--- a/consultant-materials/The-Long-Game-Live-Walkthrough.pptx
+++ b/consultant-materials/The-Long-Game-Live-Walkthrough.pptx
@@ -18,6 +18,7 @@
     <p:sldId id="266" r:id="rId17"/>
     <p:sldId id="267" r:id="rId18"/>
     <p:sldId id="268" r:id="rId19"/>
+    <p:sldId id="269" r:id="rId20"/>
   </p:sldIdLst>
   <p:sldSz cx="12191695" cy="6858000" type="screen4x3"/>
   <p:notesSz cx="6858000" cy="9144000"/>
@@ -3196,7 +3197,7 @@
         </p:nvSpPr>
         <p:spPr>
           <a:xfrm>
-            <a:off x="822960" y="1371600"/>
+            <a:off x="822960" y="1325880"/>
             <a:ext cx="10058400" cy="457200"/>
           </a:xfrm>
           <a:prstGeom prst="rect">
@@ -3238,8 +3239,8 @@
         </p:nvSpPr>
         <p:spPr>
           <a:xfrm>
-            <a:off x="777240" y="1920240"/>
-            <a:ext cx="10515600" cy="2011680"/>
+            <a:off x="777240" y="1874519"/>
+            <a:ext cx="10515600" cy="1280160"/>
           </a:xfrm>
           <a:prstGeom prst="rect">
             <a:avLst/>
@@ -3261,7 +3262,7 @@
               </a:spcAft>
             </a:pPr>
             <a:r>
-              <a:rPr sz="6000" b="1">
+              <a:rPr sz="5800" b="1">
                 <a:solidFill>
                   <a:srgbClr val="FFFFFF"/>
                 </a:solidFill>
@@ -3280,8 +3281,8 @@
         </p:nvSpPr>
         <p:spPr>
           <a:xfrm>
-            <a:off x="822960" y="3383280"/>
-            <a:ext cx="10058400" cy="548640"/>
+            <a:off x="822960" y="3246120"/>
+            <a:ext cx="10058400" cy="822960"/>
           </a:xfrm>
           <a:prstGeom prst="rect">
             <a:avLst/>
@@ -3309,7 +3310,8 @@
                 </a:solidFill>
                 <a:latin typeface="Calibri"/>
               </a:rPr>
-              <a:t>The audience game, walked through in one screen each.</a:t>
+              <a:t>A walkthrough for consultants — how each screen works,
+and the thinking behind it.</a:t>
             </a:r>
           </a:p>
         </p:txBody>
@@ -3322,49 +3324,7 @@
         </p:nvSpPr>
         <p:spPr>
           <a:xfrm>
-            <a:off x="822960" y="5120640"/>
-            <a:ext cx="10058400" cy="457200"/>
-          </a:xfrm>
-          <a:prstGeom prst="rect">
-            <a:avLst/>
-          </a:prstGeom>
-          <a:noFill/>
-        </p:spPr>
-        <p:txBody>
-          <a:bodyPr wrap="square" anchor="t">
-            <a:spAutoFit/>
-          </a:bodyPr>
-          <a:lstStyle/>
-          <a:p>
-            <a:pPr algn="l">
-              <a:spcBef>
-                <a:spcPts val="0"/>
-              </a:spcBef>
-              <a:spcAft>
-                <a:spcPts val="400"/>
-              </a:spcAft>
-            </a:pPr>
-            <a:r>
-              <a:rPr sz="1350" b="0">
-                <a:solidFill>
-                  <a:srgbClr val="BCD0E6"/>
-                </a:solidFill>
-                <a:latin typeface="Calibri"/>
-              </a:rPr>
-              <a:t>A consultant walkthrough — what players see, and why it works.</a:t>
-            </a:r>
-          </a:p>
-        </p:txBody>
-      </p:sp>
-      <p:sp>
-        <p:nvSpPr>
-          <p:cNvPr id="8" name="TextBox 7"/>
-          <p:cNvSpPr txBox="1"/>
-          <p:nvPr/>
-        </p:nvSpPr>
-        <p:spPr>
-          <a:xfrm>
-            <a:off x="822960" y="6126480"/>
+            <a:off x="822960" y="6035040"/>
             <a:ext cx="10058400" cy="365760"/>
           </a:xfrm>
           <a:prstGeom prst="rect">
@@ -3468,8 +3428,8 @@
         </p:nvSpPr>
         <p:spPr>
           <a:xfrm>
-            <a:off x="548640" y="502920"/>
-            <a:ext cx="4206240" cy="365760"/>
+            <a:off x="548640" y="457200"/>
+            <a:ext cx="4343400" cy="365760"/>
           </a:xfrm>
           <a:prstGeom prst="rect">
             <a:avLst/>
@@ -3491,13 +3451,13 @@
               </a:spcAft>
             </a:pPr>
             <a:r>
-              <a:rPr sz="1200" b="1" spc="220">
+              <a:rPr sz="1200" b="1" spc="200">
                 <a:solidFill>
                   <a:srgbClr val="008074"/>
                 </a:solidFill>
                 <a:latin typeface="Calibri"/>
               </a:rPr>
-              <a:t>THE FINISH</a:t>
+              <a:t>THE RESULT · READING THE CHART</a:t>
             </a:r>
           </a:p>
         </p:txBody>
@@ -3510,8 +3470,8 @@
         </p:nvSpPr>
         <p:spPr>
           <a:xfrm>
-            <a:off x="548640" y="868680"/>
-            <a:ext cx="4297680" cy="1828800"/>
+            <a:off x="548640" y="804672"/>
+            <a:ext cx="4343400" cy="1097280"/>
           </a:xfrm>
           <a:prstGeom prst="rect">
             <a:avLst/>
@@ -3533,13 +3493,13 @@
               </a:spcAft>
             </a:pPr>
             <a:r>
-              <a:rPr sz="3200" b="1">
+              <a:rPr sz="2700" b="1">
                 <a:solidFill>
                   <a:srgbClr val="083469"/>
                 </a:solidFill>
                 <a:latin typeface="Calibri"/>
               </a:rPr>
-              <a:t>Everyone vs. holding on</a:t>
+              <a:t>The two lines</a:t>
             </a:r>
           </a:p>
         </p:txBody>
@@ -3552,8 +3512,8 @@
         </p:nvSpPr>
         <p:spPr>
           <a:xfrm>
-            <a:off x="548640" y="1965960"/>
-            <a:ext cx="822960" cy="50800"/>
+            <a:off x="548640" y="1874519"/>
+            <a:ext cx="777240" cy="50800"/>
           </a:xfrm>
           <a:prstGeom prst="rect">
             <a:avLst/>
@@ -3596,8 +3556,8 @@
         </p:nvSpPr>
         <p:spPr>
           <a:xfrm>
-            <a:off x="548640" y="2240280"/>
-            <a:ext cx="4297680" cy="2377440"/>
+            <a:off x="548640" y="2148840"/>
+            <a:ext cx="4343400" cy="292608"/>
           </a:xfrm>
           <a:prstGeom prst="rect">
             <a:avLst/>
@@ -3619,20 +3579,146 @@
               </a:spcAft>
             </a:pPr>
             <a:r>
-              <a:rPr sz="1700" b="0">
+              <a:rPr sz="1050" b="1" spc="150">
+                <a:solidFill>
+                  <a:srgbClr val="008074"/>
+                </a:solidFill>
+                <a:latin typeface="Calibri"/>
+              </a:rPr>
+              <a:t>WHAT HAPPENS</a:t>
+            </a:r>
+          </a:p>
+        </p:txBody>
+      </p:sp>
+      <p:sp>
+        <p:nvSpPr>
+          <p:cNvPr id="7" name="TextBox 6"/>
+          <p:cNvSpPr txBox="1"/>
+          <p:nvPr/>
+        </p:nvSpPr>
+        <p:spPr>
+          <a:xfrm>
+            <a:off x="548640" y="2450592"/>
+            <a:ext cx="4343400" cy="1828800"/>
+          </a:xfrm>
+          <a:prstGeom prst="rect">
+            <a:avLst/>
+          </a:prstGeom>
+          <a:noFill/>
+        </p:spPr>
+        <p:txBody>
+          <a:bodyPr wrap="square" anchor="t">
+            <a:spAutoFit/>
+          </a:bodyPr>
+          <a:lstStyle/>
+          <a:p>
+            <a:pPr algn="l">
+              <a:spcBef>
+                <a:spcPts val="0"/>
+              </a:spcBef>
+              <a:spcAft>
+                <a:spcPts val="400"/>
+              </a:spcAft>
+            </a:pPr>
+            <a:r>
+              <a:rPr sz="1400" b="0">
                 <a:solidFill>
                   <a:srgbClr val="22313F"/>
                 </a:solidFill>
                 <a:latin typeface="Calibri"/>
               </a:rPr>
-              <a:t>Every player's finish, side by side, against the line that simply stayed invested. The fewer times they jumped, the closer they land to it.</a:t>
+              <a:t>Each player's own chart. Teal “Your choices” is the path your Buy/Hold/Sell timing produced. Navy “Stayed invested” is the whole amount put in on day one and never touched. Markers show where you acted.</a:t>
+            </a:r>
+          </a:p>
+        </p:txBody>
+      </p:sp>
+      <p:sp>
+        <p:nvSpPr>
+          <p:cNvPr id="8" name="TextBox 7"/>
+          <p:cNvSpPr txBox="1"/>
+          <p:nvPr/>
+        </p:nvSpPr>
+        <p:spPr>
+          <a:xfrm>
+            <a:off x="548640" y="4160520"/>
+            <a:ext cx="4343400" cy="292608"/>
+          </a:xfrm>
+          <a:prstGeom prst="rect">
+            <a:avLst/>
+          </a:prstGeom>
+          <a:noFill/>
+        </p:spPr>
+        <p:txBody>
+          <a:bodyPr wrap="square" anchor="t">
+            <a:spAutoFit/>
+          </a:bodyPr>
+          <a:lstStyle/>
+          <a:p>
+            <a:pPr algn="l">
+              <a:spcBef>
+                <a:spcPts val="0"/>
+              </a:spcBef>
+              <a:spcAft>
+                <a:spcPts val="400"/>
+              </a:spcAft>
+            </a:pPr>
+            <a:r>
+              <a:rPr sz="1050" b="1" spc="150">
+                <a:solidFill>
+                  <a:srgbClr val="831574"/>
+                </a:solidFill>
+                <a:latin typeface="Calibri"/>
+              </a:rPr>
+              <a:t>THE THINKING</a:t>
+            </a:r>
+          </a:p>
+        </p:txBody>
+      </p:sp>
+      <p:sp>
+        <p:nvSpPr>
+          <p:cNvPr id="9" name="TextBox 8"/>
+          <p:cNvSpPr txBox="1"/>
+          <p:nvPr/>
+        </p:nvSpPr>
+        <p:spPr>
+          <a:xfrm>
+            <a:off x="548640" y="4462272"/>
+            <a:ext cx="4343400" cy="1920240"/>
+          </a:xfrm>
+          <a:prstGeom prst="rect">
+            <a:avLst/>
+          </a:prstGeom>
+          <a:noFill/>
+        </p:spPr>
+        <p:txBody>
+          <a:bodyPr wrap="square" anchor="t">
+            <a:spAutoFit/>
+          </a:bodyPr>
+          <a:lstStyle/>
+          <a:p>
+            <a:pPr algn="l">
+              <a:spcBef>
+                <a:spcPts val="0"/>
+              </a:spcBef>
+              <a:spcAft>
+                <a:spcPts val="400"/>
+              </a:spcAft>
+            </a:pPr>
+            <a:r>
+              <a:rPr sz="1400" b="0">
+                <a:solidFill>
+                  <a:srgbClr val="22313F"/>
+                </a:solidFill>
+                <a:latin typeface="Calibri"/>
+              </a:rPr>
+              <a:t>The gap between the two lines is the whole point — what reacting cost, or (rarely) gained, versus simply holding on. The card states it in dollars and percent. (The Sales edition adds a third line: the fund itself.)</a:t>
             </a:r>
           </a:p>
         </p:txBody>
       </p:sp>
       <p:pic>
         <p:nvPicPr>
-          <p:cNvPr id="7" name="Picture 6" descr="host-finale.png"/>
+          <p:cNvPr id="10" name="Picture 9" descr="phone-reveal.png"/>
           <p:cNvPicPr>
             <a:picLocks noChangeAspect="1"/>
           </p:cNvPicPr>
@@ -3646,8 +3732,8 @@
         </p:blipFill>
         <p:spPr>
           <a:xfrm>
-            <a:off x="5029200" y="1194435"/>
-            <a:ext cx="6858000" cy="4286250"/>
+            <a:off x="7858760" y="457200"/>
+            <a:ext cx="2113280" cy="5852160"/>
           </a:xfrm>
           <a:prstGeom prst="rect">
             <a:avLst/>
@@ -3661,7 +3747,7 @@
       </p:pic>
       <p:sp>
         <p:nvSpPr>
-          <p:cNvPr id="8" name="Rectangle 7"/>
+          <p:cNvPr id="11" name="Rectangle 10"/>
           <p:cNvSpPr/>
           <p:nvPr/>
         </p:nvSpPr>
@@ -3705,7 +3791,7 @@
       </p:sp>
       <p:sp>
         <p:nvSpPr>
-          <p:cNvPr id="9" name="TextBox 8"/>
+          <p:cNvPr id="12" name="TextBox 11"/>
           <p:cNvSpPr txBox="1"/>
           <p:nvPr/>
         </p:nvSpPr>
@@ -3740,7 +3826,7 @@
                 </a:solidFill>
                 <a:latin typeface="Calibri"/>
               </a:rPr>
-              <a:t>THE LONG GAME · LIVE ROOM      ·      FOR INTERNAL USE ONLY · DO NOT DISSEMINATE</a:t>
+              <a:t>THE LONG GAME · LIVE ROOM      ·      HOW IT WORKS, AND WHY      ·      FOR INTERNAL USE ONLY</a:t>
             </a:r>
           </a:p>
         </p:txBody>
@@ -3815,8 +3901,8 @@
         </p:nvSpPr>
         <p:spPr>
           <a:xfrm>
-            <a:off x="548640" y="502920"/>
-            <a:ext cx="4206240" cy="365760"/>
+            <a:off x="548640" y="457200"/>
+            <a:ext cx="4343400" cy="365760"/>
           </a:xfrm>
           <a:prstGeom prst="rect">
             <a:avLst/>
@@ -3838,13 +3924,13 @@
               </a:spcAft>
             </a:pPr>
             <a:r>
-              <a:rPr sz="1200" b="1" spc="220">
+              <a:rPr sz="1200" b="1" spc="200">
                 <a:solidFill>
                   <a:srgbClr val="008074"/>
                 </a:solidFill>
                 <a:latin typeface="Calibri"/>
               </a:rPr>
-              <a:t>THE PROOF</a:t>
+              <a:t>THE FINISH · BIG SCREEN</a:t>
             </a:r>
           </a:p>
         </p:txBody>
@@ -3857,8 +3943,8 @@
         </p:nvSpPr>
         <p:spPr>
           <a:xfrm>
-            <a:off x="548640" y="868680"/>
-            <a:ext cx="4297680" cy="1828800"/>
+            <a:off x="548640" y="804672"/>
+            <a:ext cx="4343400" cy="1097280"/>
           </a:xfrm>
           <a:prstGeom prst="rect">
             <a:avLst/>
@@ -3880,13 +3966,13 @@
               </a:spcAft>
             </a:pPr>
             <a:r>
-              <a:rPr sz="3200" b="1">
+              <a:rPr sz="2700" b="1">
                 <a:solidFill>
                   <a:srgbClr val="083469"/>
                 </a:solidFill>
                 <a:latin typeface="Calibri"/>
               </a:rPr>
-              <a:t>It repeats in any crisis</a:t>
+              <a:t>Everyone vs. holding on</a:t>
             </a:r>
           </a:p>
         </p:txBody>
@@ -3899,8 +3985,8 @@
         </p:nvSpPr>
         <p:spPr>
           <a:xfrm>
-            <a:off x="548640" y="1965960"/>
-            <a:ext cx="822960" cy="50800"/>
+            <a:off x="548640" y="1874519"/>
+            <a:ext cx="777240" cy="50800"/>
           </a:xfrm>
           <a:prstGeom prst="rect">
             <a:avLst/>
@@ -3943,8 +4029,8 @@
         </p:nvSpPr>
         <p:spPr>
           <a:xfrm>
-            <a:off x="548640" y="2240280"/>
-            <a:ext cx="4297680" cy="2377440"/>
+            <a:off x="548640" y="2148840"/>
+            <a:ext cx="4343400" cy="292608"/>
           </a:xfrm>
           <a:prstGeom prst="rect">
             <a:avLst/>
@@ -3966,20 +4052,146 @@
               </a:spcAft>
             </a:pPr>
             <a:r>
-              <a:rPr sz="1700" b="0">
+              <a:rPr sz="1050" b="1" spc="150">
+                <a:solidFill>
+                  <a:srgbClr val="008074"/>
+                </a:solidFill>
+                <a:latin typeface="Calibri"/>
+              </a:rPr>
+              <a:t>WHAT HAPPENS</a:t>
+            </a:r>
+          </a:p>
+        </p:txBody>
+      </p:sp>
+      <p:sp>
+        <p:nvSpPr>
+          <p:cNvPr id="7" name="TextBox 6"/>
+          <p:cNvSpPr txBox="1"/>
+          <p:nvPr/>
+        </p:nvSpPr>
+        <p:spPr>
+          <a:xfrm>
+            <a:off x="548640" y="2450592"/>
+            <a:ext cx="4343400" cy="1828800"/>
+          </a:xfrm>
+          <a:prstGeom prst="rect">
+            <a:avLst/>
+          </a:prstGeom>
+          <a:noFill/>
+        </p:spPr>
+        <p:txBody>
+          <a:bodyPr wrap="square" anchor="t">
+            <a:spAutoFit/>
+          </a:bodyPr>
+          <a:lstStyle/>
+          <a:p>
+            <a:pPr algn="l">
+              <a:spcBef>
+                <a:spcPts val="0"/>
+              </a:spcBef>
+              <a:spcAft>
+                <a:spcPts val="400"/>
+              </a:spcAft>
+            </a:pPr>
+            <a:r>
+              <a:rPr sz="1400" b="0">
                 <a:solidFill>
                   <a:srgbClr val="22313F"/>
                 </a:solidFill>
                 <a:latin typeface="Calibri"/>
               </a:rPr>
-              <a:t>1973 · 1987 · 2000 · 2008 — flip through decades and the shape barely changes. Staying invested keeps winning.</a:t>
+              <a:t>Every player's final value as a bar, against the line for total money put in and the line for simply staying invested the whole time.</a:t>
+            </a:r>
+          </a:p>
+        </p:txBody>
+      </p:sp>
+      <p:sp>
+        <p:nvSpPr>
+          <p:cNvPr id="8" name="TextBox 7"/>
+          <p:cNvSpPr txBox="1"/>
+          <p:nvPr/>
+        </p:nvSpPr>
+        <p:spPr>
+          <a:xfrm>
+            <a:off x="548640" y="4160520"/>
+            <a:ext cx="4343400" cy="292608"/>
+          </a:xfrm>
+          <a:prstGeom prst="rect">
+            <a:avLst/>
+          </a:prstGeom>
+          <a:noFill/>
+        </p:spPr>
+        <p:txBody>
+          <a:bodyPr wrap="square" anchor="t">
+            <a:spAutoFit/>
+          </a:bodyPr>
+          <a:lstStyle/>
+          <a:p>
+            <a:pPr algn="l">
+              <a:spcBef>
+                <a:spcPts val="0"/>
+              </a:spcBef>
+              <a:spcAft>
+                <a:spcPts val="400"/>
+              </a:spcAft>
+            </a:pPr>
+            <a:r>
+              <a:rPr sz="1050" b="1" spc="150">
+                <a:solidFill>
+                  <a:srgbClr val="831574"/>
+                </a:solidFill>
+                <a:latin typeface="Calibri"/>
+              </a:rPr>
+              <a:t>THE THINKING</a:t>
+            </a:r>
+          </a:p>
+        </p:txBody>
+      </p:sp>
+      <p:sp>
+        <p:nvSpPr>
+          <p:cNvPr id="9" name="TextBox 8"/>
+          <p:cNvSpPr txBox="1"/>
+          <p:nvPr/>
+        </p:nvSpPr>
+        <p:spPr>
+          <a:xfrm>
+            <a:off x="548640" y="4462272"/>
+            <a:ext cx="4343400" cy="1920240"/>
+          </a:xfrm>
+          <a:prstGeom prst="rect">
+            <a:avLst/>
+          </a:prstGeom>
+          <a:noFill/>
+        </p:spPr>
+        <p:txBody>
+          <a:bodyPr wrap="square" anchor="t">
+            <a:spAutoFit/>
+          </a:bodyPr>
+          <a:lstStyle/>
+          <a:p>
+            <a:pPr algn="l">
+              <a:spcBef>
+                <a:spcPts val="0"/>
+              </a:spcBef>
+              <a:spcAft>
+                <a:spcPts val="400"/>
+              </a:spcAft>
+            </a:pPr>
+            <a:r>
+              <a:rPr sz="1400" b="0">
+                <a:solidFill>
+                  <a:srgbClr val="22313F"/>
+                </a:solidFill>
+                <a:latin typeface="Calibri"/>
+              </a:rPr>
+              <a:t>The room sees one shape together: the fewer times a player stepped out, the closer they finished to the disciplined, stayed-invested line.</a:t>
             </a:r>
           </a:p>
         </p:txBody>
       </p:sp>
       <p:pic>
         <p:nvPicPr>
-          <p:cNvPr id="7" name="Picture 6" descr="phone-crises.png"/>
+          <p:cNvPr id="10" name="Picture 9" descr="host-finale.png"/>
           <p:cNvPicPr>
             <a:picLocks noChangeAspect="1"/>
           </p:cNvPicPr>
@@ -3993,8 +4205,8 @@
         </p:blipFill>
         <p:spPr>
           <a:xfrm>
-            <a:off x="7646670" y="457200"/>
-            <a:ext cx="2080260" cy="5760720"/>
+            <a:off x="5074920" y="1285875"/>
+            <a:ext cx="6858000" cy="4286250"/>
           </a:xfrm>
           <a:prstGeom prst="rect">
             <a:avLst/>
@@ -4008,7 +4220,7 @@
       </p:pic>
       <p:sp>
         <p:nvSpPr>
-          <p:cNvPr id="8" name="Rectangle 7"/>
+          <p:cNvPr id="11" name="Rectangle 10"/>
           <p:cNvSpPr/>
           <p:nvPr/>
         </p:nvSpPr>
@@ -4052,7 +4264,7 @@
       </p:sp>
       <p:sp>
         <p:nvSpPr>
-          <p:cNvPr id="9" name="TextBox 8"/>
+          <p:cNvPr id="12" name="TextBox 11"/>
           <p:cNvSpPr txBox="1"/>
           <p:nvPr/>
         </p:nvSpPr>
@@ -4087,7 +4299,7 @@
                 </a:solidFill>
                 <a:latin typeface="Calibri"/>
               </a:rPr>
-              <a:t>THE LONG GAME · LIVE ROOM      ·      FOR INTERNAL USE ONLY · DO NOT DISSEMINATE</a:t>
+              <a:t>THE LONG GAME · LIVE ROOM      ·      HOW IT WORKS, AND WHY      ·      FOR INTERNAL USE ONLY</a:t>
             </a:r>
           </a:p>
         </p:txBody>
@@ -4156,14 +4368,339 @@
       </p:sp>
       <p:sp>
         <p:nvSpPr>
-          <p:cNvPr id="3" name="Rectangle 2"/>
+          <p:cNvPr id="3" name="TextBox 2"/>
+          <p:cNvSpPr txBox="1"/>
+          <p:nvPr/>
+        </p:nvSpPr>
+        <p:spPr>
+          <a:xfrm>
+            <a:off x="548640" y="457200"/>
+            <a:ext cx="4343400" cy="365760"/>
+          </a:xfrm>
+          <a:prstGeom prst="rect">
+            <a:avLst/>
+          </a:prstGeom>
+          <a:noFill/>
+        </p:spPr>
+        <p:txBody>
+          <a:bodyPr wrap="square" anchor="t">
+            <a:spAutoFit/>
+          </a:bodyPr>
+          <a:lstStyle/>
+          <a:p>
+            <a:pPr algn="l">
+              <a:spcBef>
+                <a:spcPts val="0"/>
+              </a:spcBef>
+              <a:spcAft>
+                <a:spcPts val="400"/>
+              </a:spcAft>
+            </a:pPr>
+            <a:r>
+              <a:rPr sz="1200" b="1" spc="200">
+                <a:solidFill>
+                  <a:srgbClr val="008074"/>
+                </a:solidFill>
+                <a:latin typeface="Calibri"/>
+              </a:rPr>
+              <a:t>AFTER THE GAME</a:t>
+            </a:r>
+          </a:p>
+        </p:txBody>
+      </p:sp>
+      <p:sp>
+        <p:nvSpPr>
+          <p:cNvPr id="4" name="TextBox 3"/>
+          <p:cNvSpPr txBox="1"/>
+          <p:nvPr/>
+        </p:nvSpPr>
+        <p:spPr>
+          <a:xfrm>
+            <a:off x="548640" y="804672"/>
+            <a:ext cx="4343400" cy="1097280"/>
+          </a:xfrm>
+          <a:prstGeom prst="rect">
+            <a:avLst/>
+          </a:prstGeom>
+          <a:noFill/>
+        </p:spPr>
+        <p:txBody>
+          <a:bodyPr wrap="square" anchor="t">
+            <a:spAutoFit/>
+          </a:bodyPr>
+          <a:lstStyle/>
+          <a:p>
+            <a:pPr algn="l">
+              <a:spcBef>
+                <a:spcPts val="0"/>
+              </a:spcBef>
+              <a:spcAft>
+                <a:spcPts val="400"/>
+              </a:spcAft>
+            </a:pPr>
+            <a:r>
+              <a:rPr sz="2700" b="1">
+                <a:solidFill>
+                  <a:srgbClr val="083469"/>
+                </a:solidFill>
+                <a:latin typeface="Calibri"/>
+              </a:rPr>
+              <a:t>Explore other crises</a:t>
+            </a:r>
+          </a:p>
+        </p:txBody>
+      </p:sp>
+      <p:sp>
+        <p:nvSpPr>
+          <p:cNvPr id="5" name="Rectangle 4"/>
           <p:cNvSpPr/>
           <p:nvPr/>
         </p:nvSpPr>
         <p:spPr>
           <a:xfrm>
-            <a:off x="0" y="0"/>
-            <a:ext cx="12191695" cy="1554480"/>
+            <a:off x="548640" y="1874519"/>
+            <a:ext cx="777240" cy="50800"/>
+          </a:xfrm>
+          <a:prstGeom prst="rect">
+            <a:avLst/>
+          </a:prstGeom>
+          <a:solidFill>
+            <a:srgbClr val="00D190"/>
+          </a:solidFill>
+          <a:ln>
+            <a:noFill/>
+          </a:ln>
+          <a:effectLst/>
+        </p:spPr>
+        <p:style>
+          <a:lnRef idx="1">
+            <a:schemeClr val="accent1"/>
+          </a:lnRef>
+          <a:fillRef idx="3">
+            <a:schemeClr val="accent1"/>
+          </a:fillRef>
+          <a:effectRef idx="2">
+            <a:schemeClr val="accent1"/>
+          </a:effectRef>
+          <a:fontRef idx="minor">
+            <a:schemeClr val="lt1"/>
+          </a:fontRef>
+        </p:style>
+        <p:txBody>
+          <a:bodyPr rtlCol="0" anchor="ctr"/>
+          <a:lstStyle/>
+          <a:p>
+            <a:pPr algn="ctr"/>
+          </a:p>
+        </p:txBody>
+      </p:sp>
+      <p:sp>
+        <p:nvSpPr>
+          <p:cNvPr id="6" name="TextBox 5"/>
+          <p:cNvSpPr txBox="1"/>
+          <p:nvPr/>
+        </p:nvSpPr>
+        <p:spPr>
+          <a:xfrm>
+            <a:off x="548640" y="2148840"/>
+            <a:ext cx="4343400" cy="292608"/>
+          </a:xfrm>
+          <a:prstGeom prst="rect">
+            <a:avLst/>
+          </a:prstGeom>
+          <a:noFill/>
+        </p:spPr>
+        <p:txBody>
+          <a:bodyPr wrap="square" anchor="t">
+            <a:spAutoFit/>
+          </a:bodyPr>
+          <a:lstStyle/>
+          <a:p>
+            <a:pPr algn="l">
+              <a:spcBef>
+                <a:spcPts val="0"/>
+              </a:spcBef>
+              <a:spcAft>
+                <a:spcPts val="400"/>
+              </a:spcAft>
+            </a:pPr>
+            <a:r>
+              <a:rPr sz="1050" b="1" spc="150">
+                <a:solidFill>
+                  <a:srgbClr val="008074"/>
+                </a:solidFill>
+                <a:latin typeface="Calibri"/>
+              </a:rPr>
+              <a:t>WHAT HAPPENS</a:t>
+            </a:r>
+          </a:p>
+        </p:txBody>
+      </p:sp>
+      <p:sp>
+        <p:nvSpPr>
+          <p:cNvPr id="7" name="TextBox 6"/>
+          <p:cNvSpPr txBox="1"/>
+          <p:nvPr/>
+        </p:nvSpPr>
+        <p:spPr>
+          <a:xfrm>
+            <a:off x="548640" y="2450592"/>
+            <a:ext cx="4343400" cy="1828800"/>
+          </a:xfrm>
+          <a:prstGeom prst="rect">
+            <a:avLst/>
+          </a:prstGeom>
+          <a:noFill/>
+        </p:spPr>
+        <p:txBody>
+          <a:bodyPr wrap="square" anchor="t">
+            <a:spAutoFit/>
+          </a:bodyPr>
+          <a:lstStyle/>
+          <a:p>
+            <a:pPr algn="l">
+              <a:spcBef>
+                <a:spcPts val="0"/>
+              </a:spcBef>
+              <a:spcAft>
+                <a:spcPts val="400"/>
+              </a:spcAft>
+            </a:pPr>
+            <a:r>
+              <a:rPr sz="1400" b="0">
+                <a:solidFill>
+                  <a:srgbClr val="22313F"/>
+                </a:solidFill>
+                <a:latin typeface="Calibri"/>
+              </a:rPr>
+              <a:t>Players can replay the same comparison through earlier crises — 1973, 1987, 2000, 2008 — each showing staying invested versus sitting out the best months.</a:t>
+            </a:r>
+          </a:p>
+        </p:txBody>
+      </p:sp>
+      <p:sp>
+        <p:nvSpPr>
+          <p:cNvPr id="8" name="TextBox 7"/>
+          <p:cNvSpPr txBox="1"/>
+          <p:nvPr/>
+        </p:nvSpPr>
+        <p:spPr>
+          <a:xfrm>
+            <a:off x="548640" y="4160520"/>
+            <a:ext cx="4343400" cy="292608"/>
+          </a:xfrm>
+          <a:prstGeom prst="rect">
+            <a:avLst/>
+          </a:prstGeom>
+          <a:noFill/>
+        </p:spPr>
+        <p:txBody>
+          <a:bodyPr wrap="square" anchor="t">
+            <a:spAutoFit/>
+          </a:bodyPr>
+          <a:lstStyle/>
+          <a:p>
+            <a:pPr algn="l">
+              <a:spcBef>
+                <a:spcPts val="0"/>
+              </a:spcBef>
+              <a:spcAft>
+                <a:spcPts val="400"/>
+              </a:spcAft>
+            </a:pPr>
+            <a:r>
+              <a:rPr sz="1050" b="1" spc="150">
+                <a:solidFill>
+                  <a:srgbClr val="831574"/>
+                </a:solidFill>
+                <a:latin typeface="Calibri"/>
+              </a:rPr>
+              <a:t>THE THINKING</a:t>
+            </a:r>
+          </a:p>
+        </p:txBody>
+      </p:sp>
+      <p:sp>
+        <p:nvSpPr>
+          <p:cNvPr id="9" name="TextBox 8"/>
+          <p:cNvSpPr txBox="1"/>
+          <p:nvPr/>
+        </p:nvSpPr>
+        <p:spPr>
+          <a:xfrm>
+            <a:off x="548640" y="4462272"/>
+            <a:ext cx="4343400" cy="1920240"/>
+          </a:xfrm>
+          <a:prstGeom prst="rect">
+            <a:avLst/>
+          </a:prstGeom>
+          <a:noFill/>
+        </p:spPr>
+        <p:txBody>
+          <a:bodyPr wrap="square" anchor="t">
+            <a:spAutoFit/>
+          </a:bodyPr>
+          <a:lstStyle/>
+          <a:p>
+            <a:pPr algn="l">
+              <a:spcBef>
+                <a:spcPts val="0"/>
+              </a:spcBef>
+              <a:spcAft>
+                <a:spcPts val="400"/>
+              </a:spcAft>
+            </a:pPr>
+            <a:r>
+              <a:rPr sz="1400" b="0">
+                <a:solidFill>
+                  <a:srgbClr val="22313F"/>
+                </a:solidFill>
+                <a:latin typeface="Calibri"/>
+              </a:rPr>
+              <a:t>It shows the pattern isn't a 2020 fluke. The best days cluster next to the worst, so stepping out to avoid the pain usually means missing the recovery.</a:t>
+            </a:r>
+          </a:p>
+        </p:txBody>
+      </p:sp>
+      <p:pic>
+        <p:nvPicPr>
+          <p:cNvPr id="10" name="Picture 9" descr="phone-crises.png"/>
+          <p:cNvPicPr>
+            <a:picLocks noChangeAspect="1"/>
+          </p:cNvPicPr>
+          <p:nvPr/>
+        </p:nvPicPr>
+        <p:blipFill>
+          <a:blip r:embed="rId2"/>
+          <a:stretch>
+            <a:fillRect/>
+          </a:stretch>
+        </p:blipFill>
+        <p:spPr>
+          <a:xfrm>
+            <a:off x="7858760" y="457200"/>
+            <a:ext cx="2113280" cy="5852160"/>
+          </a:xfrm>
+          <a:prstGeom prst="rect">
+            <a:avLst/>
+          </a:prstGeom>
+          <a:ln w="9525">
+            <a:solidFill>
+              <a:srgbClr val="DBE4EA"/>
+            </a:solidFill>
+          </a:ln>
+        </p:spPr>
+      </p:pic>
+      <p:sp>
+        <p:nvSpPr>
+          <p:cNvPr id="11" name="Rectangle 10"/>
+          <p:cNvSpPr/>
+          <p:nvPr/>
+        </p:nvSpPr>
+        <p:spPr>
+          <a:xfrm>
+            <a:off x="0" y="6565392"/>
+            <a:ext cx="12191695" cy="292608"/>
           </a:xfrm>
           <a:prstGeom prst="rect">
             <a:avLst/>
@@ -4200,651 +4737,7 @@
       </p:sp>
       <p:sp>
         <p:nvSpPr>
-          <p:cNvPr id="4" name="TextBox 3"/>
-          <p:cNvSpPr txBox="1"/>
-          <p:nvPr/>
-        </p:nvSpPr>
-        <p:spPr>
-          <a:xfrm>
-            <a:off x="822960" y="365760"/>
-            <a:ext cx="10058400" cy="365760"/>
-          </a:xfrm>
-          <a:prstGeom prst="rect">
-            <a:avLst/>
-          </a:prstGeom>
-          <a:noFill/>
-        </p:spPr>
-        <p:txBody>
-          <a:bodyPr wrap="square" anchor="t">
-            <a:spAutoFit/>
-          </a:bodyPr>
-          <a:lstStyle/>
-          <a:p>
-            <a:pPr algn="l">
-              <a:spcBef>
-                <a:spcPts val="0"/>
-              </a:spcBef>
-              <a:spcAft>
-                <a:spcPts val="400"/>
-              </a:spcAft>
-            </a:pPr>
-            <a:r>
-              <a:rPr sz="1300" b="1" spc="250">
-                <a:solidFill>
-                  <a:srgbClr val="00D190"/>
-                </a:solidFill>
-                <a:latin typeface="Calibri"/>
-              </a:rPr>
-              <a:t>THE THINKING BEHIND IT</a:t>
-            </a:r>
-          </a:p>
-        </p:txBody>
-      </p:sp>
-      <p:sp>
-        <p:nvSpPr>
-          <p:cNvPr id="5" name="TextBox 4"/>
-          <p:cNvSpPr txBox="1"/>
-          <p:nvPr/>
-        </p:nvSpPr>
-        <p:spPr>
-          <a:xfrm>
-            <a:off x="777240" y="731520"/>
-            <a:ext cx="10515600" cy="731520"/>
-          </a:xfrm>
-          <a:prstGeom prst="rect">
-            <a:avLst/>
-          </a:prstGeom>
-          <a:noFill/>
-        </p:spPr>
-        <p:txBody>
-          <a:bodyPr wrap="square" anchor="t">
-            <a:spAutoFit/>
-          </a:bodyPr>
-          <a:lstStyle/>
-          <a:p>
-            <a:pPr algn="l">
-              <a:spcBef>
-                <a:spcPts val="0"/>
-              </a:spcBef>
-              <a:spcAft>
-                <a:spcPts val="400"/>
-              </a:spcAft>
-            </a:pPr>
-            <a:r>
-              <a:rPr sz="3000" b="1">
-                <a:solidFill>
-                  <a:srgbClr val="FFFFFF"/>
-                </a:solidFill>
-                <a:latin typeface="Calibri"/>
-              </a:rPr>
-              <a:t>Investors don't fail at math. They fail at emotion.</a:t>
-            </a:r>
-          </a:p>
-        </p:txBody>
-      </p:sp>
-      <p:sp>
-        <p:nvSpPr>
-          <p:cNvPr id="6" name="Rectangle 5"/>
-          <p:cNvSpPr/>
-          <p:nvPr/>
-        </p:nvSpPr>
-        <p:spPr>
-          <a:xfrm>
-            <a:off x="685800" y="2194560"/>
-            <a:ext cx="3566160" cy="3108960"/>
-          </a:xfrm>
-          <a:prstGeom prst="rect">
-            <a:avLst/>
-          </a:prstGeom>
-          <a:solidFill>
-            <a:srgbClr val="F2F7F7"/>
-          </a:solidFill>
-          <a:ln>
-            <a:noFill/>
-          </a:ln>
-          <a:effectLst/>
-        </p:spPr>
-        <p:style>
-          <a:lnRef idx="1">
-            <a:schemeClr val="accent1"/>
-          </a:lnRef>
-          <a:fillRef idx="3">
-            <a:schemeClr val="accent1"/>
-          </a:fillRef>
-          <a:effectRef idx="2">
-            <a:schemeClr val="accent1"/>
-          </a:effectRef>
-          <a:fontRef idx="minor">
-            <a:schemeClr val="lt1"/>
-          </a:fontRef>
-        </p:style>
-        <p:txBody>
-          <a:bodyPr rtlCol="0" anchor="ctr"/>
-          <a:lstStyle/>
-          <a:p>
-            <a:pPr algn="ctr"/>
-          </a:p>
-        </p:txBody>
-      </p:sp>
-      <p:sp>
-        <p:nvSpPr>
-          <p:cNvPr id="7" name="Rectangle 6"/>
-          <p:cNvSpPr/>
-          <p:nvPr/>
-        </p:nvSpPr>
-        <p:spPr>
-          <a:xfrm>
-            <a:off x="685800" y="2194560"/>
-            <a:ext cx="3566160" cy="63500"/>
-          </a:xfrm>
-          <a:prstGeom prst="rect">
-            <a:avLst/>
-          </a:prstGeom>
-          <a:solidFill>
-            <a:srgbClr val="008074"/>
-          </a:solidFill>
-          <a:ln>
-            <a:noFill/>
-          </a:ln>
-          <a:effectLst/>
-        </p:spPr>
-        <p:style>
-          <a:lnRef idx="1">
-            <a:schemeClr val="accent1"/>
-          </a:lnRef>
-          <a:fillRef idx="3">
-            <a:schemeClr val="accent1"/>
-          </a:fillRef>
-          <a:effectRef idx="2">
-            <a:schemeClr val="accent1"/>
-          </a:effectRef>
-          <a:fontRef idx="minor">
-            <a:schemeClr val="lt1"/>
-          </a:fontRef>
-        </p:style>
-        <p:txBody>
-          <a:bodyPr rtlCol="0" anchor="ctr"/>
-          <a:lstStyle/>
-          <a:p>
-            <a:pPr algn="ctr"/>
-          </a:p>
-        </p:txBody>
-      </p:sp>
-      <p:sp>
-        <p:nvSpPr>
-          <p:cNvPr id="8" name="TextBox 7"/>
-          <p:cNvSpPr txBox="1"/>
-          <p:nvPr/>
-        </p:nvSpPr>
-        <p:spPr>
-          <a:xfrm>
-            <a:off x="960120" y="2514600"/>
-            <a:ext cx="3017520" cy="731520"/>
-          </a:xfrm>
-          <a:prstGeom prst="rect">
-            <a:avLst/>
-          </a:prstGeom>
-          <a:noFill/>
-        </p:spPr>
-        <p:txBody>
-          <a:bodyPr wrap="square" anchor="t">
-            <a:spAutoFit/>
-          </a:bodyPr>
-          <a:lstStyle/>
-          <a:p>
-            <a:pPr algn="l">
-              <a:spcBef>
-                <a:spcPts val="0"/>
-              </a:spcBef>
-              <a:spcAft>
-                <a:spcPts val="400"/>
-              </a:spcAft>
-            </a:pPr>
-            <a:r>
-              <a:rPr sz="1900" b="1">
-                <a:solidFill>
-                  <a:srgbClr val="083469"/>
-                </a:solidFill>
-                <a:latin typeface="Calibri"/>
-              </a:rPr>
-              <a:t>Felt, not lectured</a:t>
-            </a:r>
-          </a:p>
-        </p:txBody>
-      </p:sp>
-      <p:sp>
-        <p:nvSpPr>
-          <p:cNvPr id="9" name="TextBox 8"/>
-          <p:cNvSpPr txBox="1"/>
-          <p:nvPr/>
-        </p:nvSpPr>
-        <p:spPr>
-          <a:xfrm>
-            <a:off x="960120" y="3337560"/>
-            <a:ext cx="3017520" cy="1828800"/>
-          </a:xfrm>
-          <a:prstGeom prst="rect">
-            <a:avLst/>
-          </a:prstGeom>
-          <a:noFill/>
-        </p:spPr>
-        <p:txBody>
-          <a:bodyPr wrap="square" anchor="t">
-            <a:spAutoFit/>
-          </a:bodyPr>
-          <a:lstStyle/>
-          <a:p>
-            <a:pPr algn="l">
-              <a:spcBef>
-                <a:spcPts val="0"/>
-              </a:spcBef>
-              <a:spcAft>
-                <a:spcPts val="400"/>
-              </a:spcAft>
-            </a:pPr>
-            <a:r>
-              <a:rPr sz="1500" b="0">
-                <a:solidFill>
-                  <a:srgbClr val="22313F"/>
-                </a:solidFill>
-                <a:latin typeface="Calibri"/>
-              </a:rPr>
-              <a:t>Fear, FOMO and regret are lived in real time — not explained on a slide.</a:t>
-            </a:r>
-          </a:p>
-        </p:txBody>
-      </p:sp>
-      <p:sp>
-        <p:nvSpPr>
-          <p:cNvPr id="10" name="Rectangle 9"/>
-          <p:cNvSpPr/>
-          <p:nvPr/>
-        </p:nvSpPr>
-        <p:spPr>
-          <a:xfrm>
-            <a:off x="4572000" y="2194560"/>
-            <a:ext cx="3566160" cy="3108960"/>
-          </a:xfrm>
-          <a:prstGeom prst="rect">
-            <a:avLst/>
-          </a:prstGeom>
-          <a:solidFill>
-            <a:srgbClr val="F2F7F7"/>
-          </a:solidFill>
-          <a:ln>
-            <a:noFill/>
-          </a:ln>
-          <a:effectLst/>
-        </p:spPr>
-        <p:style>
-          <a:lnRef idx="1">
-            <a:schemeClr val="accent1"/>
-          </a:lnRef>
-          <a:fillRef idx="3">
-            <a:schemeClr val="accent1"/>
-          </a:fillRef>
-          <a:effectRef idx="2">
-            <a:schemeClr val="accent1"/>
-          </a:effectRef>
-          <a:fontRef idx="minor">
-            <a:schemeClr val="lt1"/>
-          </a:fontRef>
-        </p:style>
-        <p:txBody>
-          <a:bodyPr rtlCol="0" anchor="ctr"/>
-          <a:lstStyle/>
-          <a:p>
-            <a:pPr algn="ctr"/>
-          </a:p>
-        </p:txBody>
-      </p:sp>
-      <p:sp>
-        <p:nvSpPr>
-          <p:cNvPr id="11" name="Rectangle 10"/>
-          <p:cNvSpPr/>
-          <p:nvPr/>
-        </p:nvSpPr>
-        <p:spPr>
-          <a:xfrm>
-            <a:off x="4572000" y="2194560"/>
-            <a:ext cx="3566160" cy="63500"/>
-          </a:xfrm>
-          <a:prstGeom prst="rect">
-            <a:avLst/>
-          </a:prstGeom>
-          <a:solidFill>
-            <a:srgbClr val="008074"/>
-          </a:solidFill>
-          <a:ln>
-            <a:noFill/>
-          </a:ln>
-          <a:effectLst/>
-        </p:spPr>
-        <p:style>
-          <a:lnRef idx="1">
-            <a:schemeClr val="accent1"/>
-          </a:lnRef>
-          <a:fillRef idx="3">
-            <a:schemeClr val="accent1"/>
-          </a:fillRef>
-          <a:effectRef idx="2">
-            <a:schemeClr val="accent1"/>
-          </a:effectRef>
-          <a:fontRef idx="minor">
-            <a:schemeClr val="lt1"/>
-          </a:fontRef>
-        </p:style>
-        <p:txBody>
-          <a:bodyPr rtlCol="0" anchor="ctr"/>
-          <a:lstStyle/>
-          <a:p>
-            <a:pPr algn="ctr"/>
-          </a:p>
-        </p:txBody>
-      </p:sp>
-      <p:sp>
-        <p:nvSpPr>
           <p:cNvPr id="12" name="TextBox 11"/>
-          <p:cNvSpPr txBox="1"/>
-          <p:nvPr/>
-        </p:nvSpPr>
-        <p:spPr>
-          <a:xfrm>
-            <a:off x="4846320" y="2514600"/>
-            <a:ext cx="3017520" cy="731520"/>
-          </a:xfrm>
-          <a:prstGeom prst="rect">
-            <a:avLst/>
-          </a:prstGeom>
-          <a:noFill/>
-        </p:spPr>
-        <p:txBody>
-          <a:bodyPr wrap="square" anchor="t">
-            <a:spAutoFit/>
-          </a:bodyPr>
-          <a:lstStyle/>
-          <a:p>
-            <a:pPr algn="l">
-              <a:spcBef>
-                <a:spcPts val="0"/>
-              </a:spcBef>
-              <a:spcAft>
-                <a:spcPts val="400"/>
-              </a:spcAft>
-            </a:pPr>
-            <a:r>
-              <a:rPr sz="1900" b="1">
-                <a:solidFill>
-                  <a:srgbClr val="083469"/>
-                </a:solidFill>
-                <a:latin typeface="Calibri"/>
-              </a:rPr>
-              <a:t>Every instinct says sell</a:t>
-            </a:r>
-          </a:p>
-        </p:txBody>
-      </p:sp>
-      <p:sp>
-        <p:nvSpPr>
-          <p:cNvPr id="13" name="TextBox 12"/>
-          <p:cNvSpPr txBox="1"/>
-          <p:nvPr/>
-        </p:nvSpPr>
-        <p:spPr>
-          <a:xfrm>
-            <a:off x="4846320" y="3337560"/>
-            <a:ext cx="3017520" cy="1828800"/>
-          </a:xfrm>
-          <a:prstGeom prst="rect">
-            <a:avLst/>
-          </a:prstGeom>
-          <a:noFill/>
-        </p:spPr>
-        <p:txBody>
-          <a:bodyPr wrap="square" anchor="t">
-            <a:spAutoFit/>
-          </a:bodyPr>
-          <a:lstStyle/>
-          <a:p>
-            <a:pPr algn="l">
-              <a:spcBef>
-                <a:spcPts val="0"/>
-              </a:spcBef>
-              <a:spcAft>
-                <a:spcPts val="400"/>
-              </a:spcAft>
-            </a:pPr>
-            <a:r>
-              <a:rPr sz="1500" b="0">
-                <a:solidFill>
-                  <a:srgbClr val="22313F"/>
-                </a:solidFill>
-                <a:latin typeface="Calibri"/>
-              </a:rPr>
-              <a:t>And staying invested still came out ahead. The room feels the pull, then sees the cost.</a:t>
-            </a:r>
-          </a:p>
-        </p:txBody>
-      </p:sp>
-      <p:sp>
-        <p:nvSpPr>
-          <p:cNvPr id="14" name="Rectangle 13"/>
-          <p:cNvSpPr/>
-          <p:nvPr/>
-        </p:nvSpPr>
-        <p:spPr>
-          <a:xfrm>
-            <a:off x="8458200" y="2194560"/>
-            <a:ext cx="3566160" cy="3108960"/>
-          </a:xfrm>
-          <a:prstGeom prst="rect">
-            <a:avLst/>
-          </a:prstGeom>
-          <a:solidFill>
-            <a:srgbClr val="F2F7F7"/>
-          </a:solidFill>
-          <a:ln>
-            <a:noFill/>
-          </a:ln>
-          <a:effectLst/>
-        </p:spPr>
-        <p:style>
-          <a:lnRef idx="1">
-            <a:schemeClr val="accent1"/>
-          </a:lnRef>
-          <a:fillRef idx="3">
-            <a:schemeClr val="accent1"/>
-          </a:fillRef>
-          <a:effectRef idx="2">
-            <a:schemeClr val="accent1"/>
-          </a:effectRef>
-          <a:fontRef idx="minor">
-            <a:schemeClr val="lt1"/>
-          </a:fontRef>
-        </p:style>
-        <p:txBody>
-          <a:bodyPr rtlCol="0" anchor="ctr"/>
-          <a:lstStyle/>
-          <a:p>
-            <a:pPr algn="ctr"/>
-          </a:p>
-        </p:txBody>
-      </p:sp>
-      <p:sp>
-        <p:nvSpPr>
-          <p:cNvPr id="15" name="Rectangle 14"/>
-          <p:cNvSpPr/>
-          <p:nvPr/>
-        </p:nvSpPr>
-        <p:spPr>
-          <a:xfrm>
-            <a:off x="8458200" y="2194560"/>
-            <a:ext cx="3566160" cy="63500"/>
-          </a:xfrm>
-          <a:prstGeom prst="rect">
-            <a:avLst/>
-          </a:prstGeom>
-          <a:solidFill>
-            <a:srgbClr val="008074"/>
-          </a:solidFill>
-          <a:ln>
-            <a:noFill/>
-          </a:ln>
-          <a:effectLst/>
-        </p:spPr>
-        <p:style>
-          <a:lnRef idx="1">
-            <a:schemeClr val="accent1"/>
-          </a:lnRef>
-          <a:fillRef idx="3">
-            <a:schemeClr val="accent1"/>
-          </a:fillRef>
-          <a:effectRef idx="2">
-            <a:schemeClr val="accent1"/>
-          </a:effectRef>
-          <a:fontRef idx="minor">
-            <a:schemeClr val="lt1"/>
-          </a:fontRef>
-        </p:style>
-        <p:txBody>
-          <a:bodyPr rtlCol="0" anchor="ctr"/>
-          <a:lstStyle/>
-          <a:p>
-            <a:pPr algn="ctr"/>
-          </a:p>
-        </p:txBody>
-      </p:sp>
-      <p:sp>
-        <p:nvSpPr>
-          <p:cNvPr id="16" name="TextBox 15"/>
-          <p:cNvSpPr txBox="1"/>
-          <p:nvPr/>
-        </p:nvSpPr>
-        <p:spPr>
-          <a:xfrm>
-            <a:off x="8732520" y="2514600"/>
-            <a:ext cx="3017520" cy="731520"/>
-          </a:xfrm>
-          <a:prstGeom prst="rect">
-            <a:avLst/>
-          </a:prstGeom>
-          <a:noFill/>
-        </p:spPr>
-        <p:txBody>
-          <a:bodyPr wrap="square" anchor="t">
-            <a:spAutoFit/>
-          </a:bodyPr>
-          <a:lstStyle/>
-          <a:p>
-            <a:pPr algn="l">
-              <a:spcBef>
-                <a:spcPts val="0"/>
-              </a:spcBef>
-              <a:spcAft>
-                <a:spcPts val="400"/>
-              </a:spcAft>
-            </a:pPr>
-            <a:r>
-              <a:rPr sz="1900" b="1">
-                <a:solidFill>
-                  <a:srgbClr val="083469"/>
-                </a:solidFill>
-                <a:latin typeface="Calibri"/>
-              </a:rPr>
-              <a:t>Opens the conversation</a:t>
-            </a:r>
-          </a:p>
-        </p:txBody>
-      </p:sp>
-      <p:sp>
-        <p:nvSpPr>
-          <p:cNvPr id="17" name="TextBox 16"/>
-          <p:cNvSpPr txBox="1"/>
-          <p:nvPr/>
-        </p:nvSpPr>
-        <p:spPr>
-          <a:xfrm>
-            <a:off x="8732520" y="3337560"/>
-            <a:ext cx="3017520" cy="1828800"/>
-          </a:xfrm>
-          <a:prstGeom prst="rect">
-            <a:avLst/>
-          </a:prstGeom>
-          <a:noFill/>
-        </p:spPr>
-        <p:txBody>
-          <a:bodyPr wrap="square" anchor="t">
-            <a:spAutoFit/>
-          </a:bodyPr>
-          <a:lstStyle/>
-          <a:p>
-            <a:pPr algn="l">
-              <a:spcBef>
-                <a:spcPts val="0"/>
-              </a:spcBef>
-              <a:spcAft>
-                <a:spcPts val="400"/>
-              </a:spcAft>
-            </a:pPr>
-            <a:r>
-              <a:rPr sz="1500" b="0">
-                <a:solidFill>
-                  <a:srgbClr val="22313F"/>
-                </a:solidFill>
-                <a:latin typeface="Calibri"/>
-              </a:rPr>
-              <a:t>A visceral, shared reason discipline — and a professional in your corner — matters.</a:t>
-            </a:r>
-          </a:p>
-        </p:txBody>
-      </p:sp>
-      <p:sp>
-        <p:nvSpPr>
-          <p:cNvPr id="18" name="Rectangle 17"/>
-          <p:cNvSpPr/>
-          <p:nvPr/>
-        </p:nvSpPr>
-        <p:spPr>
-          <a:xfrm>
-            <a:off x="0" y="6565392"/>
-            <a:ext cx="12191695" cy="292608"/>
-          </a:xfrm>
-          <a:prstGeom prst="rect">
-            <a:avLst/>
-          </a:prstGeom>
-          <a:solidFill>
-            <a:srgbClr val="083469"/>
-          </a:solidFill>
-          <a:ln>
-            <a:noFill/>
-          </a:ln>
-          <a:effectLst/>
-        </p:spPr>
-        <p:style>
-          <a:lnRef idx="1">
-            <a:schemeClr val="accent1"/>
-          </a:lnRef>
-          <a:fillRef idx="3">
-            <a:schemeClr val="accent1"/>
-          </a:fillRef>
-          <a:effectRef idx="2">
-            <a:schemeClr val="accent1"/>
-          </a:effectRef>
-          <a:fontRef idx="minor">
-            <a:schemeClr val="lt1"/>
-          </a:fontRef>
-        </p:style>
-        <p:txBody>
-          <a:bodyPr rtlCol="0" anchor="ctr"/>
-          <a:lstStyle/>
-          <a:p>
-            <a:pPr algn="ctr"/>
-          </a:p>
-        </p:txBody>
-      </p:sp>
-      <p:sp>
-        <p:nvSpPr>
-          <p:cNvPr id="19" name="TextBox 18"/>
           <p:cNvSpPr txBox="1"/>
           <p:nvPr/>
         </p:nvSpPr>
@@ -4879,7 +4772,7 @@
                 </a:solidFill>
                 <a:latin typeface="Calibri"/>
               </a:rPr>
-              <a:t>THE LONG GAME · LIVE ROOM      ·      FOR INTERNAL USE ONLY · DO NOT DISSEMINATE</a:t>
+              <a:t>THE LONG GAME · LIVE ROOM      ·      HOW IT WORKS, AND WHY      ·      FOR INTERNAL USE ONLY</a:t>
             </a:r>
           </a:p>
         </p:txBody>
@@ -4955,7 +4848,7 @@
         <p:spPr>
           <a:xfrm>
             <a:off x="0" y="0"/>
-            <a:ext cx="12191695" cy="1554480"/>
+            <a:ext cx="12191695" cy="1463040"/>
           </a:xfrm>
           <a:prstGeom prst="rect">
             <a:avLst/>
@@ -4998,7 +4891,7 @@
         </p:nvSpPr>
         <p:spPr>
           <a:xfrm>
-            <a:off x="822960" y="365760"/>
+            <a:off x="822960" y="320040"/>
             <a:ext cx="10058400" cy="365760"/>
           </a:xfrm>
           <a:prstGeom prst="rect">
@@ -5027,7 +4920,7 @@
                 </a:solidFill>
                 <a:latin typeface="Calibri"/>
               </a:rPr>
-              <a:t>RUNNING IT</a:t>
+              <a:t>WHY IT'S BUILT THIS WAY</a:t>
             </a:r>
           </a:p>
         </p:txBody>
@@ -5040,8 +4933,8 @@
         </p:nvSpPr>
         <p:spPr>
           <a:xfrm>
-            <a:off x="777240" y="731520"/>
-            <a:ext cx="10515600" cy="731520"/>
+            <a:off x="777240" y="658368"/>
+            <a:ext cx="10515600" cy="640080"/>
           </a:xfrm>
           <a:prstGeom prst="rect">
             <a:avLst/>
@@ -5063,13 +4956,13 @@
               </a:spcAft>
             </a:pPr>
             <a:r>
-              <a:rPr sz="3000" b="1">
+              <a:rPr sz="2600" b="1">
                 <a:solidFill>
                   <a:srgbClr val="FFFFFF"/>
                 </a:solidFill>
                 <a:latin typeface="Calibri"/>
               </a:rPr>
-              <a:t>Live in about fifteen minutes.</a:t>
+              <a:t>Three ideas hold the whole game together.</a:t>
             </a:r>
           </a:p>
         </p:txBody>
@@ -5082,8 +4975,52 @@
         </p:nvSpPr>
         <p:spPr>
           <a:xfrm>
-            <a:off x="822960" y="2286000"/>
-            <a:ext cx="640080" cy="640080"/>
+            <a:off x="685800" y="2103120"/>
+            <a:ext cx="3566160" cy="3291840"/>
+          </a:xfrm>
+          <a:prstGeom prst="rect">
+            <a:avLst/>
+          </a:prstGeom>
+          <a:solidFill>
+            <a:srgbClr val="F2F7F7"/>
+          </a:solidFill>
+          <a:ln>
+            <a:noFill/>
+          </a:ln>
+          <a:effectLst/>
+        </p:spPr>
+        <p:style>
+          <a:lnRef idx="1">
+            <a:schemeClr val="accent1"/>
+          </a:lnRef>
+          <a:fillRef idx="3">
+            <a:schemeClr val="accent1"/>
+          </a:fillRef>
+          <a:effectRef idx="2">
+            <a:schemeClr val="accent1"/>
+          </a:effectRef>
+          <a:fontRef idx="minor">
+            <a:schemeClr val="lt1"/>
+          </a:fontRef>
+        </p:style>
+        <p:txBody>
+          <a:bodyPr rtlCol="0" anchor="ctr"/>
+          <a:lstStyle/>
+          <a:p>
+            <a:pPr algn="ctr"/>
+          </a:p>
+        </p:txBody>
+      </p:sp>
+      <p:sp>
+        <p:nvSpPr>
+          <p:cNvPr id="7" name="Rectangle 6"/>
+          <p:cNvSpPr/>
+          <p:nvPr/>
+        </p:nvSpPr>
+        <p:spPr>
+          <a:xfrm>
+            <a:off x="685800" y="2103120"/>
+            <a:ext cx="3566160" cy="63500"/>
           </a:xfrm>
           <a:prstGeom prst="rect">
             <a:avLst/>
@@ -5120,56 +5057,14 @@
       </p:sp>
       <p:sp>
         <p:nvSpPr>
-          <p:cNvPr id="7" name="TextBox 6"/>
-          <p:cNvSpPr txBox="1"/>
-          <p:nvPr/>
-        </p:nvSpPr>
-        <p:spPr>
-          <a:xfrm>
-            <a:off x="822960" y="2267712"/>
-            <a:ext cx="640080" cy="640080"/>
-          </a:xfrm>
-          <a:prstGeom prst="rect">
-            <a:avLst/>
-          </a:prstGeom>
-          <a:noFill/>
-        </p:spPr>
-        <p:txBody>
-          <a:bodyPr wrap="square" anchor="ctr">
-            <a:spAutoFit/>
-          </a:bodyPr>
-          <a:lstStyle/>
-          <a:p>
-            <a:pPr algn="ctr">
-              <a:spcBef>
-                <a:spcPts val="0"/>
-              </a:spcBef>
-              <a:spcAft>
-                <a:spcPts val="400"/>
-              </a:spcAft>
-            </a:pPr>
-            <a:r>
-              <a:rPr sz="2400" b="1">
-                <a:solidFill>
-                  <a:srgbClr val="FFFFFF"/>
-                </a:solidFill>
-                <a:latin typeface="Calibri"/>
-              </a:rPr>
-              <a:t>1</a:t>
-            </a:r>
-          </a:p>
-        </p:txBody>
-      </p:sp>
-      <p:sp>
-        <p:nvSpPr>
           <p:cNvPr id="8" name="TextBox 7"/>
           <p:cNvSpPr txBox="1"/>
           <p:nvPr/>
         </p:nvSpPr>
         <p:spPr>
           <a:xfrm>
-            <a:off x="1691640" y="2240280"/>
-            <a:ext cx="9144000" cy="457200"/>
+            <a:off x="960120" y="2395728"/>
+            <a:ext cx="3017520" cy="822960"/>
           </a:xfrm>
           <a:prstGeom prst="rect">
             <a:avLst/>
@@ -5191,13 +5086,13 @@
               </a:spcAft>
             </a:pPr>
             <a:r>
-              <a:rPr sz="2000" b="1">
+              <a:rPr sz="1800" b="1">
                 <a:solidFill>
                   <a:srgbClr val="083469"/>
                 </a:solidFill>
                 <a:latin typeface="Calibri"/>
               </a:rPr>
-              <a:t>Host from the link</a:t>
+              <a:t>Emotion, not math</a:t>
             </a:r>
           </a:p>
         </p:txBody>
@@ -5210,8 +5105,8 @@
         </p:nvSpPr>
         <p:spPr>
           <a:xfrm>
-            <a:off x="1691640" y="2697480"/>
-            <a:ext cx="9601200" cy="457200"/>
+            <a:off x="960120" y="3246120"/>
+            <a:ext cx="3017520" cy="2011680"/>
           </a:xfrm>
           <a:prstGeom prst="rect">
             <a:avLst/>
@@ -5235,11 +5130,11 @@
             <a:r>
               <a:rPr sz="1450" b="0">
                 <a:solidFill>
-                  <a:srgbClr val="5F7081"/>
-                </a:solidFill>
-                <a:latin typeface="Calibri"/>
-              </a:rPr>
-              <a:t>Open the game on the big screen — it makes the room + QR.</a:t>
+                  <a:srgbClr val="22313F"/>
+                </a:solidFill>
+                <a:latin typeface="Calibri"/>
+              </a:rPr>
+              <a:t>It recreates fear, FOMO and regret so the room feels why investors sell at the wrong time — the real reason returns get missed.</a:t>
             </a:r>
           </a:p>
         </p:txBody>
@@ -5252,8 +5147,52 @@
         </p:nvSpPr>
         <p:spPr>
           <a:xfrm>
-            <a:off x="822960" y="3429000"/>
-            <a:ext cx="640080" cy="640080"/>
+            <a:off x="4572000" y="2103120"/>
+            <a:ext cx="3566160" cy="3291840"/>
+          </a:xfrm>
+          <a:prstGeom prst="rect">
+            <a:avLst/>
+          </a:prstGeom>
+          <a:solidFill>
+            <a:srgbClr val="F2F7F7"/>
+          </a:solidFill>
+          <a:ln>
+            <a:noFill/>
+          </a:ln>
+          <a:effectLst/>
+        </p:spPr>
+        <p:style>
+          <a:lnRef idx="1">
+            <a:schemeClr val="accent1"/>
+          </a:lnRef>
+          <a:fillRef idx="3">
+            <a:schemeClr val="accent1"/>
+          </a:fillRef>
+          <a:effectRef idx="2">
+            <a:schemeClr val="accent1"/>
+          </a:effectRef>
+          <a:fontRef idx="minor">
+            <a:schemeClr val="lt1"/>
+          </a:fontRef>
+        </p:style>
+        <p:txBody>
+          <a:bodyPr rtlCol="0" anchor="ctr"/>
+          <a:lstStyle/>
+          <a:p>
+            <a:pPr algn="ctr"/>
+          </a:p>
+        </p:txBody>
+      </p:sp>
+      <p:sp>
+        <p:nvSpPr>
+          <p:cNvPr id="11" name="Rectangle 10"/>
+          <p:cNvSpPr/>
+          <p:nvPr/>
+        </p:nvSpPr>
+        <p:spPr>
+          <a:xfrm>
+            <a:off x="4572000" y="2103120"/>
+            <a:ext cx="3566160" cy="63500"/>
           </a:xfrm>
           <a:prstGeom prst="rect">
             <a:avLst/>
@@ -5290,56 +5229,14 @@
       </p:sp>
       <p:sp>
         <p:nvSpPr>
-          <p:cNvPr id="11" name="TextBox 10"/>
-          <p:cNvSpPr txBox="1"/>
-          <p:nvPr/>
-        </p:nvSpPr>
-        <p:spPr>
-          <a:xfrm>
-            <a:off x="822960" y="3410712"/>
-            <a:ext cx="640080" cy="640080"/>
-          </a:xfrm>
-          <a:prstGeom prst="rect">
-            <a:avLst/>
-          </a:prstGeom>
-          <a:noFill/>
-        </p:spPr>
-        <p:txBody>
-          <a:bodyPr wrap="square" anchor="ctr">
-            <a:spAutoFit/>
-          </a:bodyPr>
-          <a:lstStyle/>
-          <a:p>
-            <a:pPr algn="ctr">
-              <a:spcBef>
-                <a:spcPts val="0"/>
-              </a:spcBef>
-              <a:spcAft>
-                <a:spcPts val="400"/>
-              </a:spcAft>
-            </a:pPr>
-            <a:r>
-              <a:rPr sz="2400" b="1">
-                <a:solidFill>
-                  <a:srgbClr val="FFFFFF"/>
-                </a:solidFill>
-                <a:latin typeface="Calibri"/>
-              </a:rPr>
-              <a:t>2</a:t>
-            </a:r>
-          </a:p>
-        </p:txBody>
-      </p:sp>
-      <p:sp>
-        <p:nvSpPr>
           <p:cNvPr id="12" name="TextBox 11"/>
           <p:cNvSpPr txBox="1"/>
           <p:nvPr/>
         </p:nvSpPr>
         <p:spPr>
           <a:xfrm>
-            <a:off x="1691640" y="3383280"/>
-            <a:ext cx="9144000" cy="457200"/>
+            <a:off x="4846320" y="2395728"/>
+            <a:ext cx="3017520" cy="822960"/>
           </a:xfrm>
           <a:prstGeom prst="rect">
             <a:avLst/>
@@ -5361,13 +5258,13 @@
               </a:spcAft>
             </a:pPr>
             <a:r>
-              <a:rPr sz="2000" b="1">
+              <a:rPr sz="1800" b="1">
                 <a:solidFill>
                   <a:srgbClr val="083469"/>
                 </a:solidFill>
                 <a:latin typeface="Calibri"/>
               </a:rPr>
-              <a:t>Audience scans</a:t>
+              <a:t>Real data, hidden dates</a:t>
             </a:r>
           </a:p>
         </p:txBody>
@@ -5380,8 +5277,8 @@
         </p:nvSpPr>
         <p:spPr>
           <a:xfrm>
-            <a:off x="1691640" y="3840480"/>
-            <a:ext cx="9601200" cy="457200"/>
+            <a:off x="4846320" y="3246120"/>
+            <a:ext cx="3017520" cy="2011680"/>
           </a:xfrm>
           <a:prstGeom prst="rect">
             <a:avLst/>
@@ -5405,11 +5302,11 @@
             <a:r>
               <a:rPr sz="1450" b="0">
                 <a:solidFill>
-                  <a:srgbClr val="5F7081"/>
-                </a:solidFill>
-                <a:latin typeface="Calibri"/>
-              </a:rPr>
-              <a:t>Any phone, any network. Names appear as they join.</a:t>
+                  <a:srgbClr val="22313F"/>
+                </a:solidFill>
+                <a:latin typeface="Calibri"/>
+              </a:rPr>
+              <a:t>Real monthly returns make it credible; hiding the dates keeps it honest — every decision is made without hindsight.</a:t>
             </a:r>
           </a:p>
         </p:txBody>
@@ -5422,8 +5319,52 @@
         </p:nvSpPr>
         <p:spPr>
           <a:xfrm>
-            <a:off x="822960" y="4572000"/>
-            <a:ext cx="640080" cy="640080"/>
+            <a:off x="8458200" y="2103120"/>
+            <a:ext cx="3566160" cy="3291840"/>
+          </a:xfrm>
+          <a:prstGeom prst="rect">
+            <a:avLst/>
+          </a:prstGeom>
+          <a:solidFill>
+            <a:srgbClr val="F2F7F7"/>
+          </a:solidFill>
+          <a:ln>
+            <a:noFill/>
+          </a:ln>
+          <a:effectLst/>
+        </p:spPr>
+        <p:style>
+          <a:lnRef idx="1">
+            <a:schemeClr val="accent1"/>
+          </a:lnRef>
+          <a:fillRef idx="3">
+            <a:schemeClr val="accent1"/>
+          </a:fillRef>
+          <a:effectRef idx="2">
+            <a:schemeClr val="accent1"/>
+          </a:effectRef>
+          <a:fontRef idx="minor">
+            <a:schemeClr val="lt1"/>
+          </a:fontRef>
+        </p:style>
+        <p:txBody>
+          <a:bodyPr rtlCol="0" anchor="ctr"/>
+          <a:lstStyle/>
+          <a:p>
+            <a:pPr algn="ctr"/>
+          </a:p>
+        </p:txBody>
+      </p:sp>
+      <p:sp>
+        <p:nvSpPr>
+          <p:cNvPr id="15" name="Rectangle 14"/>
+          <p:cNvSpPr/>
+          <p:nvPr/>
+        </p:nvSpPr>
+        <p:spPr>
+          <a:xfrm>
+            <a:off x="8458200" y="2103120"/>
+            <a:ext cx="3566160" cy="63500"/>
           </a:xfrm>
           <a:prstGeom prst="rect">
             <a:avLst/>
@@ -5460,56 +5401,14 @@
       </p:sp>
       <p:sp>
         <p:nvSpPr>
-          <p:cNvPr id="15" name="TextBox 14"/>
-          <p:cNvSpPr txBox="1"/>
-          <p:nvPr/>
-        </p:nvSpPr>
-        <p:spPr>
-          <a:xfrm>
-            <a:off x="822960" y="4553712"/>
-            <a:ext cx="640080" cy="640080"/>
-          </a:xfrm>
-          <a:prstGeom prst="rect">
-            <a:avLst/>
-          </a:prstGeom>
-          <a:noFill/>
-        </p:spPr>
-        <p:txBody>
-          <a:bodyPr wrap="square" anchor="ctr">
-            <a:spAutoFit/>
-          </a:bodyPr>
-          <a:lstStyle/>
-          <a:p>
-            <a:pPr algn="ctr">
-              <a:spcBef>
-                <a:spcPts val="0"/>
-              </a:spcBef>
-              <a:spcAft>
-                <a:spcPts val="400"/>
-              </a:spcAft>
-            </a:pPr>
-            <a:r>
-              <a:rPr sz="2400" b="1">
-                <a:solidFill>
-                  <a:srgbClr val="FFFFFF"/>
-                </a:solidFill>
-                <a:latin typeface="Calibri"/>
-              </a:rPr>
-              <a:t>3</a:t>
-            </a:r>
-          </a:p>
-        </p:txBody>
-      </p:sp>
-      <p:sp>
-        <p:nvSpPr>
           <p:cNvPr id="16" name="TextBox 15"/>
           <p:cNvSpPr txBox="1"/>
           <p:nvPr/>
         </p:nvSpPr>
         <p:spPr>
           <a:xfrm>
-            <a:off x="1691640" y="4526280"/>
-            <a:ext cx="9144000" cy="457200"/>
+            <a:off x="8732520" y="2395728"/>
+            <a:ext cx="3017520" cy="822960"/>
           </a:xfrm>
           <a:prstGeom prst="rect">
             <a:avLst/>
@@ -5531,13 +5430,13 @@
               </a:spcAft>
             </a:pPr>
             <a:r>
-              <a:rPr sz="2000" b="1">
+              <a:rPr sz="1800" b="1">
                 <a:solidFill>
                   <a:srgbClr val="083469"/>
                 </a:solidFill>
                 <a:latin typeface="Calibri"/>
               </a:rPr>
-              <a:t>Play six moments</a:t>
+              <a:t>Benchmarked to holding</a:t>
             </a:r>
           </a:p>
         </p:txBody>
@@ -5550,8 +5449,8 @@
         </p:nvSpPr>
         <p:spPr>
           <a:xfrm>
-            <a:off x="1691640" y="4983480"/>
-            <a:ext cx="9601200" cy="457200"/>
+            <a:off x="8732520" y="3246120"/>
+            <a:ext cx="3017520" cy="2011680"/>
           </a:xfrm>
           <a:prstGeom prst="rect">
             <a:avLst/>
@@ -5575,60 +5474,18 @@
             <a:r>
               <a:rPr sz="1450" b="0">
                 <a:solidFill>
-                  <a:srgbClr val="5F7081"/>
-                </a:solidFill>
-                <a:latin typeface="Calibri"/>
-              </a:rPr>
-              <a:t>You pace it; checks and the finish run themselves. 5–50 players.</a:t>
-            </a:r>
-          </a:p>
-        </p:txBody>
-      </p:sp>
-      <p:sp>
-        <p:nvSpPr>
-          <p:cNvPr id="18" name="TextBox 17"/>
-          <p:cNvSpPr txBox="1"/>
-          <p:nvPr/>
-        </p:nvSpPr>
-        <p:spPr>
-          <a:xfrm>
-            <a:off x="822960" y="5943600"/>
-            <a:ext cx="10515600" cy="457200"/>
-          </a:xfrm>
-          <a:prstGeom prst="rect">
-            <a:avLst/>
-          </a:prstGeom>
-          <a:noFill/>
-        </p:spPr>
-        <p:txBody>
-          <a:bodyPr wrap="square" anchor="t">
-            <a:spAutoFit/>
-          </a:bodyPr>
-          <a:lstStyle/>
-          <a:p>
-            <a:pPr algn="l">
-              <a:spcBef>
-                <a:spcPts val="0"/>
-              </a:spcBef>
-              <a:spcAft>
-                <a:spcPts val="400"/>
-              </a:spcAft>
-            </a:pPr>
-            <a:r>
-              <a:rPr sz="1100" b="0">
-                <a:solidFill>
-                  <a:srgbClr val="5F7081"/>
-                </a:solidFill>
-                <a:latin typeface="Calibri"/>
-              </a:rPr>
-              <a:t>Reminder: internal / pre-approval. Confirm data + compliance sign-off before any client-facing use.</a:t>
-            </a:r>
-          </a:p>
-        </p:txBody>
-      </p:sp>
-      <p:sp>
-        <p:nvSpPr>
-          <p:cNvPr id="19" name="Rectangle 18"/>
+                  <a:srgbClr val="22313F"/>
+                </a:solidFill>
+                <a:latin typeface="Calibri"/>
+              </a:rPr>
+              <a:t>Every choice — timing, cash, the windfall — is measured against simply staying fully invested, so the cost of reacting is explicit.</a:t>
+            </a:r>
+          </a:p>
+        </p:txBody>
+      </p:sp>
+      <p:sp>
+        <p:nvSpPr>
+          <p:cNvPr id="18" name="Rectangle 17"/>
           <p:cNvSpPr/>
           <p:nvPr/>
         </p:nvSpPr>
@@ -5672,7 +5529,7 @@
       </p:sp>
       <p:sp>
         <p:nvSpPr>
-          <p:cNvPr id="20" name="TextBox 19"/>
+          <p:cNvPr id="19" name="TextBox 18"/>
           <p:cNvSpPr txBox="1"/>
           <p:nvPr/>
         </p:nvSpPr>
@@ -5707,7 +5564,835 @@
                 </a:solidFill>
                 <a:latin typeface="Calibri"/>
               </a:rPr>
-              <a:t>THE LONG GAME · LIVE ROOM      ·      FOR INTERNAL USE ONLY · DO NOT DISSEMINATE</a:t>
+              <a:t>THE LONG GAME · LIVE ROOM      ·      HOW IT WORKS, AND WHY      ·      FOR INTERNAL USE ONLY</a:t>
+            </a:r>
+          </a:p>
+        </p:txBody>
+      </p:sp>
+    </p:spTree>
+  </p:cSld>
+  <p:clrMapOvr>
+    <a:masterClrMapping/>
+  </p:clrMapOvr>
+</p:sld>
+</file>
+
+<file path=ppt/slides/slide14.xml><?xml version="1.0" encoding="utf-8"?>
+<p:sld xmlns:a="http://schemas.openxmlformats.org/drawingml/2006/main" xmlns:p="http://schemas.openxmlformats.org/presentationml/2006/main" xmlns:r="http://schemas.openxmlformats.org/officeDocument/2006/relationships">
+  <p:cSld>
+    <p:spTree>
+      <p:nvGrpSpPr>
+        <p:cNvPr id="1" name=""/>
+        <p:cNvGrpSpPr/>
+        <p:nvPr/>
+      </p:nvGrpSpPr>
+      <p:grpSpPr/>
+      <p:sp>
+        <p:nvSpPr>
+          <p:cNvPr id="2" name="Rectangle 1"/>
+          <p:cNvSpPr/>
+          <p:nvPr/>
+        </p:nvSpPr>
+        <p:spPr>
+          <a:xfrm>
+            <a:off x="0" y="0"/>
+            <a:ext cx="12191695" cy="6858000"/>
+          </a:xfrm>
+          <a:prstGeom prst="rect">
+            <a:avLst/>
+          </a:prstGeom>
+          <a:solidFill>
+            <a:srgbClr val="FFFFFF"/>
+          </a:solidFill>
+          <a:ln>
+            <a:noFill/>
+          </a:ln>
+          <a:effectLst/>
+        </p:spPr>
+        <p:style>
+          <a:lnRef idx="1">
+            <a:schemeClr val="accent1"/>
+          </a:lnRef>
+          <a:fillRef idx="3">
+            <a:schemeClr val="accent1"/>
+          </a:fillRef>
+          <a:effectRef idx="2">
+            <a:schemeClr val="accent1"/>
+          </a:effectRef>
+          <a:fontRef idx="minor">
+            <a:schemeClr val="lt1"/>
+          </a:fontRef>
+        </p:style>
+        <p:txBody>
+          <a:bodyPr rtlCol="0" anchor="ctr"/>
+          <a:lstStyle/>
+          <a:p>
+            <a:pPr algn="ctr"/>
+          </a:p>
+        </p:txBody>
+      </p:sp>
+      <p:sp>
+        <p:nvSpPr>
+          <p:cNvPr id="3" name="Rectangle 2"/>
+          <p:cNvSpPr/>
+          <p:nvPr/>
+        </p:nvSpPr>
+        <p:spPr>
+          <a:xfrm>
+            <a:off x="0" y="0"/>
+            <a:ext cx="12191695" cy="1463040"/>
+          </a:xfrm>
+          <a:prstGeom prst="rect">
+            <a:avLst/>
+          </a:prstGeom>
+          <a:solidFill>
+            <a:srgbClr val="083469"/>
+          </a:solidFill>
+          <a:ln>
+            <a:noFill/>
+          </a:ln>
+          <a:effectLst/>
+        </p:spPr>
+        <p:style>
+          <a:lnRef idx="1">
+            <a:schemeClr val="accent1"/>
+          </a:lnRef>
+          <a:fillRef idx="3">
+            <a:schemeClr val="accent1"/>
+          </a:fillRef>
+          <a:effectRef idx="2">
+            <a:schemeClr val="accent1"/>
+          </a:effectRef>
+          <a:fontRef idx="minor">
+            <a:schemeClr val="lt1"/>
+          </a:fontRef>
+        </p:style>
+        <p:txBody>
+          <a:bodyPr rtlCol="0" anchor="ctr"/>
+          <a:lstStyle/>
+          <a:p>
+            <a:pPr algn="ctr"/>
+          </a:p>
+        </p:txBody>
+      </p:sp>
+      <p:sp>
+        <p:nvSpPr>
+          <p:cNvPr id="4" name="TextBox 3"/>
+          <p:cNvSpPr txBox="1"/>
+          <p:nvPr/>
+        </p:nvSpPr>
+        <p:spPr>
+          <a:xfrm>
+            <a:off x="822960" y="320040"/>
+            <a:ext cx="10058400" cy="365760"/>
+          </a:xfrm>
+          <a:prstGeom prst="rect">
+            <a:avLst/>
+          </a:prstGeom>
+          <a:noFill/>
+        </p:spPr>
+        <p:txBody>
+          <a:bodyPr wrap="square" anchor="t">
+            <a:spAutoFit/>
+          </a:bodyPr>
+          <a:lstStyle/>
+          <a:p>
+            <a:pPr algn="l">
+              <a:spcBef>
+                <a:spcPts val="0"/>
+              </a:spcBef>
+              <a:spcAft>
+                <a:spcPts val="400"/>
+              </a:spcAft>
+            </a:pPr>
+            <a:r>
+              <a:rPr sz="1300" b="1" spc="250">
+                <a:solidFill>
+                  <a:srgbClr val="00D190"/>
+                </a:solidFill>
+                <a:latin typeface="Calibri"/>
+              </a:rPr>
+              <a:t>RUNNING IT</a:t>
+            </a:r>
+          </a:p>
+        </p:txBody>
+      </p:sp>
+      <p:sp>
+        <p:nvSpPr>
+          <p:cNvPr id="5" name="TextBox 4"/>
+          <p:cNvSpPr txBox="1"/>
+          <p:nvPr/>
+        </p:nvSpPr>
+        <p:spPr>
+          <a:xfrm>
+            <a:off x="777240" y="658368"/>
+            <a:ext cx="10515600" cy="640080"/>
+          </a:xfrm>
+          <a:prstGeom prst="rect">
+            <a:avLst/>
+          </a:prstGeom>
+          <a:noFill/>
+        </p:spPr>
+        <p:txBody>
+          <a:bodyPr wrap="square" anchor="t">
+            <a:spAutoFit/>
+          </a:bodyPr>
+          <a:lstStyle/>
+          <a:p>
+            <a:pPr algn="l">
+              <a:spcBef>
+                <a:spcPts val="0"/>
+              </a:spcBef>
+              <a:spcAft>
+                <a:spcPts val="400"/>
+              </a:spcAft>
+            </a:pPr>
+            <a:r>
+              <a:rPr sz="2600" b="1">
+                <a:solidFill>
+                  <a:srgbClr val="FFFFFF"/>
+                </a:solidFill>
+                <a:latin typeface="Calibri"/>
+              </a:rPr>
+              <a:t>What a consultant actually does.</a:t>
+            </a:r>
+          </a:p>
+        </p:txBody>
+      </p:sp>
+      <p:sp>
+        <p:nvSpPr>
+          <p:cNvPr id="6" name="Rectangle 5"/>
+          <p:cNvSpPr/>
+          <p:nvPr/>
+        </p:nvSpPr>
+        <p:spPr>
+          <a:xfrm>
+            <a:off x="822960" y="2148840"/>
+            <a:ext cx="594360" cy="594360"/>
+          </a:xfrm>
+          <a:prstGeom prst="rect">
+            <a:avLst/>
+          </a:prstGeom>
+          <a:solidFill>
+            <a:srgbClr val="008074"/>
+          </a:solidFill>
+          <a:ln>
+            <a:noFill/>
+          </a:ln>
+          <a:effectLst/>
+        </p:spPr>
+        <p:style>
+          <a:lnRef idx="1">
+            <a:schemeClr val="accent1"/>
+          </a:lnRef>
+          <a:fillRef idx="3">
+            <a:schemeClr val="accent1"/>
+          </a:fillRef>
+          <a:effectRef idx="2">
+            <a:schemeClr val="accent1"/>
+          </a:effectRef>
+          <a:fontRef idx="minor">
+            <a:schemeClr val="lt1"/>
+          </a:fontRef>
+        </p:style>
+        <p:txBody>
+          <a:bodyPr rtlCol="0" anchor="ctr"/>
+          <a:lstStyle/>
+          <a:p>
+            <a:pPr algn="ctr"/>
+          </a:p>
+        </p:txBody>
+      </p:sp>
+      <p:sp>
+        <p:nvSpPr>
+          <p:cNvPr id="7" name="TextBox 6"/>
+          <p:cNvSpPr txBox="1"/>
+          <p:nvPr/>
+        </p:nvSpPr>
+        <p:spPr>
+          <a:xfrm>
+            <a:off x="822960" y="2130552"/>
+            <a:ext cx="594360" cy="594360"/>
+          </a:xfrm>
+          <a:prstGeom prst="rect">
+            <a:avLst/>
+          </a:prstGeom>
+          <a:noFill/>
+        </p:spPr>
+        <p:txBody>
+          <a:bodyPr wrap="square" anchor="ctr">
+            <a:spAutoFit/>
+          </a:bodyPr>
+          <a:lstStyle/>
+          <a:p>
+            <a:pPr algn="ctr">
+              <a:spcBef>
+                <a:spcPts val="0"/>
+              </a:spcBef>
+              <a:spcAft>
+                <a:spcPts val="400"/>
+              </a:spcAft>
+            </a:pPr>
+            <a:r>
+              <a:rPr sz="2200" b="1">
+                <a:solidFill>
+                  <a:srgbClr val="FFFFFF"/>
+                </a:solidFill>
+                <a:latin typeface="Calibri"/>
+              </a:rPr>
+              <a:t>1</a:t>
+            </a:r>
+          </a:p>
+        </p:txBody>
+      </p:sp>
+      <p:sp>
+        <p:nvSpPr>
+          <p:cNvPr id="8" name="TextBox 7"/>
+          <p:cNvSpPr txBox="1"/>
+          <p:nvPr/>
+        </p:nvSpPr>
+        <p:spPr>
+          <a:xfrm>
+            <a:off x="1645920" y="2103120"/>
+            <a:ext cx="9601200" cy="457200"/>
+          </a:xfrm>
+          <a:prstGeom prst="rect">
+            <a:avLst/>
+          </a:prstGeom>
+          <a:noFill/>
+        </p:spPr>
+        <p:txBody>
+          <a:bodyPr wrap="square" anchor="t">
+            <a:spAutoFit/>
+          </a:bodyPr>
+          <a:lstStyle/>
+          <a:p>
+            <a:pPr algn="l">
+              <a:spcBef>
+                <a:spcPts val="0"/>
+              </a:spcBef>
+              <a:spcAft>
+                <a:spcPts val="400"/>
+              </a:spcAft>
+            </a:pPr>
+            <a:r>
+              <a:rPr sz="1900" b="1">
+                <a:solidFill>
+                  <a:srgbClr val="083469"/>
+                </a:solidFill>
+                <a:latin typeface="Calibri"/>
+              </a:rPr>
+              <a:t>Host from the official link</a:t>
+            </a:r>
+          </a:p>
+        </p:txBody>
+      </p:sp>
+      <p:sp>
+        <p:nvSpPr>
+          <p:cNvPr id="9" name="TextBox 8"/>
+          <p:cNvSpPr txBox="1"/>
+          <p:nvPr/>
+        </p:nvSpPr>
+        <p:spPr>
+          <a:xfrm>
+            <a:off x="1645920" y="2532888"/>
+            <a:ext cx="9875520" cy="457200"/>
+          </a:xfrm>
+          <a:prstGeom prst="rect">
+            <a:avLst/>
+          </a:prstGeom>
+          <a:noFill/>
+        </p:spPr>
+        <p:txBody>
+          <a:bodyPr wrap="square" anchor="t">
+            <a:spAutoFit/>
+          </a:bodyPr>
+          <a:lstStyle/>
+          <a:p>
+            <a:pPr algn="l">
+              <a:spcBef>
+                <a:spcPts val="0"/>
+              </a:spcBef>
+              <a:spcAft>
+                <a:spcPts val="400"/>
+              </a:spcAft>
+            </a:pPr>
+            <a:r>
+              <a:rPr sz="1400" b="0">
+                <a:solidFill>
+                  <a:srgbClr val="5F7081"/>
+                </a:solidFill>
+                <a:latin typeface="Calibri"/>
+              </a:rPr>
+              <a:t>Open the game on the big screen — it creates the room and QR. Set the starting amount.</a:t>
+            </a:r>
+          </a:p>
+        </p:txBody>
+      </p:sp>
+      <p:sp>
+        <p:nvSpPr>
+          <p:cNvPr id="10" name="Rectangle 9"/>
+          <p:cNvSpPr/>
+          <p:nvPr/>
+        </p:nvSpPr>
+        <p:spPr>
+          <a:xfrm>
+            <a:off x="822960" y="3291840"/>
+            <a:ext cx="594360" cy="594360"/>
+          </a:xfrm>
+          <a:prstGeom prst="rect">
+            <a:avLst/>
+          </a:prstGeom>
+          <a:solidFill>
+            <a:srgbClr val="008074"/>
+          </a:solidFill>
+          <a:ln>
+            <a:noFill/>
+          </a:ln>
+          <a:effectLst/>
+        </p:spPr>
+        <p:style>
+          <a:lnRef idx="1">
+            <a:schemeClr val="accent1"/>
+          </a:lnRef>
+          <a:fillRef idx="3">
+            <a:schemeClr val="accent1"/>
+          </a:fillRef>
+          <a:effectRef idx="2">
+            <a:schemeClr val="accent1"/>
+          </a:effectRef>
+          <a:fontRef idx="minor">
+            <a:schemeClr val="lt1"/>
+          </a:fontRef>
+        </p:style>
+        <p:txBody>
+          <a:bodyPr rtlCol="0" anchor="ctr"/>
+          <a:lstStyle/>
+          <a:p>
+            <a:pPr algn="ctr"/>
+          </a:p>
+        </p:txBody>
+      </p:sp>
+      <p:sp>
+        <p:nvSpPr>
+          <p:cNvPr id="11" name="TextBox 10"/>
+          <p:cNvSpPr txBox="1"/>
+          <p:nvPr/>
+        </p:nvSpPr>
+        <p:spPr>
+          <a:xfrm>
+            <a:off x="822960" y="3273552"/>
+            <a:ext cx="594360" cy="594360"/>
+          </a:xfrm>
+          <a:prstGeom prst="rect">
+            <a:avLst/>
+          </a:prstGeom>
+          <a:noFill/>
+        </p:spPr>
+        <p:txBody>
+          <a:bodyPr wrap="square" anchor="ctr">
+            <a:spAutoFit/>
+          </a:bodyPr>
+          <a:lstStyle/>
+          <a:p>
+            <a:pPr algn="ctr">
+              <a:spcBef>
+                <a:spcPts val="0"/>
+              </a:spcBef>
+              <a:spcAft>
+                <a:spcPts val="400"/>
+              </a:spcAft>
+            </a:pPr>
+            <a:r>
+              <a:rPr sz="2200" b="1">
+                <a:solidFill>
+                  <a:srgbClr val="FFFFFF"/>
+                </a:solidFill>
+                <a:latin typeface="Calibri"/>
+              </a:rPr>
+              <a:t>2</a:t>
+            </a:r>
+          </a:p>
+        </p:txBody>
+      </p:sp>
+      <p:sp>
+        <p:nvSpPr>
+          <p:cNvPr id="12" name="TextBox 11"/>
+          <p:cNvSpPr txBox="1"/>
+          <p:nvPr/>
+        </p:nvSpPr>
+        <p:spPr>
+          <a:xfrm>
+            <a:off x="1645920" y="3246120"/>
+            <a:ext cx="9601200" cy="457200"/>
+          </a:xfrm>
+          <a:prstGeom prst="rect">
+            <a:avLst/>
+          </a:prstGeom>
+          <a:noFill/>
+        </p:spPr>
+        <p:txBody>
+          <a:bodyPr wrap="square" anchor="t">
+            <a:spAutoFit/>
+          </a:bodyPr>
+          <a:lstStyle/>
+          <a:p>
+            <a:pPr algn="l">
+              <a:spcBef>
+                <a:spcPts val="0"/>
+              </a:spcBef>
+              <a:spcAft>
+                <a:spcPts val="400"/>
+              </a:spcAft>
+            </a:pPr>
+            <a:r>
+              <a:rPr sz="1900" b="1">
+                <a:solidFill>
+                  <a:srgbClr val="083469"/>
+                </a:solidFill>
+                <a:latin typeface="Calibri"/>
+              </a:rPr>
+              <a:t>The audience scans</a:t>
+            </a:r>
+          </a:p>
+        </p:txBody>
+      </p:sp>
+      <p:sp>
+        <p:nvSpPr>
+          <p:cNvPr id="13" name="TextBox 12"/>
+          <p:cNvSpPr txBox="1"/>
+          <p:nvPr/>
+        </p:nvSpPr>
+        <p:spPr>
+          <a:xfrm>
+            <a:off x="1645920" y="3675888"/>
+            <a:ext cx="9875520" cy="457200"/>
+          </a:xfrm>
+          <a:prstGeom prst="rect">
+            <a:avLst/>
+          </a:prstGeom>
+          <a:noFill/>
+        </p:spPr>
+        <p:txBody>
+          <a:bodyPr wrap="square" anchor="t">
+            <a:spAutoFit/>
+          </a:bodyPr>
+          <a:lstStyle/>
+          <a:p>
+            <a:pPr algn="l">
+              <a:spcBef>
+                <a:spcPts val="0"/>
+              </a:spcBef>
+              <a:spcAft>
+                <a:spcPts val="400"/>
+              </a:spcAft>
+            </a:pPr>
+            <a:r>
+              <a:rPr sz="1400" b="0">
+                <a:solidFill>
+                  <a:srgbClr val="5F7081"/>
+                </a:solidFill>
+                <a:latin typeface="Calibri"/>
+              </a:rPr>
+              <a:t>Any phone, any network. Names appear as they join; press start when the room is in.</a:t>
+            </a:r>
+          </a:p>
+        </p:txBody>
+      </p:sp>
+      <p:sp>
+        <p:nvSpPr>
+          <p:cNvPr id="14" name="Rectangle 13"/>
+          <p:cNvSpPr/>
+          <p:nvPr/>
+        </p:nvSpPr>
+        <p:spPr>
+          <a:xfrm>
+            <a:off x="822960" y="4434840"/>
+            <a:ext cx="594360" cy="594360"/>
+          </a:xfrm>
+          <a:prstGeom prst="rect">
+            <a:avLst/>
+          </a:prstGeom>
+          <a:solidFill>
+            <a:srgbClr val="008074"/>
+          </a:solidFill>
+          <a:ln>
+            <a:noFill/>
+          </a:ln>
+          <a:effectLst/>
+        </p:spPr>
+        <p:style>
+          <a:lnRef idx="1">
+            <a:schemeClr val="accent1"/>
+          </a:lnRef>
+          <a:fillRef idx="3">
+            <a:schemeClr val="accent1"/>
+          </a:fillRef>
+          <a:effectRef idx="2">
+            <a:schemeClr val="accent1"/>
+          </a:effectRef>
+          <a:fontRef idx="minor">
+            <a:schemeClr val="lt1"/>
+          </a:fontRef>
+        </p:style>
+        <p:txBody>
+          <a:bodyPr rtlCol="0" anchor="ctr"/>
+          <a:lstStyle/>
+          <a:p>
+            <a:pPr algn="ctr"/>
+          </a:p>
+        </p:txBody>
+      </p:sp>
+      <p:sp>
+        <p:nvSpPr>
+          <p:cNvPr id="15" name="TextBox 14"/>
+          <p:cNvSpPr txBox="1"/>
+          <p:nvPr/>
+        </p:nvSpPr>
+        <p:spPr>
+          <a:xfrm>
+            <a:off x="822960" y="4416552"/>
+            <a:ext cx="594360" cy="594360"/>
+          </a:xfrm>
+          <a:prstGeom prst="rect">
+            <a:avLst/>
+          </a:prstGeom>
+          <a:noFill/>
+        </p:spPr>
+        <p:txBody>
+          <a:bodyPr wrap="square" anchor="ctr">
+            <a:spAutoFit/>
+          </a:bodyPr>
+          <a:lstStyle/>
+          <a:p>
+            <a:pPr algn="ctr">
+              <a:spcBef>
+                <a:spcPts val="0"/>
+              </a:spcBef>
+              <a:spcAft>
+                <a:spcPts val="400"/>
+              </a:spcAft>
+            </a:pPr>
+            <a:r>
+              <a:rPr sz="2200" b="1">
+                <a:solidFill>
+                  <a:srgbClr val="FFFFFF"/>
+                </a:solidFill>
+                <a:latin typeface="Calibri"/>
+              </a:rPr>
+              <a:t>3</a:t>
+            </a:r>
+          </a:p>
+        </p:txBody>
+      </p:sp>
+      <p:sp>
+        <p:nvSpPr>
+          <p:cNvPr id="16" name="TextBox 15"/>
+          <p:cNvSpPr txBox="1"/>
+          <p:nvPr/>
+        </p:nvSpPr>
+        <p:spPr>
+          <a:xfrm>
+            <a:off x="1645920" y="4389120"/>
+            <a:ext cx="9601200" cy="457200"/>
+          </a:xfrm>
+          <a:prstGeom prst="rect">
+            <a:avLst/>
+          </a:prstGeom>
+          <a:noFill/>
+        </p:spPr>
+        <p:txBody>
+          <a:bodyPr wrap="square" anchor="t">
+            <a:spAutoFit/>
+          </a:bodyPr>
+          <a:lstStyle/>
+          <a:p>
+            <a:pPr algn="l">
+              <a:spcBef>
+                <a:spcPts val="0"/>
+              </a:spcBef>
+              <a:spcAft>
+                <a:spcPts val="400"/>
+              </a:spcAft>
+            </a:pPr>
+            <a:r>
+              <a:rPr sz="1900" b="1">
+                <a:solidFill>
+                  <a:srgbClr val="083469"/>
+                </a:solidFill>
+                <a:latin typeface="Calibri"/>
+              </a:rPr>
+              <a:t>Pace the six moments</a:t>
+            </a:r>
+          </a:p>
+        </p:txBody>
+      </p:sp>
+      <p:sp>
+        <p:nvSpPr>
+          <p:cNvPr id="17" name="TextBox 16"/>
+          <p:cNvSpPr txBox="1"/>
+          <p:nvPr/>
+        </p:nvSpPr>
+        <p:spPr>
+          <a:xfrm>
+            <a:off x="1645920" y="4818888"/>
+            <a:ext cx="9875520" cy="457200"/>
+          </a:xfrm>
+          <a:prstGeom prst="rect">
+            <a:avLst/>
+          </a:prstGeom>
+          <a:noFill/>
+        </p:spPr>
+        <p:txBody>
+          <a:bodyPr wrap="square" anchor="t">
+            <a:spAutoFit/>
+          </a:bodyPr>
+          <a:lstStyle/>
+          <a:p>
+            <a:pPr algn="l">
+              <a:spcBef>
+                <a:spcPts val="0"/>
+              </a:spcBef>
+              <a:spcAft>
+                <a:spcPts val="400"/>
+              </a:spcAft>
+            </a:pPr>
+            <a:r>
+              <a:rPr sz="1400" b="0">
+                <a:solidFill>
+                  <a:srgbClr val="5F7081"/>
+                </a:solidFill>
+                <a:latin typeface="Calibri"/>
+              </a:rPr>
+              <a:t>You control reveal and next; the checks, windfall and finish run themselves. 5–50 players, ~15 min.</a:t>
+            </a:r>
+          </a:p>
+        </p:txBody>
+      </p:sp>
+      <p:sp>
+        <p:nvSpPr>
+          <p:cNvPr id="18" name="TextBox 17"/>
+          <p:cNvSpPr txBox="1"/>
+          <p:nvPr/>
+        </p:nvSpPr>
+        <p:spPr>
+          <a:xfrm>
+            <a:off x="822960" y="5897880"/>
+            <a:ext cx="10515600" cy="457200"/>
+          </a:xfrm>
+          <a:prstGeom prst="rect">
+            <a:avLst/>
+          </a:prstGeom>
+          <a:noFill/>
+        </p:spPr>
+        <p:txBody>
+          <a:bodyPr wrap="square" anchor="t">
+            <a:spAutoFit/>
+          </a:bodyPr>
+          <a:lstStyle/>
+          <a:p>
+            <a:pPr algn="l">
+              <a:spcBef>
+                <a:spcPts val="0"/>
+              </a:spcBef>
+              <a:spcAft>
+                <a:spcPts val="400"/>
+              </a:spcAft>
+            </a:pPr>
+            <a:r>
+              <a:rPr sz="1100" b="0">
+                <a:solidFill>
+                  <a:srgbClr val="5F7081"/>
+                </a:solidFill>
+                <a:latin typeface="Calibri"/>
+              </a:rPr>
+              <a:t>Internal / pre-approval. Confirm data + compliance sign-off before any client-facing use.</a:t>
+            </a:r>
+          </a:p>
+        </p:txBody>
+      </p:sp>
+      <p:sp>
+        <p:nvSpPr>
+          <p:cNvPr id="19" name="Rectangle 18"/>
+          <p:cNvSpPr/>
+          <p:nvPr/>
+        </p:nvSpPr>
+        <p:spPr>
+          <a:xfrm>
+            <a:off x="0" y="6565392"/>
+            <a:ext cx="12191695" cy="292608"/>
+          </a:xfrm>
+          <a:prstGeom prst="rect">
+            <a:avLst/>
+          </a:prstGeom>
+          <a:solidFill>
+            <a:srgbClr val="083469"/>
+          </a:solidFill>
+          <a:ln>
+            <a:noFill/>
+          </a:ln>
+          <a:effectLst/>
+        </p:spPr>
+        <p:style>
+          <a:lnRef idx="1">
+            <a:schemeClr val="accent1"/>
+          </a:lnRef>
+          <a:fillRef idx="3">
+            <a:schemeClr val="accent1"/>
+          </a:fillRef>
+          <a:effectRef idx="2">
+            <a:schemeClr val="accent1"/>
+          </a:effectRef>
+          <a:fontRef idx="minor">
+            <a:schemeClr val="lt1"/>
+          </a:fontRef>
+        </p:style>
+        <p:txBody>
+          <a:bodyPr rtlCol="0" anchor="ctr"/>
+          <a:lstStyle/>
+          <a:p>
+            <a:pPr algn="ctr"/>
+          </a:p>
+        </p:txBody>
+      </p:sp>
+      <p:sp>
+        <p:nvSpPr>
+          <p:cNvPr id="20" name="TextBox 19"/>
+          <p:cNvSpPr txBox="1"/>
+          <p:nvPr/>
+        </p:nvSpPr>
+        <p:spPr>
+          <a:xfrm>
+            <a:off x="0" y="6556248"/>
+            <a:ext cx="12191695" cy="292608"/>
+          </a:xfrm>
+          <a:prstGeom prst="rect">
+            <a:avLst/>
+          </a:prstGeom>
+          <a:noFill/>
+        </p:spPr>
+        <p:txBody>
+          <a:bodyPr wrap="square" anchor="ctr">
+            <a:spAutoFit/>
+          </a:bodyPr>
+          <a:lstStyle/>
+          <a:p>
+            <a:pPr algn="ctr">
+              <a:spcBef>
+                <a:spcPts val="0"/>
+              </a:spcBef>
+              <a:spcAft>
+                <a:spcPts val="400"/>
+              </a:spcAft>
+            </a:pPr>
+            <a:r>
+              <a:rPr sz="850" b="1" spc="150">
+                <a:solidFill>
+                  <a:srgbClr val="BCD0E6"/>
+                </a:solidFill>
+                <a:latin typeface="Calibri"/>
+              </a:rPr>
+              <a:t>THE LONG GAME · LIVE ROOM      ·      HOW IT WORKS, AND WHY      ·      FOR INTERNAL USE ONLY</a:t>
             </a:r>
           </a:p>
         </p:txBody>
@@ -5776,213 +6461,14 @@
       </p:sp>
       <p:sp>
         <p:nvSpPr>
-          <p:cNvPr id="3" name="TextBox 2"/>
-          <p:cNvSpPr txBox="1"/>
-          <p:nvPr/>
-        </p:nvSpPr>
-        <p:spPr>
-          <a:xfrm>
-            <a:off x="548640" y="502920"/>
-            <a:ext cx="4206240" cy="365760"/>
-          </a:xfrm>
-          <a:prstGeom prst="rect">
-            <a:avLst/>
-          </a:prstGeom>
-          <a:noFill/>
-        </p:spPr>
-        <p:txBody>
-          <a:bodyPr wrap="square" anchor="t">
-            <a:spAutoFit/>
-          </a:bodyPr>
-          <a:lstStyle/>
-          <a:p>
-            <a:pPr algn="l">
-              <a:spcBef>
-                <a:spcPts val="0"/>
-              </a:spcBef>
-              <a:spcAft>
-                <a:spcPts val="400"/>
-              </a:spcAft>
-            </a:pPr>
-            <a:r>
-              <a:rPr sz="1200" b="1" spc="220">
-                <a:solidFill>
-                  <a:srgbClr val="008074"/>
-                </a:solidFill>
-                <a:latin typeface="Calibri"/>
-              </a:rPr>
-              <a:t>STEP 1 · SET UP</a:t>
-            </a:r>
-          </a:p>
-        </p:txBody>
-      </p:sp>
-      <p:sp>
-        <p:nvSpPr>
-          <p:cNvPr id="4" name="TextBox 3"/>
-          <p:cNvSpPr txBox="1"/>
-          <p:nvPr/>
-        </p:nvSpPr>
-        <p:spPr>
-          <a:xfrm>
-            <a:off x="548640" y="868680"/>
-            <a:ext cx="4297680" cy="1828800"/>
-          </a:xfrm>
-          <a:prstGeom prst="rect">
-            <a:avLst/>
-          </a:prstGeom>
-          <a:noFill/>
-        </p:spPr>
-        <p:txBody>
-          <a:bodyPr wrap="square" anchor="t">
-            <a:spAutoFit/>
-          </a:bodyPr>
-          <a:lstStyle/>
-          <a:p>
-            <a:pPr algn="l">
-              <a:spcBef>
-                <a:spcPts val="0"/>
-              </a:spcBef>
-              <a:spcAft>
-                <a:spcPts val="400"/>
-              </a:spcAft>
-            </a:pPr>
-            <a:r>
-              <a:rPr sz="3200" b="1">
-                <a:solidFill>
-                  <a:srgbClr val="083469"/>
-                </a:solidFill>
-                <a:latin typeface="Calibri"/>
-              </a:rPr>
-              <a:t>Scan to play</a:t>
-            </a:r>
-          </a:p>
-        </p:txBody>
-      </p:sp>
-      <p:sp>
-        <p:nvSpPr>
-          <p:cNvPr id="5" name="Rectangle 4"/>
+          <p:cNvPr id="3" name="Rectangle 2"/>
           <p:cNvSpPr/>
           <p:nvPr/>
         </p:nvSpPr>
         <p:spPr>
           <a:xfrm>
-            <a:off x="548640" y="1965960"/>
-            <a:ext cx="822960" cy="50800"/>
-          </a:xfrm>
-          <a:prstGeom prst="rect">
-            <a:avLst/>
-          </a:prstGeom>
-          <a:solidFill>
-            <a:srgbClr val="00D190"/>
-          </a:solidFill>
-          <a:ln>
-            <a:noFill/>
-          </a:ln>
-          <a:effectLst/>
-        </p:spPr>
-        <p:style>
-          <a:lnRef idx="1">
-            <a:schemeClr val="accent1"/>
-          </a:lnRef>
-          <a:fillRef idx="3">
-            <a:schemeClr val="accent1"/>
-          </a:fillRef>
-          <a:effectRef idx="2">
-            <a:schemeClr val="accent1"/>
-          </a:effectRef>
-          <a:fontRef idx="minor">
-            <a:schemeClr val="lt1"/>
-          </a:fontRef>
-        </p:style>
-        <p:txBody>
-          <a:bodyPr rtlCol="0" anchor="ctr"/>
-          <a:lstStyle/>
-          <a:p>
-            <a:pPr algn="ctr"/>
-          </a:p>
-        </p:txBody>
-      </p:sp>
-      <p:sp>
-        <p:nvSpPr>
-          <p:cNvPr id="6" name="TextBox 5"/>
-          <p:cNvSpPr txBox="1"/>
-          <p:nvPr/>
-        </p:nvSpPr>
-        <p:spPr>
-          <a:xfrm>
-            <a:off x="548640" y="2240280"/>
-            <a:ext cx="4297680" cy="2377440"/>
-          </a:xfrm>
-          <a:prstGeom prst="rect">
-            <a:avLst/>
-          </a:prstGeom>
-          <a:noFill/>
-        </p:spPr>
-        <p:txBody>
-          <a:bodyPr wrap="square" anchor="t">
-            <a:spAutoFit/>
-          </a:bodyPr>
-          <a:lstStyle/>
-          <a:p>
-            <a:pPr algn="l">
-              <a:spcBef>
-                <a:spcPts val="0"/>
-              </a:spcBef>
-              <a:spcAft>
-                <a:spcPts val="400"/>
-              </a:spcAft>
-            </a:pPr>
-            <a:r>
-              <a:rPr sz="1700" b="0">
-                <a:solidFill>
-                  <a:srgbClr val="22313F"/>
-                </a:solidFill>
-                <a:latin typeface="Calibri"/>
-              </a:rPr>
-              <a:t>One QR on the big screen. Any phone joins — any network. You set one starting amount for the whole room, so the leaderboard is fair.</a:t>
-            </a:r>
-          </a:p>
-        </p:txBody>
-      </p:sp>
-      <p:pic>
-        <p:nvPicPr>
-          <p:cNvPr id="7" name="Picture 6" descr="host-lobby.png"/>
-          <p:cNvPicPr>
-            <a:picLocks noChangeAspect="1"/>
-          </p:cNvPicPr>
-          <p:nvPr/>
-        </p:nvPicPr>
-        <p:blipFill>
-          <a:blip r:embed="rId2"/>
-          <a:stretch>
-            <a:fillRect/>
-          </a:stretch>
-        </p:blipFill>
-        <p:spPr>
-          <a:xfrm>
-            <a:off x="5029200" y="1194435"/>
-            <a:ext cx="6858000" cy="4286250"/>
-          </a:xfrm>
-          <a:prstGeom prst="rect">
-            <a:avLst/>
-          </a:prstGeom>
-          <a:ln w="9525">
-            <a:solidFill>
-              <a:srgbClr val="DBE4EA"/>
-            </a:solidFill>
-          </a:ln>
-        </p:spPr>
-      </p:pic>
-      <p:sp>
-        <p:nvSpPr>
-          <p:cNvPr id="8" name="Rectangle 7"/>
-          <p:cNvSpPr/>
-          <p:nvPr/>
-        </p:nvSpPr>
-        <p:spPr>
-          <a:xfrm>
-            <a:off x="0" y="6565392"/>
-            <a:ext cx="12191695" cy="292608"/>
+            <a:off x="0" y="0"/>
+            <a:ext cx="12191695" cy="1463040"/>
           </a:xfrm>
           <a:prstGeom prst="rect">
             <a:avLst/>
@@ -6019,7 +6505,985 @@
       </p:sp>
       <p:sp>
         <p:nvSpPr>
+          <p:cNvPr id="4" name="TextBox 3"/>
+          <p:cNvSpPr txBox="1"/>
+          <p:nvPr/>
+        </p:nvSpPr>
+        <p:spPr>
+          <a:xfrm>
+            <a:off x="822960" y="320040"/>
+            <a:ext cx="10058400" cy="365760"/>
+          </a:xfrm>
+          <a:prstGeom prst="rect">
+            <a:avLst/>
+          </a:prstGeom>
+          <a:noFill/>
+        </p:spPr>
+        <p:txBody>
+          <a:bodyPr wrap="square" anchor="t">
+            <a:spAutoFit/>
+          </a:bodyPr>
+          <a:lstStyle/>
+          <a:p>
+            <a:pPr algn="l">
+              <a:spcBef>
+                <a:spcPts val="0"/>
+              </a:spcBef>
+              <a:spcAft>
+                <a:spcPts val="400"/>
+              </a:spcAft>
+            </a:pPr>
+            <a:r>
+              <a:rPr sz="1300" b="1" spc="250">
+                <a:solidFill>
+                  <a:srgbClr val="00D190"/>
+                </a:solidFill>
+                <a:latin typeface="Calibri"/>
+              </a:rPr>
+              <a:t>HOW A SESSION FLOWS</a:t>
+            </a:r>
+          </a:p>
+        </p:txBody>
+      </p:sp>
+      <p:sp>
+        <p:nvSpPr>
+          <p:cNvPr id="5" name="TextBox 4"/>
+          <p:cNvSpPr txBox="1"/>
+          <p:nvPr/>
+        </p:nvSpPr>
+        <p:spPr>
+          <a:xfrm>
+            <a:off x="777240" y="658368"/>
+            <a:ext cx="10515600" cy="640080"/>
+          </a:xfrm>
+          <a:prstGeom prst="rect">
+            <a:avLst/>
+          </a:prstGeom>
+          <a:noFill/>
+        </p:spPr>
+        <p:txBody>
+          <a:bodyPr wrap="square" anchor="t">
+            <a:spAutoFit/>
+          </a:bodyPr>
+          <a:lstStyle/>
+          <a:p>
+            <a:pPr algn="l">
+              <a:spcBef>
+                <a:spcPts val="0"/>
+              </a:spcBef>
+              <a:spcAft>
+                <a:spcPts val="400"/>
+              </a:spcAft>
+            </a:pPr>
+            <a:r>
+              <a:rPr sz="2600" b="1">
+                <a:solidFill>
+                  <a:srgbClr val="FFFFFF"/>
+                </a:solidFill>
+                <a:latin typeface="Calibri"/>
+              </a:rPr>
+              <a:t>Six moments, book-ended by setup and a shared reveal.</a:t>
+            </a:r>
+          </a:p>
+        </p:txBody>
+      </p:sp>
+      <p:sp>
+        <p:nvSpPr>
+          <p:cNvPr id="6" name="Rectangle 5"/>
+          <p:cNvSpPr/>
+          <p:nvPr/>
+        </p:nvSpPr>
+        <p:spPr>
+          <a:xfrm>
+            <a:off x="822960" y="1965960"/>
+            <a:ext cx="475488" cy="475488"/>
+          </a:xfrm>
+          <a:prstGeom prst="rect">
+            <a:avLst/>
+          </a:prstGeom>
+          <a:solidFill>
+            <a:srgbClr val="008074"/>
+          </a:solidFill>
+          <a:ln>
+            <a:noFill/>
+          </a:ln>
+          <a:effectLst/>
+        </p:spPr>
+        <p:style>
+          <a:lnRef idx="1">
+            <a:schemeClr val="accent1"/>
+          </a:lnRef>
+          <a:fillRef idx="3">
+            <a:schemeClr val="accent1"/>
+          </a:fillRef>
+          <a:effectRef idx="2">
+            <a:schemeClr val="accent1"/>
+          </a:effectRef>
+          <a:fontRef idx="minor">
+            <a:schemeClr val="lt1"/>
+          </a:fontRef>
+        </p:style>
+        <p:txBody>
+          <a:bodyPr rtlCol="0" anchor="ctr"/>
+          <a:lstStyle/>
+          <a:p>
+            <a:pPr algn="ctr"/>
+          </a:p>
+        </p:txBody>
+      </p:sp>
+      <p:sp>
+        <p:nvSpPr>
+          <p:cNvPr id="7" name="TextBox 6"/>
+          <p:cNvSpPr txBox="1"/>
+          <p:nvPr/>
+        </p:nvSpPr>
+        <p:spPr>
+          <a:xfrm>
+            <a:off x="822960" y="1938528"/>
+            <a:ext cx="475488" cy="475488"/>
+          </a:xfrm>
+          <a:prstGeom prst="rect">
+            <a:avLst/>
+          </a:prstGeom>
+          <a:noFill/>
+        </p:spPr>
+        <p:txBody>
+          <a:bodyPr wrap="square" anchor="ctr">
+            <a:spAutoFit/>
+          </a:bodyPr>
+          <a:lstStyle/>
+          <a:p>
+            <a:pPr algn="ctr">
+              <a:spcBef>
+                <a:spcPts val="0"/>
+              </a:spcBef>
+              <a:spcAft>
+                <a:spcPts val="400"/>
+              </a:spcAft>
+            </a:pPr>
+            <a:r>
+              <a:rPr sz="2000" b="1">
+                <a:solidFill>
+                  <a:srgbClr val="FFFFFF"/>
+                </a:solidFill>
+                <a:latin typeface="Calibri"/>
+              </a:rPr>
+              <a:t>1</a:t>
+            </a:r>
+          </a:p>
+        </p:txBody>
+      </p:sp>
+      <p:sp>
+        <p:nvSpPr>
+          <p:cNvPr id="8" name="TextBox 7"/>
+          <p:cNvSpPr txBox="1"/>
+          <p:nvPr/>
+        </p:nvSpPr>
+        <p:spPr>
+          <a:xfrm>
+            <a:off x="1508760" y="1920240"/>
+            <a:ext cx="10058400" cy="365760"/>
+          </a:xfrm>
+          <a:prstGeom prst="rect">
+            <a:avLst/>
+          </a:prstGeom>
+          <a:noFill/>
+        </p:spPr>
+        <p:txBody>
+          <a:bodyPr wrap="square" anchor="t">
+            <a:spAutoFit/>
+          </a:bodyPr>
+          <a:lstStyle/>
+          <a:p>
+            <a:pPr algn="l">
+              <a:spcBef>
+                <a:spcPts val="0"/>
+              </a:spcBef>
+              <a:spcAft>
+                <a:spcPts val="400"/>
+              </a:spcAft>
+            </a:pPr>
+            <a:r>
+              <a:rPr sz="1700" b="1">
+                <a:solidFill>
+                  <a:srgbClr val="083469"/>
+                </a:solidFill>
+                <a:latin typeface="Calibri"/>
+              </a:rPr>
+              <a:t>Join &amp; allocate</a:t>
+            </a:r>
+          </a:p>
+        </p:txBody>
+      </p:sp>
+      <p:sp>
+        <p:nvSpPr>
           <p:cNvPr id="9" name="TextBox 8"/>
+          <p:cNvSpPr txBox="1"/>
+          <p:nvPr/>
+        </p:nvSpPr>
+        <p:spPr>
+          <a:xfrm>
+            <a:off x="1508760" y="2295144"/>
+            <a:ext cx="10241280" cy="457200"/>
+          </a:xfrm>
+          <a:prstGeom prst="rect">
+            <a:avLst/>
+          </a:prstGeom>
+          <a:noFill/>
+        </p:spPr>
+        <p:txBody>
+          <a:bodyPr wrap="square" anchor="t">
+            <a:spAutoFit/>
+          </a:bodyPr>
+          <a:lstStyle/>
+          <a:p>
+            <a:pPr algn="l">
+              <a:spcBef>
+                <a:spcPts val="0"/>
+              </a:spcBef>
+              <a:spcAft>
+                <a:spcPts val="400"/>
+              </a:spcAft>
+            </a:pPr>
+            <a:r>
+              <a:rPr sz="1300" b="0">
+                <a:solidFill>
+                  <a:srgbClr val="5F7081"/>
+                </a:solidFill>
+                <a:latin typeface="Calibri"/>
+              </a:rPr>
+              <a:t>Players scan in, pick a nickname, and choose how much starts invested vs. in cash.</a:t>
+            </a:r>
+          </a:p>
+        </p:txBody>
+      </p:sp>
+      <p:sp>
+        <p:nvSpPr>
+          <p:cNvPr id="10" name="Rectangle 9"/>
+          <p:cNvSpPr/>
+          <p:nvPr/>
+        </p:nvSpPr>
+        <p:spPr>
+          <a:xfrm>
+            <a:off x="822960" y="2852928"/>
+            <a:ext cx="475488" cy="475488"/>
+          </a:xfrm>
+          <a:prstGeom prst="rect">
+            <a:avLst/>
+          </a:prstGeom>
+          <a:solidFill>
+            <a:srgbClr val="008074"/>
+          </a:solidFill>
+          <a:ln>
+            <a:noFill/>
+          </a:ln>
+          <a:effectLst/>
+        </p:spPr>
+        <p:style>
+          <a:lnRef idx="1">
+            <a:schemeClr val="accent1"/>
+          </a:lnRef>
+          <a:fillRef idx="3">
+            <a:schemeClr val="accent1"/>
+          </a:fillRef>
+          <a:effectRef idx="2">
+            <a:schemeClr val="accent1"/>
+          </a:effectRef>
+          <a:fontRef idx="minor">
+            <a:schemeClr val="lt1"/>
+          </a:fontRef>
+        </p:style>
+        <p:txBody>
+          <a:bodyPr rtlCol="0" anchor="ctr"/>
+          <a:lstStyle/>
+          <a:p>
+            <a:pPr algn="ctr"/>
+          </a:p>
+        </p:txBody>
+      </p:sp>
+      <p:sp>
+        <p:nvSpPr>
+          <p:cNvPr id="11" name="TextBox 10"/>
+          <p:cNvSpPr txBox="1"/>
+          <p:nvPr/>
+        </p:nvSpPr>
+        <p:spPr>
+          <a:xfrm>
+            <a:off x="822960" y="2825496"/>
+            <a:ext cx="475488" cy="475488"/>
+          </a:xfrm>
+          <a:prstGeom prst="rect">
+            <a:avLst/>
+          </a:prstGeom>
+          <a:noFill/>
+        </p:spPr>
+        <p:txBody>
+          <a:bodyPr wrap="square" anchor="ctr">
+            <a:spAutoFit/>
+          </a:bodyPr>
+          <a:lstStyle/>
+          <a:p>
+            <a:pPr algn="ctr">
+              <a:spcBef>
+                <a:spcPts val="0"/>
+              </a:spcBef>
+              <a:spcAft>
+                <a:spcPts val="400"/>
+              </a:spcAft>
+            </a:pPr>
+            <a:r>
+              <a:rPr sz="2000" b="1">
+                <a:solidFill>
+                  <a:srgbClr val="FFFFFF"/>
+                </a:solidFill>
+                <a:latin typeface="Calibri"/>
+              </a:rPr>
+              <a:t>2</a:t>
+            </a:r>
+          </a:p>
+        </p:txBody>
+      </p:sp>
+      <p:sp>
+        <p:nvSpPr>
+          <p:cNvPr id="12" name="TextBox 11"/>
+          <p:cNvSpPr txBox="1"/>
+          <p:nvPr/>
+        </p:nvSpPr>
+        <p:spPr>
+          <a:xfrm>
+            <a:off x="1508760" y="2807208"/>
+            <a:ext cx="10058400" cy="365760"/>
+          </a:xfrm>
+          <a:prstGeom prst="rect">
+            <a:avLst/>
+          </a:prstGeom>
+          <a:noFill/>
+        </p:spPr>
+        <p:txBody>
+          <a:bodyPr wrap="square" anchor="t">
+            <a:spAutoFit/>
+          </a:bodyPr>
+          <a:lstStyle/>
+          <a:p>
+            <a:pPr algn="l">
+              <a:spcBef>
+                <a:spcPts val="0"/>
+              </a:spcBef>
+              <a:spcAft>
+                <a:spcPts val="400"/>
+              </a:spcAft>
+            </a:pPr>
+            <a:r>
+              <a:rPr sz="1700" b="1">
+                <a:solidFill>
+                  <a:srgbClr val="083469"/>
+                </a:solidFill>
+                <a:latin typeface="Calibri"/>
+              </a:rPr>
+              <a:t>Six moments</a:t>
+            </a:r>
+          </a:p>
+        </p:txBody>
+      </p:sp>
+      <p:sp>
+        <p:nvSpPr>
+          <p:cNvPr id="13" name="TextBox 12"/>
+          <p:cNvSpPr txBox="1"/>
+          <p:nvPr/>
+        </p:nvSpPr>
+        <p:spPr>
+          <a:xfrm>
+            <a:off x="1508760" y="3182112"/>
+            <a:ext cx="10241280" cy="457200"/>
+          </a:xfrm>
+          <a:prstGeom prst="rect">
+            <a:avLst/>
+          </a:prstGeom>
+          <a:noFill/>
+        </p:spPr>
+        <p:txBody>
+          <a:bodyPr wrap="square" anchor="t">
+            <a:spAutoFit/>
+          </a:bodyPr>
+          <a:lstStyle/>
+          <a:p>
+            <a:pPr algn="l">
+              <a:spcBef>
+                <a:spcPts val="0"/>
+              </a:spcBef>
+              <a:spcAft>
+                <a:spcPts val="400"/>
+              </a:spcAft>
+            </a:pPr>
+            <a:r>
+              <a:rPr sz="1300" b="0">
+                <a:solidFill>
+                  <a:srgbClr val="5F7081"/>
+                </a:solidFill>
+                <a:latin typeface="Calibri"/>
+              </a:rPr>
+              <a:t>For each: read a real (unnamed) crisis, decide Buy/Hold/Sell on the phone, then the host reveals what the market did.</a:t>
+            </a:r>
+          </a:p>
+        </p:txBody>
+      </p:sp>
+      <p:sp>
+        <p:nvSpPr>
+          <p:cNvPr id="14" name="Rectangle 13"/>
+          <p:cNvSpPr/>
+          <p:nvPr/>
+        </p:nvSpPr>
+        <p:spPr>
+          <a:xfrm>
+            <a:off x="822960" y="3739896"/>
+            <a:ext cx="475488" cy="475488"/>
+          </a:xfrm>
+          <a:prstGeom prst="rect">
+            <a:avLst/>
+          </a:prstGeom>
+          <a:solidFill>
+            <a:srgbClr val="008074"/>
+          </a:solidFill>
+          <a:ln>
+            <a:noFill/>
+          </a:ln>
+          <a:effectLst/>
+        </p:spPr>
+        <p:style>
+          <a:lnRef idx="1">
+            <a:schemeClr val="accent1"/>
+          </a:lnRef>
+          <a:fillRef idx="3">
+            <a:schemeClr val="accent1"/>
+          </a:fillRef>
+          <a:effectRef idx="2">
+            <a:schemeClr val="accent1"/>
+          </a:effectRef>
+          <a:fontRef idx="minor">
+            <a:schemeClr val="lt1"/>
+          </a:fontRef>
+        </p:style>
+        <p:txBody>
+          <a:bodyPr rtlCol="0" anchor="ctr"/>
+          <a:lstStyle/>
+          <a:p>
+            <a:pPr algn="ctr"/>
+          </a:p>
+        </p:txBody>
+      </p:sp>
+      <p:sp>
+        <p:nvSpPr>
+          <p:cNvPr id="15" name="TextBox 14"/>
+          <p:cNvSpPr txBox="1"/>
+          <p:nvPr/>
+        </p:nvSpPr>
+        <p:spPr>
+          <a:xfrm>
+            <a:off x="822960" y="3712464"/>
+            <a:ext cx="475488" cy="475488"/>
+          </a:xfrm>
+          <a:prstGeom prst="rect">
+            <a:avLst/>
+          </a:prstGeom>
+          <a:noFill/>
+        </p:spPr>
+        <p:txBody>
+          <a:bodyPr wrap="square" anchor="ctr">
+            <a:spAutoFit/>
+          </a:bodyPr>
+          <a:lstStyle/>
+          <a:p>
+            <a:pPr algn="ctr">
+              <a:spcBef>
+                <a:spcPts val="0"/>
+              </a:spcBef>
+              <a:spcAft>
+                <a:spcPts val="400"/>
+              </a:spcAft>
+            </a:pPr>
+            <a:r>
+              <a:rPr sz="2000" b="1">
+                <a:solidFill>
+                  <a:srgbClr val="FFFFFF"/>
+                </a:solidFill>
+                <a:latin typeface="Calibri"/>
+              </a:rPr>
+              <a:t>3</a:t>
+            </a:r>
+          </a:p>
+        </p:txBody>
+      </p:sp>
+      <p:sp>
+        <p:nvSpPr>
+          <p:cNvPr id="16" name="TextBox 15"/>
+          <p:cNvSpPr txBox="1"/>
+          <p:nvPr/>
+        </p:nvSpPr>
+        <p:spPr>
+          <a:xfrm>
+            <a:off x="1508760" y="3694176"/>
+            <a:ext cx="10058400" cy="365760"/>
+          </a:xfrm>
+          <a:prstGeom prst="rect">
+            <a:avLst/>
+          </a:prstGeom>
+          <a:noFill/>
+        </p:spPr>
+        <p:txBody>
+          <a:bodyPr wrap="square" anchor="t">
+            <a:spAutoFit/>
+          </a:bodyPr>
+          <a:lstStyle/>
+          <a:p>
+            <a:pPr algn="l">
+              <a:spcBef>
+                <a:spcPts val="0"/>
+              </a:spcBef>
+              <a:spcAft>
+                <a:spcPts val="400"/>
+              </a:spcAft>
+            </a:pPr>
+            <a:r>
+              <a:rPr sz="1700" b="1">
+                <a:solidFill>
+                  <a:srgbClr val="083469"/>
+                </a:solidFill>
+                <a:latin typeface="Calibri"/>
+              </a:rPr>
+              <a:t>Checks &amp; a windfall</a:t>
+            </a:r>
+          </a:p>
+        </p:txBody>
+      </p:sp>
+      <p:sp>
+        <p:nvSpPr>
+          <p:cNvPr id="17" name="TextBox 16"/>
+          <p:cNvSpPr txBox="1"/>
+          <p:nvPr/>
+        </p:nvSpPr>
+        <p:spPr>
+          <a:xfrm>
+            <a:off x="1508760" y="4069080"/>
+            <a:ext cx="10241280" cy="457200"/>
+          </a:xfrm>
+          <a:prstGeom prst="rect">
+            <a:avLst/>
+          </a:prstGeom>
+          <a:noFill/>
+        </p:spPr>
+        <p:txBody>
+          <a:bodyPr wrap="square" anchor="t">
+            <a:spAutoFit/>
+          </a:bodyPr>
+          <a:lstStyle/>
+          <a:p>
+            <a:pPr algn="l">
+              <a:spcBef>
+                <a:spcPts val="0"/>
+              </a:spcBef>
+              <a:spcAft>
+                <a:spcPts val="400"/>
+              </a:spcAft>
+            </a:pPr>
+            <a:r>
+              <a:rPr sz="1300" b="0">
+                <a:solidFill>
+                  <a:srgbClr val="5F7081"/>
+                </a:solidFill>
+                <a:latin typeface="Calibri"/>
+              </a:rPr>
+              <a:t>A live leaderboard after moments 2 and 4; a cash bonus lands at moment 3.</a:t>
+            </a:r>
+          </a:p>
+        </p:txBody>
+      </p:sp>
+      <p:sp>
+        <p:nvSpPr>
+          <p:cNvPr id="18" name="Rectangle 17"/>
+          <p:cNvSpPr/>
+          <p:nvPr/>
+        </p:nvSpPr>
+        <p:spPr>
+          <a:xfrm>
+            <a:off x="822960" y="4626864"/>
+            <a:ext cx="475488" cy="475488"/>
+          </a:xfrm>
+          <a:prstGeom prst="rect">
+            <a:avLst/>
+          </a:prstGeom>
+          <a:solidFill>
+            <a:srgbClr val="008074"/>
+          </a:solidFill>
+          <a:ln>
+            <a:noFill/>
+          </a:ln>
+          <a:effectLst/>
+        </p:spPr>
+        <p:style>
+          <a:lnRef idx="1">
+            <a:schemeClr val="accent1"/>
+          </a:lnRef>
+          <a:fillRef idx="3">
+            <a:schemeClr val="accent1"/>
+          </a:fillRef>
+          <a:effectRef idx="2">
+            <a:schemeClr val="accent1"/>
+          </a:effectRef>
+          <a:fontRef idx="minor">
+            <a:schemeClr val="lt1"/>
+          </a:fontRef>
+        </p:style>
+        <p:txBody>
+          <a:bodyPr rtlCol="0" anchor="ctr"/>
+          <a:lstStyle/>
+          <a:p>
+            <a:pPr algn="ctr"/>
+          </a:p>
+        </p:txBody>
+      </p:sp>
+      <p:sp>
+        <p:nvSpPr>
+          <p:cNvPr id="19" name="TextBox 18"/>
+          <p:cNvSpPr txBox="1"/>
+          <p:nvPr/>
+        </p:nvSpPr>
+        <p:spPr>
+          <a:xfrm>
+            <a:off x="822960" y="4599432"/>
+            <a:ext cx="475488" cy="475488"/>
+          </a:xfrm>
+          <a:prstGeom prst="rect">
+            <a:avLst/>
+          </a:prstGeom>
+          <a:noFill/>
+        </p:spPr>
+        <p:txBody>
+          <a:bodyPr wrap="square" anchor="ctr">
+            <a:spAutoFit/>
+          </a:bodyPr>
+          <a:lstStyle/>
+          <a:p>
+            <a:pPr algn="ctr">
+              <a:spcBef>
+                <a:spcPts val="0"/>
+              </a:spcBef>
+              <a:spcAft>
+                <a:spcPts val="400"/>
+              </a:spcAft>
+            </a:pPr>
+            <a:r>
+              <a:rPr sz="2000" b="1">
+                <a:solidFill>
+                  <a:srgbClr val="FFFFFF"/>
+                </a:solidFill>
+                <a:latin typeface="Calibri"/>
+              </a:rPr>
+              <a:t>4</a:t>
+            </a:r>
+          </a:p>
+        </p:txBody>
+      </p:sp>
+      <p:sp>
+        <p:nvSpPr>
+          <p:cNvPr id="20" name="TextBox 19"/>
+          <p:cNvSpPr txBox="1"/>
+          <p:nvPr/>
+        </p:nvSpPr>
+        <p:spPr>
+          <a:xfrm>
+            <a:off x="1508760" y="4581144"/>
+            <a:ext cx="10058400" cy="365760"/>
+          </a:xfrm>
+          <a:prstGeom prst="rect">
+            <a:avLst/>
+          </a:prstGeom>
+          <a:noFill/>
+        </p:spPr>
+        <p:txBody>
+          <a:bodyPr wrap="square" anchor="t">
+            <a:spAutoFit/>
+          </a:bodyPr>
+          <a:lstStyle/>
+          <a:p>
+            <a:pPr algn="l">
+              <a:spcBef>
+                <a:spcPts val="0"/>
+              </a:spcBef>
+              <a:spcAft>
+                <a:spcPts val="400"/>
+              </a:spcAft>
+            </a:pPr>
+            <a:r>
+              <a:rPr sz="1700" b="1">
+                <a:solidFill>
+                  <a:srgbClr val="083469"/>
+                </a:solidFill>
+                <a:latin typeface="Calibri"/>
+              </a:rPr>
+              <a:t>The finish</a:t>
+            </a:r>
+          </a:p>
+        </p:txBody>
+      </p:sp>
+      <p:sp>
+        <p:nvSpPr>
+          <p:cNvPr id="21" name="TextBox 20"/>
+          <p:cNvSpPr txBox="1"/>
+          <p:nvPr/>
+        </p:nvSpPr>
+        <p:spPr>
+          <a:xfrm>
+            <a:off x="1508760" y="4956048"/>
+            <a:ext cx="10241280" cy="457200"/>
+          </a:xfrm>
+          <a:prstGeom prst="rect">
+            <a:avLst/>
+          </a:prstGeom>
+          <a:noFill/>
+        </p:spPr>
+        <p:txBody>
+          <a:bodyPr wrap="square" anchor="t">
+            <a:spAutoFit/>
+          </a:bodyPr>
+          <a:lstStyle/>
+          <a:p>
+            <a:pPr algn="l">
+              <a:spcBef>
+                <a:spcPts val="0"/>
+              </a:spcBef>
+              <a:spcAft>
+                <a:spcPts val="400"/>
+              </a:spcAft>
+            </a:pPr>
+            <a:r>
+              <a:rPr sz="1300" b="0">
+                <a:solidFill>
+                  <a:srgbClr val="5F7081"/>
+                </a:solidFill>
+                <a:latin typeface="Calibri"/>
+              </a:rPr>
+              <a:t>Everyone's result, side by side, against simply staying invested.</a:t>
+            </a:r>
+          </a:p>
+        </p:txBody>
+      </p:sp>
+      <p:sp>
+        <p:nvSpPr>
+          <p:cNvPr id="22" name="Rectangle 21"/>
+          <p:cNvSpPr/>
+          <p:nvPr/>
+        </p:nvSpPr>
+        <p:spPr>
+          <a:xfrm>
+            <a:off x="822960" y="5513832"/>
+            <a:ext cx="475488" cy="475488"/>
+          </a:xfrm>
+          <a:prstGeom prst="rect">
+            <a:avLst/>
+          </a:prstGeom>
+          <a:solidFill>
+            <a:srgbClr val="008074"/>
+          </a:solidFill>
+          <a:ln>
+            <a:noFill/>
+          </a:ln>
+          <a:effectLst/>
+        </p:spPr>
+        <p:style>
+          <a:lnRef idx="1">
+            <a:schemeClr val="accent1"/>
+          </a:lnRef>
+          <a:fillRef idx="3">
+            <a:schemeClr val="accent1"/>
+          </a:fillRef>
+          <a:effectRef idx="2">
+            <a:schemeClr val="accent1"/>
+          </a:effectRef>
+          <a:fontRef idx="minor">
+            <a:schemeClr val="lt1"/>
+          </a:fontRef>
+        </p:style>
+        <p:txBody>
+          <a:bodyPr rtlCol="0" anchor="ctr"/>
+          <a:lstStyle/>
+          <a:p>
+            <a:pPr algn="ctr"/>
+          </a:p>
+        </p:txBody>
+      </p:sp>
+      <p:sp>
+        <p:nvSpPr>
+          <p:cNvPr id="23" name="TextBox 22"/>
+          <p:cNvSpPr txBox="1"/>
+          <p:nvPr/>
+        </p:nvSpPr>
+        <p:spPr>
+          <a:xfrm>
+            <a:off x="822960" y="5486400"/>
+            <a:ext cx="475488" cy="475488"/>
+          </a:xfrm>
+          <a:prstGeom prst="rect">
+            <a:avLst/>
+          </a:prstGeom>
+          <a:noFill/>
+        </p:spPr>
+        <p:txBody>
+          <a:bodyPr wrap="square" anchor="ctr">
+            <a:spAutoFit/>
+          </a:bodyPr>
+          <a:lstStyle/>
+          <a:p>
+            <a:pPr algn="ctr">
+              <a:spcBef>
+                <a:spcPts val="0"/>
+              </a:spcBef>
+              <a:spcAft>
+                <a:spcPts val="400"/>
+              </a:spcAft>
+            </a:pPr>
+            <a:r>
+              <a:rPr sz="2000" b="1">
+                <a:solidFill>
+                  <a:srgbClr val="FFFFFF"/>
+                </a:solidFill>
+                <a:latin typeface="Calibri"/>
+              </a:rPr>
+              <a:t>5</a:t>
+            </a:r>
+          </a:p>
+        </p:txBody>
+      </p:sp>
+      <p:sp>
+        <p:nvSpPr>
+          <p:cNvPr id="24" name="TextBox 23"/>
+          <p:cNvSpPr txBox="1"/>
+          <p:nvPr/>
+        </p:nvSpPr>
+        <p:spPr>
+          <a:xfrm>
+            <a:off x="1508760" y="5468112"/>
+            <a:ext cx="10058400" cy="365760"/>
+          </a:xfrm>
+          <a:prstGeom prst="rect">
+            <a:avLst/>
+          </a:prstGeom>
+          <a:noFill/>
+        </p:spPr>
+        <p:txBody>
+          <a:bodyPr wrap="square" anchor="t">
+            <a:spAutoFit/>
+          </a:bodyPr>
+          <a:lstStyle/>
+          <a:p>
+            <a:pPr algn="l">
+              <a:spcBef>
+                <a:spcPts val="0"/>
+              </a:spcBef>
+              <a:spcAft>
+                <a:spcPts val="400"/>
+              </a:spcAft>
+            </a:pPr>
+            <a:r>
+              <a:rPr sz="1700" b="1">
+                <a:solidFill>
+                  <a:srgbClr val="083469"/>
+                </a:solidFill>
+                <a:latin typeface="Calibri"/>
+              </a:rPr>
+              <a:t>Explore</a:t>
+            </a:r>
+          </a:p>
+        </p:txBody>
+      </p:sp>
+      <p:sp>
+        <p:nvSpPr>
+          <p:cNvPr id="25" name="TextBox 24"/>
+          <p:cNvSpPr txBox="1"/>
+          <p:nvPr/>
+        </p:nvSpPr>
+        <p:spPr>
+          <a:xfrm>
+            <a:off x="1508760" y="5843016"/>
+            <a:ext cx="10241280" cy="457200"/>
+          </a:xfrm>
+          <a:prstGeom prst="rect">
+            <a:avLst/>
+          </a:prstGeom>
+          <a:noFill/>
+        </p:spPr>
+        <p:txBody>
+          <a:bodyPr wrap="square" anchor="t">
+            <a:spAutoFit/>
+          </a:bodyPr>
+          <a:lstStyle/>
+          <a:p>
+            <a:pPr algn="l">
+              <a:spcBef>
+                <a:spcPts val="0"/>
+              </a:spcBef>
+              <a:spcAft>
+                <a:spcPts val="400"/>
+              </a:spcAft>
+            </a:pPr>
+            <a:r>
+              <a:rPr sz="1300" b="0">
+                <a:solidFill>
+                  <a:srgbClr val="5F7081"/>
+                </a:solidFill>
+                <a:latin typeface="Calibri"/>
+              </a:rPr>
+              <a:t>The same lesson replayed through past crises — 1973 to 2018.</a:t>
+            </a:r>
+          </a:p>
+        </p:txBody>
+      </p:sp>
+      <p:sp>
+        <p:nvSpPr>
+          <p:cNvPr id="26" name="Rectangle 25"/>
+          <p:cNvSpPr/>
+          <p:nvPr/>
+        </p:nvSpPr>
+        <p:spPr>
+          <a:xfrm>
+            <a:off x="0" y="6565392"/>
+            <a:ext cx="12191695" cy="292608"/>
+          </a:xfrm>
+          <a:prstGeom prst="rect">
+            <a:avLst/>
+          </a:prstGeom>
+          <a:solidFill>
+            <a:srgbClr val="083469"/>
+          </a:solidFill>
+          <a:ln>
+            <a:noFill/>
+          </a:ln>
+          <a:effectLst/>
+        </p:spPr>
+        <p:style>
+          <a:lnRef idx="1">
+            <a:schemeClr val="accent1"/>
+          </a:lnRef>
+          <a:fillRef idx="3">
+            <a:schemeClr val="accent1"/>
+          </a:fillRef>
+          <a:effectRef idx="2">
+            <a:schemeClr val="accent1"/>
+          </a:effectRef>
+          <a:fontRef idx="minor">
+            <a:schemeClr val="lt1"/>
+          </a:fontRef>
+        </p:style>
+        <p:txBody>
+          <a:bodyPr rtlCol="0" anchor="ctr"/>
+          <a:lstStyle/>
+          <a:p>
+            <a:pPr algn="ctr"/>
+          </a:p>
+        </p:txBody>
+      </p:sp>
+      <p:sp>
+        <p:nvSpPr>
+          <p:cNvPr id="27" name="TextBox 26"/>
           <p:cNvSpPr txBox="1"/>
           <p:nvPr/>
         </p:nvSpPr>
@@ -6054,7 +7518,7 @@
                 </a:solidFill>
                 <a:latin typeface="Calibri"/>
               </a:rPr>
-              <a:t>THE LONG GAME · LIVE ROOM      ·      FOR INTERNAL USE ONLY · DO NOT DISSEMINATE</a:t>
+              <a:t>THE LONG GAME · LIVE ROOM      ·      HOW IT WORKS, AND WHY      ·      FOR INTERNAL USE ONLY</a:t>
             </a:r>
           </a:p>
         </p:txBody>
@@ -6129,8 +7593,8 @@
         </p:nvSpPr>
         <p:spPr>
           <a:xfrm>
-            <a:off x="548640" y="502920"/>
-            <a:ext cx="4206240" cy="365760"/>
+            <a:off x="548640" y="457200"/>
+            <a:ext cx="4343400" cy="365760"/>
           </a:xfrm>
           <a:prstGeom prst="rect">
             <a:avLst/>
@@ -6152,13 +7616,13 @@
               </a:spcAft>
             </a:pPr>
             <a:r>
-              <a:rPr sz="1200" b="1" spc="220">
+              <a:rPr sz="1200" b="1" spc="200">
                 <a:solidFill>
                   <a:srgbClr val="008074"/>
                 </a:solidFill>
                 <a:latin typeface="Calibri"/>
               </a:rPr>
-              <a:t>STEP 2 · YOUR STAKE</a:t>
+              <a:t>SETUP · THE BIG SCREEN</a:t>
             </a:r>
           </a:p>
         </p:txBody>
@@ -6171,8 +7635,8 @@
         </p:nvSpPr>
         <p:spPr>
           <a:xfrm>
-            <a:off x="548640" y="868680"/>
-            <a:ext cx="4297680" cy="1828800"/>
+            <a:off x="548640" y="804672"/>
+            <a:ext cx="4343400" cy="1097280"/>
           </a:xfrm>
           <a:prstGeom prst="rect">
             <a:avLst/>
@@ -6194,13 +7658,13 @@
               </a:spcAft>
             </a:pPr>
             <a:r>
-              <a:rPr sz="3200" b="1">
+              <a:rPr sz="2700" b="1">
                 <a:solidFill>
                   <a:srgbClr val="083469"/>
                 </a:solidFill>
                 <a:latin typeface="Calibri"/>
               </a:rPr>
-              <a:t>Invest it — or don't</a:t>
+              <a:t>The host screen</a:t>
             </a:r>
           </a:p>
         </p:txBody>
@@ -6213,8 +7677,8 @@
         </p:nvSpPr>
         <p:spPr>
           <a:xfrm>
-            <a:off x="548640" y="1965960"/>
-            <a:ext cx="822960" cy="50800"/>
+            <a:off x="548640" y="1874519"/>
+            <a:ext cx="777240" cy="50800"/>
           </a:xfrm>
           <a:prstGeom prst="rect">
             <a:avLst/>
@@ -6257,8 +7721,8 @@
         </p:nvSpPr>
         <p:spPr>
           <a:xfrm>
-            <a:off x="548640" y="2240280"/>
-            <a:ext cx="4297680" cy="2377440"/>
+            <a:off x="548640" y="2148840"/>
+            <a:ext cx="4343400" cy="292608"/>
           </a:xfrm>
           <a:prstGeom prst="rect">
             <a:avLst/>
@@ -6280,20 +7744,146 @@
               </a:spcAft>
             </a:pPr>
             <a:r>
-              <a:rPr sz="1700" b="0">
+              <a:rPr sz="1050" b="1" spc="150">
+                <a:solidFill>
+                  <a:srgbClr val="008074"/>
+                </a:solidFill>
+                <a:latin typeface="Calibri"/>
+              </a:rPr>
+              <a:t>WHAT HAPPENS</a:t>
+            </a:r>
+          </a:p>
+        </p:txBody>
+      </p:sp>
+      <p:sp>
+        <p:nvSpPr>
+          <p:cNvPr id="7" name="TextBox 6"/>
+          <p:cNvSpPr txBox="1"/>
+          <p:nvPr/>
+        </p:nvSpPr>
+        <p:spPr>
+          <a:xfrm>
+            <a:off x="548640" y="2450592"/>
+            <a:ext cx="4343400" cy="1828800"/>
+          </a:xfrm>
+          <a:prstGeom prst="rect">
+            <a:avLst/>
+          </a:prstGeom>
+          <a:noFill/>
+        </p:spPr>
+        <p:txBody>
+          <a:bodyPr wrap="square" anchor="t">
+            <a:spAutoFit/>
+          </a:bodyPr>
+          <a:lstStyle/>
+          <a:p>
+            <a:pPr algn="l">
+              <a:spcBef>
+                <a:spcPts val="0"/>
+              </a:spcBef>
+              <a:spcAft>
+                <a:spcPts val="400"/>
+              </a:spcAft>
+            </a:pPr>
+            <a:r>
+              <a:rPr sz="1400" b="0">
                 <a:solidFill>
                   <a:srgbClr val="22313F"/>
                 </a:solidFill>
                 <a:latin typeface="Calibri"/>
               </a:rPr>
-              <a:t>Each player chooses how much of their money starts in the market. Holding cash on the sidelines feels safe — the game will show what it costs.</a:t>
+              <a:t>The host opens the game on the big screen. It creates a room, a QR code, and one starting amount for the whole room. Players scan to join and their names appear.</a:t>
+            </a:r>
+          </a:p>
+        </p:txBody>
+      </p:sp>
+      <p:sp>
+        <p:nvSpPr>
+          <p:cNvPr id="8" name="TextBox 7"/>
+          <p:cNvSpPr txBox="1"/>
+          <p:nvPr/>
+        </p:nvSpPr>
+        <p:spPr>
+          <a:xfrm>
+            <a:off x="548640" y="4160520"/>
+            <a:ext cx="4343400" cy="292608"/>
+          </a:xfrm>
+          <a:prstGeom prst="rect">
+            <a:avLst/>
+          </a:prstGeom>
+          <a:noFill/>
+        </p:spPr>
+        <p:txBody>
+          <a:bodyPr wrap="square" anchor="t">
+            <a:spAutoFit/>
+          </a:bodyPr>
+          <a:lstStyle/>
+          <a:p>
+            <a:pPr algn="l">
+              <a:spcBef>
+                <a:spcPts val="0"/>
+              </a:spcBef>
+              <a:spcAft>
+                <a:spcPts val="400"/>
+              </a:spcAft>
+            </a:pPr>
+            <a:r>
+              <a:rPr sz="1050" b="1" spc="150">
+                <a:solidFill>
+                  <a:srgbClr val="831574"/>
+                </a:solidFill>
+                <a:latin typeface="Calibri"/>
+              </a:rPr>
+              <a:t>THE THINKING</a:t>
+            </a:r>
+          </a:p>
+        </p:txBody>
+      </p:sp>
+      <p:sp>
+        <p:nvSpPr>
+          <p:cNvPr id="9" name="TextBox 8"/>
+          <p:cNvSpPr txBox="1"/>
+          <p:nvPr/>
+        </p:nvSpPr>
+        <p:spPr>
+          <a:xfrm>
+            <a:off x="548640" y="4462272"/>
+            <a:ext cx="4343400" cy="1920240"/>
+          </a:xfrm>
+          <a:prstGeom prst="rect">
+            <a:avLst/>
+          </a:prstGeom>
+          <a:noFill/>
+        </p:spPr>
+        <p:txBody>
+          <a:bodyPr wrap="square" anchor="t">
+            <a:spAutoFit/>
+          </a:bodyPr>
+          <a:lstStyle/>
+          <a:p>
+            <a:pPr algn="l">
+              <a:spcBef>
+                <a:spcPts val="0"/>
+              </a:spcBef>
+              <a:spcAft>
+                <a:spcPts val="400"/>
+              </a:spcAft>
+            </a:pPr>
+            <a:r>
+              <a:rPr sz="1400" b="0">
+                <a:solidFill>
+                  <a:srgbClr val="22313F"/>
+                </a:solidFill>
+                <a:latin typeface="Calibri"/>
+              </a:rPr>
+              <a:t>One shared amount means the leaderboard reflects decisions, not who started with more. The QR points at the hosted site, so any phone — on any network — can join.</a:t>
             </a:r>
           </a:p>
         </p:txBody>
       </p:sp>
       <p:pic>
         <p:nvPicPr>
-          <p:cNvPr id="7" name="Picture 6" descr="phone-alloc.png"/>
+          <p:cNvPr id="10" name="Picture 9" descr="host-lobby.png"/>
           <p:cNvPicPr>
             <a:picLocks noChangeAspect="1"/>
           </p:cNvPicPr>
@@ -6307,8 +7897,8 @@
         </p:blipFill>
         <p:spPr>
           <a:xfrm>
-            <a:off x="7282624" y="457200"/>
-            <a:ext cx="2808351" cy="5760720"/>
+            <a:off x="5074920" y="1285875"/>
+            <a:ext cx="6858000" cy="4286250"/>
           </a:xfrm>
           <a:prstGeom prst="rect">
             <a:avLst/>
@@ -6322,7 +7912,7 @@
       </p:pic>
       <p:sp>
         <p:nvSpPr>
-          <p:cNvPr id="8" name="Rectangle 7"/>
+          <p:cNvPr id="11" name="Rectangle 10"/>
           <p:cNvSpPr/>
           <p:nvPr/>
         </p:nvSpPr>
@@ -6366,7 +7956,7 @@
       </p:sp>
       <p:sp>
         <p:nvSpPr>
-          <p:cNvPr id="9" name="TextBox 8"/>
+          <p:cNvPr id="12" name="TextBox 11"/>
           <p:cNvSpPr txBox="1"/>
           <p:nvPr/>
         </p:nvSpPr>
@@ -6401,7 +7991,7 @@
                 </a:solidFill>
                 <a:latin typeface="Calibri"/>
               </a:rPr>
-              <a:t>THE LONG GAME · LIVE ROOM      ·      FOR INTERNAL USE ONLY · DO NOT DISSEMINATE</a:t>
+              <a:t>THE LONG GAME · LIVE ROOM      ·      HOW IT WORKS, AND WHY      ·      FOR INTERNAL USE ONLY</a:t>
             </a:r>
           </a:p>
         </p:txBody>
@@ -6476,8 +8066,8 @@
         </p:nvSpPr>
         <p:spPr>
           <a:xfrm>
-            <a:off x="548640" y="502920"/>
-            <a:ext cx="4206240" cy="365760"/>
+            <a:off x="548640" y="457200"/>
+            <a:ext cx="4343400" cy="365760"/>
           </a:xfrm>
           <a:prstGeom prst="rect">
             <a:avLst/>
@@ -6499,13 +8089,13 @@
               </a:spcAft>
             </a:pPr>
             <a:r>
-              <a:rPr sz="1200" b="1" spc="220">
+              <a:rPr sz="1200" b="1" spc="200">
                 <a:solidFill>
                   <a:srgbClr val="008074"/>
                 </a:solidFill>
                 <a:latin typeface="Calibri"/>
               </a:rPr>
-              <a:t>STEP 3 · THE MOMENTS</a:t>
+              <a:t>SETUP · EACH PHONE</a:t>
             </a:r>
           </a:p>
         </p:txBody>
@@ -6518,8 +8108,8 @@
         </p:nvSpPr>
         <p:spPr>
           <a:xfrm>
-            <a:off x="548640" y="868680"/>
-            <a:ext cx="4297680" cy="1828800"/>
+            <a:off x="548640" y="804672"/>
+            <a:ext cx="4343400" cy="1097280"/>
           </a:xfrm>
           <a:prstGeom prst="rect">
             <a:avLst/>
@@ -6541,13 +8131,13 @@
               </a:spcAft>
             </a:pPr>
             <a:r>
-              <a:rPr sz="3200" b="1">
+              <a:rPr sz="2700" b="1">
                 <a:solidFill>
                   <a:srgbClr val="083469"/>
                 </a:solidFill>
                 <a:latin typeface="Calibri"/>
               </a:rPr>
-              <a:t>Six real crises</a:t>
+              <a:t>The starting split</a:t>
             </a:r>
           </a:p>
         </p:txBody>
@@ -6560,8 +8150,8 @@
         </p:nvSpPr>
         <p:spPr>
           <a:xfrm>
-            <a:off x="548640" y="1965960"/>
-            <a:ext cx="822960" cy="50800"/>
+            <a:off x="548640" y="1874519"/>
+            <a:ext cx="777240" cy="50800"/>
           </a:xfrm>
           <a:prstGeom prst="rect">
             <a:avLst/>
@@ -6604,8 +8194,8 @@
         </p:nvSpPr>
         <p:spPr>
           <a:xfrm>
-            <a:off x="548640" y="2240280"/>
-            <a:ext cx="4297680" cy="2377440"/>
+            <a:off x="548640" y="2148840"/>
+            <a:ext cx="4343400" cy="292608"/>
           </a:xfrm>
           <a:prstGeom prst="rect">
             <a:avLst/>
@@ -6627,20 +8217,146 @@
               </a:spcAft>
             </a:pPr>
             <a:r>
-              <a:rPr sz="1700" b="0">
+              <a:rPr sz="1050" b="1" spc="150">
+                <a:solidFill>
+                  <a:srgbClr val="008074"/>
+                </a:solidFill>
+                <a:latin typeface="Calibri"/>
+              </a:rPr>
+              <a:t>WHAT HAPPENS</a:t>
+            </a:r>
+          </a:p>
+        </p:txBody>
+      </p:sp>
+      <p:sp>
+        <p:nvSpPr>
+          <p:cNvPr id="7" name="TextBox 6"/>
+          <p:cNvSpPr txBox="1"/>
+          <p:nvPr/>
+        </p:nvSpPr>
+        <p:spPr>
+          <a:xfrm>
+            <a:off x="548640" y="2450592"/>
+            <a:ext cx="4343400" cy="1828800"/>
+          </a:xfrm>
+          <a:prstGeom prst="rect">
+            <a:avLst/>
+          </a:prstGeom>
+          <a:noFill/>
+        </p:spPr>
+        <p:txBody>
+          <a:bodyPr wrap="square" anchor="t">
+            <a:spAutoFit/>
+          </a:bodyPr>
+          <a:lstStyle/>
+          <a:p>
+            <a:pPr algn="l">
+              <a:spcBef>
+                <a:spcPts val="0"/>
+              </a:spcBef>
+              <a:spcAft>
+                <a:spcPts val="400"/>
+              </a:spcAft>
+            </a:pPr>
+            <a:r>
+              <a:rPr sz="1400" b="0">
                 <a:solidFill>
                   <a:srgbClr val="22313F"/>
                 </a:solidFill>
                 <a:latin typeface="Calibri"/>
               </a:rPr>
-              <a:t>Real months of 2020–2025, but never named. Players react on gut — Buy, Hold, or Sell — with no idea which crisis they're in.</a:t>
+              <a:t>After joining, each player sets how much of their money starts invested versus held in cash — their own choice, on their own phone.</a:t>
+            </a:r>
+          </a:p>
+        </p:txBody>
+      </p:sp>
+      <p:sp>
+        <p:nvSpPr>
+          <p:cNvPr id="8" name="TextBox 7"/>
+          <p:cNvSpPr txBox="1"/>
+          <p:nvPr/>
+        </p:nvSpPr>
+        <p:spPr>
+          <a:xfrm>
+            <a:off x="548640" y="4160520"/>
+            <a:ext cx="4343400" cy="292608"/>
+          </a:xfrm>
+          <a:prstGeom prst="rect">
+            <a:avLst/>
+          </a:prstGeom>
+          <a:noFill/>
+        </p:spPr>
+        <p:txBody>
+          <a:bodyPr wrap="square" anchor="t">
+            <a:spAutoFit/>
+          </a:bodyPr>
+          <a:lstStyle/>
+          <a:p>
+            <a:pPr algn="l">
+              <a:spcBef>
+                <a:spcPts val="0"/>
+              </a:spcBef>
+              <a:spcAft>
+                <a:spcPts val="400"/>
+              </a:spcAft>
+            </a:pPr>
+            <a:r>
+              <a:rPr sz="1050" b="1" spc="150">
+                <a:solidFill>
+                  <a:srgbClr val="831574"/>
+                </a:solidFill>
+                <a:latin typeface="Calibri"/>
+              </a:rPr>
+              <a:t>THE THINKING</a:t>
+            </a:r>
+          </a:p>
+        </p:txBody>
+      </p:sp>
+      <p:sp>
+        <p:nvSpPr>
+          <p:cNvPr id="9" name="TextBox 8"/>
+          <p:cNvSpPr txBox="1"/>
+          <p:nvPr/>
+        </p:nvSpPr>
+        <p:spPr>
+          <a:xfrm>
+            <a:off x="548640" y="4462272"/>
+            <a:ext cx="4343400" cy="1920240"/>
+          </a:xfrm>
+          <a:prstGeom prst="rect">
+            <a:avLst/>
+          </a:prstGeom>
+          <a:noFill/>
+        </p:spPr>
+        <p:txBody>
+          <a:bodyPr wrap="square" anchor="t">
+            <a:spAutoFit/>
+          </a:bodyPr>
+          <a:lstStyle/>
+          <a:p>
+            <a:pPr algn="l">
+              <a:spcBef>
+                <a:spcPts val="0"/>
+              </a:spcBef>
+              <a:spcAft>
+                <a:spcPts val="400"/>
+              </a:spcAft>
+            </a:pPr>
+            <a:r>
+              <a:rPr sz="1400" b="0">
+                <a:solidFill>
+                  <a:srgbClr val="22313F"/>
+                </a:solidFill>
+                <a:latin typeface="Calibri"/>
+              </a:rPr>
+              <a:t>Cash feels safe, but the benchmark stays fully invested from day one, so holding back is measured as a real cost later. It turns allocation into a live decision rather than an assumption.</a:t>
             </a:r>
           </a:p>
         </p:txBody>
       </p:sp>
       <p:pic>
         <p:nvPicPr>
-          <p:cNvPr id="7" name="Picture 6" descr="phone-moment.png"/>
+          <p:cNvPr id="10" name="Picture 9" descr="phone-alloc.png"/>
           <p:cNvPicPr>
             <a:picLocks noChangeAspect="1"/>
           </p:cNvPicPr>
@@ -6654,8 +8370,8 @@
         </p:blipFill>
         <p:spPr>
           <a:xfrm>
-            <a:off x="7282624" y="457200"/>
-            <a:ext cx="2808351" cy="5760720"/>
+            <a:off x="7488936" y="457200"/>
+            <a:ext cx="2852928" cy="5852160"/>
           </a:xfrm>
           <a:prstGeom prst="rect">
             <a:avLst/>
@@ -6669,7 +8385,7 @@
       </p:pic>
       <p:sp>
         <p:nvSpPr>
-          <p:cNvPr id="8" name="Rectangle 7"/>
+          <p:cNvPr id="11" name="Rectangle 10"/>
           <p:cNvSpPr/>
           <p:nvPr/>
         </p:nvSpPr>
@@ -6713,7 +8429,7 @@
       </p:sp>
       <p:sp>
         <p:nvSpPr>
-          <p:cNvPr id="9" name="TextBox 8"/>
+          <p:cNvPr id="12" name="TextBox 11"/>
           <p:cNvSpPr txBox="1"/>
           <p:nvPr/>
         </p:nvSpPr>
@@ -6748,7 +8464,7 @@
                 </a:solidFill>
                 <a:latin typeface="Calibri"/>
               </a:rPr>
-              <a:t>THE LONG GAME · LIVE ROOM      ·      FOR INTERNAL USE ONLY · DO NOT DISSEMINATE</a:t>
+              <a:t>THE LONG GAME · LIVE ROOM      ·      HOW IT WORKS, AND WHY      ·      FOR INTERNAL USE ONLY</a:t>
             </a:r>
           </a:p>
         </p:txBody>
@@ -6823,8 +8539,8 @@
         </p:nvSpPr>
         <p:spPr>
           <a:xfrm>
-            <a:off x="548640" y="502920"/>
-            <a:ext cx="4206240" cy="365760"/>
+            <a:off x="548640" y="457200"/>
+            <a:ext cx="4343400" cy="365760"/>
           </a:xfrm>
           <a:prstGeom prst="rect">
             <a:avLst/>
@@ -6846,13 +8562,13 @@
               </a:spcAft>
             </a:pPr>
             <a:r>
-              <a:rPr sz="1200" b="1" spc="220">
+              <a:rPr sz="1200" b="1" spc="200">
                 <a:solidFill>
                   <a:srgbClr val="008074"/>
                 </a:solidFill>
                 <a:latin typeface="Calibri"/>
               </a:rPr>
-              <a:t>LIVE</a:t>
+              <a:t>EACH MOMENT · THE PHONE</a:t>
             </a:r>
           </a:p>
         </p:txBody>
@@ -6865,8 +8581,8 @@
         </p:nvSpPr>
         <p:spPr>
           <a:xfrm>
-            <a:off x="548640" y="868680"/>
-            <a:ext cx="4297680" cy="1828800"/>
+            <a:off x="548640" y="804672"/>
+            <a:ext cx="4343400" cy="1097280"/>
           </a:xfrm>
           <a:prstGeom prst="rect">
             <a:avLst/>
@@ -6888,13 +8604,13 @@
               </a:spcAft>
             </a:pPr>
             <a:r>
-              <a:rPr sz="3200" b="1">
+              <a:rPr sz="2700" b="1">
                 <a:solidFill>
                   <a:srgbClr val="083469"/>
                 </a:solidFill>
                 <a:latin typeface="Calibri"/>
               </a:rPr>
-              <a:t>The room decides</a:t>
+              <a:t>The decision</a:t>
             </a:r>
           </a:p>
         </p:txBody>
@@ -6907,8 +8623,8 @@
         </p:nvSpPr>
         <p:spPr>
           <a:xfrm>
-            <a:off x="548640" y="1965960"/>
-            <a:ext cx="822960" cy="50800"/>
+            <a:off x="548640" y="1874519"/>
+            <a:ext cx="777240" cy="50800"/>
           </a:xfrm>
           <a:prstGeom prst="rect">
             <a:avLst/>
@@ -6951,8 +8667,8 @@
         </p:nvSpPr>
         <p:spPr>
           <a:xfrm>
-            <a:off x="548640" y="2240280"/>
-            <a:ext cx="4297680" cy="2377440"/>
+            <a:off x="548640" y="2148840"/>
+            <a:ext cx="4343400" cy="292608"/>
           </a:xfrm>
           <a:prstGeom prst="rect">
             <a:avLst/>
@@ -6974,20 +8690,146 @@
               </a:spcAft>
             </a:pPr>
             <a:r>
-              <a:rPr sz="1700" b="0">
+              <a:rPr sz="1050" b="1" spc="150">
+                <a:solidFill>
+                  <a:srgbClr val="008074"/>
+                </a:solidFill>
+                <a:latin typeface="Calibri"/>
+              </a:rPr>
+              <a:t>WHAT HAPPENS</a:t>
+            </a:r>
+          </a:p>
+        </p:txBody>
+      </p:sp>
+      <p:sp>
+        <p:nvSpPr>
+          <p:cNvPr id="7" name="TextBox 6"/>
+          <p:cNvSpPr txBox="1"/>
+          <p:nvPr/>
+        </p:nvSpPr>
+        <p:spPr>
+          <a:xfrm>
+            <a:off x="548640" y="2450592"/>
+            <a:ext cx="4343400" cy="1828800"/>
+          </a:xfrm>
+          <a:prstGeom prst="rect">
+            <a:avLst/>
+          </a:prstGeom>
+          <a:noFill/>
+        </p:spPr>
+        <p:txBody>
+          <a:bodyPr wrap="square" anchor="t">
+            <a:spAutoFit/>
+          </a:bodyPr>
+          <a:lstStyle/>
+          <a:p>
+            <a:pPr algn="l">
+              <a:spcBef>
+                <a:spcPts val="0"/>
+              </a:spcBef>
+              <a:spcAft>
+                <a:spcPts val="400"/>
+              </a:spcAft>
+            </a:pPr>
+            <a:r>
+              <a:rPr sz="1400" b="0">
                 <a:solidFill>
                   <a:srgbClr val="22313F"/>
                 </a:solidFill>
                 <a:latin typeface="Calibri"/>
               </a:rPr>
-              <a:t>The big screen shows the crowd leaning Buy / Hold / Sell in real time — but the outcome stays hidden until the host reveals it.</a:t>
+              <a:t>Every moment is a real month of 2020–2025, shown only as a short, tense story — never named or dated. The player chooses Buy, Hold, or Sell.</a:t>
+            </a:r>
+          </a:p>
+        </p:txBody>
+      </p:sp>
+      <p:sp>
+        <p:nvSpPr>
+          <p:cNvPr id="8" name="TextBox 7"/>
+          <p:cNvSpPr txBox="1"/>
+          <p:nvPr/>
+        </p:nvSpPr>
+        <p:spPr>
+          <a:xfrm>
+            <a:off x="548640" y="4160520"/>
+            <a:ext cx="4343400" cy="292608"/>
+          </a:xfrm>
+          <a:prstGeom prst="rect">
+            <a:avLst/>
+          </a:prstGeom>
+          <a:noFill/>
+        </p:spPr>
+        <p:txBody>
+          <a:bodyPr wrap="square" anchor="t">
+            <a:spAutoFit/>
+          </a:bodyPr>
+          <a:lstStyle/>
+          <a:p>
+            <a:pPr algn="l">
+              <a:spcBef>
+                <a:spcPts val="0"/>
+              </a:spcBef>
+              <a:spcAft>
+                <a:spcPts val="400"/>
+              </a:spcAft>
+            </a:pPr>
+            <a:r>
+              <a:rPr sz="1050" b="1" spc="150">
+                <a:solidFill>
+                  <a:srgbClr val="831574"/>
+                </a:solidFill>
+                <a:latin typeface="Calibri"/>
+              </a:rPr>
+              <a:t>THE THINKING</a:t>
+            </a:r>
+          </a:p>
+        </p:txBody>
+      </p:sp>
+      <p:sp>
+        <p:nvSpPr>
+          <p:cNvPr id="9" name="TextBox 8"/>
+          <p:cNvSpPr txBox="1"/>
+          <p:nvPr/>
+        </p:nvSpPr>
+        <p:spPr>
+          <a:xfrm>
+            <a:off x="548640" y="4462272"/>
+            <a:ext cx="4343400" cy="1920240"/>
+          </a:xfrm>
+          <a:prstGeom prst="rect">
+            <a:avLst/>
+          </a:prstGeom>
+          <a:noFill/>
+        </p:spPr>
+        <p:txBody>
+          <a:bodyPr wrap="square" anchor="t">
+            <a:spAutoFit/>
+          </a:bodyPr>
+          <a:lstStyle/>
+          <a:p>
+            <a:pPr algn="l">
+              <a:spcBef>
+                <a:spcPts val="0"/>
+              </a:spcBef>
+              <a:spcAft>
+                <a:spcPts val="400"/>
+              </a:spcAft>
+            </a:pPr>
+            <a:r>
+              <a:rPr sz="1400" b="0">
+                <a:solidFill>
+                  <a:srgbClr val="22313F"/>
+                </a:solidFill>
+                <a:latin typeface="Calibri"/>
+              </a:rPr>
+              <a:t>Hiding the date forces a gut reaction — the way an investor actually experiences a crisis in the moment, without the comfort of hindsight.</a:t>
             </a:r>
           </a:p>
         </p:txBody>
       </p:sp>
       <p:pic>
         <p:nvPicPr>
-          <p:cNvPr id="7" name="Picture 6" descr="host-voting.png"/>
+          <p:cNvPr id="10" name="Picture 9" descr="phone-moment.png"/>
           <p:cNvPicPr>
             <a:picLocks noChangeAspect="1"/>
           </p:cNvPicPr>
@@ -7001,8 +8843,8 @@
         </p:blipFill>
         <p:spPr>
           <a:xfrm>
-            <a:off x="5029200" y="1194435"/>
-            <a:ext cx="6858000" cy="4286250"/>
+            <a:off x="7488936" y="457200"/>
+            <a:ext cx="2852928" cy="5852160"/>
           </a:xfrm>
           <a:prstGeom prst="rect">
             <a:avLst/>
@@ -7016,7 +8858,7 @@
       </p:pic>
       <p:sp>
         <p:nvSpPr>
-          <p:cNvPr id="8" name="Rectangle 7"/>
+          <p:cNvPr id="11" name="Rectangle 10"/>
           <p:cNvSpPr/>
           <p:nvPr/>
         </p:nvSpPr>
@@ -7060,7 +8902,7 @@
       </p:sp>
       <p:sp>
         <p:nvSpPr>
-          <p:cNvPr id="9" name="TextBox 8"/>
+          <p:cNvPr id="12" name="TextBox 11"/>
           <p:cNvSpPr txBox="1"/>
           <p:nvPr/>
         </p:nvSpPr>
@@ -7095,7 +8937,7 @@
                 </a:solidFill>
                 <a:latin typeface="Calibri"/>
               </a:rPr>
-              <a:t>THE LONG GAME · LIVE ROOM      ·      FOR INTERNAL USE ONLY · DO NOT DISSEMINATE</a:t>
+              <a:t>THE LONG GAME · LIVE ROOM      ·      HOW IT WORKS, AND WHY      ·      FOR INTERNAL USE ONLY</a:t>
             </a:r>
           </a:p>
         </p:txBody>
@@ -7170,8 +9012,8 @@
         </p:nvSpPr>
         <p:spPr>
           <a:xfrm>
-            <a:off x="548640" y="502920"/>
-            <a:ext cx="4206240" cy="365760"/>
+            <a:off x="548640" y="457200"/>
+            <a:ext cx="4343400" cy="365760"/>
           </a:xfrm>
           <a:prstGeom prst="rect">
             <a:avLst/>
@@ -7193,13 +9035,13 @@
               </a:spcAft>
             </a:pPr>
             <a:r>
-              <a:rPr sz="1200" b="1" spc="220">
+              <a:rPr sz="1200" b="1" spc="200">
                 <a:solidFill>
                   <a:srgbClr val="008074"/>
                 </a:solidFill>
                 <a:latin typeface="Calibri"/>
               </a:rPr>
-              <a:t>THE PAYOFF</a:t>
+              <a:t>EACH MOMENT · BIG SCREEN</a:t>
             </a:r>
           </a:p>
         </p:txBody>
@@ -7212,8 +9054,8 @@
         </p:nvSpPr>
         <p:spPr>
           <a:xfrm>
-            <a:off x="548640" y="868680"/>
-            <a:ext cx="4297680" cy="1828800"/>
+            <a:off x="548640" y="804672"/>
+            <a:ext cx="4343400" cy="1097280"/>
           </a:xfrm>
           <a:prstGeom prst="rect">
             <a:avLst/>
@@ -7235,13 +9077,13 @@
               </a:spcAft>
             </a:pPr>
             <a:r>
-              <a:rPr sz="3200" b="1">
+              <a:rPr sz="2700" b="1">
                 <a:solidFill>
                   <a:srgbClr val="083469"/>
                 </a:solidFill>
                 <a:latin typeface="Calibri"/>
               </a:rPr>
-              <a:t>What actually happened</a:t>
+              <a:t>While the room decides</a:t>
             </a:r>
           </a:p>
         </p:txBody>
@@ -7254,8 +9096,8 @@
         </p:nvSpPr>
         <p:spPr>
           <a:xfrm>
-            <a:off x="548640" y="1965960"/>
-            <a:ext cx="822960" cy="50800"/>
+            <a:off x="548640" y="1874519"/>
+            <a:ext cx="777240" cy="50800"/>
           </a:xfrm>
           <a:prstGeom prst="rect">
             <a:avLst/>
@@ -7298,8 +9140,8 @@
         </p:nvSpPr>
         <p:spPr>
           <a:xfrm>
-            <a:off x="548640" y="2240280"/>
-            <a:ext cx="4297680" cy="2377440"/>
+            <a:off x="548640" y="2148840"/>
+            <a:ext cx="4343400" cy="292608"/>
           </a:xfrm>
           <a:prstGeom prst="rect">
             <a:avLst/>
@@ -7321,20 +9163,146 @@
               </a:spcAft>
             </a:pPr>
             <a:r>
-              <a:rPr sz="1700" b="0">
+              <a:rPr sz="1050" b="1" spc="150">
+                <a:solidFill>
+                  <a:srgbClr val="008074"/>
+                </a:solidFill>
+                <a:latin typeface="Calibri"/>
+              </a:rPr>
+              <a:t>WHAT HAPPENS</a:t>
+            </a:r>
+          </a:p>
+        </p:txBody>
+      </p:sp>
+      <p:sp>
+        <p:nvSpPr>
+          <p:cNvPr id="7" name="TextBox 6"/>
+          <p:cNvSpPr txBox="1"/>
+          <p:nvPr/>
+        </p:nvSpPr>
+        <p:spPr>
+          <a:xfrm>
+            <a:off x="548640" y="2450592"/>
+            <a:ext cx="4343400" cy="1828800"/>
+          </a:xfrm>
+          <a:prstGeom prst="rect">
+            <a:avLst/>
+          </a:prstGeom>
+          <a:noFill/>
+        </p:spPr>
+        <p:txBody>
+          <a:bodyPr wrap="square" anchor="t">
+            <a:spAutoFit/>
+          </a:bodyPr>
+          <a:lstStyle/>
+          <a:p>
+            <a:pPr algn="l">
+              <a:spcBef>
+                <a:spcPts val="0"/>
+              </a:spcBef>
+              <a:spcAft>
+                <a:spcPts val="400"/>
+              </a:spcAft>
+            </a:pPr>
+            <a:r>
+              <a:rPr sz="1400" b="0">
                 <a:solidFill>
                   <a:srgbClr val="22313F"/>
                 </a:solidFill>
                 <a:latin typeface="Calibri"/>
               </a:rPr>
-              <a:t>One dramatic number: the market's verdict for that month. Did the room's instinct pay off — or not?</a:t>
+              <a:t>The big screen shows the room leaning Buy / Hold / Sell in real time. The outcome stays hidden until the host chooses to reveal it.</a:t>
+            </a:r>
+          </a:p>
+        </p:txBody>
+      </p:sp>
+      <p:sp>
+        <p:nvSpPr>
+          <p:cNvPr id="8" name="TextBox 7"/>
+          <p:cNvSpPr txBox="1"/>
+          <p:nvPr/>
+        </p:nvSpPr>
+        <p:spPr>
+          <a:xfrm>
+            <a:off x="548640" y="4160520"/>
+            <a:ext cx="4343400" cy="292608"/>
+          </a:xfrm>
+          <a:prstGeom prst="rect">
+            <a:avLst/>
+          </a:prstGeom>
+          <a:noFill/>
+        </p:spPr>
+        <p:txBody>
+          <a:bodyPr wrap="square" anchor="t">
+            <a:spAutoFit/>
+          </a:bodyPr>
+          <a:lstStyle/>
+          <a:p>
+            <a:pPr algn="l">
+              <a:spcBef>
+                <a:spcPts val="0"/>
+              </a:spcBef>
+              <a:spcAft>
+                <a:spcPts val="400"/>
+              </a:spcAft>
+            </a:pPr>
+            <a:r>
+              <a:rPr sz="1050" b="1" spc="150">
+                <a:solidFill>
+                  <a:srgbClr val="831574"/>
+                </a:solidFill>
+                <a:latin typeface="Calibri"/>
+              </a:rPr>
+              <a:t>THE THINKING</a:t>
+            </a:r>
+          </a:p>
+        </p:txBody>
+      </p:sp>
+      <p:sp>
+        <p:nvSpPr>
+          <p:cNvPr id="9" name="TextBox 8"/>
+          <p:cNvSpPr txBox="1"/>
+          <p:nvPr/>
+        </p:nvSpPr>
+        <p:spPr>
+          <a:xfrm>
+            <a:off x="548640" y="4462272"/>
+            <a:ext cx="4343400" cy="1920240"/>
+          </a:xfrm>
+          <a:prstGeom prst="rect">
+            <a:avLst/>
+          </a:prstGeom>
+          <a:noFill/>
+        </p:spPr>
+        <p:txBody>
+          <a:bodyPr wrap="square" anchor="t">
+            <a:spAutoFit/>
+          </a:bodyPr>
+          <a:lstStyle/>
+          <a:p>
+            <a:pPr algn="l">
+              <a:spcBef>
+                <a:spcPts val="0"/>
+              </a:spcBef>
+              <a:spcAft>
+                <a:spcPts val="400"/>
+              </a:spcAft>
+            </a:pPr>
+            <a:r>
+              <a:rPr sz="1400" b="0">
+                <a:solidFill>
+                  <a:srgbClr val="22313F"/>
+                </a:solidFill>
+                <a:latin typeface="Calibri"/>
+              </a:rPr>
+              <a:t>Surfacing the crowd's instinct — and withholding the result — lets the room commit to a decision before they know whether it paid off.</a:t>
             </a:r>
           </a:p>
         </p:txBody>
       </p:sp>
       <p:pic>
         <p:nvPicPr>
-          <p:cNvPr id="7" name="Picture 6" descr="host-reveal.png"/>
+          <p:cNvPr id="10" name="Picture 9" descr="host-voting.png"/>
           <p:cNvPicPr>
             <a:picLocks noChangeAspect="1"/>
           </p:cNvPicPr>
@@ -7348,7 +9316,7 @@
         </p:blipFill>
         <p:spPr>
           <a:xfrm>
-            <a:off x="5029200" y="1194435"/>
+            <a:off x="5074920" y="1285875"/>
             <a:ext cx="6858000" cy="4286250"/>
           </a:xfrm>
           <a:prstGeom prst="rect">
@@ -7363,7 +9331,7 @@
       </p:pic>
       <p:sp>
         <p:nvSpPr>
-          <p:cNvPr id="8" name="Rectangle 7"/>
+          <p:cNvPr id="11" name="Rectangle 10"/>
           <p:cNvSpPr/>
           <p:nvPr/>
         </p:nvSpPr>
@@ -7407,7 +9375,7 @@
       </p:sp>
       <p:sp>
         <p:nvSpPr>
-          <p:cNvPr id="9" name="TextBox 8"/>
+          <p:cNvPr id="12" name="TextBox 11"/>
           <p:cNvSpPr txBox="1"/>
           <p:nvPr/>
         </p:nvSpPr>
@@ -7442,7 +9410,7 @@
                 </a:solidFill>
                 <a:latin typeface="Calibri"/>
               </a:rPr>
-              <a:t>THE LONG GAME · LIVE ROOM      ·      FOR INTERNAL USE ONLY · DO NOT DISSEMINATE</a:t>
+              <a:t>THE LONG GAME · LIVE ROOM      ·      HOW IT WORKS, AND WHY      ·      FOR INTERNAL USE ONLY</a:t>
             </a:r>
           </a:p>
         </p:txBody>
@@ -7517,8 +9485,8 @@
         </p:nvSpPr>
         <p:spPr>
           <a:xfrm>
-            <a:off x="548640" y="502920"/>
-            <a:ext cx="4206240" cy="365760"/>
+            <a:off x="548640" y="457200"/>
+            <a:ext cx="4343400" cy="365760"/>
           </a:xfrm>
           <a:prstGeom prst="rect">
             <a:avLst/>
@@ -7540,13 +9508,13 @@
               </a:spcAft>
             </a:pPr>
             <a:r>
-              <a:rPr sz="1200" b="1" spc="220">
+              <a:rPr sz="1200" b="1" spc="200">
                 <a:solidFill>
                   <a:srgbClr val="008074"/>
                 </a:solidFill>
                 <a:latin typeface="Calibri"/>
               </a:rPr>
-              <a:t>THE TWIST</a:t>
+              <a:t>EACH MOMENT · THE REVEAL</a:t>
             </a:r>
           </a:p>
         </p:txBody>
@@ -7559,8 +9527,8 @@
         </p:nvSpPr>
         <p:spPr>
           <a:xfrm>
-            <a:off x="548640" y="868680"/>
-            <a:ext cx="4297680" cy="1828800"/>
+            <a:off x="548640" y="804672"/>
+            <a:ext cx="4343400" cy="1097280"/>
           </a:xfrm>
           <a:prstGeom prst="rect">
             <a:avLst/>
@@ -7582,13 +9550,13 @@
               </a:spcAft>
             </a:pPr>
             <a:r>
-              <a:rPr sz="3200" b="1">
+              <a:rPr sz="2700" b="1">
                 <a:solidFill>
                   <a:srgbClr val="083469"/>
                 </a:solidFill>
                 <a:latin typeface="Calibri"/>
               </a:rPr>
-              <a:t>A bonus lands</a:t>
+              <a:t>What actually happened</a:t>
             </a:r>
           </a:p>
         </p:txBody>
@@ -7601,8 +9569,8 @@
         </p:nvSpPr>
         <p:spPr>
           <a:xfrm>
-            <a:off x="548640" y="1965960"/>
-            <a:ext cx="822960" cy="50800"/>
+            <a:off x="548640" y="1874519"/>
+            <a:ext cx="777240" cy="50800"/>
           </a:xfrm>
           <a:prstGeom prst="rect">
             <a:avLst/>
@@ -7645,8 +9613,8 @@
         </p:nvSpPr>
         <p:spPr>
           <a:xfrm>
-            <a:off x="548640" y="2240280"/>
-            <a:ext cx="4297680" cy="2377440"/>
+            <a:off x="548640" y="2148840"/>
+            <a:ext cx="4343400" cy="292608"/>
           </a:xfrm>
           <a:prstGeom prst="rect">
             <a:avLst/>
@@ -7668,20 +9636,146 @@
               </a:spcAft>
             </a:pPr>
             <a:r>
-              <a:rPr sz="1700" b="0">
+              <a:rPr sz="1050" b="1" spc="150">
+                <a:solidFill>
+                  <a:srgbClr val="008074"/>
+                </a:solidFill>
+                <a:latin typeface="Calibri"/>
+              </a:rPr>
+              <a:t>WHAT HAPPENS</a:t>
+            </a:r>
+          </a:p>
+        </p:txBody>
+      </p:sp>
+      <p:sp>
+        <p:nvSpPr>
+          <p:cNvPr id="7" name="TextBox 6"/>
+          <p:cNvSpPr txBox="1"/>
+          <p:nvPr/>
+        </p:nvSpPr>
+        <p:spPr>
+          <a:xfrm>
+            <a:off x="548640" y="2450592"/>
+            <a:ext cx="4343400" cy="1828800"/>
+          </a:xfrm>
+          <a:prstGeom prst="rect">
+            <a:avLst/>
+          </a:prstGeom>
+          <a:noFill/>
+        </p:spPr>
+        <p:txBody>
+          <a:bodyPr wrap="square" anchor="t">
+            <a:spAutoFit/>
+          </a:bodyPr>
+          <a:lstStyle/>
+          <a:p>
+            <a:pPr algn="l">
+              <a:spcBef>
+                <a:spcPts val="0"/>
+              </a:spcBef>
+              <a:spcAft>
+                <a:spcPts val="400"/>
+              </a:spcAft>
+            </a:pPr>
+            <a:r>
+              <a:rPr sz="1400" b="0">
                 <a:solidFill>
                   <a:srgbClr val="22313F"/>
                 </a:solidFill>
                 <a:latin typeface="Calibri"/>
               </a:rPr>
-              <a:t>Mid-game, new cash arrives — often at the scariest moment. Put it to work, or freeze? The same dilemma real investors face with a windfall.</a:t>
+              <a:t>On reveal, the big screen shows one number — the market's real move that month — with a plain-language read of what it meant.</a:t>
+            </a:r>
+          </a:p>
+        </p:txBody>
+      </p:sp>
+      <p:sp>
+        <p:nvSpPr>
+          <p:cNvPr id="8" name="TextBox 7"/>
+          <p:cNvSpPr txBox="1"/>
+          <p:nvPr/>
+        </p:nvSpPr>
+        <p:spPr>
+          <a:xfrm>
+            <a:off x="548640" y="4160520"/>
+            <a:ext cx="4343400" cy="292608"/>
+          </a:xfrm>
+          <a:prstGeom prst="rect">
+            <a:avLst/>
+          </a:prstGeom>
+          <a:noFill/>
+        </p:spPr>
+        <p:txBody>
+          <a:bodyPr wrap="square" anchor="t">
+            <a:spAutoFit/>
+          </a:bodyPr>
+          <a:lstStyle/>
+          <a:p>
+            <a:pPr algn="l">
+              <a:spcBef>
+                <a:spcPts val="0"/>
+              </a:spcBef>
+              <a:spcAft>
+                <a:spcPts val="400"/>
+              </a:spcAft>
+            </a:pPr>
+            <a:r>
+              <a:rPr sz="1050" b="1" spc="150">
+                <a:solidFill>
+                  <a:srgbClr val="831574"/>
+                </a:solidFill>
+                <a:latin typeface="Calibri"/>
+              </a:rPr>
+              <a:t>THE THINKING</a:t>
+            </a:r>
+          </a:p>
+        </p:txBody>
+      </p:sp>
+      <p:sp>
+        <p:nvSpPr>
+          <p:cNvPr id="9" name="TextBox 8"/>
+          <p:cNvSpPr txBox="1"/>
+          <p:nvPr/>
+        </p:nvSpPr>
+        <p:spPr>
+          <a:xfrm>
+            <a:off x="548640" y="4462272"/>
+            <a:ext cx="4343400" cy="1920240"/>
+          </a:xfrm>
+          <a:prstGeom prst="rect">
+            <a:avLst/>
+          </a:prstGeom>
+          <a:noFill/>
+        </p:spPr>
+        <p:txBody>
+          <a:bodyPr wrap="square" anchor="t">
+            <a:spAutoFit/>
+          </a:bodyPr>
+          <a:lstStyle/>
+          <a:p>
+            <a:pPr algn="l">
+              <a:spcBef>
+                <a:spcPts val="0"/>
+              </a:spcBef>
+              <a:spcAft>
+                <a:spcPts val="400"/>
+              </a:spcAft>
+            </a:pPr>
+            <a:r>
+              <a:rPr sz="1400" b="0">
+                <a:solidFill>
+                  <a:srgbClr val="22313F"/>
+                </a:solidFill>
+                <a:latin typeface="Calibri"/>
+              </a:rPr>
+              <a:t>The market's move is separated from the drama of the story, so the takeaway is the data itself, not the fear the headline created.</a:t>
             </a:r>
           </a:p>
         </p:txBody>
       </p:sp>
       <p:pic>
         <p:nvPicPr>
-          <p:cNvPr id="7" name="Picture 6" descr="phone-injection.png"/>
+          <p:cNvPr id="10" name="Picture 9" descr="host-reveal.png"/>
           <p:cNvPicPr>
             <a:picLocks noChangeAspect="1"/>
           </p:cNvPicPr>
@@ -7695,8 +9789,8 @@
         </p:blipFill>
         <p:spPr>
           <a:xfrm>
-            <a:off x="7282624" y="457200"/>
-            <a:ext cx="2808351" cy="5760720"/>
+            <a:off x="5074920" y="1285875"/>
+            <a:ext cx="6858000" cy="4286250"/>
           </a:xfrm>
           <a:prstGeom prst="rect">
             <a:avLst/>
@@ -7710,7 +9804,7 @@
       </p:pic>
       <p:sp>
         <p:nvSpPr>
-          <p:cNvPr id="8" name="Rectangle 7"/>
+          <p:cNvPr id="11" name="Rectangle 10"/>
           <p:cNvSpPr/>
           <p:nvPr/>
         </p:nvSpPr>
@@ -7754,7 +9848,7 @@
       </p:sp>
       <p:sp>
         <p:nvSpPr>
-          <p:cNvPr id="9" name="TextBox 8"/>
+          <p:cNvPr id="12" name="TextBox 11"/>
           <p:cNvSpPr txBox="1"/>
           <p:nvPr/>
         </p:nvSpPr>
@@ -7789,7 +9883,7 @@
                 </a:solidFill>
                 <a:latin typeface="Calibri"/>
               </a:rPr>
-              <a:t>THE LONG GAME · LIVE ROOM      ·      FOR INTERNAL USE ONLY · DO NOT DISSEMINATE</a:t>
+              <a:t>THE LONG GAME · LIVE ROOM      ·      HOW IT WORKS, AND WHY      ·      FOR INTERNAL USE ONLY</a:t>
             </a:r>
           </a:p>
         </p:txBody>
@@ -7864,8 +9958,8 @@
         </p:nvSpPr>
         <p:spPr>
           <a:xfrm>
-            <a:off x="548640" y="502920"/>
-            <a:ext cx="4206240" cy="365760"/>
+            <a:off x="548640" y="457200"/>
+            <a:ext cx="4343400" cy="365760"/>
           </a:xfrm>
           <a:prstGeom prst="rect">
             <a:avLst/>
@@ -7887,13 +9981,13 @@
               </a:spcAft>
             </a:pPr>
             <a:r>
-              <a:rPr sz="1200" b="1" spc="220">
+              <a:rPr sz="1200" b="1" spc="200">
                 <a:solidFill>
                   <a:srgbClr val="008074"/>
                 </a:solidFill>
                 <a:latin typeface="Calibri"/>
               </a:rPr>
-              <a:t>THE HOOK</a:t>
+              <a:t>MOMENT 3 · ITS OWN SCREEN</a:t>
             </a:r>
           </a:p>
         </p:txBody>
@@ -7906,8 +10000,8 @@
         </p:nvSpPr>
         <p:spPr>
           <a:xfrm>
-            <a:off x="548640" y="868680"/>
-            <a:ext cx="4297680" cy="1828800"/>
+            <a:off x="548640" y="804672"/>
+            <a:ext cx="4343400" cy="1097280"/>
           </a:xfrm>
           <a:prstGeom prst="rect">
             <a:avLst/>
@@ -7929,13 +10023,13 @@
               </a:spcAft>
             </a:pPr>
             <a:r>
-              <a:rPr sz="3200" b="1">
+              <a:rPr sz="2700" b="1">
                 <a:solidFill>
                   <a:srgbClr val="083469"/>
                 </a:solidFill>
                 <a:latin typeface="Calibri"/>
               </a:rPr>
-              <a:t>Who's ahead — live</a:t>
+              <a:t>The cash windfall</a:t>
             </a:r>
           </a:p>
         </p:txBody>
@@ -7948,8 +10042,8 @@
         </p:nvSpPr>
         <p:spPr>
           <a:xfrm>
-            <a:off x="548640" y="1965960"/>
-            <a:ext cx="822960" cy="50800"/>
+            <a:off x="548640" y="1874519"/>
+            <a:ext cx="777240" cy="50800"/>
           </a:xfrm>
           <a:prstGeom prst="rect">
             <a:avLst/>
@@ -7992,8 +10086,8 @@
         </p:nvSpPr>
         <p:spPr>
           <a:xfrm>
-            <a:off x="548640" y="2240280"/>
-            <a:ext cx="4297680" cy="2377440"/>
+            <a:off x="548640" y="2148840"/>
+            <a:ext cx="4343400" cy="292608"/>
           </a:xfrm>
           <a:prstGeom prst="rect">
             <a:avLst/>
@@ -8015,20 +10109,146 @@
               </a:spcAft>
             </a:pPr>
             <a:r>
-              <a:rPr sz="1700" b="0">
+              <a:rPr sz="1050" b="1" spc="150">
+                <a:solidFill>
+                  <a:srgbClr val="008074"/>
+                </a:solidFill>
+                <a:latin typeface="Calibri"/>
+              </a:rPr>
+              <a:t>WHAT HAPPENS</a:t>
+            </a:r>
+          </a:p>
+        </p:txBody>
+      </p:sp>
+      <p:sp>
+        <p:nvSpPr>
+          <p:cNvPr id="7" name="TextBox 6"/>
+          <p:cNvSpPr txBox="1"/>
+          <p:nvPr/>
+        </p:nvSpPr>
+        <p:spPr>
+          <a:xfrm>
+            <a:off x="548640" y="2450592"/>
+            <a:ext cx="4343400" cy="1828800"/>
+          </a:xfrm>
+          <a:prstGeom prst="rect">
+            <a:avLst/>
+          </a:prstGeom>
+          <a:noFill/>
+        </p:spPr>
+        <p:txBody>
+          <a:bodyPr wrap="square" anchor="t">
+            <a:spAutoFit/>
+          </a:bodyPr>
+          <a:lstStyle/>
+          <a:p>
+            <a:pPr algn="l">
+              <a:spcBef>
+                <a:spcPts val="0"/>
+              </a:spcBef>
+              <a:spcAft>
+                <a:spcPts val="400"/>
+              </a:spcAft>
+            </a:pPr>
+            <a:r>
+              <a:rPr sz="1400" b="0">
                 <a:solidFill>
                   <a:srgbClr val="22313F"/>
                 </a:solidFill>
                 <a:latin typeface="Calibri"/>
               </a:rPr>
-              <a:t>Twice mid-game, a leaderboard shows every player against what they put in. Nothing drives a room like watching the pack pull ahead.</a:t>
+              <a:t>Partway through, a cash bonus lands in every portfolio — as cash, announced on its own screen before the moment continues.</a:t>
+            </a:r>
+          </a:p>
+        </p:txBody>
+      </p:sp>
+      <p:sp>
+        <p:nvSpPr>
+          <p:cNvPr id="8" name="TextBox 7"/>
+          <p:cNvSpPr txBox="1"/>
+          <p:nvPr/>
+        </p:nvSpPr>
+        <p:spPr>
+          <a:xfrm>
+            <a:off x="548640" y="4160520"/>
+            <a:ext cx="4343400" cy="292608"/>
+          </a:xfrm>
+          <a:prstGeom prst="rect">
+            <a:avLst/>
+          </a:prstGeom>
+          <a:noFill/>
+        </p:spPr>
+        <p:txBody>
+          <a:bodyPr wrap="square" anchor="t">
+            <a:spAutoFit/>
+          </a:bodyPr>
+          <a:lstStyle/>
+          <a:p>
+            <a:pPr algn="l">
+              <a:spcBef>
+                <a:spcPts val="0"/>
+              </a:spcBef>
+              <a:spcAft>
+                <a:spcPts val="400"/>
+              </a:spcAft>
+            </a:pPr>
+            <a:r>
+              <a:rPr sz="1050" b="1" spc="150">
+                <a:solidFill>
+                  <a:srgbClr val="831574"/>
+                </a:solidFill>
+                <a:latin typeface="Calibri"/>
+              </a:rPr>
+              <a:t>THE THINKING</a:t>
+            </a:r>
+          </a:p>
+        </p:txBody>
+      </p:sp>
+      <p:sp>
+        <p:nvSpPr>
+          <p:cNvPr id="9" name="TextBox 8"/>
+          <p:cNvSpPr txBox="1"/>
+          <p:nvPr/>
+        </p:nvSpPr>
+        <p:spPr>
+          <a:xfrm>
+            <a:off x="548640" y="4462272"/>
+            <a:ext cx="4343400" cy="1920240"/>
+          </a:xfrm>
+          <a:prstGeom prst="rect">
+            <a:avLst/>
+          </a:prstGeom>
+          <a:noFill/>
+        </p:spPr>
+        <p:txBody>
+          <a:bodyPr wrap="square" anchor="t">
+            <a:spAutoFit/>
+          </a:bodyPr>
+          <a:lstStyle/>
+          <a:p>
+            <a:pPr algn="l">
+              <a:spcBef>
+                <a:spcPts val="0"/>
+              </a:spcBef>
+              <a:spcAft>
+                <a:spcPts val="400"/>
+              </a:spcAft>
+            </a:pPr>
+            <a:r>
+              <a:rPr sz="1400" b="0">
+                <a:solidFill>
+                  <a:srgbClr val="22313F"/>
+                </a:solidFill>
+                <a:latin typeface="Calibri"/>
+              </a:rPr>
+              <a:t>New money often arrives at unsettling times. Deploying it or leaving it idle is a real decision, and idle cash is measured against putting it to work.</a:t>
             </a:r>
           </a:p>
         </p:txBody>
       </p:sp>
       <p:pic>
         <p:nvPicPr>
-          <p:cNvPr id="7" name="Picture 6" descr="host-check.png"/>
+          <p:cNvPr id="10" name="Picture 9" descr="phone-injection.png"/>
           <p:cNvPicPr>
             <a:picLocks noChangeAspect="1"/>
           </p:cNvPicPr>
@@ -8042,8 +10262,8 @@
         </p:blipFill>
         <p:spPr>
           <a:xfrm>
-            <a:off x="5029200" y="1194435"/>
-            <a:ext cx="6858000" cy="4286250"/>
+            <a:off x="7488936" y="457200"/>
+            <a:ext cx="2852928" cy="5852160"/>
           </a:xfrm>
           <a:prstGeom prst="rect">
             <a:avLst/>
@@ -8057,7 +10277,7 @@
       </p:pic>
       <p:sp>
         <p:nvSpPr>
-          <p:cNvPr id="8" name="Rectangle 7"/>
+          <p:cNvPr id="11" name="Rectangle 10"/>
           <p:cNvSpPr/>
           <p:nvPr/>
         </p:nvSpPr>
@@ -8101,7 +10321,7 @@
       </p:sp>
       <p:sp>
         <p:nvSpPr>
-          <p:cNvPr id="9" name="TextBox 8"/>
+          <p:cNvPr id="12" name="TextBox 11"/>
           <p:cNvSpPr txBox="1"/>
           <p:nvPr/>
         </p:nvSpPr>
@@ -8136,7 +10356,7 @@
                 </a:solidFill>
                 <a:latin typeface="Calibri"/>
               </a:rPr>
-              <a:t>THE LONG GAME · LIVE ROOM      ·      FOR INTERNAL USE ONLY · DO NOT DISSEMINATE</a:t>
+              <a:t>THE LONG GAME · LIVE ROOM      ·      HOW IT WORKS, AND WHY      ·      FOR INTERNAL USE ONLY</a:t>
             </a:r>
           </a:p>
         </p:txBody>
@@ -8211,8 +10431,8 @@
         </p:nvSpPr>
         <p:spPr>
           <a:xfrm>
-            <a:off x="548640" y="502920"/>
-            <a:ext cx="4206240" cy="365760"/>
+            <a:off x="548640" y="457200"/>
+            <a:ext cx="4343400" cy="365760"/>
           </a:xfrm>
           <a:prstGeom prst="rect">
             <a:avLst/>
@@ -8234,13 +10454,13 @@
               </a:spcAft>
             </a:pPr>
             <a:r>
-              <a:rPr sz="1200" b="1" spc="220">
+              <a:rPr sz="1200" b="1" spc="200">
                 <a:solidFill>
                   <a:srgbClr val="008074"/>
                 </a:solidFill>
                 <a:latin typeface="Calibri"/>
               </a:rPr>
-              <a:t>ON EVERY PHONE</a:t>
+              <a:t>AFTER MOMENTS 2 &amp; 4</a:t>
             </a:r>
           </a:p>
         </p:txBody>
@@ -8253,8 +10473,8 @@
         </p:nvSpPr>
         <p:spPr>
           <a:xfrm>
-            <a:off x="548640" y="868680"/>
-            <a:ext cx="4297680" cy="1828800"/>
+            <a:off x="548640" y="804672"/>
+            <a:ext cx="4343400" cy="1097280"/>
           </a:xfrm>
           <a:prstGeom prst="rect">
             <a:avLst/>
@@ -8276,13 +10496,13 @@
               </a:spcAft>
             </a:pPr>
             <a:r>
-              <a:rPr sz="3200" b="1">
+              <a:rPr sz="2700" b="1">
                 <a:solidFill>
                   <a:srgbClr val="083469"/>
                 </a:solidFill>
                 <a:latin typeface="Calibri"/>
               </a:rPr>
-              <a:t>Your rank, personally</a:t>
+              <a:t>The performance check</a:t>
             </a:r>
           </a:p>
         </p:txBody>
@@ -8295,8 +10515,8 @@
         </p:nvSpPr>
         <p:spPr>
           <a:xfrm>
-            <a:off x="548640" y="1965960"/>
-            <a:ext cx="822960" cy="50800"/>
+            <a:off x="548640" y="1874519"/>
+            <a:ext cx="777240" cy="50800"/>
           </a:xfrm>
           <a:prstGeom prst="rect">
             <a:avLst/>
@@ -8339,8 +10559,8 @@
         </p:nvSpPr>
         <p:spPr>
           <a:xfrm>
-            <a:off x="548640" y="2240280"/>
-            <a:ext cx="4297680" cy="2377440"/>
+            <a:off x="548640" y="2148840"/>
+            <a:ext cx="4343400" cy="292608"/>
           </a:xfrm>
           <a:prstGeom prst="rect">
             <a:avLst/>
@@ -8362,20 +10582,146 @@
               </a:spcAft>
             </a:pPr>
             <a:r>
-              <a:rPr sz="1700" b="0">
+              <a:rPr sz="1050" b="1" spc="150">
+                <a:solidFill>
+                  <a:srgbClr val="008074"/>
+                </a:solidFill>
+                <a:latin typeface="Calibri"/>
+              </a:rPr>
+              <a:t>WHAT HAPPENS</a:t>
+            </a:r>
+          </a:p>
+        </p:txBody>
+      </p:sp>
+      <p:sp>
+        <p:nvSpPr>
+          <p:cNvPr id="7" name="TextBox 6"/>
+          <p:cNvSpPr txBox="1"/>
+          <p:nvPr/>
+        </p:nvSpPr>
+        <p:spPr>
+          <a:xfrm>
+            <a:off x="548640" y="2450592"/>
+            <a:ext cx="4343400" cy="1828800"/>
+          </a:xfrm>
+          <a:prstGeom prst="rect">
+            <a:avLst/>
+          </a:prstGeom>
+          <a:noFill/>
+        </p:spPr>
+        <p:txBody>
+          <a:bodyPr wrap="square" anchor="t">
+            <a:spAutoFit/>
+          </a:bodyPr>
+          <a:lstStyle/>
+          <a:p>
+            <a:pPr algn="l">
+              <a:spcBef>
+                <a:spcPts val="0"/>
+              </a:spcBef>
+              <a:spcAft>
+                <a:spcPts val="400"/>
+              </a:spcAft>
+            </a:pPr>
+            <a:r>
+              <a:rPr sz="1400" b="0">
                 <a:solidFill>
                   <a:srgbClr val="22313F"/>
                 </a:solidFill>
                 <a:latin typeface="Calibri"/>
               </a:rPr>
-              <a:t>Public chart on the wall; a private '#4 of 12' in your hand. The sting that makes the lesson land.</a:t>
+              <a:t>A live leaderboard shows every player against what they put in. At the same time, each phone shows that player their own rank.</a:t>
+            </a:r>
+          </a:p>
+        </p:txBody>
+      </p:sp>
+      <p:sp>
+        <p:nvSpPr>
+          <p:cNvPr id="8" name="TextBox 7"/>
+          <p:cNvSpPr txBox="1"/>
+          <p:nvPr/>
+        </p:nvSpPr>
+        <p:spPr>
+          <a:xfrm>
+            <a:off x="548640" y="4160520"/>
+            <a:ext cx="4343400" cy="292608"/>
+          </a:xfrm>
+          <a:prstGeom prst="rect">
+            <a:avLst/>
+          </a:prstGeom>
+          <a:noFill/>
+        </p:spPr>
+        <p:txBody>
+          <a:bodyPr wrap="square" anchor="t">
+            <a:spAutoFit/>
+          </a:bodyPr>
+          <a:lstStyle/>
+          <a:p>
+            <a:pPr algn="l">
+              <a:spcBef>
+                <a:spcPts val="0"/>
+              </a:spcBef>
+              <a:spcAft>
+                <a:spcPts val="400"/>
+              </a:spcAft>
+            </a:pPr>
+            <a:r>
+              <a:rPr sz="1050" b="1" spc="150">
+                <a:solidFill>
+                  <a:srgbClr val="831574"/>
+                </a:solidFill>
+                <a:latin typeface="Calibri"/>
+              </a:rPr>
+              <a:t>THE THINKING</a:t>
+            </a:r>
+          </a:p>
+        </p:txBody>
+      </p:sp>
+      <p:sp>
+        <p:nvSpPr>
+          <p:cNvPr id="9" name="TextBox 8"/>
+          <p:cNvSpPr txBox="1"/>
+          <p:nvPr/>
+        </p:nvSpPr>
+        <p:spPr>
+          <a:xfrm>
+            <a:off x="548640" y="4462272"/>
+            <a:ext cx="4343400" cy="1920240"/>
+          </a:xfrm>
+          <a:prstGeom prst="rect">
+            <a:avLst/>
+          </a:prstGeom>
+          <a:noFill/>
+        </p:spPr>
+        <p:txBody>
+          <a:bodyPr wrap="square" anchor="t">
+            <a:spAutoFit/>
+          </a:bodyPr>
+          <a:lstStyle/>
+          <a:p>
+            <a:pPr algn="l">
+              <a:spcBef>
+                <a:spcPts val="0"/>
+              </a:spcBef>
+              <a:spcAft>
+                <a:spcPts val="400"/>
+              </a:spcAft>
+            </a:pPr>
+            <a:r>
+              <a:rPr sz="1400" b="0">
+                <a:solidFill>
+                  <a:srgbClr val="22313F"/>
+                </a:solidFill>
+                <a:latin typeface="Calibri"/>
+              </a:rPr>
+              <a:t>A mid-game standing keeps the room engaged and makes the final lesson personal — you were in it, and this is where you stood.</a:t>
             </a:r>
           </a:p>
         </p:txBody>
       </p:sp>
       <p:pic>
         <p:nvPicPr>
-          <p:cNvPr id="7" name="Picture 6" descr="phone-rank.png"/>
+          <p:cNvPr id="10" name="Picture 9" descr="host-check.png"/>
           <p:cNvPicPr>
             <a:picLocks noChangeAspect="1"/>
           </p:cNvPicPr>
@@ -8389,8 +10735,8 @@
         </p:blipFill>
         <p:spPr>
           <a:xfrm>
-            <a:off x="7282624" y="457200"/>
-            <a:ext cx="2808351" cy="5760720"/>
+            <a:off x="5074920" y="1285875"/>
+            <a:ext cx="6858000" cy="4286250"/>
           </a:xfrm>
           <a:prstGeom prst="rect">
             <a:avLst/>
@@ -8404,7 +10750,7 @@
       </p:pic>
       <p:sp>
         <p:nvSpPr>
-          <p:cNvPr id="8" name="Rectangle 7"/>
+          <p:cNvPr id="11" name="Rectangle 10"/>
           <p:cNvSpPr/>
           <p:nvPr/>
         </p:nvSpPr>
@@ -8448,7 +10794,7 @@
       </p:sp>
       <p:sp>
         <p:nvSpPr>
-          <p:cNvPr id="9" name="TextBox 8"/>
+          <p:cNvPr id="12" name="TextBox 11"/>
           <p:cNvSpPr txBox="1"/>
           <p:nvPr/>
         </p:nvSpPr>
@@ -8483,7 +10829,7 @@
                 </a:solidFill>
                 <a:latin typeface="Calibri"/>
               </a:rPr>
-              <a:t>THE LONG GAME · LIVE ROOM      ·      FOR INTERNAL USE ONLY · DO NOT DISSEMINATE</a:t>
+              <a:t>THE LONG GAME · LIVE ROOM      ·      HOW IT WORKS, AND WHY      ·      FOR INTERNAL USE ONLY</a:t>
             </a:r>
           </a:p>
         </p:txBody>

--- a/consultant-materials/The-Long-Game-Live-Walkthrough.pptx
+++ b/consultant-materials/The-Long-Game-Live-Walkthrough.pptx
@@ -3153,8 +3153,8 @@
         </p:nvSpPr>
         <p:spPr>
           <a:xfrm>
-            <a:off x="0" y="6355080"/>
-            <a:ext cx="12191695" cy="164592"/>
+            <a:off x="0" y="6400800"/>
+            <a:ext cx="12191695" cy="146304"/>
           </a:xfrm>
           <a:prstGeom prst="rect">
             <a:avLst/>
@@ -3197,7 +3197,7 @@
         </p:nvSpPr>
         <p:spPr>
           <a:xfrm>
-            <a:off x="822960" y="1325880"/>
+            <a:off x="868680" y="1371600"/>
             <a:ext cx="10058400" cy="457200"/>
           </a:xfrm>
           <a:prstGeom prst="rect">
@@ -3239,7 +3239,7 @@
         </p:nvSpPr>
         <p:spPr>
           <a:xfrm>
-            <a:off x="777240" y="1874519"/>
+            <a:off x="822960" y="1920240"/>
             <a:ext cx="10515600" cy="1280160"/>
           </a:xfrm>
           <a:prstGeom prst="rect">
@@ -3281,8 +3281,8 @@
         </p:nvSpPr>
         <p:spPr>
           <a:xfrm>
-            <a:off x="822960" y="3246120"/>
-            <a:ext cx="10058400" cy="822960"/>
+            <a:off x="868680" y="3291840"/>
+            <a:ext cx="10058400" cy="914400"/>
           </a:xfrm>
           <a:prstGeom prst="rect">
             <a:avLst/>
@@ -3310,8 +3310,26 @@
                 </a:solidFill>
                 <a:latin typeface="Calibri"/>
               </a:rPr>
-              <a:t>A walkthrough for consultants — how each screen works,
-and the thinking behind it.</a:t>
+              <a:t>A walkthrough for consultants — how each screen works,</a:t>
+            </a:r>
+          </a:p>
+          <a:p>
+            <a:pPr algn="l">
+              <a:spcBef>
+                <a:spcPts val="0"/>
+              </a:spcBef>
+              <a:spcAft>
+                <a:spcPts val="400"/>
+              </a:spcAft>
+            </a:pPr>
+            <a:r>
+              <a:rPr sz="2000" b="0">
+                <a:solidFill>
+                  <a:srgbClr val="CFE0F2"/>
+                </a:solidFill>
+                <a:latin typeface="Calibri"/>
+              </a:rPr>
+              <a:t>and the thinking behind it.</a:t>
             </a:r>
           </a:p>
         </p:txBody>
@@ -3324,7 +3342,7 @@
         </p:nvSpPr>
         <p:spPr>
           <a:xfrm>
-            <a:off x="822960" y="6035040"/>
+            <a:off x="868680" y="5989320"/>
             <a:ext cx="10058400" cy="365760"/>
           </a:xfrm>
           <a:prstGeom prst="rect">
@@ -3428,8 +3446,8 @@
         </p:nvSpPr>
         <p:spPr>
           <a:xfrm>
-            <a:off x="548640" y="457200"/>
-            <a:ext cx="4343400" cy="365760"/>
+            <a:off x="640080" y="566928"/>
+            <a:ext cx="4892040" cy="365760"/>
           </a:xfrm>
           <a:prstGeom prst="rect">
             <a:avLst/>
@@ -3451,7 +3469,7 @@
               </a:spcAft>
             </a:pPr>
             <a:r>
-              <a:rPr sz="1200" b="1" spc="200">
+              <a:rPr sz="1150" b="1" spc="180">
                 <a:solidFill>
                   <a:srgbClr val="008074"/>
                 </a:solidFill>
@@ -3470,8 +3488,97 @@
         </p:nvSpPr>
         <p:spPr>
           <a:xfrm>
-            <a:off x="548640" y="804672"/>
-            <a:ext cx="4343400" cy="1097280"/>
+            <a:off x="640080" y="914400"/>
+            <a:ext cx="4892040" cy="1005840"/>
+          </a:xfrm>
+          <a:prstGeom prst="rect">
+            <a:avLst/>
+          </a:prstGeom>
+          <a:noFill/>
+        </p:spPr>
+        <p:txBody>
+          <a:bodyPr wrap="square" anchor="t">
+            <a:spAutoFit/>
+          </a:bodyPr>
+          <a:lstStyle/>
+          <a:p>
+            <a:pPr algn="l">
+              <a:lnSpc>
+                <a:spcPct val="102000"/>
+              </a:lnSpc>
+              <a:spcBef>
+                <a:spcPts val="0"/>
+              </a:spcBef>
+              <a:spcAft>
+                <a:spcPts val="400"/>
+              </a:spcAft>
+            </a:pPr>
+            <a:r>
+              <a:rPr sz="2600" b="1">
+                <a:solidFill>
+                  <a:srgbClr val="083469"/>
+                </a:solidFill>
+                <a:latin typeface="Calibri"/>
+              </a:rPr>
+              <a:t>The two lines</a:t>
+            </a:r>
+          </a:p>
+        </p:txBody>
+      </p:sp>
+      <p:sp>
+        <p:nvSpPr>
+          <p:cNvPr id="5" name="Rectangle 4"/>
+          <p:cNvSpPr/>
+          <p:nvPr/>
+        </p:nvSpPr>
+        <p:spPr>
+          <a:xfrm>
+            <a:off x="640080" y="1847088"/>
+            <a:ext cx="731520" cy="50800"/>
+          </a:xfrm>
+          <a:prstGeom prst="rect">
+            <a:avLst/>
+          </a:prstGeom>
+          <a:solidFill>
+            <a:srgbClr val="00D190"/>
+          </a:solidFill>
+          <a:ln>
+            <a:noFill/>
+          </a:ln>
+          <a:effectLst/>
+        </p:spPr>
+        <p:style>
+          <a:lnRef idx="1">
+            <a:schemeClr val="accent1"/>
+          </a:lnRef>
+          <a:fillRef idx="3">
+            <a:schemeClr val="accent1"/>
+          </a:fillRef>
+          <a:effectRef idx="2">
+            <a:schemeClr val="accent1"/>
+          </a:effectRef>
+          <a:fontRef idx="minor">
+            <a:schemeClr val="lt1"/>
+          </a:fontRef>
+        </p:style>
+        <p:txBody>
+          <a:bodyPr rtlCol="0" anchor="ctr"/>
+          <a:lstStyle/>
+          <a:p>
+            <a:pPr algn="ctr"/>
+          </a:p>
+        </p:txBody>
+      </p:sp>
+      <p:sp>
+        <p:nvSpPr>
+          <p:cNvPr id="6" name="TextBox 5"/>
+          <p:cNvSpPr txBox="1"/>
+          <p:nvPr/>
+        </p:nvSpPr>
+        <p:spPr>
+          <a:xfrm>
+            <a:off x="640080" y="2121408"/>
+            <a:ext cx="4892040" cy="274320"/>
           </a:xfrm>
           <a:prstGeom prst="rect">
             <a:avLst/>
@@ -3493,71 +3600,72 @@
               </a:spcAft>
             </a:pPr>
             <a:r>
-              <a:rPr sz="2700" b="1">
-                <a:solidFill>
-                  <a:srgbClr val="083469"/>
+              <a:rPr sz="1000" b="1" spc="140">
+                <a:solidFill>
+                  <a:srgbClr val="008074"/>
                 </a:solidFill>
                 <a:latin typeface="Calibri"/>
               </a:rPr>
-              <a:t>The two lines</a:t>
-            </a:r>
-          </a:p>
-        </p:txBody>
-      </p:sp>
-      <p:sp>
-        <p:nvSpPr>
-          <p:cNvPr id="5" name="Rectangle 4"/>
-          <p:cNvSpPr/>
-          <p:nvPr/>
-        </p:nvSpPr>
-        <p:spPr>
-          <a:xfrm>
-            <a:off x="548640" y="1874519"/>
-            <a:ext cx="777240" cy="50800"/>
-          </a:xfrm>
-          <a:prstGeom prst="rect">
-            <a:avLst/>
-          </a:prstGeom>
-          <a:solidFill>
-            <a:srgbClr val="00D190"/>
-          </a:solidFill>
-          <a:ln>
-            <a:noFill/>
-          </a:ln>
-          <a:effectLst/>
-        </p:spPr>
-        <p:style>
-          <a:lnRef idx="1">
-            <a:schemeClr val="accent1"/>
-          </a:lnRef>
-          <a:fillRef idx="3">
-            <a:schemeClr val="accent1"/>
-          </a:fillRef>
-          <a:effectRef idx="2">
-            <a:schemeClr val="accent1"/>
-          </a:effectRef>
-          <a:fontRef idx="minor">
-            <a:schemeClr val="lt1"/>
-          </a:fontRef>
-        </p:style>
-        <p:txBody>
-          <a:bodyPr rtlCol="0" anchor="ctr"/>
-          <a:lstStyle/>
-          <a:p>
-            <a:pPr algn="ctr"/>
-          </a:p>
-        </p:txBody>
-      </p:sp>
-      <p:sp>
-        <p:nvSpPr>
-          <p:cNvPr id="6" name="TextBox 5"/>
+              <a:t>WHAT HAPPENS</a:t>
+            </a:r>
+          </a:p>
+        </p:txBody>
+      </p:sp>
+      <p:sp>
+        <p:nvSpPr>
+          <p:cNvPr id="7" name="TextBox 6"/>
           <p:cNvSpPr txBox="1"/>
           <p:nvPr/>
         </p:nvSpPr>
         <p:spPr>
           <a:xfrm>
-            <a:off x="548640" y="2148840"/>
-            <a:ext cx="4343400" cy="292608"/>
+            <a:off x="640080" y="2414016"/>
+            <a:ext cx="4892040" cy="1828800"/>
+          </a:xfrm>
+          <a:prstGeom prst="rect">
+            <a:avLst/>
+          </a:prstGeom>
+          <a:noFill/>
+        </p:spPr>
+        <p:txBody>
+          <a:bodyPr wrap="square" anchor="t">
+            <a:spAutoFit/>
+          </a:bodyPr>
+          <a:lstStyle/>
+          <a:p>
+            <a:pPr algn="l">
+              <a:lnSpc>
+                <a:spcPct val="112000"/>
+              </a:lnSpc>
+              <a:spcBef>
+                <a:spcPts val="0"/>
+              </a:spcBef>
+              <a:spcAft>
+                <a:spcPts val="400"/>
+              </a:spcAft>
+            </a:pPr>
+            <a:r>
+              <a:rPr sz="1350" b="0">
+                <a:solidFill>
+                  <a:srgbClr val="22313F"/>
+                </a:solidFill>
+                <a:latin typeface="Calibri"/>
+              </a:rPr>
+              <a:t>Teal “Your choices” is the path your Buy / Hold / Sell timing produced. Navy “Stayed invested” is the whole amount put in on day one and never touched. Markers show where you acted.</a:t>
+            </a:r>
+          </a:p>
+        </p:txBody>
+      </p:sp>
+      <p:sp>
+        <p:nvSpPr>
+          <p:cNvPr id="8" name="TextBox 7"/>
+          <p:cNvSpPr txBox="1"/>
+          <p:nvPr/>
+        </p:nvSpPr>
+        <p:spPr>
+          <a:xfrm>
+            <a:off x="640080" y="4224528"/>
+            <a:ext cx="4892040" cy="274320"/>
           </a:xfrm>
           <a:prstGeom prst="rect">
             <a:avLst/>
@@ -3579,27 +3687,27 @@
               </a:spcAft>
             </a:pPr>
             <a:r>
-              <a:rPr sz="1050" b="1" spc="150">
-                <a:solidFill>
-                  <a:srgbClr val="008074"/>
+              <a:rPr sz="1000" b="1" spc="140">
+                <a:solidFill>
+                  <a:srgbClr val="831574"/>
                 </a:solidFill>
                 <a:latin typeface="Calibri"/>
               </a:rPr>
-              <a:t>WHAT HAPPENS</a:t>
-            </a:r>
-          </a:p>
-        </p:txBody>
-      </p:sp>
-      <p:sp>
-        <p:nvSpPr>
-          <p:cNvPr id="7" name="TextBox 6"/>
+              <a:t>THE THINKING</a:t>
+            </a:r>
+          </a:p>
+        </p:txBody>
+      </p:sp>
+      <p:sp>
+        <p:nvSpPr>
+          <p:cNvPr id="9" name="TextBox 8"/>
           <p:cNvSpPr txBox="1"/>
           <p:nvPr/>
         </p:nvSpPr>
         <p:spPr>
           <a:xfrm>
-            <a:off x="548640" y="2450592"/>
-            <a:ext cx="4343400" cy="1828800"/>
+            <a:off x="640080" y="4517136"/>
+            <a:ext cx="4892040" cy="1828800"/>
           </a:xfrm>
           <a:prstGeom prst="rect">
             <a:avLst/>
@@ -3613,6 +3721,9 @@
           <a:lstStyle/>
           <a:p>
             <a:pPr algn="l">
+              <a:lnSpc>
+                <a:spcPct val="112000"/>
+              </a:lnSpc>
               <a:spcBef>
                 <a:spcPts val="0"/>
               </a:spcBef>
@@ -3621,104 +3732,66 @@
               </a:spcAft>
             </a:pPr>
             <a:r>
-              <a:rPr sz="1400" b="0">
+              <a:rPr sz="1350" b="0">
                 <a:solidFill>
                   <a:srgbClr val="22313F"/>
                 </a:solidFill>
                 <a:latin typeface="Calibri"/>
               </a:rPr>
-              <a:t>Each player's own chart. Teal “Your choices” is the path your Buy/Hold/Sell timing produced. Navy “Stayed invested” is the whole amount put in on day one and never touched. Markers show where you acted.</a:t>
-            </a:r>
-          </a:p>
-        </p:txBody>
-      </p:sp>
-      <p:sp>
-        <p:nvSpPr>
-          <p:cNvPr id="8" name="TextBox 7"/>
-          <p:cNvSpPr txBox="1"/>
-          <p:nvPr/>
-        </p:nvSpPr>
-        <p:spPr>
-          <a:xfrm>
-            <a:off x="548640" y="4160520"/>
-            <a:ext cx="4343400" cy="292608"/>
-          </a:xfrm>
-          <a:prstGeom prst="rect">
-            <a:avLst/>
-          </a:prstGeom>
-          <a:noFill/>
-        </p:spPr>
-        <p:txBody>
-          <a:bodyPr wrap="square" anchor="t">
-            <a:spAutoFit/>
-          </a:bodyPr>
-          <a:lstStyle/>
-          <a:p>
-            <a:pPr algn="l">
-              <a:spcBef>
-                <a:spcPts val="0"/>
-              </a:spcBef>
-              <a:spcAft>
-                <a:spcPts val="400"/>
-              </a:spcAft>
-            </a:pPr>
-            <a:r>
-              <a:rPr sz="1050" b="1" spc="150">
-                <a:solidFill>
-                  <a:srgbClr val="831574"/>
-                </a:solidFill>
-                <a:latin typeface="Calibri"/>
-              </a:rPr>
-              <a:t>THE THINKING</a:t>
-            </a:r>
-          </a:p>
-        </p:txBody>
-      </p:sp>
-      <p:sp>
-        <p:nvSpPr>
-          <p:cNvPr id="9" name="TextBox 8"/>
-          <p:cNvSpPr txBox="1"/>
-          <p:nvPr/>
-        </p:nvSpPr>
-        <p:spPr>
-          <a:xfrm>
-            <a:off x="548640" y="4462272"/>
-            <a:ext cx="4343400" cy="1920240"/>
-          </a:xfrm>
-          <a:prstGeom prst="rect">
-            <a:avLst/>
-          </a:prstGeom>
-          <a:noFill/>
-        </p:spPr>
-        <p:txBody>
-          <a:bodyPr wrap="square" anchor="t">
-            <a:spAutoFit/>
-          </a:bodyPr>
-          <a:lstStyle/>
-          <a:p>
-            <a:pPr algn="l">
-              <a:spcBef>
-                <a:spcPts val="0"/>
-              </a:spcBef>
-              <a:spcAft>
-                <a:spcPts val="400"/>
-              </a:spcAft>
-            </a:pPr>
-            <a:r>
-              <a:rPr sz="1400" b="0">
-                <a:solidFill>
-                  <a:srgbClr val="22313F"/>
-                </a:solidFill>
-                <a:latin typeface="Calibri"/>
-              </a:rPr>
-              <a:t>The gap between the two lines is the whole point — what reacting cost, or (rarely) gained, versus simply holding on. The card states it in dollars and percent. (The Sales edition adds a third line: the fund itself.)</a:t>
-            </a:r>
+              <a:t>The gap between the two lines is the whole point — what reacting cost, or (rarely) gained, versus simply holding on. The card states it in dollars and percent. (The Sales edition adds a third line: the fund.)</a:t>
+            </a:r>
+          </a:p>
+        </p:txBody>
+      </p:sp>
+      <p:sp>
+        <p:nvSpPr>
+          <p:cNvPr id="10" name="Rounded Rectangle 9"/>
+          <p:cNvSpPr/>
+          <p:nvPr/>
+        </p:nvSpPr>
+        <p:spPr>
+          <a:xfrm>
+            <a:off x="7611826" y="365760"/>
+            <a:ext cx="2469987" cy="6071616"/>
+          </a:xfrm>
+          <a:prstGeom prst="roundRect">
+            <a:avLst>
+              <a:gd name="adj" fmla="val 3500"/>
+            </a:avLst>
+          </a:prstGeom>
+          <a:solidFill>
+            <a:srgbClr val="EEF3F6"/>
+          </a:solidFill>
+          <a:ln>
+            <a:noFill/>
+          </a:ln>
+          <a:effectLst/>
+        </p:spPr>
+        <p:style>
+          <a:lnRef idx="1">
+            <a:schemeClr val="accent1"/>
+          </a:lnRef>
+          <a:fillRef idx="3">
+            <a:schemeClr val="accent1"/>
+          </a:fillRef>
+          <a:effectRef idx="2">
+            <a:schemeClr val="accent1"/>
+          </a:effectRef>
+          <a:fontRef idx="minor">
+            <a:schemeClr val="lt1"/>
+          </a:fontRef>
+        </p:style>
+        <p:txBody>
+          <a:bodyPr rtlCol="0" anchor="ctr"/>
+          <a:lstStyle/>
+          <a:p>
+            <a:pPr algn="ctr"/>
           </a:p>
         </p:txBody>
       </p:sp>
       <p:pic>
         <p:nvPicPr>
-          <p:cNvPr id="10" name="Picture 9" descr="phone-reveal.png"/>
+          <p:cNvPr id="11" name="Picture 10" descr="phone-reveal.png"/>
           <p:cNvPicPr>
             <a:picLocks noChangeAspect="1"/>
           </p:cNvPicPr>
@@ -3732,29 +3805,29 @@
         </p:blipFill>
         <p:spPr>
           <a:xfrm>
-            <a:off x="7858760" y="457200"/>
-            <a:ext cx="2113280" cy="5852160"/>
+            <a:off x="7812994" y="566928"/>
+            <a:ext cx="2067651" cy="5669280"/>
           </a:xfrm>
           <a:prstGeom prst="rect">
             <a:avLst/>
           </a:prstGeom>
           <a:ln w="9525">
             <a:solidFill>
-              <a:srgbClr val="DBE4EA"/>
+              <a:srgbClr val="D5DFE6"/>
             </a:solidFill>
           </a:ln>
         </p:spPr>
       </p:pic>
       <p:sp>
         <p:nvSpPr>
-          <p:cNvPr id="11" name="Rectangle 10"/>
+          <p:cNvPr id="12" name="Rectangle 11"/>
           <p:cNvSpPr/>
           <p:nvPr/>
         </p:nvSpPr>
         <p:spPr>
           <a:xfrm>
-            <a:off x="0" y="6565392"/>
-            <a:ext cx="12191695" cy="292608"/>
+            <a:off x="0" y="6583680"/>
+            <a:ext cx="12191695" cy="274320"/>
           </a:xfrm>
           <a:prstGeom prst="rect">
             <a:avLst/>
@@ -3791,14 +3864,14 @@
       </p:sp>
       <p:sp>
         <p:nvSpPr>
-          <p:cNvPr id="12" name="TextBox 11"/>
+          <p:cNvPr id="13" name="TextBox 12"/>
           <p:cNvSpPr txBox="1"/>
           <p:nvPr/>
         </p:nvSpPr>
         <p:spPr>
           <a:xfrm>
-            <a:off x="0" y="6556248"/>
-            <a:ext cx="12191695" cy="292608"/>
+            <a:off x="0" y="6574536"/>
+            <a:ext cx="12191695" cy="274320"/>
           </a:xfrm>
           <a:prstGeom prst="rect">
             <a:avLst/>
@@ -3820,13 +3893,13 @@
               </a:spcAft>
             </a:pPr>
             <a:r>
-              <a:rPr sz="850" b="1" spc="150">
+              <a:rPr sz="800" b="1" spc="140">
                 <a:solidFill>
                   <a:srgbClr val="BCD0E6"/>
                 </a:solidFill>
                 <a:latin typeface="Calibri"/>
               </a:rPr>
-              <a:t>THE LONG GAME · LIVE ROOM      ·      HOW IT WORKS, AND WHY      ·      FOR INTERNAL USE ONLY</a:t>
+              <a:t>THE LONG GAME · LIVE ROOM      ·      HOW IT WORKS, AND WHY      ·      INTERNAL USE ONLY</a:t>
             </a:r>
           </a:p>
         </p:txBody>
@@ -3901,8 +3974,8 @@
         </p:nvSpPr>
         <p:spPr>
           <a:xfrm>
-            <a:off x="548640" y="457200"/>
-            <a:ext cx="4343400" cy="365760"/>
+            <a:off x="640080" y="566928"/>
+            <a:ext cx="4892040" cy="365760"/>
           </a:xfrm>
           <a:prstGeom prst="rect">
             <a:avLst/>
@@ -3924,7 +3997,7 @@
               </a:spcAft>
             </a:pPr>
             <a:r>
-              <a:rPr sz="1200" b="1" spc="200">
+              <a:rPr sz="1150" b="1" spc="180">
                 <a:solidFill>
                   <a:srgbClr val="008074"/>
                 </a:solidFill>
@@ -3943,8 +4016,97 @@
         </p:nvSpPr>
         <p:spPr>
           <a:xfrm>
-            <a:off x="548640" y="804672"/>
-            <a:ext cx="4343400" cy="1097280"/>
+            <a:off x="640080" y="914400"/>
+            <a:ext cx="4892040" cy="1005840"/>
+          </a:xfrm>
+          <a:prstGeom prst="rect">
+            <a:avLst/>
+          </a:prstGeom>
+          <a:noFill/>
+        </p:spPr>
+        <p:txBody>
+          <a:bodyPr wrap="square" anchor="t">
+            <a:spAutoFit/>
+          </a:bodyPr>
+          <a:lstStyle/>
+          <a:p>
+            <a:pPr algn="l">
+              <a:lnSpc>
+                <a:spcPct val="102000"/>
+              </a:lnSpc>
+              <a:spcBef>
+                <a:spcPts val="0"/>
+              </a:spcBef>
+              <a:spcAft>
+                <a:spcPts val="400"/>
+              </a:spcAft>
+            </a:pPr>
+            <a:r>
+              <a:rPr sz="2600" b="1">
+                <a:solidFill>
+                  <a:srgbClr val="083469"/>
+                </a:solidFill>
+                <a:latin typeface="Calibri"/>
+              </a:rPr>
+              <a:t>Everyone vs. holding on</a:t>
+            </a:r>
+          </a:p>
+        </p:txBody>
+      </p:sp>
+      <p:sp>
+        <p:nvSpPr>
+          <p:cNvPr id="5" name="Rectangle 4"/>
+          <p:cNvSpPr/>
+          <p:nvPr/>
+        </p:nvSpPr>
+        <p:spPr>
+          <a:xfrm>
+            <a:off x="640080" y="1847088"/>
+            <a:ext cx="731520" cy="50800"/>
+          </a:xfrm>
+          <a:prstGeom prst="rect">
+            <a:avLst/>
+          </a:prstGeom>
+          <a:solidFill>
+            <a:srgbClr val="00D190"/>
+          </a:solidFill>
+          <a:ln>
+            <a:noFill/>
+          </a:ln>
+          <a:effectLst/>
+        </p:spPr>
+        <p:style>
+          <a:lnRef idx="1">
+            <a:schemeClr val="accent1"/>
+          </a:lnRef>
+          <a:fillRef idx="3">
+            <a:schemeClr val="accent1"/>
+          </a:fillRef>
+          <a:effectRef idx="2">
+            <a:schemeClr val="accent1"/>
+          </a:effectRef>
+          <a:fontRef idx="minor">
+            <a:schemeClr val="lt1"/>
+          </a:fontRef>
+        </p:style>
+        <p:txBody>
+          <a:bodyPr rtlCol="0" anchor="ctr"/>
+          <a:lstStyle/>
+          <a:p>
+            <a:pPr algn="ctr"/>
+          </a:p>
+        </p:txBody>
+      </p:sp>
+      <p:sp>
+        <p:nvSpPr>
+          <p:cNvPr id="6" name="TextBox 5"/>
+          <p:cNvSpPr txBox="1"/>
+          <p:nvPr/>
+        </p:nvSpPr>
+        <p:spPr>
+          <a:xfrm>
+            <a:off x="640080" y="2121408"/>
+            <a:ext cx="4892040" cy="274320"/>
           </a:xfrm>
           <a:prstGeom prst="rect">
             <a:avLst/>
@@ -3966,71 +4128,72 @@
               </a:spcAft>
             </a:pPr>
             <a:r>
-              <a:rPr sz="2700" b="1">
-                <a:solidFill>
-                  <a:srgbClr val="083469"/>
+              <a:rPr sz="1000" b="1" spc="140">
+                <a:solidFill>
+                  <a:srgbClr val="008074"/>
                 </a:solidFill>
                 <a:latin typeface="Calibri"/>
               </a:rPr>
-              <a:t>Everyone vs. holding on</a:t>
-            </a:r>
-          </a:p>
-        </p:txBody>
-      </p:sp>
-      <p:sp>
-        <p:nvSpPr>
-          <p:cNvPr id="5" name="Rectangle 4"/>
-          <p:cNvSpPr/>
-          <p:nvPr/>
-        </p:nvSpPr>
-        <p:spPr>
-          <a:xfrm>
-            <a:off x="548640" y="1874519"/>
-            <a:ext cx="777240" cy="50800"/>
-          </a:xfrm>
-          <a:prstGeom prst="rect">
-            <a:avLst/>
-          </a:prstGeom>
-          <a:solidFill>
-            <a:srgbClr val="00D190"/>
-          </a:solidFill>
-          <a:ln>
-            <a:noFill/>
-          </a:ln>
-          <a:effectLst/>
-        </p:spPr>
-        <p:style>
-          <a:lnRef idx="1">
-            <a:schemeClr val="accent1"/>
-          </a:lnRef>
-          <a:fillRef idx="3">
-            <a:schemeClr val="accent1"/>
-          </a:fillRef>
-          <a:effectRef idx="2">
-            <a:schemeClr val="accent1"/>
-          </a:effectRef>
-          <a:fontRef idx="minor">
-            <a:schemeClr val="lt1"/>
-          </a:fontRef>
-        </p:style>
-        <p:txBody>
-          <a:bodyPr rtlCol="0" anchor="ctr"/>
-          <a:lstStyle/>
-          <a:p>
-            <a:pPr algn="ctr"/>
-          </a:p>
-        </p:txBody>
-      </p:sp>
-      <p:sp>
-        <p:nvSpPr>
-          <p:cNvPr id="6" name="TextBox 5"/>
+              <a:t>WHAT HAPPENS</a:t>
+            </a:r>
+          </a:p>
+        </p:txBody>
+      </p:sp>
+      <p:sp>
+        <p:nvSpPr>
+          <p:cNvPr id="7" name="TextBox 6"/>
           <p:cNvSpPr txBox="1"/>
           <p:nvPr/>
         </p:nvSpPr>
         <p:spPr>
           <a:xfrm>
-            <a:off x="548640" y="2148840"/>
-            <a:ext cx="4343400" cy="292608"/>
+            <a:off x="640080" y="2414016"/>
+            <a:ext cx="4892040" cy="1828800"/>
+          </a:xfrm>
+          <a:prstGeom prst="rect">
+            <a:avLst/>
+          </a:prstGeom>
+          <a:noFill/>
+        </p:spPr>
+        <p:txBody>
+          <a:bodyPr wrap="square" anchor="t">
+            <a:spAutoFit/>
+          </a:bodyPr>
+          <a:lstStyle/>
+          <a:p>
+            <a:pPr algn="l">
+              <a:lnSpc>
+                <a:spcPct val="112000"/>
+              </a:lnSpc>
+              <a:spcBef>
+                <a:spcPts val="0"/>
+              </a:spcBef>
+              <a:spcAft>
+                <a:spcPts val="400"/>
+              </a:spcAft>
+            </a:pPr>
+            <a:r>
+              <a:rPr sz="1350" b="0">
+                <a:solidFill>
+                  <a:srgbClr val="22313F"/>
+                </a:solidFill>
+                <a:latin typeface="Calibri"/>
+              </a:rPr>
+              <a:t>Every player's final value as a bar, against the line for total money put in and the line for simply staying invested the whole time.</a:t>
+            </a:r>
+          </a:p>
+        </p:txBody>
+      </p:sp>
+      <p:sp>
+        <p:nvSpPr>
+          <p:cNvPr id="8" name="TextBox 7"/>
+          <p:cNvSpPr txBox="1"/>
+          <p:nvPr/>
+        </p:nvSpPr>
+        <p:spPr>
+          <a:xfrm>
+            <a:off x="640080" y="4224528"/>
+            <a:ext cx="4892040" cy="274320"/>
           </a:xfrm>
           <a:prstGeom prst="rect">
             <a:avLst/>
@@ -4052,27 +4215,27 @@
               </a:spcAft>
             </a:pPr>
             <a:r>
-              <a:rPr sz="1050" b="1" spc="150">
-                <a:solidFill>
-                  <a:srgbClr val="008074"/>
+              <a:rPr sz="1000" b="1" spc="140">
+                <a:solidFill>
+                  <a:srgbClr val="831574"/>
                 </a:solidFill>
                 <a:latin typeface="Calibri"/>
               </a:rPr>
-              <a:t>WHAT HAPPENS</a:t>
-            </a:r>
-          </a:p>
-        </p:txBody>
-      </p:sp>
-      <p:sp>
-        <p:nvSpPr>
-          <p:cNvPr id="7" name="TextBox 6"/>
+              <a:t>THE THINKING</a:t>
+            </a:r>
+          </a:p>
+        </p:txBody>
+      </p:sp>
+      <p:sp>
+        <p:nvSpPr>
+          <p:cNvPr id="9" name="TextBox 8"/>
           <p:cNvSpPr txBox="1"/>
           <p:nvPr/>
         </p:nvSpPr>
         <p:spPr>
           <a:xfrm>
-            <a:off x="548640" y="2450592"/>
-            <a:ext cx="4343400" cy="1828800"/>
+            <a:off x="640080" y="4517136"/>
+            <a:ext cx="4892040" cy="1828800"/>
           </a:xfrm>
           <a:prstGeom prst="rect">
             <a:avLst/>
@@ -4086,6 +4249,9 @@
           <a:lstStyle/>
           <a:p>
             <a:pPr algn="l">
+              <a:lnSpc>
+                <a:spcPct val="112000"/>
+              </a:lnSpc>
               <a:spcBef>
                 <a:spcPts val="0"/>
               </a:spcBef>
@@ -4094,91 +4260,7 @@
               </a:spcAft>
             </a:pPr>
             <a:r>
-              <a:rPr sz="1400" b="0">
-                <a:solidFill>
-                  <a:srgbClr val="22313F"/>
-                </a:solidFill>
-                <a:latin typeface="Calibri"/>
-              </a:rPr>
-              <a:t>Every player's final value as a bar, against the line for total money put in and the line for simply staying invested the whole time.</a:t>
-            </a:r>
-          </a:p>
-        </p:txBody>
-      </p:sp>
-      <p:sp>
-        <p:nvSpPr>
-          <p:cNvPr id="8" name="TextBox 7"/>
-          <p:cNvSpPr txBox="1"/>
-          <p:nvPr/>
-        </p:nvSpPr>
-        <p:spPr>
-          <a:xfrm>
-            <a:off x="548640" y="4160520"/>
-            <a:ext cx="4343400" cy="292608"/>
-          </a:xfrm>
-          <a:prstGeom prst="rect">
-            <a:avLst/>
-          </a:prstGeom>
-          <a:noFill/>
-        </p:spPr>
-        <p:txBody>
-          <a:bodyPr wrap="square" anchor="t">
-            <a:spAutoFit/>
-          </a:bodyPr>
-          <a:lstStyle/>
-          <a:p>
-            <a:pPr algn="l">
-              <a:spcBef>
-                <a:spcPts val="0"/>
-              </a:spcBef>
-              <a:spcAft>
-                <a:spcPts val="400"/>
-              </a:spcAft>
-            </a:pPr>
-            <a:r>
-              <a:rPr sz="1050" b="1" spc="150">
-                <a:solidFill>
-                  <a:srgbClr val="831574"/>
-                </a:solidFill>
-                <a:latin typeface="Calibri"/>
-              </a:rPr>
-              <a:t>THE THINKING</a:t>
-            </a:r>
-          </a:p>
-        </p:txBody>
-      </p:sp>
-      <p:sp>
-        <p:nvSpPr>
-          <p:cNvPr id="9" name="TextBox 8"/>
-          <p:cNvSpPr txBox="1"/>
-          <p:nvPr/>
-        </p:nvSpPr>
-        <p:spPr>
-          <a:xfrm>
-            <a:off x="548640" y="4462272"/>
-            <a:ext cx="4343400" cy="1920240"/>
-          </a:xfrm>
-          <a:prstGeom prst="rect">
-            <a:avLst/>
-          </a:prstGeom>
-          <a:noFill/>
-        </p:spPr>
-        <p:txBody>
-          <a:bodyPr wrap="square" anchor="t">
-            <a:spAutoFit/>
-          </a:bodyPr>
-          <a:lstStyle/>
-          <a:p>
-            <a:pPr algn="l">
-              <a:spcBef>
-                <a:spcPts val="0"/>
-              </a:spcBef>
-              <a:spcAft>
-                <a:spcPts val="400"/>
-              </a:spcAft>
-            </a:pPr>
-            <a:r>
-              <a:rPr sz="1400" b="0">
+              <a:rPr sz="1350" b="0">
                 <a:solidFill>
                   <a:srgbClr val="22313F"/>
                 </a:solidFill>
@@ -4189,9 +4271,55 @@
           </a:p>
         </p:txBody>
       </p:sp>
+      <p:sp>
+        <p:nvSpPr>
+          <p:cNvPr id="10" name="Rounded Rectangle 9"/>
+          <p:cNvSpPr/>
+          <p:nvPr/>
+        </p:nvSpPr>
+        <p:spPr>
+          <a:xfrm>
+            <a:off x="5742432" y="418228"/>
+            <a:ext cx="6208776" cy="5966680"/>
+          </a:xfrm>
+          <a:prstGeom prst="roundRect">
+            <a:avLst>
+              <a:gd name="adj" fmla="val 3500"/>
+            </a:avLst>
+          </a:prstGeom>
+          <a:solidFill>
+            <a:srgbClr val="EEF3F6"/>
+          </a:solidFill>
+          <a:ln>
+            <a:noFill/>
+          </a:ln>
+          <a:effectLst/>
+        </p:spPr>
+        <p:style>
+          <a:lnRef idx="1">
+            <a:schemeClr val="accent1"/>
+          </a:lnRef>
+          <a:fillRef idx="3">
+            <a:schemeClr val="accent1"/>
+          </a:fillRef>
+          <a:effectRef idx="2">
+            <a:schemeClr val="accent1"/>
+          </a:effectRef>
+          <a:fontRef idx="minor">
+            <a:schemeClr val="lt1"/>
+          </a:fontRef>
+        </p:style>
+        <p:txBody>
+          <a:bodyPr rtlCol="0" anchor="ctr"/>
+          <a:lstStyle/>
+          <a:p>
+            <a:pPr algn="ctr"/>
+          </a:p>
+        </p:txBody>
+      </p:sp>
       <p:pic>
         <p:nvPicPr>
-          <p:cNvPr id="10" name="Picture 9" descr="host-finale.png"/>
+          <p:cNvPr id="11" name="Picture 10" descr="host-finale.png"/>
           <p:cNvPicPr>
             <a:picLocks noChangeAspect="1"/>
           </p:cNvPicPr>
@@ -4205,29 +4333,29 @@
         </p:blipFill>
         <p:spPr>
           <a:xfrm>
-            <a:off x="5074920" y="1285875"/>
-            <a:ext cx="6858000" cy="4286250"/>
+            <a:off x="5943600" y="619396"/>
+            <a:ext cx="5806440" cy="5564344"/>
           </a:xfrm>
           <a:prstGeom prst="rect">
             <a:avLst/>
           </a:prstGeom>
           <a:ln w="9525">
             <a:solidFill>
-              <a:srgbClr val="DBE4EA"/>
+              <a:srgbClr val="D5DFE6"/>
             </a:solidFill>
           </a:ln>
         </p:spPr>
       </p:pic>
       <p:sp>
         <p:nvSpPr>
-          <p:cNvPr id="11" name="Rectangle 10"/>
+          <p:cNvPr id="12" name="Rectangle 11"/>
           <p:cNvSpPr/>
           <p:nvPr/>
         </p:nvSpPr>
         <p:spPr>
           <a:xfrm>
-            <a:off x="0" y="6565392"/>
-            <a:ext cx="12191695" cy="292608"/>
+            <a:off x="0" y="6583680"/>
+            <a:ext cx="12191695" cy="274320"/>
           </a:xfrm>
           <a:prstGeom prst="rect">
             <a:avLst/>
@@ -4264,14 +4392,14 @@
       </p:sp>
       <p:sp>
         <p:nvSpPr>
-          <p:cNvPr id="12" name="TextBox 11"/>
+          <p:cNvPr id="13" name="TextBox 12"/>
           <p:cNvSpPr txBox="1"/>
           <p:nvPr/>
         </p:nvSpPr>
         <p:spPr>
           <a:xfrm>
-            <a:off x="0" y="6556248"/>
-            <a:ext cx="12191695" cy="292608"/>
+            <a:off x="0" y="6574536"/>
+            <a:ext cx="12191695" cy="274320"/>
           </a:xfrm>
           <a:prstGeom prst="rect">
             <a:avLst/>
@@ -4293,13 +4421,13 @@
               </a:spcAft>
             </a:pPr>
             <a:r>
-              <a:rPr sz="850" b="1" spc="150">
+              <a:rPr sz="800" b="1" spc="140">
                 <a:solidFill>
                   <a:srgbClr val="BCD0E6"/>
                 </a:solidFill>
                 <a:latin typeface="Calibri"/>
               </a:rPr>
-              <a:t>THE LONG GAME · LIVE ROOM      ·      HOW IT WORKS, AND WHY      ·      FOR INTERNAL USE ONLY</a:t>
+              <a:t>THE LONG GAME · LIVE ROOM      ·      HOW IT WORKS, AND WHY      ·      INTERNAL USE ONLY</a:t>
             </a:r>
           </a:p>
         </p:txBody>
@@ -4374,8 +4502,8 @@
         </p:nvSpPr>
         <p:spPr>
           <a:xfrm>
-            <a:off x="548640" y="457200"/>
-            <a:ext cx="4343400" cy="365760"/>
+            <a:off x="640080" y="566928"/>
+            <a:ext cx="4892040" cy="365760"/>
           </a:xfrm>
           <a:prstGeom prst="rect">
             <a:avLst/>
@@ -4397,7 +4525,7 @@
               </a:spcAft>
             </a:pPr>
             <a:r>
-              <a:rPr sz="1200" b="1" spc="200">
+              <a:rPr sz="1150" b="1" spc="180">
                 <a:solidFill>
                   <a:srgbClr val="008074"/>
                 </a:solidFill>
@@ -4416,8 +4544,97 @@
         </p:nvSpPr>
         <p:spPr>
           <a:xfrm>
-            <a:off x="548640" y="804672"/>
-            <a:ext cx="4343400" cy="1097280"/>
+            <a:off x="640080" y="914400"/>
+            <a:ext cx="4892040" cy="1005840"/>
+          </a:xfrm>
+          <a:prstGeom prst="rect">
+            <a:avLst/>
+          </a:prstGeom>
+          <a:noFill/>
+        </p:spPr>
+        <p:txBody>
+          <a:bodyPr wrap="square" anchor="t">
+            <a:spAutoFit/>
+          </a:bodyPr>
+          <a:lstStyle/>
+          <a:p>
+            <a:pPr algn="l">
+              <a:lnSpc>
+                <a:spcPct val="102000"/>
+              </a:lnSpc>
+              <a:spcBef>
+                <a:spcPts val="0"/>
+              </a:spcBef>
+              <a:spcAft>
+                <a:spcPts val="400"/>
+              </a:spcAft>
+            </a:pPr>
+            <a:r>
+              <a:rPr sz="2600" b="1">
+                <a:solidFill>
+                  <a:srgbClr val="083469"/>
+                </a:solidFill>
+                <a:latin typeface="Calibri"/>
+              </a:rPr>
+              <a:t>Explore other crises</a:t>
+            </a:r>
+          </a:p>
+        </p:txBody>
+      </p:sp>
+      <p:sp>
+        <p:nvSpPr>
+          <p:cNvPr id="5" name="Rectangle 4"/>
+          <p:cNvSpPr/>
+          <p:nvPr/>
+        </p:nvSpPr>
+        <p:spPr>
+          <a:xfrm>
+            <a:off x="640080" y="1847088"/>
+            <a:ext cx="731520" cy="50800"/>
+          </a:xfrm>
+          <a:prstGeom prst="rect">
+            <a:avLst/>
+          </a:prstGeom>
+          <a:solidFill>
+            <a:srgbClr val="00D190"/>
+          </a:solidFill>
+          <a:ln>
+            <a:noFill/>
+          </a:ln>
+          <a:effectLst/>
+        </p:spPr>
+        <p:style>
+          <a:lnRef idx="1">
+            <a:schemeClr val="accent1"/>
+          </a:lnRef>
+          <a:fillRef idx="3">
+            <a:schemeClr val="accent1"/>
+          </a:fillRef>
+          <a:effectRef idx="2">
+            <a:schemeClr val="accent1"/>
+          </a:effectRef>
+          <a:fontRef idx="minor">
+            <a:schemeClr val="lt1"/>
+          </a:fontRef>
+        </p:style>
+        <p:txBody>
+          <a:bodyPr rtlCol="0" anchor="ctr"/>
+          <a:lstStyle/>
+          <a:p>
+            <a:pPr algn="ctr"/>
+          </a:p>
+        </p:txBody>
+      </p:sp>
+      <p:sp>
+        <p:nvSpPr>
+          <p:cNvPr id="6" name="TextBox 5"/>
+          <p:cNvSpPr txBox="1"/>
+          <p:nvPr/>
+        </p:nvSpPr>
+        <p:spPr>
+          <a:xfrm>
+            <a:off x="640080" y="2121408"/>
+            <a:ext cx="4892040" cy="274320"/>
           </a:xfrm>
           <a:prstGeom prst="rect">
             <a:avLst/>
@@ -4439,71 +4656,72 @@
               </a:spcAft>
             </a:pPr>
             <a:r>
-              <a:rPr sz="2700" b="1">
-                <a:solidFill>
-                  <a:srgbClr val="083469"/>
+              <a:rPr sz="1000" b="1" spc="140">
+                <a:solidFill>
+                  <a:srgbClr val="008074"/>
                 </a:solidFill>
                 <a:latin typeface="Calibri"/>
               </a:rPr>
-              <a:t>Explore other crises</a:t>
-            </a:r>
-          </a:p>
-        </p:txBody>
-      </p:sp>
-      <p:sp>
-        <p:nvSpPr>
-          <p:cNvPr id="5" name="Rectangle 4"/>
-          <p:cNvSpPr/>
-          <p:nvPr/>
-        </p:nvSpPr>
-        <p:spPr>
-          <a:xfrm>
-            <a:off x="548640" y="1874519"/>
-            <a:ext cx="777240" cy="50800"/>
-          </a:xfrm>
-          <a:prstGeom prst="rect">
-            <a:avLst/>
-          </a:prstGeom>
-          <a:solidFill>
-            <a:srgbClr val="00D190"/>
-          </a:solidFill>
-          <a:ln>
-            <a:noFill/>
-          </a:ln>
-          <a:effectLst/>
-        </p:spPr>
-        <p:style>
-          <a:lnRef idx="1">
-            <a:schemeClr val="accent1"/>
-          </a:lnRef>
-          <a:fillRef idx="3">
-            <a:schemeClr val="accent1"/>
-          </a:fillRef>
-          <a:effectRef idx="2">
-            <a:schemeClr val="accent1"/>
-          </a:effectRef>
-          <a:fontRef idx="minor">
-            <a:schemeClr val="lt1"/>
-          </a:fontRef>
-        </p:style>
-        <p:txBody>
-          <a:bodyPr rtlCol="0" anchor="ctr"/>
-          <a:lstStyle/>
-          <a:p>
-            <a:pPr algn="ctr"/>
-          </a:p>
-        </p:txBody>
-      </p:sp>
-      <p:sp>
-        <p:nvSpPr>
-          <p:cNvPr id="6" name="TextBox 5"/>
+              <a:t>WHAT HAPPENS</a:t>
+            </a:r>
+          </a:p>
+        </p:txBody>
+      </p:sp>
+      <p:sp>
+        <p:nvSpPr>
+          <p:cNvPr id="7" name="TextBox 6"/>
           <p:cNvSpPr txBox="1"/>
           <p:nvPr/>
         </p:nvSpPr>
         <p:spPr>
           <a:xfrm>
-            <a:off x="548640" y="2148840"/>
-            <a:ext cx="4343400" cy="292608"/>
+            <a:off x="640080" y="2414016"/>
+            <a:ext cx="4892040" cy="1828800"/>
+          </a:xfrm>
+          <a:prstGeom prst="rect">
+            <a:avLst/>
+          </a:prstGeom>
+          <a:noFill/>
+        </p:spPr>
+        <p:txBody>
+          <a:bodyPr wrap="square" anchor="t">
+            <a:spAutoFit/>
+          </a:bodyPr>
+          <a:lstStyle/>
+          <a:p>
+            <a:pPr algn="l">
+              <a:lnSpc>
+                <a:spcPct val="112000"/>
+              </a:lnSpc>
+              <a:spcBef>
+                <a:spcPts val="0"/>
+              </a:spcBef>
+              <a:spcAft>
+                <a:spcPts val="400"/>
+              </a:spcAft>
+            </a:pPr>
+            <a:r>
+              <a:rPr sz="1350" b="0">
+                <a:solidFill>
+                  <a:srgbClr val="22313F"/>
+                </a:solidFill>
+                <a:latin typeface="Calibri"/>
+              </a:rPr>
+              <a:t>Players can replay the same comparison through earlier crises — 1973, 1987, 2000, 2008 — each showing staying invested versus sitting out the best months.</a:t>
+            </a:r>
+          </a:p>
+        </p:txBody>
+      </p:sp>
+      <p:sp>
+        <p:nvSpPr>
+          <p:cNvPr id="8" name="TextBox 7"/>
+          <p:cNvSpPr txBox="1"/>
+          <p:nvPr/>
+        </p:nvSpPr>
+        <p:spPr>
+          <a:xfrm>
+            <a:off x="640080" y="4224528"/>
+            <a:ext cx="4892040" cy="274320"/>
           </a:xfrm>
           <a:prstGeom prst="rect">
             <a:avLst/>
@@ -4525,27 +4743,27 @@
               </a:spcAft>
             </a:pPr>
             <a:r>
-              <a:rPr sz="1050" b="1" spc="150">
-                <a:solidFill>
-                  <a:srgbClr val="008074"/>
+              <a:rPr sz="1000" b="1" spc="140">
+                <a:solidFill>
+                  <a:srgbClr val="831574"/>
                 </a:solidFill>
                 <a:latin typeface="Calibri"/>
               </a:rPr>
-              <a:t>WHAT HAPPENS</a:t>
-            </a:r>
-          </a:p>
-        </p:txBody>
-      </p:sp>
-      <p:sp>
-        <p:nvSpPr>
-          <p:cNvPr id="7" name="TextBox 6"/>
+              <a:t>THE THINKING</a:t>
+            </a:r>
+          </a:p>
+        </p:txBody>
+      </p:sp>
+      <p:sp>
+        <p:nvSpPr>
+          <p:cNvPr id="9" name="TextBox 8"/>
           <p:cNvSpPr txBox="1"/>
           <p:nvPr/>
         </p:nvSpPr>
         <p:spPr>
           <a:xfrm>
-            <a:off x="548640" y="2450592"/>
-            <a:ext cx="4343400" cy="1828800"/>
+            <a:off x="640080" y="4517136"/>
+            <a:ext cx="4892040" cy="1828800"/>
           </a:xfrm>
           <a:prstGeom prst="rect">
             <a:avLst/>
@@ -4559,6 +4777,9 @@
           <a:lstStyle/>
           <a:p>
             <a:pPr algn="l">
+              <a:lnSpc>
+                <a:spcPct val="112000"/>
+              </a:lnSpc>
               <a:spcBef>
                 <a:spcPts val="0"/>
               </a:spcBef>
@@ -4567,91 +4788,7 @@
               </a:spcAft>
             </a:pPr>
             <a:r>
-              <a:rPr sz="1400" b="0">
-                <a:solidFill>
-                  <a:srgbClr val="22313F"/>
-                </a:solidFill>
-                <a:latin typeface="Calibri"/>
-              </a:rPr>
-              <a:t>Players can replay the same comparison through earlier crises — 1973, 1987, 2000, 2008 — each showing staying invested versus sitting out the best months.</a:t>
-            </a:r>
-          </a:p>
-        </p:txBody>
-      </p:sp>
-      <p:sp>
-        <p:nvSpPr>
-          <p:cNvPr id="8" name="TextBox 7"/>
-          <p:cNvSpPr txBox="1"/>
-          <p:nvPr/>
-        </p:nvSpPr>
-        <p:spPr>
-          <a:xfrm>
-            <a:off x="548640" y="4160520"/>
-            <a:ext cx="4343400" cy="292608"/>
-          </a:xfrm>
-          <a:prstGeom prst="rect">
-            <a:avLst/>
-          </a:prstGeom>
-          <a:noFill/>
-        </p:spPr>
-        <p:txBody>
-          <a:bodyPr wrap="square" anchor="t">
-            <a:spAutoFit/>
-          </a:bodyPr>
-          <a:lstStyle/>
-          <a:p>
-            <a:pPr algn="l">
-              <a:spcBef>
-                <a:spcPts val="0"/>
-              </a:spcBef>
-              <a:spcAft>
-                <a:spcPts val="400"/>
-              </a:spcAft>
-            </a:pPr>
-            <a:r>
-              <a:rPr sz="1050" b="1" spc="150">
-                <a:solidFill>
-                  <a:srgbClr val="831574"/>
-                </a:solidFill>
-                <a:latin typeface="Calibri"/>
-              </a:rPr>
-              <a:t>THE THINKING</a:t>
-            </a:r>
-          </a:p>
-        </p:txBody>
-      </p:sp>
-      <p:sp>
-        <p:nvSpPr>
-          <p:cNvPr id="9" name="TextBox 8"/>
-          <p:cNvSpPr txBox="1"/>
-          <p:nvPr/>
-        </p:nvSpPr>
-        <p:spPr>
-          <a:xfrm>
-            <a:off x="548640" y="4462272"/>
-            <a:ext cx="4343400" cy="1920240"/>
-          </a:xfrm>
-          <a:prstGeom prst="rect">
-            <a:avLst/>
-          </a:prstGeom>
-          <a:noFill/>
-        </p:spPr>
-        <p:txBody>
-          <a:bodyPr wrap="square" anchor="t">
-            <a:spAutoFit/>
-          </a:bodyPr>
-          <a:lstStyle/>
-          <a:p>
-            <a:pPr algn="l">
-              <a:spcBef>
-                <a:spcPts val="0"/>
-              </a:spcBef>
-              <a:spcAft>
-                <a:spcPts val="400"/>
-              </a:spcAft>
-            </a:pPr>
-            <a:r>
-              <a:rPr sz="1400" b="0">
+              <a:rPr sz="1350" b="0">
                 <a:solidFill>
                   <a:srgbClr val="22313F"/>
                 </a:solidFill>
@@ -4662,9 +4799,55 @@
           </a:p>
         </p:txBody>
       </p:sp>
+      <p:sp>
+        <p:nvSpPr>
+          <p:cNvPr id="10" name="Rounded Rectangle 9"/>
+          <p:cNvSpPr/>
+          <p:nvPr/>
+        </p:nvSpPr>
+        <p:spPr>
+          <a:xfrm>
+            <a:off x="7607804" y="365760"/>
+            <a:ext cx="2478032" cy="6071616"/>
+          </a:xfrm>
+          <a:prstGeom prst="roundRect">
+            <a:avLst>
+              <a:gd name="adj" fmla="val 3500"/>
+            </a:avLst>
+          </a:prstGeom>
+          <a:solidFill>
+            <a:srgbClr val="EEF3F6"/>
+          </a:solidFill>
+          <a:ln>
+            <a:noFill/>
+          </a:ln>
+          <a:effectLst/>
+        </p:spPr>
+        <p:style>
+          <a:lnRef idx="1">
+            <a:schemeClr val="accent1"/>
+          </a:lnRef>
+          <a:fillRef idx="3">
+            <a:schemeClr val="accent1"/>
+          </a:fillRef>
+          <a:effectRef idx="2">
+            <a:schemeClr val="accent1"/>
+          </a:effectRef>
+          <a:fontRef idx="minor">
+            <a:schemeClr val="lt1"/>
+          </a:fontRef>
+        </p:style>
+        <p:txBody>
+          <a:bodyPr rtlCol="0" anchor="ctr"/>
+          <a:lstStyle/>
+          <a:p>
+            <a:pPr algn="ctr"/>
+          </a:p>
+        </p:txBody>
+      </p:sp>
       <p:pic>
         <p:nvPicPr>
-          <p:cNvPr id="10" name="Picture 9" descr="phone-crises.png"/>
+          <p:cNvPr id="11" name="Picture 10" descr="phone-crises.png"/>
           <p:cNvPicPr>
             <a:picLocks noChangeAspect="1"/>
           </p:cNvPicPr>
@@ -4678,29 +4861,29 @@
         </p:blipFill>
         <p:spPr>
           <a:xfrm>
-            <a:off x="7858760" y="457200"/>
-            <a:ext cx="2113280" cy="5852160"/>
+            <a:off x="7808972" y="566928"/>
+            <a:ext cx="2075696" cy="5669280"/>
           </a:xfrm>
           <a:prstGeom prst="rect">
             <a:avLst/>
           </a:prstGeom>
           <a:ln w="9525">
             <a:solidFill>
-              <a:srgbClr val="DBE4EA"/>
+              <a:srgbClr val="D5DFE6"/>
             </a:solidFill>
           </a:ln>
         </p:spPr>
       </p:pic>
       <p:sp>
         <p:nvSpPr>
-          <p:cNvPr id="11" name="Rectangle 10"/>
+          <p:cNvPr id="12" name="Rectangle 11"/>
           <p:cNvSpPr/>
           <p:nvPr/>
         </p:nvSpPr>
         <p:spPr>
           <a:xfrm>
-            <a:off x="0" y="6565392"/>
-            <a:ext cx="12191695" cy="292608"/>
+            <a:off x="0" y="6583680"/>
+            <a:ext cx="12191695" cy="274320"/>
           </a:xfrm>
           <a:prstGeom prst="rect">
             <a:avLst/>
@@ -4737,14 +4920,14 @@
       </p:sp>
       <p:sp>
         <p:nvSpPr>
-          <p:cNvPr id="12" name="TextBox 11"/>
+          <p:cNvPr id="13" name="TextBox 12"/>
           <p:cNvSpPr txBox="1"/>
           <p:nvPr/>
         </p:nvSpPr>
         <p:spPr>
           <a:xfrm>
-            <a:off x="0" y="6556248"/>
-            <a:ext cx="12191695" cy="292608"/>
+            <a:off x="0" y="6574536"/>
+            <a:ext cx="12191695" cy="274320"/>
           </a:xfrm>
           <a:prstGeom prst="rect">
             <a:avLst/>
@@ -4766,13 +4949,13 @@
               </a:spcAft>
             </a:pPr>
             <a:r>
-              <a:rPr sz="850" b="1" spc="150">
+              <a:rPr sz="800" b="1" spc="140">
                 <a:solidFill>
                   <a:srgbClr val="BCD0E6"/>
                 </a:solidFill>
                 <a:latin typeface="Calibri"/>
               </a:rPr>
-              <a:t>THE LONG GAME · LIVE ROOM      ·      HOW IT WORKS, AND WHY      ·      FOR INTERNAL USE ONLY</a:t>
+              <a:t>THE LONG GAME · LIVE ROOM      ·      HOW IT WORKS, AND WHY      ·      INTERNAL USE ONLY</a:t>
             </a:r>
           </a:p>
         </p:txBody>
@@ -4848,7 +5031,7 @@
         <p:spPr>
           <a:xfrm>
             <a:off x="0" y="0"/>
-            <a:ext cx="12191695" cy="1463040"/>
+            <a:ext cx="12191695" cy="1417320"/>
           </a:xfrm>
           <a:prstGeom prst="rect">
             <a:avLst/>
@@ -4891,7 +5074,7 @@
         </p:nvSpPr>
         <p:spPr>
           <a:xfrm>
-            <a:off x="822960" y="320040"/>
+            <a:off x="868680" y="292608"/>
             <a:ext cx="10058400" cy="365760"/>
           </a:xfrm>
           <a:prstGeom prst="rect">
@@ -4933,7 +5116,7 @@
         </p:nvSpPr>
         <p:spPr>
           <a:xfrm>
-            <a:off x="777240" y="658368"/>
+            <a:off x="822960" y="621792"/>
             <a:ext cx="10515600" cy="640080"/>
           </a:xfrm>
           <a:prstGeom prst="rect">
@@ -4956,7 +5139,7 @@
               </a:spcAft>
             </a:pPr>
             <a:r>
-              <a:rPr sz="2600" b="1">
+              <a:rPr sz="2500" b="1">
                 <a:solidFill>
                   <a:srgbClr val="FFFFFF"/>
                 </a:solidFill>
@@ -4969,20 +5152,22 @@
       </p:sp>
       <p:sp>
         <p:nvSpPr>
-          <p:cNvPr id="6" name="Rectangle 5"/>
+          <p:cNvPr id="6" name="Rounded Rectangle 5"/>
           <p:cNvSpPr/>
           <p:nvPr/>
         </p:nvSpPr>
         <p:spPr>
           <a:xfrm>
-            <a:off x="685800" y="2103120"/>
-            <a:ext cx="3566160" cy="3291840"/>
-          </a:xfrm>
-          <a:prstGeom prst="rect">
-            <a:avLst/>
+            <a:off x="713232" y="2057400"/>
+            <a:ext cx="3566160" cy="3383280"/>
+          </a:xfrm>
+          <a:prstGeom prst="roundRect">
+            <a:avLst>
+              <a:gd name="adj" fmla="val 3500"/>
+            </a:avLst>
           </a:prstGeom>
           <a:solidFill>
-            <a:srgbClr val="F2F7F7"/>
+            <a:srgbClr val="EEF3F6"/>
           </a:solidFill>
           <a:ln>
             <a:noFill/>
@@ -5019,8 +5204,8 @@
         </p:nvSpPr>
         <p:spPr>
           <a:xfrm>
-            <a:off x="685800" y="2103120"/>
-            <a:ext cx="3566160" cy="63500"/>
+            <a:off x="713232" y="2057400"/>
+            <a:ext cx="3566160" cy="76200"/>
           </a:xfrm>
           <a:prstGeom prst="rect">
             <a:avLst/>
@@ -5063,8 +5248,8 @@
         </p:nvSpPr>
         <p:spPr>
           <a:xfrm>
-            <a:off x="960120" y="2395728"/>
-            <a:ext cx="3017520" cy="822960"/>
+            <a:off x="1005840" y="2368296"/>
+            <a:ext cx="2980944" cy="822960"/>
           </a:xfrm>
           <a:prstGeom prst="rect">
             <a:avLst/>
@@ -5105,8 +5290,143 @@
         </p:nvSpPr>
         <p:spPr>
           <a:xfrm>
-            <a:off x="960120" y="3246120"/>
-            <a:ext cx="3017520" cy="2011680"/>
+            <a:off x="1005840" y="3246120"/>
+            <a:ext cx="2980944" cy="2011680"/>
+          </a:xfrm>
+          <a:prstGeom prst="rect">
+            <a:avLst/>
+          </a:prstGeom>
+          <a:noFill/>
+        </p:spPr>
+        <p:txBody>
+          <a:bodyPr wrap="square" anchor="t">
+            <a:spAutoFit/>
+          </a:bodyPr>
+          <a:lstStyle/>
+          <a:p>
+            <a:pPr algn="l">
+              <a:lnSpc>
+                <a:spcPct val="114000"/>
+              </a:lnSpc>
+              <a:spcBef>
+                <a:spcPts val="0"/>
+              </a:spcBef>
+              <a:spcAft>
+                <a:spcPts val="400"/>
+              </a:spcAft>
+            </a:pPr>
+            <a:r>
+              <a:rPr sz="1450" b="0">
+                <a:solidFill>
+                  <a:srgbClr val="22313F"/>
+                </a:solidFill>
+                <a:latin typeface="Calibri"/>
+              </a:rPr>
+              <a:t>It recreates fear, FOMO and regret so the room feels why investors sell at the wrong time — the real reason returns get missed.</a:t>
+            </a:r>
+          </a:p>
+        </p:txBody>
+      </p:sp>
+      <p:sp>
+        <p:nvSpPr>
+          <p:cNvPr id="10" name="Rounded Rectangle 9"/>
+          <p:cNvSpPr/>
+          <p:nvPr/>
+        </p:nvSpPr>
+        <p:spPr>
+          <a:xfrm>
+            <a:off x="4599432" y="2057400"/>
+            <a:ext cx="3566160" cy="3383280"/>
+          </a:xfrm>
+          <a:prstGeom prst="roundRect">
+            <a:avLst>
+              <a:gd name="adj" fmla="val 3500"/>
+            </a:avLst>
+          </a:prstGeom>
+          <a:solidFill>
+            <a:srgbClr val="EEF3F6"/>
+          </a:solidFill>
+          <a:ln>
+            <a:noFill/>
+          </a:ln>
+          <a:effectLst/>
+        </p:spPr>
+        <p:style>
+          <a:lnRef idx="1">
+            <a:schemeClr val="accent1"/>
+          </a:lnRef>
+          <a:fillRef idx="3">
+            <a:schemeClr val="accent1"/>
+          </a:fillRef>
+          <a:effectRef idx="2">
+            <a:schemeClr val="accent1"/>
+          </a:effectRef>
+          <a:fontRef idx="minor">
+            <a:schemeClr val="lt1"/>
+          </a:fontRef>
+        </p:style>
+        <p:txBody>
+          <a:bodyPr rtlCol="0" anchor="ctr"/>
+          <a:lstStyle/>
+          <a:p>
+            <a:pPr algn="ctr"/>
+          </a:p>
+        </p:txBody>
+      </p:sp>
+      <p:sp>
+        <p:nvSpPr>
+          <p:cNvPr id="11" name="Rectangle 10"/>
+          <p:cNvSpPr/>
+          <p:nvPr/>
+        </p:nvSpPr>
+        <p:spPr>
+          <a:xfrm>
+            <a:off x="4599432" y="2057400"/>
+            <a:ext cx="3566160" cy="76200"/>
+          </a:xfrm>
+          <a:prstGeom prst="rect">
+            <a:avLst/>
+          </a:prstGeom>
+          <a:solidFill>
+            <a:srgbClr val="008074"/>
+          </a:solidFill>
+          <a:ln>
+            <a:noFill/>
+          </a:ln>
+          <a:effectLst/>
+        </p:spPr>
+        <p:style>
+          <a:lnRef idx="1">
+            <a:schemeClr val="accent1"/>
+          </a:lnRef>
+          <a:fillRef idx="3">
+            <a:schemeClr val="accent1"/>
+          </a:fillRef>
+          <a:effectRef idx="2">
+            <a:schemeClr val="accent1"/>
+          </a:effectRef>
+          <a:fontRef idx="minor">
+            <a:schemeClr val="lt1"/>
+          </a:fontRef>
+        </p:style>
+        <p:txBody>
+          <a:bodyPr rtlCol="0" anchor="ctr"/>
+          <a:lstStyle/>
+          <a:p>
+            <a:pPr algn="ctr"/>
+          </a:p>
+        </p:txBody>
+      </p:sp>
+      <p:sp>
+        <p:nvSpPr>
+          <p:cNvPr id="12" name="TextBox 11"/>
+          <p:cNvSpPr txBox="1"/>
+          <p:nvPr/>
+        </p:nvSpPr>
+        <p:spPr>
+          <a:xfrm>
+            <a:off x="4892040" y="2368296"/>
+            <a:ext cx="2980944" cy="822960"/>
           </a:xfrm>
           <a:prstGeom prst="rect">
             <a:avLst/>
@@ -5128,33 +5448,80 @@
               </a:spcAft>
             </a:pPr>
             <a:r>
-              <a:rPr sz="1450" b="0">
-                <a:solidFill>
-                  <a:srgbClr val="22313F"/>
+              <a:rPr sz="1800" b="1">
+                <a:solidFill>
+                  <a:srgbClr val="083469"/>
                 </a:solidFill>
                 <a:latin typeface="Calibri"/>
               </a:rPr>
-              <a:t>It recreates fear, FOMO and regret so the room feels why investors sell at the wrong time — the real reason returns get missed.</a:t>
-            </a:r>
-          </a:p>
-        </p:txBody>
-      </p:sp>
-      <p:sp>
-        <p:nvSpPr>
-          <p:cNvPr id="10" name="Rectangle 9"/>
+              <a:t>Real data, hidden dates</a:t>
+            </a:r>
+          </a:p>
+        </p:txBody>
+      </p:sp>
+      <p:sp>
+        <p:nvSpPr>
+          <p:cNvPr id="13" name="TextBox 12"/>
+          <p:cNvSpPr txBox="1"/>
+          <p:nvPr/>
+        </p:nvSpPr>
+        <p:spPr>
+          <a:xfrm>
+            <a:off x="4892040" y="3246120"/>
+            <a:ext cx="2980944" cy="2011680"/>
+          </a:xfrm>
+          <a:prstGeom prst="rect">
+            <a:avLst/>
+          </a:prstGeom>
+          <a:noFill/>
+        </p:spPr>
+        <p:txBody>
+          <a:bodyPr wrap="square" anchor="t">
+            <a:spAutoFit/>
+          </a:bodyPr>
+          <a:lstStyle/>
+          <a:p>
+            <a:pPr algn="l">
+              <a:lnSpc>
+                <a:spcPct val="114000"/>
+              </a:lnSpc>
+              <a:spcBef>
+                <a:spcPts val="0"/>
+              </a:spcBef>
+              <a:spcAft>
+                <a:spcPts val="400"/>
+              </a:spcAft>
+            </a:pPr>
+            <a:r>
+              <a:rPr sz="1450" b="0">
+                <a:solidFill>
+                  <a:srgbClr val="22313F"/>
+                </a:solidFill>
+                <a:latin typeface="Calibri"/>
+              </a:rPr>
+              <a:t>Real monthly returns make it credible; hiding the dates keeps it honest — every decision is made without hindsight.</a:t>
+            </a:r>
+          </a:p>
+        </p:txBody>
+      </p:sp>
+      <p:sp>
+        <p:nvSpPr>
+          <p:cNvPr id="14" name="Rounded Rectangle 13"/>
           <p:cNvSpPr/>
           <p:nvPr/>
         </p:nvSpPr>
         <p:spPr>
           <a:xfrm>
-            <a:off x="4572000" y="2103120"/>
-            <a:ext cx="3566160" cy="3291840"/>
-          </a:xfrm>
-          <a:prstGeom prst="rect">
-            <a:avLst/>
+            <a:off x="8485632" y="2057400"/>
+            <a:ext cx="3566160" cy="3383280"/>
+          </a:xfrm>
+          <a:prstGeom prst="roundRect">
+            <a:avLst>
+              <a:gd name="adj" fmla="val 3500"/>
+            </a:avLst>
           </a:prstGeom>
           <a:solidFill>
-            <a:srgbClr val="F2F7F7"/>
+            <a:srgbClr val="EEF3F6"/>
           </a:solidFill>
           <a:ln>
             <a:noFill/>
@@ -5185,14 +5552,14 @@
       </p:sp>
       <p:sp>
         <p:nvSpPr>
-          <p:cNvPr id="11" name="Rectangle 10"/>
+          <p:cNvPr id="15" name="Rectangle 14"/>
           <p:cNvSpPr/>
           <p:nvPr/>
         </p:nvSpPr>
         <p:spPr>
           <a:xfrm>
-            <a:off x="4572000" y="2103120"/>
-            <a:ext cx="3566160" cy="63500"/>
+            <a:off x="8485632" y="2057400"/>
+            <a:ext cx="3566160" cy="76200"/>
           </a:xfrm>
           <a:prstGeom prst="rect">
             <a:avLst/>
@@ -5229,14 +5596,14 @@
       </p:sp>
       <p:sp>
         <p:nvSpPr>
-          <p:cNvPr id="12" name="TextBox 11"/>
+          <p:cNvPr id="16" name="TextBox 15"/>
           <p:cNvSpPr txBox="1"/>
           <p:nvPr/>
         </p:nvSpPr>
         <p:spPr>
           <a:xfrm>
-            <a:off x="4846320" y="2395728"/>
-            <a:ext cx="3017520" cy="822960"/>
+            <a:off x="8778240" y="2368296"/>
+            <a:ext cx="2980944" cy="822960"/>
           </a:xfrm>
           <a:prstGeom prst="rect">
             <a:avLst/>
@@ -5264,21 +5631,21 @@
                 </a:solidFill>
                 <a:latin typeface="Calibri"/>
               </a:rPr>
-              <a:t>Real data, hidden dates</a:t>
-            </a:r>
-          </a:p>
-        </p:txBody>
-      </p:sp>
-      <p:sp>
-        <p:nvSpPr>
-          <p:cNvPr id="13" name="TextBox 12"/>
+              <a:t>Benchmarked to holding</a:t>
+            </a:r>
+          </a:p>
+        </p:txBody>
+      </p:sp>
+      <p:sp>
+        <p:nvSpPr>
+          <p:cNvPr id="17" name="TextBox 16"/>
           <p:cNvSpPr txBox="1"/>
           <p:nvPr/>
         </p:nvSpPr>
         <p:spPr>
           <a:xfrm>
-            <a:off x="4846320" y="3246120"/>
-            <a:ext cx="3017520" cy="2011680"/>
+            <a:off x="8778240" y="3246120"/>
+            <a:ext cx="2980944" cy="2011680"/>
           </a:xfrm>
           <a:prstGeom prst="rect">
             <a:avLst/>
@@ -5292,6 +5659,9 @@
           <a:lstStyle/>
           <a:p>
             <a:pPr algn="l">
+              <a:lnSpc>
+                <a:spcPct val="114000"/>
+              </a:lnSpc>
               <a:spcBef>
                 <a:spcPts val="0"/>
               </a:spcBef>
@@ -5306,178 +5676,6 @@
                 </a:solidFill>
                 <a:latin typeface="Calibri"/>
               </a:rPr>
-              <a:t>Real monthly returns make it credible; hiding the dates keeps it honest — every decision is made without hindsight.</a:t>
-            </a:r>
-          </a:p>
-        </p:txBody>
-      </p:sp>
-      <p:sp>
-        <p:nvSpPr>
-          <p:cNvPr id="14" name="Rectangle 13"/>
-          <p:cNvSpPr/>
-          <p:nvPr/>
-        </p:nvSpPr>
-        <p:spPr>
-          <a:xfrm>
-            <a:off x="8458200" y="2103120"/>
-            <a:ext cx="3566160" cy="3291840"/>
-          </a:xfrm>
-          <a:prstGeom prst="rect">
-            <a:avLst/>
-          </a:prstGeom>
-          <a:solidFill>
-            <a:srgbClr val="F2F7F7"/>
-          </a:solidFill>
-          <a:ln>
-            <a:noFill/>
-          </a:ln>
-          <a:effectLst/>
-        </p:spPr>
-        <p:style>
-          <a:lnRef idx="1">
-            <a:schemeClr val="accent1"/>
-          </a:lnRef>
-          <a:fillRef idx="3">
-            <a:schemeClr val="accent1"/>
-          </a:fillRef>
-          <a:effectRef idx="2">
-            <a:schemeClr val="accent1"/>
-          </a:effectRef>
-          <a:fontRef idx="minor">
-            <a:schemeClr val="lt1"/>
-          </a:fontRef>
-        </p:style>
-        <p:txBody>
-          <a:bodyPr rtlCol="0" anchor="ctr"/>
-          <a:lstStyle/>
-          <a:p>
-            <a:pPr algn="ctr"/>
-          </a:p>
-        </p:txBody>
-      </p:sp>
-      <p:sp>
-        <p:nvSpPr>
-          <p:cNvPr id="15" name="Rectangle 14"/>
-          <p:cNvSpPr/>
-          <p:nvPr/>
-        </p:nvSpPr>
-        <p:spPr>
-          <a:xfrm>
-            <a:off x="8458200" y="2103120"/>
-            <a:ext cx="3566160" cy="63500"/>
-          </a:xfrm>
-          <a:prstGeom prst="rect">
-            <a:avLst/>
-          </a:prstGeom>
-          <a:solidFill>
-            <a:srgbClr val="008074"/>
-          </a:solidFill>
-          <a:ln>
-            <a:noFill/>
-          </a:ln>
-          <a:effectLst/>
-        </p:spPr>
-        <p:style>
-          <a:lnRef idx="1">
-            <a:schemeClr val="accent1"/>
-          </a:lnRef>
-          <a:fillRef idx="3">
-            <a:schemeClr val="accent1"/>
-          </a:fillRef>
-          <a:effectRef idx="2">
-            <a:schemeClr val="accent1"/>
-          </a:effectRef>
-          <a:fontRef idx="minor">
-            <a:schemeClr val="lt1"/>
-          </a:fontRef>
-        </p:style>
-        <p:txBody>
-          <a:bodyPr rtlCol="0" anchor="ctr"/>
-          <a:lstStyle/>
-          <a:p>
-            <a:pPr algn="ctr"/>
-          </a:p>
-        </p:txBody>
-      </p:sp>
-      <p:sp>
-        <p:nvSpPr>
-          <p:cNvPr id="16" name="TextBox 15"/>
-          <p:cNvSpPr txBox="1"/>
-          <p:nvPr/>
-        </p:nvSpPr>
-        <p:spPr>
-          <a:xfrm>
-            <a:off x="8732520" y="2395728"/>
-            <a:ext cx="3017520" cy="822960"/>
-          </a:xfrm>
-          <a:prstGeom prst="rect">
-            <a:avLst/>
-          </a:prstGeom>
-          <a:noFill/>
-        </p:spPr>
-        <p:txBody>
-          <a:bodyPr wrap="square" anchor="t">
-            <a:spAutoFit/>
-          </a:bodyPr>
-          <a:lstStyle/>
-          <a:p>
-            <a:pPr algn="l">
-              <a:spcBef>
-                <a:spcPts val="0"/>
-              </a:spcBef>
-              <a:spcAft>
-                <a:spcPts val="400"/>
-              </a:spcAft>
-            </a:pPr>
-            <a:r>
-              <a:rPr sz="1800" b="1">
-                <a:solidFill>
-                  <a:srgbClr val="083469"/>
-                </a:solidFill>
-                <a:latin typeface="Calibri"/>
-              </a:rPr>
-              <a:t>Benchmarked to holding</a:t>
-            </a:r>
-          </a:p>
-        </p:txBody>
-      </p:sp>
-      <p:sp>
-        <p:nvSpPr>
-          <p:cNvPr id="17" name="TextBox 16"/>
-          <p:cNvSpPr txBox="1"/>
-          <p:nvPr/>
-        </p:nvSpPr>
-        <p:spPr>
-          <a:xfrm>
-            <a:off x="8732520" y="3246120"/>
-            <a:ext cx="3017520" cy="2011680"/>
-          </a:xfrm>
-          <a:prstGeom prst="rect">
-            <a:avLst/>
-          </a:prstGeom>
-          <a:noFill/>
-        </p:spPr>
-        <p:txBody>
-          <a:bodyPr wrap="square" anchor="t">
-            <a:spAutoFit/>
-          </a:bodyPr>
-          <a:lstStyle/>
-          <a:p>
-            <a:pPr algn="l">
-              <a:spcBef>
-                <a:spcPts val="0"/>
-              </a:spcBef>
-              <a:spcAft>
-                <a:spcPts val="400"/>
-              </a:spcAft>
-            </a:pPr>
-            <a:r>
-              <a:rPr sz="1450" b="0">
-                <a:solidFill>
-                  <a:srgbClr val="22313F"/>
-                </a:solidFill>
-                <a:latin typeface="Calibri"/>
-              </a:rPr>
               <a:t>Every choice — timing, cash, the windfall — is measured against simply staying fully invested, so the cost of reacting is explicit.</a:t>
             </a:r>
           </a:p>
@@ -5491,8 +5689,8 @@
         </p:nvSpPr>
         <p:spPr>
           <a:xfrm>
-            <a:off x="0" y="6565392"/>
-            <a:ext cx="12191695" cy="292608"/>
+            <a:off x="0" y="6583680"/>
+            <a:ext cx="12191695" cy="274320"/>
           </a:xfrm>
           <a:prstGeom prst="rect">
             <a:avLst/>
@@ -5535,8 +5733,8 @@
         </p:nvSpPr>
         <p:spPr>
           <a:xfrm>
-            <a:off x="0" y="6556248"/>
-            <a:ext cx="12191695" cy="292608"/>
+            <a:off x="0" y="6574536"/>
+            <a:ext cx="12191695" cy="274320"/>
           </a:xfrm>
           <a:prstGeom prst="rect">
             <a:avLst/>
@@ -5558,13 +5756,13 @@
               </a:spcAft>
             </a:pPr>
             <a:r>
-              <a:rPr sz="850" b="1" spc="150">
+              <a:rPr sz="800" b="1" spc="140">
                 <a:solidFill>
                   <a:srgbClr val="BCD0E6"/>
                 </a:solidFill>
                 <a:latin typeface="Calibri"/>
               </a:rPr>
-              <a:t>THE LONG GAME · LIVE ROOM      ·      HOW IT WORKS, AND WHY      ·      FOR INTERNAL USE ONLY</a:t>
+              <a:t>THE LONG GAME · LIVE ROOM      ·      HOW IT WORKS, AND WHY      ·      INTERNAL USE ONLY</a:t>
             </a:r>
           </a:p>
         </p:txBody>
@@ -5640,7 +5838,7 @@
         <p:spPr>
           <a:xfrm>
             <a:off x="0" y="0"/>
-            <a:ext cx="12191695" cy="1463040"/>
+            <a:ext cx="12191695" cy="1417320"/>
           </a:xfrm>
           <a:prstGeom prst="rect">
             <a:avLst/>
@@ -5683,7 +5881,7 @@
         </p:nvSpPr>
         <p:spPr>
           <a:xfrm>
-            <a:off x="822960" y="320040"/>
+            <a:off x="868680" y="292608"/>
             <a:ext cx="10058400" cy="365760"/>
           </a:xfrm>
           <a:prstGeom prst="rect">
@@ -5725,7 +5923,7 @@
         </p:nvSpPr>
         <p:spPr>
           <a:xfrm>
-            <a:off x="777240" y="658368"/>
+            <a:off x="822960" y="621792"/>
             <a:ext cx="10515600" cy="640080"/>
           </a:xfrm>
           <a:prstGeom prst="rect">
@@ -5748,7 +5946,7 @@
               </a:spcAft>
             </a:pPr>
             <a:r>
-              <a:rPr sz="2600" b="1">
+              <a:rPr sz="2500" b="1">
                 <a:solidFill>
                   <a:srgbClr val="FFFFFF"/>
                 </a:solidFill>
@@ -5761,17 +5959,19 @@
       </p:sp>
       <p:sp>
         <p:nvSpPr>
-          <p:cNvPr id="6" name="Rectangle 5"/>
+          <p:cNvPr id="6" name="Rounded Rectangle 5"/>
           <p:cNvSpPr/>
           <p:nvPr/>
         </p:nvSpPr>
         <p:spPr>
           <a:xfrm>
-            <a:off x="822960" y="2148840"/>
-            <a:ext cx="594360" cy="594360"/>
-          </a:xfrm>
-          <a:prstGeom prst="rect">
-            <a:avLst/>
+            <a:off x="868680" y="2148840"/>
+            <a:ext cx="566928" cy="566928"/>
+          </a:xfrm>
+          <a:prstGeom prst="roundRect">
+            <a:avLst>
+              <a:gd name="adj" fmla="val 3500"/>
+            </a:avLst>
           </a:prstGeom>
           <a:solidFill>
             <a:srgbClr val="008074"/>
@@ -5811,8 +6011,8 @@
         </p:nvSpPr>
         <p:spPr>
           <a:xfrm>
-            <a:off x="822960" y="2130552"/>
-            <a:ext cx="594360" cy="594360"/>
+            <a:off x="868680" y="2130552"/>
+            <a:ext cx="566928" cy="566928"/>
           </a:xfrm>
           <a:prstGeom prst="rect">
             <a:avLst/>
@@ -5834,7 +6034,7 @@
               </a:spcAft>
             </a:pPr>
             <a:r>
-              <a:rPr sz="2200" b="1">
+              <a:rPr sz="2100" b="1">
                 <a:solidFill>
                   <a:srgbClr val="FFFFFF"/>
                 </a:solidFill>
@@ -5853,7 +6053,7 @@
         </p:nvSpPr>
         <p:spPr>
           <a:xfrm>
-            <a:off x="1645920" y="2103120"/>
+            <a:off x="1691640" y="2093976"/>
             <a:ext cx="9601200" cy="457200"/>
           </a:xfrm>
           <a:prstGeom prst="rect">
@@ -5895,7 +6095,7 @@
         </p:nvSpPr>
         <p:spPr>
           <a:xfrm>
-            <a:off x="1645920" y="2532888"/>
+            <a:off x="1691640" y="2532888"/>
             <a:ext cx="9875520" cy="457200"/>
           </a:xfrm>
           <a:prstGeom prst="rect">
@@ -5931,17 +6131,19 @@
       </p:sp>
       <p:sp>
         <p:nvSpPr>
-          <p:cNvPr id="10" name="Rectangle 9"/>
+          <p:cNvPr id="10" name="Rounded Rectangle 9"/>
           <p:cNvSpPr/>
           <p:nvPr/>
         </p:nvSpPr>
         <p:spPr>
           <a:xfrm>
-            <a:off x="822960" y="3291840"/>
-            <a:ext cx="594360" cy="594360"/>
-          </a:xfrm>
-          <a:prstGeom prst="rect">
-            <a:avLst/>
+            <a:off x="868680" y="3246120"/>
+            <a:ext cx="566928" cy="566928"/>
+          </a:xfrm>
+          <a:prstGeom prst="roundRect">
+            <a:avLst>
+              <a:gd name="adj" fmla="val 3500"/>
+            </a:avLst>
           </a:prstGeom>
           <a:solidFill>
             <a:srgbClr val="008074"/>
@@ -5981,8 +6183,8 @@
         </p:nvSpPr>
         <p:spPr>
           <a:xfrm>
-            <a:off x="822960" y="3273552"/>
-            <a:ext cx="594360" cy="594360"/>
+            <a:off x="868680" y="3227832"/>
+            <a:ext cx="566928" cy="566928"/>
           </a:xfrm>
           <a:prstGeom prst="rect">
             <a:avLst/>
@@ -6004,7 +6206,7 @@
               </a:spcAft>
             </a:pPr>
             <a:r>
-              <a:rPr sz="2200" b="1">
+              <a:rPr sz="2100" b="1">
                 <a:solidFill>
                   <a:srgbClr val="FFFFFF"/>
                 </a:solidFill>
@@ -6023,7 +6225,7 @@
         </p:nvSpPr>
         <p:spPr>
           <a:xfrm>
-            <a:off x="1645920" y="3246120"/>
+            <a:off x="1691640" y="3191256"/>
             <a:ext cx="9601200" cy="457200"/>
           </a:xfrm>
           <a:prstGeom prst="rect">
@@ -6065,7 +6267,7 @@
         </p:nvSpPr>
         <p:spPr>
           <a:xfrm>
-            <a:off x="1645920" y="3675888"/>
+            <a:off x="1691640" y="3630168"/>
             <a:ext cx="9875520" cy="457200"/>
           </a:xfrm>
           <a:prstGeom prst="rect">
@@ -6101,17 +6303,19 @@
       </p:sp>
       <p:sp>
         <p:nvSpPr>
-          <p:cNvPr id="14" name="Rectangle 13"/>
+          <p:cNvPr id="14" name="Rounded Rectangle 13"/>
           <p:cNvSpPr/>
           <p:nvPr/>
         </p:nvSpPr>
         <p:spPr>
           <a:xfrm>
-            <a:off x="822960" y="4434840"/>
-            <a:ext cx="594360" cy="594360"/>
-          </a:xfrm>
-          <a:prstGeom prst="rect">
-            <a:avLst/>
+            <a:off x="868680" y="4343400"/>
+            <a:ext cx="566928" cy="566928"/>
+          </a:xfrm>
+          <a:prstGeom prst="roundRect">
+            <a:avLst>
+              <a:gd name="adj" fmla="val 3500"/>
+            </a:avLst>
           </a:prstGeom>
           <a:solidFill>
             <a:srgbClr val="008074"/>
@@ -6151,8 +6355,8 @@
         </p:nvSpPr>
         <p:spPr>
           <a:xfrm>
-            <a:off x="822960" y="4416552"/>
-            <a:ext cx="594360" cy="594360"/>
+            <a:off x="868680" y="4325112"/>
+            <a:ext cx="566928" cy="566928"/>
           </a:xfrm>
           <a:prstGeom prst="rect">
             <a:avLst/>
@@ -6174,7 +6378,7 @@
               </a:spcAft>
             </a:pPr>
             <a:r>
-              <a:rPr sz="2200" b="1">
+              <a:rPr sz="2100" b="1">
                 <a:solidFill>
                   <a:srgbClr val="FFFFFF"/>
                 </a:solidFill>
@@ -6193,7 +6397,7 @@
         </p:nvSpPr>
         <p:spPr>
           <a:xfrm>
-            <a:off x="1645920" y="4389120"/>
+            <a:off x="1691640" y="4288536"/>
             <a:ext cx="9601200" cy="457200"/>
           </a:xfrm>
           <a:prstGeom prst="rect">
@@ -6235,7 +6439,7 @@
         </p:nvSpPr>
         <p:spPr>
           <a:xfrm>
-            <a:off x="1645920" y="4818888"/>
+            <a:off x="1691640" y="4727448"/>
             <a:ext cx="9875520" cy="457200"/>
           </a:xfrm>
           <a:prstGeom prst="rect">
@@ -6277,7 +6481,7 @@
         </p:nvSpPr>
         <p:spPr>
           <a:xfrm>
-            <a:off x="822960" y="5897880"/>
+            <a:off x="868680" y="5806440"/>
             <a:ext cx="10515600" cy="457200"/>
           </a:xfrm>
           <a:prstGeom prst="rect">
@@ -6319,8 +6523,8 @@
         </p:nvSpPr>
         <p:spPr>
           <a:xfrm>
-            <a:off x="0" y="6565392"/>
-            <a:ext cx="12191695" cy="292608"/>
+            <a:off x="0" y="6583680"/>
+            <a:ext cx="12191695" cy="274320"/>
           </a:xfrm>
           <a:prstGeom prst="rect">
             <a:avLst/>
@@ -6363,8 +6567,8 @@
         </p:nvSpPr>
         <p:spPr>
           <a:xfrm>
-            <a:off x="0" y="6556248"/>
-            <a:ext cx="12191695" cy="292608"/>
+            <a:off x="0" y="6574536"/>
+            <a:ext cx="12191695" cy="274320"/>
           </a:xfrm>
           <a:prstGeom prst="rect">
             <a:avLst/>
@@ -6386,13 +6590,13 @@
               </a:spcAft>
             </a:pPr>
             <a:r>
-              <a:rPr sz="850" b="1" spc="150">
+              <a:rPr sz="800" b="1" spc="140">
                 <a:solidFill>
                   <a:srgbClr val="BCD0E6"/>
                 </a:solidFill>
                 <a:latin typeface="Calibri"/>
               </a:rPr>
-              <a:t>THE LONG GAME · LIVE ROOM      ·      HOW IT WORKS, AND WHY      ·      FOR INTERNAL USE ONLY</a:t>
+              <a:t>THE LONG GAME · LIVE ROOM      ·      HOW IT WORKS, AND WHY      ·      INTERNAL USE ONLY</a:t>
             </a:r>
           </a:p>
         </p:txBody>
@@ -6468,7 +6672,7 @@
         <p:spPr>
           <a:xfrm>
             <a:off x="0" y="0"/>
-            <a:ext cx="12191695" cy="1463040"/>
+            <a:ext cx="12191695" cy="1417320"/>
           </a:xfrm>
           <a:prstGeom prst="rect">
             <a:avLst/>
@@ -6511,7 +6715,7 @@
         </p:nvSpPr>
         <p:spPr>
           <a:xfrm>
-            <a:off x="822960" y="320040"/>
+            <a:off x="868680" y="292608"/>
             <a:ext cx="10058400" cy="365760"/>
           </a:xfrm>
           <a:prstGeom prst="rect">
@@ -6553,7 +6757,7 @@
         </p:nvSpPr>
         <p:spPr>
           <a:xfrm>
-            <a:off x="777240" y="658368"/>
+            <a:off x="822960" y="621792"/>
             <a:ext cx="10515600" cy="640080"/>
           </a:xfrm>
           <a:prstGeom prst="rect">
@@ -6576,7 +6780,7 @@
               </a:spcAft>
             </a:pPr>
             <a:r>
-              <a:rPr sz="2600" b="1">
+              <a:rPr sz="2500" b="1">
                 <a:solidFill>
                   <a:srgbClr val="FFFFFF"/>
                 </a:solidFill>
@@ -6589,17 +6793,19 @@
       </p:sp>
       <p:sp>
         <p:nvSpPr>
-          <p:cNvPr id="6" name="Rectangle 5"/>
+          <p:cNvPr id="6" name="Rounded Rectangle 5"/>
           <p:cNvSpPr/>
           <p:nvPr/>
         </p:nvSpPr>
         <p:spPr>
           <a:xfrm>
-            <a:off x="822960" y="1965960"/>
-            <a:ext cx="475488" cy="475488"/>
-          </a:xfrm>
-          <a:prstGeom prst="rect">
-            <a:avLst/>
+            <a:off x="868680" y="1874519"/>
+            <a:ext cx="457200" cy="457200"/>
+          </a:xfrm>
+          <a:prstGeom prst="roundRect">
+            <a:avLst>
+              <a:gd name="adj" fmla="val 3500"/>
+            </a:avLst>
           </a:prstGeom>
           <a:solidFill>
             <a:srgbClr val="008074"/>
@@ -6639,8 +6845,8 @@
         </p:nvSpPr>
         <p:spPr>
           <a:xfrm>
-            <a:off x="822960" y="1938528"/>
-            <a:ext cx="475488" cy="475488"/>
+            <a:off x="868680" y="1847087"/>
+            <a:ext cx="457200" cy="457200"/>
           </a:xfrm>
           <a:prstGeom prst="rect">
             <a:avLst/>
@@ -6662,7 +6868,7 @@
               </a:spcAft>
             </a:pPr>
             <a:r>
-              <a:rPr sz="2000" b="1">
+              <a:rPr sz="1900" b="1">
                 <a:solidFill>
                   <a:srgbClr val="FFFFFF"/>
                 </a:solidFill>
@@ -6681,7 +6887,7 @@
         </p:nvSpPr>
         <p:spPr>
           <a:xfrm>
-            <a:off x="1508760" y="1920240"/>
+            <a:off x="1554480" y="1819655"/>
             <a:ext cx="10058400" cy="365760"/>
           </a:xfrm>
           <a:prstGeom prst="rect">
@@ -6723,8 +6929,8 @@
         </p:nvSpPr>
         <p:spPr>
           <a:xfrm>
-            <a:off x="1508760" y="2295144"/>
-            <a:ext cx="10241280" cy="457200"/>
+            <a:off x="1554480" y="2185415"/>
+            <a:ext cx="10332720" cy="457200"/>
           </a:xfrm>
           <a:prstGeom prst="rect">
             <a:avLst/>
@@ -6752,24 +6958,26 @@
                 </a:solidFill>
                 <a:latin typeface="Calibri"/>
               </a:rPr>
-              <a:t>Players scan in, pick a nickname, and choose how much starts invested vs. in cash.</a:t>
-            </a:r>
-          </a:p>
-        </p:txBody>
-      </p:sp>
-      <p:sp>
-        <p:nvSpPr>
-          <p:cNvPr id="10" name="Rectangle 9"/>
+              <a:t>Players scan in, pick a nickname, and choose how much of their money starts invested vs. in cash.</a:t>
+            </a:r>
+          </a:p>
+        </p:txBody>
+      </p:sp>
+      <p:sp>
+        <p:nvSpPr>
+          <p:cNvPr id="10" name="Rounded Rectangle 9"/>
           <p:cNvSpPr/>
           <p:nvPr/>
         </p:nvSpPr>
         <p:spPr>
           <a:xfrm>
-            <a:off x="822960" y="2852928"/>
-            <a:ext cx="475488" cy="475488"/>
-          </a:xfrm>
-          <a:prstGeom prst="rect">
-            <a:avLst/>
+            <a:off x="868680" y="2788919"/>
+            <a:ext cx="457200" cy="457200"/>
+          </a:xfrm>
+          <a:prstGeom prst="roundRect">
+            <a:avLst>
+              <a:gd name="adj" fmla="val 3500"/>
+            </a:avLst>
           </a:prstGeom>
           <a:solidFill>
             <a:srgbClr val="008074"/>
@@ -6809,8 +7017,8 @@
         </p:nvSpPr>
         <p:spPr>
           <a:xfrm>
-            <a:off x="822960" y="2825496"/>
-            <a:ext cx="475488" cy="475488"/>
+            <a:off x="868680" y="2761487"/>
+            <a:ext cx="457200" cy="457200"/>
           </a:xfrm>
           <a:prstGeom prst="rect">
             <a:avLst/>
@@ -6832,7 +7040,7 @@
               </a:spcAft>
             </a:pPr>
             <a:r>
-              <a:rPr sz="2000" b="1">
+              <a:rPr sz="1900" b="1">
                 <a:solidFill>
                   <a:srgbClr val="FFFFFF"/>
                 </a:solidFill>
@@ -6851,7 +7059,7 @@
         </p:nvSpPr>
         <p:spPr>
           <a:xfrm>
-            <a:off x="1508760" y="2807208"/>
+            <a:off x="1554480" y="2734055"/>
             <a:ext cx="10058400" cy="365760"/>
           </a:xfrm>
           <a:prstGeom prst="rect">
@@ -6893,8 +7101,8 @@
         </p:nvSpPr>
         <p:spPr>
           <a:xfrm>
-            <a:off x="1508760" y="3182112"/>
-            <a:ext cx="10241280" cy="457200"/>
+            <a:off x="1554480" y="3099815"/>
+            <a:ext cx="10332720" cy="457200"/>
           </a:xfrm>
           <a:prstGeom prst="rect">
             <a:avLst/>
@@ -6922,24 +7130,26 @@
                 </a:solidFill>
                 <a:latin typeface="Calibri"/>
               </a:rPr>
-              <a:t>For each: read a real (unnamed) crisis, decide Buy/Hold/Sell on the phone, then the host reveals what the market did.</a:t>
-            </a:r>
-          </a:p>
-        </p:txBody>
-      </p:sp>
-      <p:sp>
-        <p:nvSpPr>
-          <p:cNvPr id="14" name="Rectangle 13"/>
+              <a:t>For each: read a real (unnamed) crisis, decide Buy / Hold / Sell on the phone, then the host reveals what the market did.</a:t>
+            </a:r>
+          </a:p>
+        </p:txBody>
+      </p:sp>
+      <p:sp>
+        <p:nvSpPr>
+          <p:cNvPr id="14" name="Rounded Rectangle 13"/>
           <p:cNvSpPr/>
           <p:nvPr/>
         </p:nvSpPr>
         <p:spPr>
           <a:xfrm>
-            <a:off x="822960" y="3739896"/>
-            <a:ext cx="475488" cy="475488"/>
-          </a:xfrm>
-          <a:prstGeom prst="rect">
-            <a:avLst/>
+            <a:off x="868680" y="3703319"/>
+            <a:ext cx="457200" cy="457200"/>
+          </a:xfrm>
+          <a:prstGeom prst="roundRect">
+            <a:avLst>
+              <a:gd name="adj" fmla="val 3500"/>
+            </a:avLst>
           </a:prstGeom>
           <a:solidFill>
             <a:srgbClr val="008074"/>
@@ -6979,8 +7189,8 @@
         </p:nvSpPr>
         <p:spPr>
           <a:xfrm>
-            <a:off x="822960" y="3712464"/>
-            <a:ext cx="475488" cy="475488"/>
+            <a:off x="868680" y="3675887"/>
+            <a:ext cx="457200" cy="457200"/>
           </a:xfrm>
           <a:prstGeom prst="rect">
             <a:avLst/>
@@ -7002,7 +7212,7 @@
               </a:spcAft>
             </a:pPr>
             <a:r>
-              <a:rPr sz="2000" b="1">
+              <a:rPr sz="1900" b="1">
                 <a:solidFill>
                   <a:srgbClr val="FFFFFF"/>
                 </a:solidFill>
@@ -7021,7 +7231,7 @@
         </p:nvSpPr>
         <p:spPr>
           <a:xfrm>
-            <a:off x="1508760" y="3694176"/>
+            <a:off x="1554480" y="3648455"/>
             <a:ext cx="10058400" cy="365760"/>
           </a:xfrm>
           <a:prstGeom prst="rect">
@@ -7063,8 +7273,8 @@
         </p:nvSpPr>
         <p:spPr>
           <a:xfrm>
-            <a:off x="1508760" y="4069080"/>
-            <a:ext cx="10241280" cy="457200"/>
+            <a:off x="1554480" y="4014215"/>
+            <a:ext cx="10332720" cy="457200"/>
           </a:xfrm>
           <a:prstGeom prst="rect">
             <a:avLst/>
@@ -7099,17 +7309,19 @@
       </p:sp>
       <p:sp>
         <p:nvSpPr>
-          <p:cNvPr id="18" name="Rectangle 17"/>
+          <p:cNvPr id="18" name="Rounded Rectangle 17"/>
           <p:cNvSpPr/>
           <p:nvPr/>
         </p:nvSpPr>
         <p:spPr>
           <a:xfrm>
-            <a:off x="822960" y="4626864"/>
-            <a:ext cx="475488" cy="475488"/>
-          </a:xfrm>
-          <a:prstGeom prst="rect">
-            <a:avLst/>
+            <a:off x="868680" y="4617719"/>
+            <a:ext cx="457200" cy="457200"/>
+          </a:xfrm>
+          <a:prstGeom prst="roundRect">
+            <a:avLst>
+              <a:gd name="adj" fmla="val 3500"/>
+            </a:avLst>
           </a:prstGeom>
           <a:solidFill>
             <a:srgbClr val="008074"/>
@@ -7149,8 +7361,8 @@
         </p:nvSpPr>
         <p:spPr>
           <a:xfrm>
-            <a:off x="822960" y="4599432"/>
-            <a:ext cx="475488" cy="475488"/>
+            <a:off x="868680" y="4590287"/>
+            <a:ext cx="457200" cy="457200"/>
           </a:xfrm>
           <a:prstGeom prst="rect">
             <a:avLst/>
@@ -7172,7 +7384,7 @@
               </a:spcAft>
             </a:pPr>
             <a:r>
-              <a:rPr sz="2000" b="1">
+              <a:rPr sz="1900" b="1">
                 <a:solidFill>
                   <a:srgbClr val="FFFFFF"/>
                 </a:solidFill>
@@ -7191,7 +7403,7 @@
         </p:nvSpPr>
         <p:spPr>
           <a:xfrm>
-            <a:off x="1508760" y="4581144"/>
+            <a:off x="1554480" y="4562855"/>
             <a:ext cx="10058400" cy="365760"/>
           </a:xfrm>
           <a:prstGeom prst="rect">
@@ -7233,8 +7445,8 @@
         </p:nvSpPr>
         <p:spPr>
           <a:xfrm>
-            <a:off x="1508760" y="4956048"/>
-            <a:ext cx="10241280" cy="457200"/>
+            <a:off x="1554480" y="4928615"/>
+            <a:ext cx="10332720" cy="457200"/>
           </a:xfrm>
           <a:prstGeom prst="rect">
             <a:avLst/>
@@ -7269,17 +7481,19 @@
       </p:sp>
       <p:sp>
         <p:nvSpPr>
-          <p:cNvPr id="22" name="Rectangle 21"/>
+          <p:cNvPr id="22" name="Rounded Rectangle 21"/>
           <p:cNvSpPr/>
           <p:nvPr/>
         </p:nvSpPr>
         <p:spPr>
           <a:xfrm>
-            <a:off x="822960" y="5513832"/>
-            <a:ext cx="475488" cy="475488"/>
-          </a:xfrm>
-          <a:prstGeom prst="rect">
-            <a:avLst/>
+            <a:off x="868680" y="5532119"/>
+            <a:ext cx="457200" cy="457200"/>
+          </a:xfrm>
+          <a:prstGeom prst="roundRect">
+            <a:avLst>
+              <a:gd name="adj" fmla="val 3500"/>
+            </a:avLst>
           </a:prstGeom>
           <a:solidFill>
             <a:srgbClr val="008074"/>
@@ -7319,8 +7533,8 @@
         </p:nvSpPr>
         <p:spPr>
           <a:xfrm>
-            <a:off x="822960" y="5486400"/>
-            <a:ext cx="475488" cy="475488"/>
+            <a:off x="868680" y="5504687"/>
+            <a:ext cx="457200" cy="457200"/>
           </a:xfrm>
           <a:prstGeom prst="rect">
             <a:avLst/>
@@ -7342,7 +7556,7 @@
               </a:spcAft>
             </a:pPr>
             <a:r>
-              <a:rPr sz="2000" b="1">
+              <a:rPr sz="1900" b="1">
                 <a:solidFill>
                   <a:srgbClr val="FFFFFF"/>
                 </a:solidFill>
@@ -7361,7 +7575,7 @@
         </p:nvSpPr>
         <p:spPr>
           <a:xfrm>
-            <a:off x="1508760" y="5468112"/>
+            <a:off x="1554480" y="5477255"/>
             <a:ext cx="10058400" cy="365760"/>
           </a:xfrm>
           <a:prstGeom prst="rect">
@@ -7403,8 +7617,8 @@
         </p:nvSpPr>
         <p:spPr>
           <a:xfrm>
-            <a:off x="1508760" y="5843016"/>
-            <a:ext cx="10241280" cy="457200"/>
+            <a:off x="1554480" y="5843015"/>
+            <a:ext cx="10332720" cy="457200"/>
           </a:xfrm>
           <a:prstGeom prst="rect">
             <a:avLst/>
@@ -7445,8 +7659,8 @@
         </p:nvSpPr>
         <p:spPr>
           <a:xfrm>
-            <a:off x="0" y="6565392"/>
-            <a:ext cx="12191695" cy="292608"/>
+            <a:off x="0" y="6583680"/>
+            <a:ext cx="12191695" cy="274320"/>
           </a:xfrm>
           <a:prstGeom prst="rect">
             <a:avLst/>
@@ -7489,8 +7703,8 @@
         </p:nvSpPr>
         <p:spPr>
           <a:xfrm>
-            <a:off x="0" y="6556248"/>
-            <a:ext cx="12191695" cy="292608"/>
+            <a:off x="0" y="6574536"/>
+            <a:ext cx="12191695" cy="274320"/>
           </a:xfrm>
           <a:prstGeom prst="rect">
             <a:avLst/>
@@ -7512,13 +7726,13 @@
               </a:spcAft>
             </a:pPr>
             <a:r>
-              <a:rPr sz="850" b="1" spc="150">
+              <a:rPr sz="800" b="1" spc="140">
                 <a:solidFill>
                   <a:srgbClr val="BCD0E6"/>
                 </a:solidFill>
                 <a:latin typeface="Calibri"/>
               </a:rPr>
-              <a:t>THE LONG GAME · LIVE ROOM      ·      HOW IT WORKS, AND WHY      ·      FOR INTERNAL USE ONLY</a:t>
+              <a:t>THE LONG GAME · LIVE ROOM      ·      HOW IT WORKS, AND WHY      ·      INTERNAL USE ONLY</a:t>
             </a:r>
           </a:p>
         </p:txBody>
@@ -7593,8 +7807,8 @@
         </p:nvSpPr>
         <p:spPr>
           <a:xfrm>
-            <a:off x="548640" y="457200"/>
-            <a:ext cx="4343400" cy="365760"/>
+            <a:off x="640080" y="566928"/>
+            <a:ext cx="4892040" cy="365760"/>
           </a:xfrm>
           <a:prstGeom prst="rect">
             <a:avLst/>
@@ -7616,7 +7830,7 @@
               </a:spcAft>
             </a:pPr>
             <a:r>
-              <a:rPr sz="1200" b="1" spc="200">
+              <a:rPr sz="1150" b="1" spc="180">
                 <a:solidFill>
                   <a:srgbClr val="008074"/>
                 </a:solidFill>
@@ -7635,8 +7849,97 @@
         </p:nvSpPr>
         <p:spPr>
           <a:xfrm>
-            <a:off x="548640" y="804672"/>
-            <a:ext cx="4343400" cy="1097280"/>
+            <a:off x="640080" y="914400"/>
+            <a:ext cx="4892040" cy="1005840"/>
+          </a:xfrm>
+          <a:prstGeom prst="rect">
+            <a:avLst/>
+          </a:prstGeom>
+          <a:noFill/>
+        </p:spPr>
+        <p:txBody>
+          <a:bodyPr wrap="square" anchor="t">
+            <a:spAutoFit/>
+          </a:bodyPr>
+          <a:lstStyle/>
+          <a:p>
+            <a:pPr algn="l">
+              <a:lnSpc>
+                <a:spcPct val="102000"/>
+              </a:lnSpc>
+              <a:spcBef>
+                <a:spcPts val="0"/>
+              </a:spcBef>
+              <a:spcAft>
+                <a:spcPts val="400"/>
+              </a:spcAft>
+            </a:pPr>
+            <a:r>
+              <a:rPr sz="2600" b="1">
+                <a:solidFill>
+                  <a:srgbClr val="083469"/>
+                </a:solidFill>
+                <a:latin typeface="Calibri"/>
+              </a:rPr>
+              <a:t>The host screen</a:t>
+            </a:r>
+          </a:p>
+        </p:txBody>
+      </p:sp>
+      <p:sp>
+        <p:nvSpPr>
+          <p:cNvPr id="5" name="Rectangle 4"/>
+          <p:cNvSpPr/>
+          <p:nvPr/>
+        </p:nvSpPr>
+        <p:spPr>
+          <a:xfrm>
+            <a:off x="640080" y="1847088"/>
+            <a:ext cx="731520" cy="50800"/>
+          </a:xfrm>
+          <a:prstGeom prst="rect">
+            <a:avLst/>
+          </a:prstGeom>
+          <a:solidFill>
+            <a:srgbClr val="00D190"/>
+          </a:solidFill>
+          <a:ln>
+            <a:noFill/>
+          </a:ln>
+          <a:effectLst/>
+        </p:spPr>
+        <p:style>
+          <a:lnRef idx="1">
+            <a:schemeClr val="accent1"/>
+          </a:lnRef>
+          <a:fillRef idx="3">
+            <a:schemeClr val="accent1"/>
+          </a:fillRef>
+          <a:effectRef idx="2">
+            <a:schemeClr val="accent1"/>
+          </a:effectRef>
+          <a:fontRef idx="minor">
+            <a:schemeClr val="lt1"/>
+          </a:fontRef>
+        </p:style>
+        <p:txBody>
+          <a:bodyPr rtlCol="0" anchor="ctr"/>
+          <a:lstStyle/>
+          <a:p>
+            <a:pPr algn="ctr"/>
+          </a:p>
+        </p:txBody>
+      </p:sp>
+      <p:sp>
+        <p:nvSpPr>
+          <p:cNvPr id="6" name="TextBox 5"/>
+          <p:cNvSpPr txBox="1"/>
+          <p:nvPr/>
+        </p:nvSpPr>
+        <p:spPr>
+          <a:xfrm>
+            <a:off x="640080" y="2121408"/>
+            <a:ext cx="4892040" cy="274320"/>
           </a:xfrm>
           <a:prstGeom prst="rect">
             <a:avLst/>
@@ -7658,71 +7961,72 @@
               </a:spcAft>
             </a:pPr>
             <a:r>
-              <a:rPr sz="2700" b="1">
-                <a:solidFill>
-                  <a:srgbClr val="083469"/>
+              <a:rPr sz="1000" b="1" spc="140">
+                <a:solidFill>
+                  <a:srgbClr val="008074"/>
                 </a:solidFill>
                 <a:latin typeface="Calibri"/>
               </a:rPr>
-              <a:t>The host screen</a:t>
-            </a:r>
-          </a:p>
-        </p:txBody>
-      </p:sp>
-      <p:sp>
-        <p:nvSpPr>
-          <p:cNvPr id="5" name="Rectangle 4"/>
-          <p:cNvSpPr/>
-          <p:nvPr/>
-        </p:nvSpPr>
-        <p:spPr>
-          <a:xfrm>
-            <a:off x="548640" y="1874519"/>
-            <a:ext cx="777240" cy="50800"/>
-          </a:xfrm>
-          <a:prstGeom prst="rect">
-            <a:avLst/>
-          </a:prstGeom>
-          <a:solidFill>
-            <a:srgbClr val="00D190"/>
-          </a:solidFill>
-          <a:ln>
-            <a:noFill/>
-          </a:ln>
-          <a:effectLst/>
-        </p:spPr>
-        <p:style>
-          <a:lnRef idx="1">
-            <a:schemeClr val="accent1"/>
-          </a:lnRef>
-          <a:fillRef idx="3">
-            <a:schemeClr val="accent1"/>
-          </a:fillRef>
-          <a:effectRef idx="2">
-            <a:schemeClr val="accent1"/>
-          </a:effectRef>
-          <a:fontRef idx="minor">
-            <a:schemeClr val="lt1"/>
-          </a:fontRef>
-        </p:style>
-        <p:txBody>
-          <a:bodyPr rtlCol="0" anchor="ctr"/>
-          <a:lstStyle/>
-          <a:p>
-            <a:pPr algn="ctr"/>
-          </a:p>
-        </p:txBody>
-      </p:sp>
-      <p:sp>
-        <p:nvSpPr>
-          <p:cNvPr id="6" name="TextBox 5"/>
+              <a:t>WHAT HAPPENS</a:t>
+            </a:r>
+          </a:p>
+        </p:txBody>
+      </p:sp>
+      <p:sp>
+        <p:nvSpPr>
+          <p:cNvPr id="7" name="TextBox 6"/>
           <p:cNvSpPr txBox="1"/>
           <p:nvPr/>
         </p:nvSpPr>
         <p:spPr>
           <a:xfrm>
-            <a:off x="548640" y="2148840"/>
-            <a:ext cx="4343400" cy="292608"/>
+            <a:off x="640080" y="2414016"/>
+            <a:ext cx="4892040" cy="1828800"/>
+          </a:xfrm>
+          <a:prstGeom prst="rect">
+            <a:avLst/>
+          </a:prstGeom>
+          <a:noFill/>
+        </p:spPr>
+        <p:txBody>
+          <a:bodyPr wrap="square" anchor="t">
+            <a:spAutoFit/>
+          </a:bodyPr>
+          <a:lstStyle/>
+          <a:p>
+            <a:pPr algn="l">
+              <a:lnSpc>
+                <a:spcPct val="112000"/>
+              </a:lnSpc>
+              <a:spcBef>
+                <a:spcPts val="0"/>
+              </a:spcBef>
+              <a:spcAft>
+                <a:spcPts val="400"/>
+              </a:spcAft>
+            </a:pPr>
+            <a:r>
+              <a:rPr sz="1350" b="0">
+                <a:solidFill>
+                  <a:srgbClr val="22313F"/>
+                </a:solidFill>
+                <a:latin typeface="Calibri"/>
+              </a:rPr>
+              <a:t>The host opens the game on the big screen. It creates a room, a QR code, and one starting amount for the whole room. Players scan to join and their names appear.</a:t>
+            </a:r>
+          </a:p>
+        </p:txBody>
+      </p:sp>
+      <p:sp>
+        <p:nvSpPr>
+          <p:cNvPr id="8" name="TextBox 7"/>
+          <p:cNvSpPr txBox="1"/>
+          <p:nvPr/>
+        </p:nvSpPr>
+        <p:spPr>
+          <a:xfrm>
+            <a:off x="640080" y="4224528"/>
+            <a:ext cx="4892040" cy="274320"/>
           </a:xfrm>
           <a:prstGeom prst="rect">
             <a:avLst/>
@@ -7744,27 +8048,27 @@
               </a:spcAft>
             </a:pPr>
             <a:r>
-              <a:rPr sz="1050" b="1" spc="150">
-                <a:solidFill>
-                  <a:srgbClr val="008074"/>
+              <a:rPr sz="1000" b="1" spc="140">
+                <a:solidFill>
+                  <a:srgbClr val="831574"/>
                 </a:solidFill>
                 <a:latin typeface="Calibri"/>
               </a:rPr>
-              <a:t>WHAT HAPPENS</a:t>
-            </a:r>
-          </a:p>
-        </p:txBody>
-      </p:sp>
-      <p:sp>
-        <p:nvSpPr>
-          <p:cNvPr id="7" name="TextBox 6"/>
+              <a:t>THE THINKING</a:t>
+            </a:r>
+          </a:p>
+        </p:txBody>
+      </p:sp>
+      <p:sp>
+        <p:nvSpPr>
+          <p:cNvPr id="9" name="TextBox 8"/>
           <p:cNvSpPr txBox="1"/>
           <p:nvPr/>
         </p:nvSpPr>
         <p:spPr>
           <a:xfrm>
-            <a:off x="548640" y="2450592"/>
-            <a:ext cx="4343400" cy="1828800"/>
+            <a:off x="640080" y="4517136"/>
+            <a:ext cx="4892040" cy="1828800"/>
           </a:xfrm>
           <a:prstGeom prst="rect">
             <a:avLst/>
@@ -7778,6 +8082,9 @@
           <a:lstStyle/>
           <a:p>
             <a:pPr algn="l">
+              <a:lnSpc>
+                <a:spcPct val="112000"/>
+              </a:lnSpc>
               <a:spcBef>
                 <a:spcPts val="0"/>
               </a:spcBef>
@@ -7786,91 +8093,7 @@
               </a:spcAft>
             </a:pPr>
             <a:r>
-              <a:rPr sz="1400" b="0">
-                <a:solidFill>
-                  <a:srgbClr val="22313F"/>
-                </a:solidFill>
-                <a:latin typeface="Calibri"/>
-              </a:rPr>
-              <a:t>The host opens the game on the big screen. It creates a room, a QR code, and one starting amount for the whole room. Players scan to join and their names appear.</a:t>
-            </a:r>
-          </a:p>
-        </p:txBody>
-      </p:sp>
-      <p:sp>
-        <p:nvSpPr>
-          <p:cNvPr id="8" name="TextBox 7"/>
-          <p:cNvSpPr txBox="1"/>
-          <p:nvPr/>
-        </p:nvSpPr>
-        <p:spPr>
-          <a:xfrm>
-            <a:off x="548640" y="4160520"/>
-            <a:ext cx="4343400" cy="292608"/>
-          </a:xfrm>
-          <a:prstGeom prst="rect">
-            <a:avLst/>
-          </a:prstGeom>
-          <a:noFill/>
-        </p:spPr>
-        <p:txBody>
-          <a:bodyPr wrap="square" anchor="t">
-            <a:spAutoFit/>
-          </a:bodyPr>
-          <a:lstStyle/>
-          <a:p>
-            <a:pPr algn="l">
-              <a:spcBef>
-                <a:spcPts val="0"/>
-              </a:spcBef>
-              <a:spcAft>
-                <a:spcPts val="400"/>
-              </a:spcAft>
-            </a:pPr>
-            <a:r>
-              <a:rPr sz="1050" b="1" spc="150">
-                <a:solidFill>
-                  <a:srgbClr val="831574"/>
-                </a:solidFill>
-                <a:latin typeface="Calibri"/>
-              </a:rPr>
-              <a:t>THE THINKING</a:t>
-            </a:r>
-          </a:p>
-        </p:txBody>
-      </p:sp>
-      <p:sp>
-        <p:nvSpPr>
-          <p:cNvPr id="9" name="TextBox 8"/>
-          <p:cNvSpPr txBox="1"/>
-          <p:nvPr/>
-        </p:nvSpPr>
-        <p:spPr>
-          <a:xfrm>
-            <a:off x="548640" y="4462272"/>
-            <a:ext cx="4343400" cy="1920240"/>
-          </a:xfrm>
-          <a:prstGeom prst="rect">
-            <a:avLst/>
-          </a:prstGeom>
-          <a:noFill/>
-        </p:spPr>
-        <p:txBody>
-          <a:bodyPr wrap="square" anchor="t">
-            <a:spAutoFit/>
-          </a:bodyPr>
-          <a:lstStyle/>
-          <a:p>
-            <a:pPr algn="l">
-              <a:spcBef>
-                <a:spcPts val="0"/>
-              </a:spcBef>
-              <a:spcAft>
-                <a:spcPts val="400"/>
-              </a:spcAft>
-            </a:pPr>
-            <a:r>
-              <a:rPr sz="1400" b="0">
+              <a:rPr sz="1350" b="0">
                 <a:solidFill>
                   <a:srgbClr val="22313F"/>
                 </a:solidFill>
@@ -7881,9 +8104,55 @@
           </a:p>
         </p:txBody>
       </p:sp>
+      <p:sp>
+        <p:nvSpPr>
+          <p:cNvPr id="10" name="Rounded Rectangle 9"/>
+          <p:cNvSpPr/>
+          <p:nvPr/>
+        </p:nvSpPr>
+        <p:spPr>
+          <a:xfrm>
+            <a:off x="5742432" y="418228"/>
+            <a:ext cx="6208776" cy="5966680"/>
+          </a:xfrm>
+          <a:prstGeom prst="roundRect">
+            <a:avLst>
+              <a:gd name="adj" fmla="val 3500"/>
+            </a:avLst>
+          </a:prstGeom>
+          <a:solidFill>
+            <a:srgbClr val="EEF3F6"/>
+          </a:solidFill>
+          <a:ln>
+            <a:noFill/>
+          </a:ln>
+          <a:effectLst/>
+        </p:spPr>
+        <p:style>
+          <a:lnRef idx="1">
+            <a:schemeClr val="accent1"/>
+          </a:lnRef>
+          <a:fillRef idx="3">
+            <a:schemeClr val="accent1"/>
+          </a:fillRef>
+          <a:effectRef idx="2">
+            <a:schemeClr val="accent1"/>
+          </a:effectRef>
+          <a:fontRef idx="minor">
+            <a:schemeClr val="lt1"/>
+          </a:fontRef>
+        </p:style>
+        <p:txBody>
+          <a:bodyPr rtlCol="0" anchor="ctr"/>
+          <a:lstStyle/>
+          <a:p>
+            <a:pPr algn="ctr"/>
+          </a:p>
+        </p:txBody>
+      </p:sp>
       <p:pic>
         <p:nvPicPr>
-          <p:cNvPr id="10" name="Picture 9" descr="host-lobby.png"/>
+          <p:cNvPr id="11" name="Picture 10" descr="host-lobby.png"/>
           <p:cNvPicPr>
             <a:picLocks noChangeAspect="1"/>
           </p:cNvPicPr>
@@ -7897,29 +8166,29 @@
         </p:blipFill>
         <p:spPr>
           <a:xfrm>
-            <a:off x="5074920" y="1285875"/>
-            <a:ext cx="6858000" cy="4286250"/>
+            <a:off x="5943600" y="619396"/>
+            <a:ext cx="5806440" cy="5564344"/>
           </a:xfrm>
           <a:prstGeom prst="rect">
             <a:avLst/>
           </a:prstGeom>
           <a:ln w="9525">
             <a:solidFill>
-              <a:srgbClr val="DBE4EA"/>
+              <a:srgbClr val="D5DFE6"/>
             </a:solidFill>
           </a:ln>
         </p:spPr>
       </p:pic>
       <p:sp>
         <p:nvSpPr>
-          <p:cNvPr id="11" name="Rectangle 10"/>
+          <p:cNvPr id="12" name="Rectangle 11"/>
           <p:cNvSpPr/>
           <p:nvPr/>
         </p:nvSpPr>
         <p:spPr>
           <a:xfrm>
-            <a:off x="0" y="6565392"/>
-            <a:ext cx="12191695" cy="292608"/>
+            <a:off x="0" y="6583680"/>
+            <a:ext cx="12191695" cy="274320"/>
           </a:xfrm>
           <a:prstGeom prst="rect">
             <a:avLst/>
@@ -7956,14 +8225,14 @@
       </p:sp>
       <p:sp>
         <p:nvSpPr>
-          <p:cNvPr id="12" name="TextBox 11"/>
+          <p:cNvPr id="13" name="TextBox 12"/>
           <p:cNvSpPr txBox="1"/>
           <p:nvPr/>
         </p:nvSpPr>
         <p:spPr>
           <a:xfrm>
-            <a:off x="0" y="6556248"/>
-            <a:ext cx="12191695" cy="292608"/>
+            <a:off x="0" y="6574536"/>
+            <a:ext cx="12191695" cy="274320"/>
           </a:xfrm>
           <a:prstGeom prst="rect">
             <a:avLst/>
@@ -7985,13 +8254,13 @@
               </a:spcAft>
             </a:pPr>
             <a:r>
-              <a:rPr sz="850" b="1" spc="150">
+              <a:rPr sz="800" b="1" spc="140">
                 <a:solidFill>
                   <a:srgbClr val="BCD0E6"/>
                 </a:solidFill>
                 <a:latin typeface="Calibri"/>
               </a:rPr>
-              <a:t>THE LONG GAME · LIVE ROOM      ·      HOW IT WORKS, AND WHY      ·      FOR INTERNAL USE ONLY</a:t>
+              <a:t>THE LONG GAME · LIVE ROOM      ·      HOW IT WORKS, AND WHY      ·      INTERNAL USE ONLY</a:t>
             </a:r>
           </a:p>
         </p:txBody>
@@ -8066,8 +8335,8 @@
         </p:nvSpPr>
         <p:spPr>
           <a:xfrm>
-            <a:off x="548640" y="457200"/>
-            <a:ext cx="4343400" cy="365760"/>
+            <a:off x="640080" y="566928"/>
+            <a:ext cx="4892040" cy="365760"/>
           </a:xfrm>
           <a:prstGeom prst="rect">
             <a:avLst/>
@@ -8089,7 +8358,7 @@
               </a:spcAft>
             </a:pPr>
             <a:r>
-              <a:rPr sz="1200" b="1" spc="200">
+              <a:rPr sz="1150" b="1" spc="180">
                 <a:solidFill>
                   <a:srgbClr val="008074"/>
                 </a:solidFill>
@@ -8108,8 +8377,97 @@
         </p:nvSpPr>
         <p:spPr>
           <a:xfrm>
-            <a:off x="548640" y="804672"/>
-            <a:ext cx="4343400" cy="1097280"/>
+            <a:off x="640080" y="914400"/>
+            <a:ext cx="4892040" cy="1005840"/>
+          </a:xfrm>
+          <a:prstGeom prst="rect">
+            <a:avLst/>
+          </a:prstGeom>
+          <a:noFill/>
+        </p:spPr>
+        <p:txBody>
+          <a:bodyPr wrap="square" anchor="t">
+            <a:spAutoFit/>
+          </a:bodyPr>
+          <a:lstStyle/>
+          <a:p>
+            <a:pPr algn="l">
+              <a:lnSpc>
+                <a:spcPct val="102000"/>
+              </a:lnSpc>
+              <a:spcBef>
+                <a:spcPts val="0"/>
+              </a:spcBef>
+              <a:spcAft>
+                <a:spcPts val="400"/>
+              </a:spcAft>
+            </a:pPr>
+            <a:r>
+              <a:rPr sz="2600" b="1">
+                <a:solidFill>
+                  <a:srgbClr val="083469"/>
+                </a:solidFill>
+                <a:latin typeface="Calibri"/>
+              </a:rPr>
+              <a:t>The starting split</a:t>
+            </a:r>
+          </a:p>
+        </p:txBody>
+      </p:sp>
+      <p:sp>
+        <p:nvSpPr>
+          <p:cNvPr id="5" name="Rectangle 4"/>
+          <p:cNvSpPr/>
+          <p:nvPr/>
+        </p:nvSpPr>
+        <p:spPr>
+          <a:xfrm>
+            <a:off x="640080" y="1847088"/>
+            <a:ext cx="731520" cy="50800"/>
+          </a:xfrm>
+          <a:prstGeom prst="rect">
+            <a:avLst/>
+          </a:prstGeom>
+          <a:solidFill>
+            <a:srgbClr val="00D190"/>
+          </a:solidFill>
+          <a:ln>
+            <a:noFill/>
+          </a:ln>
+          <a:effectLst/>
+        </p:spPr>
+        <p:style>
+          <a:lnRef idx="1">
+            <a:schemeClr val="accent1"/>
+          </a:lnRef>
+          <a:fillRef idx="3">
+            <a:schemeClr val="accent1"/>
+          </a:fillRef>
+          <a:effectRef idx="2">
+            <a:schemeClr val="accent1"/>
+          </a:effectRef>
+          <a:fontRef idx="minor">
+            <a:schemeClr val="lt1"/>
+          </a:fontRef>
+        </p:style>
+        <p:txBody>
+          <a:bodyPr rtlCol="0" anchor="ctr"/>
+          <a:lstStyle/>
+          <a:p>
+            <a:pPr algn="ctr"/>
+          </a:p>
+        </p:txBody>
+      </p:sp>
+      <p:sp>
+        <p:nvSpPr>
+          <p:cNvPr id="6" name="TextBox 5"/>
+          <p:cNvSpPr txBox="1"/>
+          <p:nvPr/>
+        </p:nvSpPr>
+        <p:spPr>
+          <a:xfrm>
+            <a:off x="640080" y="2121408"/>
+            <a:ext cx="4892040" cy="274320"/>
           </a:xfrm>
           <a:prstGeom prst="rect">
             <a:avLst/>
@@ -8131,71 +8489,72 @@
               </a:spcAft>
             </a:pPr>
             <a:r>
-              <a:rPr sz="2700" b="1">
-                <a:solidFill>
-                  <a:srgbClr val="083469"/>
+              <a:rPr sz="1000" b="1" spc="140">
+                <a:solidFill>
+                  <a:srgbClr val="008074"/>
                 </a:solidFill>
                 <a:latin typeface="Calibri"/>
               </a:rPr>
-              <a:t>The starting split</a:t>
-            </a:r>
-          </a:p>
-        </p:txBody>
-      </p:sp>
-      <p:sp>
-        <p:nvSpPr>
-          <p:cNvPr id="5" name="Rectangle 4"/>
-          <p:cNvSpPr/>
-          <p:nvPr/>
-        </p:nvSpPr>
-        <p:spPr>
-          <a:xfrm>
-            <a:off x="548640" y="1874519"/>
-            <a:ext cx="777240" cy="50800"/>
-          </a:xfrm>
-          <a:prstGeom prst="rect">
-            <a:avLst/>
-          </a:prstGeom>
-          <a:solidFill>
-            <a:srgbClr val="00D190"/>
-          </a:solidFill>
-          <a:ln>
-            <a:noFill/>
-          </a:ln>
-          <a:effectLst/>
-        </p:spPr>
-        <p:style>
-          <a:lnRef idx="1">
-            <a:schemeClr val="accent1"/>
-          </a:lnRef>
-          <a:fillRef idx="3">
-            <a:schemeClr val="accent1"/>
-          </a:fillRef>
-          <a:effectRef idx="2">
-            <a:schemeClr val="accent1"/>
-          </a:effectRef>
-          <a:fontRef idx="minor">
-            <a:schemeClr val="lt1"/>
-          </a:fontRef>
-        </p:style>
-        <p:txBody>
-          <a:bodyPr rtlCol="0" anchor="ctr"/>
-          <a:lstStyle/>
-          <a:p>
-            <a:pPr algn="ctr"/>
-          </a:p>
-        </p:txBody>
-      </p:sp>
-      <p:sp>
-        <p:nvSpPr>
-          <p:cNvPr id="6" name="TextBox 5"/>
+              <a:t>WHAT HAPPENS</a:t>
+            </a:r>
+          </a:p>
+        </p:txBody>
+      </p:sp>
+      <p:sp>
+        <p:nvSpPr>
+          <p:cNvPr id="7" name="TextBox 6"/>
           <p:cNvSpPr txBox="1"/>
           <p:nvPr/>
         </p:nvSpPr>
         <p:spPr>
           <a:xfrm>
-            <a:off x="548640" y="2148840"/>
-            <a:ext cx="4343400" cy="292608"/>
+            <a:off x="640080" y="2414016"/>
+            <a:ext cx="4892040" cy="1828800"/>
+          </a:xfrm>
+          <a:prstGeom prst="rect">
+            <a:avLst/>
+          </a:prstGeom>
+          <a:noFill/>
+        </p:spPr>
+        <p:txBody>
+          <a:bodyPr wrap="square" anchor="t">
+            <a:spAutoFit/>
+          </a:bodyPr>
+          <a:lstStyle/>
+          <a:p>
+            <a:pPr algn="l">
+              <a:lnSpc>
+                <a:spcPct val="112000"/>
+              </a:lnSpc>
+              <a:spcBef>
+                <a:spcPts val="0"/>
+              </a:spcBef>
+              <a:spcAft>
+                <a:spcPts val="400"/>
+              </a:spcAft>
+            </a:pPr>
+            <a:r>
+              <a:rPr sz="1350" b="0">
+                <a:solidFill>
+                  <a:srgbClr val="22313F"/>
+                </a:solidFill>
+                <a:latin typeface="Calibri"/>
+              </a:rPr>
+              <a:t>After joining, each player sets how much of their money starts invested versus held in cash — their own choice, on their own phone.</a:t>
+            </a:r>
+          </a:p>
+        </p:txBody>
+      </p:sp>
+      <p:sp>
+        <p:nvSpPr>
+          <p:cNvPr id="8" name="TextBox 7"/>
+          <p:cNvSpPr txBox="1"/>
+          <p:nvPr/>
+        </p:nvSpPr>
+        <p:spPr>
+          <a:xfrm>
+            <a:off x="640080" y="4224528"/>
+            <a:ext cx="4892040" cy="274320"/>
           </a:xfrm>
           <a:prstGeom prst="rect">
             <a:avLst/>
@@ -8217,27 +8576,27 @@
               </a:spcAft>
             </a:pPr>
             <a:r>
-              <a:rPr sz="1050" b="1" spc="150">
-                <a:solidFill>
-                  <a:srgbClr val="008074"/>
+              <a:rPr sz="1000" b="1" spc="140">
+                <a:solidFill>
+                  <a:srgbClr val="831574"/>
                 </a:solidFill>
                 <a:latin typeface="Calibri"/>
               </a:rPr>
-              <a:t>WHAT HAPPENS</a:t>
-            </a:r>
-          </a:p>
-        </p:txBody>
-      </p:sp>
-      <p:sp>
-        <p:nvSpPr>
-          <p:cNvPr id="7" name="TextBox 6"/>
+              <a:t>THE THINKING</a:t>
+            </a:r>
+          </a:p>
+        </p:txBody>
+      </p:sp>
+      <p:sp>
+        <p:nvSpPr>
+          <p:cNvPr id="9" name="TextBox 8"/>
           <p:cNvSpPr txBox="1"/>
           <p:nvPr/>
         </p:nvSpPr>
         <p:spPr>
           <a:xfrm>
-            <a:off x="548640" y="2450592"/>
-            <a:ext cx="4343400" cy="1828800"/>
+            <a:off x="640080" y="4517136"/>
+            <a:ext cx="4892040" cy="1828800"/>
           </a:xfrm>
           <a:prstGeom prst="rect">
             <a:avLst/>
@@ -8251,6 +8610,9 @@
           <a:lstStyle/>
           <a:p>
             <a:pPr algn="l">
+              <a:lnSpc>
+                <a:spcPct val="112000"/>
+              </a:lnSpc>
               <a:spcBef>
                 <a:spcPts val="0"/>
               </a:spcBef>
@@ -8259,104 +8621,66 @@
               </a:spcAft>
             </a:pPr>
             <a:r>
-              <a:rPr sz="1400" b="0">
+              <a:rPr sz="1350" b="0">
                 <a:solidFill>
                   <a:srgbClr val="22313F"/>
                 </a:solidFill>
                 <a:latin typeface="Calibri"/>
               </a:rPr>
-              <a:t>After joining, each player sets how much of their money starts invested versus held in cash — their own choice, on their own phone.</a:t>
-            </a:r>
-          </a:p>
-        </p:txBody>
-      </p:sp>
-      <p:sp>
-        <p:nvSpPr>
-          <p:cNvPr id="8" name="TextBox 7"/>
-          <p:cNvSpPr txBox="1"/>
-          <p:nvPr/>
-        </p:nvSpPr>
-        <p:spPr>
-          <a:xfrm>
-            <a:off x="548640" y="4160520"/>
-            <a:ext cx="4343400" cy="292608"/>
-          </a:xfrm>
-          <a:prstGeom prst="rect">
-            <a:avLst/>
-          </a:prstGeom>
-          <a:noFill/>
-        </p:spPr>
-        <p:txBody>
-          <a:bodyPr wrap="square" anchor="t">
-            <a:spAutoFit/>
-          </a:bodyPr>
-          <a:lstStyle/>
-          <a:p>
-            <a:pPr algn="l">
-              <a:spcBef>
-                <a:spcPts val="0"/>
-              </a:spcBef>
-              <a:spcAft>
-                <a:spcPts val="400"/>
-              </a:spcAft>
-            </a:pPr>
-            <a:r>
-              <a:rPr sz="1050" b="1" spc="150">
-                <a:solidFill>
-                  <a:srgbClr val="831574"/>
-                </a:solidFill>
-                <a:latin typeface="Calibri"/>
-              </a:rPr>
-              <a:t>THE THINKING</a:t>
-            </a:r>
-          </a:p>
-        </p:txBody>
-      </p:sp>
-      <p:sp>
-        <p:nvSpPr>
-          <p:cNvPr id="9" name="TextBox 8"/>
-          <p:cNvSpPr txBox="1"/>
-          <p:nvPr/>
-        </p:nvSpPr>
-        <p:spPr>
-          <a:xfrm>
-            <a:off x="548640" y="4462272"/>
-            <a:ext cx="4343400" cy="1920240"/>
-          </a:xfrm>
-          <a:prstGeom prst="rect">
-            <a:avLst/>
-          </a:prstGeom>
-          <a:noFill/>
-        </p:spPr>
-        <p:txBody>
-          <a:bodyPr wrap="square" anchor="t">
-            <a:spAutoFit/>
-          </a:bodyPr>
-          <a:lstStyle/>
-          <a:p>
-            <a:pPr algn="l">
-              <a:spcBef>
-                <a:spcPts val="0"/>
-              </a:spcBef>
-              <a:spcAft>
-                <a:spcPts val="400"/>
-              </a:spcAft>
-            </a:pPr>
-            <a:r>
-              <a:rPr sz="1400" b="0">
-                <a:solidFill>
-                  <a:srgbClr val="22313F"/>
-                </a:solidFill>
-                <a:latin typeface="Calibri"/>
-              </a:rPr>
-              <a:t>Cash feels safe, but the benchmark stays fully invested from day one, so holding back is measured as a real cost later. It turns allocation into a live decision rather than an assumption.</a:t>
-            </a:r>
+              <a:t>Cash feels safe, but the benchmark stays fully invested from day one, so holding back is measured as a real cost later. It makes allocation a live decision, not an assumption.</a:t>
+            </a:r>
+          </a:p>
+        </p:txBody>
+      </p:sp>
+      <p:sp>
+        <p:nvSpPr>
+          <p:cNvPr id="10" name="Rounded Rectangle 9"/>
+          <p:cNvSpPr/>
+          <p:nvPr/>
+        </p:nvSpPr>
+        <p:spPr>
+          <a:xfrm>
+            <a:off x="6631973" y="365760"/>
+            <a:ext cx="4429693" cy="6071616"/>
+          </a:xfrm>
+          <a:prstGeom prst="roundRect">
+            <a:avLst>
+              <a:gd name="adj" fmla="val 3500"/>
+            </a:avLst>
+          </a:prstGeom>
+          <a:solidFill>
+            <a:srgbClr val="EEF3F6"/>
+          </a:solidFill>
+          <a:ln>
+            <a:noFill/>
+          </a:ln>
+          <a:effectLst/>
+        </p:spPr>
+        <p:style>
+          <a:lnRef idx="1">
+            <a:schemeClr val="accent1"/>
+          </a:lnRef>
+          <a:fillRef idx="3">
+            <a:schemeClr val="accent1"/>
+          </a:fillRef>
+          <a:effectRef idx="2">
+            <a:schemeClr val="accent1"/>
+          </a:effectRef>
+          <a:fontRef idx="minor">
+            <a:schemeClr val="lt1"/>
+          </a:fontRef>
+        </p:style>
+        <p:txBody>
+          <a:bodyPr rtlCol="0" anchor="ctr"/>
+          <a:lstStyle/>
+          <a:p>
+            <a:pPr algn="ctr"/>
           </a:p>
         </p:txBody>
       </p:sp>
       <p:pic>
         <p:nvPicPr>
-          <p:cNvPr id="10" name="Picture 9" descr="phone-alloc.png"/>
+          <p:cNvPr id="11" name="Picture 10" descr="phone-alloc.png"/>
           <p:cNvPicPr>
             <a:picLocks noChangeAspect="1"/>
           </p:cNvPicPr>
@@ -8370,29 +8694,29 @@
         </p:blipFill>
         <p:spPr>
           <a:xfrm>
-            <a:off x="7488936" y="457200"/>
-            <a:ext cx="2852928" cy="5852160"/>
+            <a:off x="6833141" y="566928"/>
+            <a:ext cx="4027357" cy="5669280"/>
           </a:xfrm>
           <a:prstGeom prst="rect">
             <a:avLst/>
           </a:prstGeom>
           <a:ln w="9525">
             <a:solidFill>
-              <a:srgbClr val="DBE4EA"/>
+              <a:srgbClr val="D5DFE6"/>
             </a:solidFill>
           </a:ln>
         </p:spPr>
       </p:pic>
       <p:sp>
         <p:nvSpPr>
-          <p:cNvPr id="11" name="Rectangle 10"/>
+          <p:cNvPr id="12" name="Rectangle 11"/>
           <p:cNvSpPr/>
           <p:nvPr/>
         </p:nvSpPr>
         <p:spPr>
           <a:xfrm>
-            <a:off x="0" y="6565392"/>
-            <a:ext cx="12191695" cy="292608"/>
+            <a:off x="0" y="6583680"/>
+            <a:ext cx="12191695" cy="274320"/>
           </a:xfrm>
           <a:prstGeom prst="rect">
             <a:avLst/>
@@ -8429,14 +8753,14 @@
       </p:sp>
       <p:sp>
         <p:nvSpPr>
-          <p:cNvPr id="12" name="TextBox 11"/>
+          <p:cNvPr id="13" name="TextBox 12"/>
           <p:cNvSpPr txBox="1"/>
           <p:nvPr/>
         </p:nvSpPr>
         <p:spPr>
           <a:xfrm>
-            <a:off x="0" y="6556248"/>
-            <a:ext cx="12191695" cy="292608"/>
+            <a:off x="0" y="6574536"/>
+            <a:ext cx="12191695" cy="274320"/>
           </a:xfrm>
           <a:prstGeom prst="rect">
             <a:avLst/>
@@ -8458,13 +8782,13 @@
               </a:spcAft>
             </a:pPr>
             <a:r>
-              <a:rPr sz="850" b="1" spc="150">
+              <a:rPr sz="800" b="1" spc="140">
                 <a:solidFill>
                   <a:srgbClr val="BCD0E6"/>
                 </a:solidFill>
                 <a:latin typeface="Calibri"/>
               </a:rPr>
-              <a:t>THE LONG GAME · LIVE ROOM      ·      HOW IT WORKS, AND WHY      ·      FOR INTERNAL USE ONLY</a:t>
+              <a:t>THE LONG GAME · LIVE ROOM      ·      HOW IT WORKS, AND WHY      ·      INTERNAL USE ONLY</a:t>
             </a:r>
           </a:p>
         </p:txBody>
@@ -8539,8 +8863,8 @@
         </p:nvSpPr>
         <p:spPr>
           <a:xfrm>
-            <a:off x="548640" y="457200"/>
-            <a:ext cx="4343400" cy="365760"/>
+            <a:off x="640080" y="566928"/>
+            <a:ext cx="4892040" cy="365760"/>
           </a:xfrm>
           <a:prstGeom prst="rect">
             <a:avLst/>
@@ -8562,7 +8886,7 @@
               </a:spcAft>
             </a:pPr>
             <a:r>
-              <a:rPr sz="1200" b="1" spc="200">
+              <a:rPr sz="1150" b="1" spc="180">
                 <a:solidFill>
                   <a:srgbClr val="008074"/>
                 </a:solidFill>
@@ -8581,8 +8905,97 @@
         </p:nvSpPr>
         <p:spPr>
           <a:xfrm>
-            <a:off x="548640" y="804672"/>
-            <a:ext cx="4343400" cy="1097280"/>
+            <a:off x="640080" y="914400"/>
+            <a:ext cx="4892040" cy="1005840"/>
+          </a:xfrm>
+          <a:prstGeom prst="rect">
+            <a:avLst/>
+          </a:prstGeom>
+          <a:noFill/>
+        </p:spPr>
+        <p:txBody>
+          <a:bodyPr wrap="square" anchor="t">
+            <a:spAutoFit/>
+          </a:bodyPr>
+          <a:lstStyle/>
+          <a:p>
+            <a:pPr algn="l">
+              <a:lnSpc>
+                <a:spcPct val="102000"/>
+              </a:lnSpc>
+              <a:spcBef>
+                <a:spcPts val="0"/>
+              </a:spcBef>
+              <a:spcAft>
+                <a:spcPts val="400"/>
+              </a:spcAft>
+            </a:pPr>
+            <a:r>
+              <a:rPr sz="2600" b="1">
+                <a:solidFill>
+                  <a:srgbClr val="083469"/>
+                </a:solidFill>
+                <a:latin typeface="Calibri"/>
+              </a:rPr>
+              <a:t>The decision</a:t>
+            </a:r>
+          </a:p>
+        </p:txBody>
+      </p:sp>
+      <p:sp>
+        <p:nvSpPr>
+          <p:cNvPr id="5" name="Rectangle 4"/>
+          <p:cNvSpPr/>
+          <p:nvPr/>
+        </p:nvSpPr>
+        <p:spPr>
+          <a:xfrm>
+            <a:off x="640080" y="1847088"/>
+            <a:ext cx="731520" cy="50800"/>
+          </a:xfrm>
+          <a:prstGeom prst="rect">
+            <a:avLst/>
+          </a:prstGeom>
+          <a:solidFill>
+            <a:srgbClr val="00D190"/>
+          </a:solidFill>
+          <a:ln>
+            <a:noFill/>
+          </a:ln>
+          <a:effectLst/>
+        </p:spPr>
+        <p:style>
+          <a:lnRef idx="1">
+            <a:schemeClr val="accent1"/>
+          </a:lnRef>
+          <a:fillRef idx="3">
+            <a:schemeClr val="accent1"/>
+          </a:fillRef>
+          <a:effectRef idx="2">
+            <a:schemeClr val="accent1"/>
+          </a:effectRef>
+          <a:fontRef idx="minor">
+            <a:schemeClr val="lt1"/>
+          </a:fontRef>
+        </p:style>
+        <p:txBody>
+          <a:bodyPr rtlCol="0" anchor="ctr"/>
+          <a:lstStyle/>
+          <a:p>
+            <a:pPr algn="ctr"/>
+          </a:p>
+        </p:txBody>
+      </p:sp>
+      <p:sp>
+        <p:nvSpPr>
+          <p:cNvPr id="6" name="TextBox 5"/>
+          <p:cNvSpPr txBox="1"/>
+          <p:nvPr/>
+        </p:nvSpPr>
+        <p:spPr>
+          <a:xfrm>
+            <a:off x="640080" y="2121408"/>
+            <a:ext cx="4892040" cy="274320"/>
           </a:xfrm>
           <a:prstGeom prst="rect">
             <a:avLst/>
@@ -8604,71 +9017,72 @@
               </a:spcAft>
             </a:pPr>
             <a:r>
-              <a:rPr sz="2700" b="1">
-                <a:solidFill>
-                  <a:srgbClr val="083469"/>
+              <a:rPr sz="1000" b="1" spc="140">
+                <a:solidFill>
+                  <a:srgbClr val="008074"/>
                 </a:solidFill>
                 <a:latin typeface="Calibri"/>
               </a:rPr>
-              <a:t>The decision</a:t>
-            </a:r>
-          </a:p>
-        </p:txBody>
-      </p:sp>
-      <p:sp>
-        <p:nvSpPr>
-          <p:cNvPr id="5" name="Rectangle 4"/>
-          <p:cNvSpPr/>
-          <p:nvPr/>
-        </p:nvSpPr>
-        <p:spPr>
-          <a:xfrm>
-            <a:off x="548640" y="1874519"/>
-            <a:ext cx="777240" cy="50800"/>
-          </a:xfrm>
-          <a:prstGeom prst="rect">
-            <a:avLst/>
-          </a:prstGeom>
-          <a:solidFill>
-            <a:srgbClr val="00D190"/>
-          </a:solidFill>
-          <a:ln>
-            <a:noFill/>
-          </a:ln>
-          <a:effectLst/>
-        </p:spPr>
-        <p:style>
-          <a:lnRef idx="1">
-            <a:schemeClr val="accent1"/>
-          </a:lnRef>
-          <a:fillRef idx="3">
-            <a:schemeClr val="accent1"/>
-          </a:fillRef>
-          <a:effectRef idx="2">
-            <a:schemeClr val="accent1"/>
-          </a:effectRef>
-          <a:fontRef idx="minor">
-            <a:schemeClr val="lt1"/>
-          </a:fontRef>
-        </p:style>
-        <p:txBody>
-          <a:bodyPr rtlCol="0" anchor="ctr"/>
-          <a:lstStyle/>
-          <a:p>
-            <a:pPr algn="ctr"/>
-          </a:p>
-        </p:txBody>
-      </p:sp>
-      <p:sp>
-        <p:nvSpPr>
-          <p:cNvPr id="6" name="TextBox 5"/>
+              <a:t>WHAT HAPPENS</a:t>
+            </a:r>
+          </a:p>
+        </p:txBody>
+      </p:sp>
+      <p:sp>
+        <p:nvSpPr>
+          <p:cNvPr id="7" name="TextBox 6"/>
           <p:cNvSpPr txBox="1"/>
           <p:nvPr/>
         </p:nvSpPr>
         <p:spPr>
           <a:xfrm>
-            <a:off x="548640" y="2148840"/>
-            <a:ext cx="4343400" cy="292608"/>
+            <a:off x="640080" y="2414016"/>
+            <a:ext cx="4892040" cy="1828800"/>
+          </a:xfrm>
+          <a:prstGeom prst="rect">
+            <a:avLst/>
+          </a:prstGeom>
+          <a:noFill/>
+        </p:spPr>
+        <p:txBody>
+          <a:bodyPr wrap="square" anchor="t">
+            <a:spAutoFit/>
+          </a:bodyPr>
+          <a:lstStyle/>
+          <a:p>
+            <a:pPr algn="l">
+              <a:lnSpc>
+                <a:spcPct val="112000"/>
+              </a:lnSpc>
+              <a:spcBef>
+                <a:spcPts val="0"/>
+              </a:spcBef>
+              <a:spcAft>
+                <a:spcPts val="400"/>
+              </a:spcAft>
+            </a:pPr>
+            <a:r>
+              <a:rPr sz="1350" b="0">
+                <a:solidFill>
+                  <a:srgbClr val="22313F"/>
+                </a:solidFill>
+                <a:latin typeface="Calibri"/>
+              </a:rPr>
+              <a:t>Every moment is a real month of 2020–2025, shown only as a short, tense story — never named or dated. The player chooses Buy, Hold, or Sell.</a:t>
+            </a:r>
+          </a:p>
+        </p:txBody>
+      </p:sp>
+      <p:sp>
+        <p:nvSpPr>
+          <p:cNvPr id="8" name="TextBox 7"/>
+          <p:cNvSpPr txBox="1"/>
+          <p:nvPr/>
+        </p:nvSpPr>
+        <p:spPr>
+          <a:xfrm>
+            <a:off x="640080" y="4224528"/>
+            <a:ext cx="4892040" cy="274320"/>
           </a:xfrm>
           <a:prstGeom prst="rect">
             <a:avLst/>
@@ -8690,27 +9104,27 @@
               </a:spcAft>
             </a:pPr>
             <a:r>
-              <a:rPr sz="1050" b="1" spc="150">
-                <a:solidFill>
-                  <a:srgbClr val="008074"/>
+              <a:rPr sz="1000" b="1" spc="140">
+                <a:solidFill>
+                  <a:srgbClr val="831574"/>
                 </a:solidFill>
                 <a:latin typeface="Calibri"/>
               </a:rPr>
-              <a:t>WHAT HAPPENS</a:t>
-            </a:r>
-          </a:p>
-        </p:txBody>
-      </p:sp>
-      <p:sp>
-        <p:nvSpPr>
-          <p:cNvPr id="7" name="TextBox 6"/>
+              <a:t>THE THINKING</a:t>
+            </a:r>
+          </a:p>
+        </p:txBody>
+      </p:sp>
+      <p:sp>
+        <p:nvSpPr>
+          <p:cNvPr id="9" name="TextBox 8"/>
           <p:cNvSpPr txBox="1"/>
           <p:nvPr/>
         </p:nvSpPr>
         <p:spPr>
           <a:xfrm>
-            <a:off x="548640" y="2450592"/>
-            <a:ext cx="4343400" cy="1828800"/>
+            <a:off x="640080" y="4517136"/>
+            <a:ext cx="4892040" cy="1828800"/>
           </a:xfrm>
           <a:prstGeom prst="rect">
             <a:avLst/>
@@ -8724,6 +9138,9 @@
           <a:lstStyle/>
           <a:p>
             <a:pPr algn="l">
+              <a:lnSpc>
+                <a:spcPct val="112000"/>
+              </a:lnSpc>
               <a:spcBef>
                 <a:spcPts val="0"/>
               </a:spcBef>
@@ -8732,91 +9149,7 @@
               </a:spcAft>
             </a:pPr>
             <a:r>
-              <a:rPr sz="1400" b="0">
-                <a:solidFill>
-                  <a:srgbClr val="22313F"/>
-                </a:solidFill>
-                <a:latin typeface="Calibri"/>
-              </a:rPr>
-              <a:t>Every moment is a real month of 2020–2025, shown only as a short, tense story — never named or dated. The player chooses Buy, Hold, or Sell.</a:t>
-            </a:r>
-          </a:p>
-        </p:txBody>
-      </p:sp>
-      <p:sp>
-        <p:nvSpPr>
-          <p:cNvPr id="8" name="TextBox 7"/>
-          <p:cNvSpPr txBox="1"/>
-          <p:nvPr/>
-        </p:nvSpPr>
-        <p:spPr>
-          <a:xfrm>
-            <a:off x="548640" y="4160520"/>
-            <a:ext cx="4343400" cy="292608"/>
-          </a:xfrm>
-          <a:prstGeom prst="rect">
-            <a:avLst/>
-          </a:prstGeom>
-          <a:noFill/>
-        </p:spPr>
-        <p:txBody>
-          <a:bodyPr wrap="square" anchor="t">
-            <a:spAutoFit/>
-          </a:bodyPr>
-          <a:lstStyle/>
-          <a:p>
-            <a:pPr algn="l">
-              <a:spcBef>
-                <a:spcPts val="0"/>
-              </a:spcBef>
-              <a:spcAft>
-                <a:spcPts val="400"/>
-              </a:spcAft>
-            </a:pPr>
-            <a:r>
-              <a:rPr sz="1050" b="1" spc="150">
-                <a:solidFill>
-                  <a:srgbClr val="831574"/>
-                </a:solidFill>
-                <a:latin typeface="Calibri"/>
-              </a:rPr>
-              <a:t>THE THINKING</a:t>
-            </a:r>
-          </a:p>
-        </p:txBody>
-      </p:sp>
-      <p:sp>
-        <p:nvSpPr>
-          <p:cNvPr id="9" name="TextBox 8"/>
-          <p:cNvSpPr txBox="1"/>
-          <p:nvPr/>
-        </p:nvSpPr>
-        <p:spPr>
-          <a:xfrm>
-            <a:off x="548640" y="4462272"/>
-            <a:ext cx="4343400" cy="1920240"/>
-          </a:xfrm>
-          <a:prstGeom prst="rect">
-            <a:avLst/>
-          </a:prstGeom>
-          <a:noFill/>
-        </p:spPr>
-        <p:txBody>
-          <a:bodyPr wrap="square" anchor="t">
-            <a:spAutoFit/>
-          </a:bodyPr>
-          <a:lstStyle/>
-          <a:p>
-            <a:pPr algn="l">
-              <a:spcBef>
-                <a:spcPts val="0"/>
-              </a:spcBef>
-              <a:spcAft>
-                <a:spcPts val="400"/>
-              </a:spcAft>
-            </a:pPr>
-            <a:r>
-              <a:rPr sz="1400" b="0">
+              <a:rPr sz="1350" b="0">
                 <a:solidFill>
                   <a:srgbClr val="22313F"/>
                 </a:solidFill>
@@ -8827,9 +9160,55 @@
           </a:p>
         </p:txBody>
       </p:sp>
+      <p:sp>
+        <p:nvSpPr>
+          <p:cNvPr id="10" name="Rounded Rectangle 9"/>
+          <p:cNvSpPr/>
+          <p:nvPr/>
+        </p:nvSpPr>
+        <p:spPr>
+          <a:xfrm>
+            <a:off x="7218267" y="365760"/>
+            <a:ext cx="3257105" cy="6071616"/>
+          </a:xfrm>
+          <a:prstGeom prst="roundRect">
+            <a:avLst>
+              <a:gd name="adj" fmla="val 3500"/>
+            </a:avLst>
+          </a:prstGeom>
+          <a:solidFill>
+            <a:srgbClr val="EEF3F6"/>
+          </a:solidFill>
+          <a:ln>
+            <a:noFill/>
+          </a:ln>
+          <a:effectLst/>
+        </p:spPr>
+        <p:style>
+          <a:lnRef idx="1">
+            <a:schemeClr val="accent1"/>
+          </a:lnRef>
+          <a:fillRef idx="3">
+            <a:schemeClr val="accent1"/>
+          </a:fillRef>
+          <a:effectRef idx="2">
+            <a:schemeClr val="accent1"/>
+          </a:effectRef>
+          <a:fontRef idx="minor">
+            <a:schemeClr val="lt1"/>
+          </a:fontRef>
+        </p:style>
+        <p:txBody>
+          <a:bodyPr rtlCol="0" anchor="ctr"/>
+          <a:lstStyle/>
+          <a:p>
+            <a:pPr algn="ctr"/>
+          </a:p>
+        </p:txBody>
+      </p:sp>
       <p:pic>
         <p:nvPicPr>
-          <p:cNvPr id="10" name="Picture 9" descr="phone-moment.png"/>
+          <p:cNvPr id="11" name="Picture 10" descr="phone-moment.png"/>
           <p:cNvPicPr>
             <a:picLocks noChangeAspect="1"/>
           </p:cNvPicPr>
@@ -8843,29 +9222,29 @@
         </p:blipFill>
         <p:spPr>
           <a:xfrm>
-            <a:off x="7488936" y="457200"/>
-            <a:ext cx="2852928" cy="5852160"/>
+            <a:off x="7419435" y="566928"/>
+            <a:ext cx="2854769" cy="5669280"/>
           </a:xfrm>
           <a:prstGeom prst="rect">
             <a:avLst/>
           </a:prstGeom>
           <a:ln w="9525">
             <a:solidFill>
-              <a:srgbClr val="DBE4EA"/>
+              <a:srgbClr val="D5DFE6"/>
             </a:solidFill>
           </a:ln>
         </p:spPr>
       </p:pic>
       <p:sp>
         <p:nvSpPr>
-          <p:cNvPr id="11" name="Rectangle 10"/>
+          <p:cNvPr id="12" name="Rectangle 11"/>
           <p:cNvSpPr/>
           <p:nvPr/>
         </p:nvSpPr>
         <p:spPr>
           <a:xfrm>
-            <a:off x="0" y="6565392"/>
-            <a:ext cx="12191695" cy="292608"/>
+            <a:off x="0" y="6583680"/>
+            <a:ext cx="12191695" cy="274320"/>
           </a:xfrm>
           <a:prstGeom prst="rect">
             <a:avLst/>
@@ -8902,14 +9281,14 @@
       </p:sp>
       <p:sp>
         <p:nvSpPr>
-          <p:cNvPr id="12" name="TextBox 11"/>
+          <p:cNvPr id="13" name="TextBox 12"/>
           <p:cNvSpPr txBox="1"/>
           <p:nvPr/>
         </p:nvSpPr>
         <p:spPr>
           <a:xfrm>
-            <a:off x="0" y="6556248"/>
-            <a:ext cx="12191695" cy="292608"/>
+            <a:off x="0" y="6574536"/>
+            <a:ext cx="12191695" cy="274320"/>
           </a:xfrm>
           <a:prstGeom prst="rect">
             <a:avLst/>
@@ -8931,13 +9310,13 @@
               </a:spcAft>
             </a:pPr>
             <a:r>
-              <a:rPr sz="850" b="1" spc="150">
+              <a:rPr sz="800" b="1" spc="140">
                 <a:solidFill>
                   <a:srgbClr val="BCD0E6"/>
                 </a:solidFill>
                 <a:latin typeface="Calibri"/>
               </a:rPr>
-              <a:t>THE LONG GAME · LIVE ROOM      ·      HOW IT WORKS, AND WHY      ·      FOR INTERNAL USE ONLY</a:t>
+              <a:t>THE LONG GAME · LIVE ROOM      ·      HOW IT WORKS, AND WHY      ·      INTERNAL USE ONLY</a:t>
             </a:r>
           </a:p>
         </p:txBody>
@@ -9012,8 +9391,8 @@
         </p:nvSpPr>
         <p:spPr>
           <a:xfrm>
-            <a:off x="548640" y="457200"/>
-            <a:ext cx="4343400" cy="365760"/>
+            <a:off x="640080" y="566928"/>
+            <a:ext cx="4892040" cy="365760"/>
           </a:xfrm>
           <a:prstGeom prst="rect">
             <a:avLst/>
@@ -9035,7 +9414,7 @@
               </a:spcAft>
             </a:pPr>
             <a:r>
-              <a:rPr sz="1200" b="1" spc="200">
+              <a:rPr sz="1150" b="1" spc="180">
                 <a:solidFill>
                   <a:srgbClr val="008074"/>
                 </a:solidFill>
@@ -9054,8 +9433,97 @@
         </p:nvSpPr>
         <p:spPr>
           <a:xfrm>
-            <a:off x="548640" y="804672"/>
-            <a:ext cx="4343400" cy="1097280"/>
+            <a:off x="640080" y="914400"/>
+            <a:ext cx="4892040" cy="1005840"/>
+          </a:xfrm>
+          <a:prstGeom prst="rect">
+            <a:avLst/>
+          </a:prstGeom>
+          <a:noFill/>
+        </p:spPr>
+        <p:txBody>
+          <a:bodyPr wrap="square" anchor="t">
+            <a:spAutoFit/>
+          </a:bodyPr>
+          <a:lstStyle/>
+          <a:p>
+            <a:pPr algn="l">
+              <a:lnSpc>
+                <a:spcPct val="102000"/>
+              </a:lnSpc>
+              <a:spcBef>
+                <a:spcPts val="0"/>
+              </a:spcBef>
+              <a:spcAft>
+                <a:spcPts val="400"/>
+              </a:spcAft>
+            </a:pPr>
+            <a:r>
+              <a:rPr sz="2600" b="1">
+                <a:solidFill>
+                  <a:srgbClr val="083469"/>
+                </a:solidFill>
+                <a:latin typeface="Calibri"/>
+              </a:rPr>
+              <a:t>While the room decides</a:t>
+            </a:r>
+          </a:p>
+        </p:txBody>
+      </p:sp>
+      <p:sp>
+        <p:nvSpPr>
+          <p:cNvPr id="5" name="Rectangle 4"/>
+          <p:cNvSpPr/>
+          <p:nvPr/>
+        </p:nvSpPr>
+        <p:spPr>
+          <a:xfrm>
+            <a:off x="640080" y="1847088"/>
+            <a:ext cx="731520" cy="50800"/>
+          </a:xfrm>
+          <a:prstGeom prst="rect">
+            <a:avLst/>
+          </a:prstGeom>
+          <a:solidFill>
+            <a:srgbClr val="00D190"/>
+          </a:solidFill>
+          <a:ln>
+            <a:noFill/>
+          </a:ln>
+          <a:effectLst/>
+        </p:spPr>
+        <p:style>
+          <a:lnRef idx="1">
+            <a:schemeClr val="accent1"/>
+          </a:lnRef>
+          <a:fillRef idx="3">
+            <a:schemeClr val="accent1"/>
+          </a:fillRef>
+          <a:effectRef idx="2">
+            <a:schemeClr val="accent1"/>
+          </a:effectRef>
+          <a:fontRef idx="minor">
+            <a:schemeClr val="lt1"/>
+          </a:fontRef>
+        </p:style>
+        <p:txBody>
+          <a:bodyPr rtlCol="0" anchor="ctr"/>
+          <a:lstStyle/>
+          <a:p>
+            <a:pPr algn="ctr"/>
+          </a:p>
+        </p:txBody>
+      </p:sp>
+      <p:sp>
+        <p:nvSpPr>
+          <p:cNvPr id="6" name="TextBox 5"/>
+          <p:cNvSpPr txBox="1"/>
+          <p:nvPr/>
+        </p:nvSpPr>
+        <p:spPr>
+          <a:xfrm>
+            <a:off x="640080" y="2121408"/>
+            <a:ext cx="4892040" cy="274320"/>
           </a:xfrm>
           <a:prstGeom prst="rect">
             <a:avLst/>
@@ -9077,71 +9545,72 @@
               </a:spcAft>
             </a:pPr>
             <a:r>
-              <a:rPr sz="2700" b="1">
-                <a:solidFill>
-                  <a:srgbClr val="083469"/>
+              <a:rPr sz="1000" b="1" spc="140">
+                <a:solidFill>
+                  <a:srgbClr val="008074"/>
                 </a:solidFill>
                 <a:latin typeface="Calibri"/>
               </a:rPr>
-              <a:t>While the room decides</a:t>
-            </a:r>
-          </a:p>
-        </p:txBody>
-      </p:sp>
-      <p:sp>
-        <p:nvSpPr>
-          <p:cNvPr id="5" name="Rectangle 4"/>
-          <p:cNvSpPr/>
-          <p:nvPr/>
-        </p:nvSpPr>
-        <p:spPr>
-          <a:xfrm>
-            <a:off x="548640" y="1874519"/>
-            <a:ext cx="777240" cy="50800"/>
-          </a:xfrm>
-          <a:prstGeom prst="rect">
-            <a:avLst/>
-          </a:prstGeom>
-          <a:solidFill>
-            <a:srgbClr val="00D190"/>
-          </a:solidFill>
-          <a:ln>
-            <a:noFill/>
-          </a:ln>
-          <a:effectLst/>
-        </p:spPr>
-        <p:style>
-          <a:lnRef idx="1">
-            <a:schemeClr val="accent1"/>
-          </a:lnRef>
-          <a:fillRef idx="3">
-            <a:schemeClr val="accent1"/>
-          </a:fillRef>
-          <a:effectRef idx="2">
-            <a:schemeClr val="accent1"/>
-          </a:effectRef>
-          <a:fontRef idx="minor">
-            <a:schemeClr val="lt1"/>
-          </a:fontRef>
-        </p:style>
-        <p:txBody>
-          <a:bodyPr rtlCol="0" anchor="ctr"/>
-          <a:lstStyle/>
-          <a:p>
-            <a:pPr algn="ctr"/>
-          </a:p>
-        </p:txBody>
-      </p:sp>
-      <p:sp>
-        <p:nvSpPr>
-          <p:cNvPr id="6" name="TextBox 5"/>
+              <a:t>WHAT HAPPENS</a:t>
+            </a:r>
+          </a:p>
+        </p:txBody>
+      </p:sp>
+      <p:sp>
+        <p:nvSpPr>
+          <p:cNvPr id="7" name="TextBox 6"/>
           <p:cNvSpPr txBox="1"/>
           <p:nvPr/>
         </p:nvSpPr>
         <p:spPr>
           <a:xfrm>
-            <a:off x="548640" y="2148840"/>
-            <a:ext cx="4343400" cy="292608"/>
+            <a:off x="640080" y="2414016"/>
+            <a:ext cx="4892040" cy="1828800"/>
+          </a:xfrm>
+          <a:prstGeom prst="rect">
+            <a:avLst/>
+          </a:prstGeom>
+          <a:noFill/>
+        </p:spPr>
+        <p:txBody>
+          <a:bodyPr wrap="square" anchor="t">
+            <a:spAutoFit/>
+          </a:bodyPr>
+          <a:lstStyle/>
+          <a:p>
+            <a:pPr algn="l">
+              <a:lnSpc>
+                <a:spcPct val="112000"/>
+              </a:lnSpc>
+              <a:spcBef>
+                <a:spcPts val="0"/>
+              </a:spcBef>
+              <a:spcAft>
+                <a:spcPts val="400"/>
+              </a:spcAft>
+            </a:pPr>
+            <a:r>
+              <a:rPr sz="1350" b="0">
+                <a:solidFill>
+                  <a:srgbClr val="22313F"/>
+                </a:solidFill>
+                <a:latin typeface="Calibri"/>
+              </a:rPr>
+              <a:t>The big screen shows the room leaning Buy / Hold / Sell in real time. The outcome stays hidden until the host chooses to reveal it.</a:t>
+            </a:r>
+          </a:p>
+        </p:txBody>
+      </p:sp>
+      <p:sp>
+        <p:nvSpPr>
+          <p:cNvPr id="8" name="TextBox 7"/>
+          <p:cNvSpPr txBox="1"/>
+          <p:nvPr/>
+        </p:nvSpPr>
+        <p:spPr>
+          <a:xfrm>
+            <a:off x="640080" y="4224528"/>
+            <a:ext cx="4892040" cy="274320"/>
           </a:xfrm>
           <a:prstGeom prst="rect">
             <a:avLst/>
@@ -9163,27 +9632,27 @@
               </a:spcAft>
             </a:pPr>
             <a:r>
-              <a:rPr sz="1050" b="1" spc="150">
-                <a:solidFill>
-                  <a:srgbClr val="008074"/>
+              <a:rPr sz="1000" b="1" spc="140">
+                <a:solidFill>
+                  <a:srgbClr val="831574"/>
                 </a:solidFill>
                 <a:latin typeface="Calibri"/>
               </a:rPr>
-              <a:t>WHAT HAPPENS</a:t>
-            </a:r>
-          </a:p>
-        </p:txBody>
-      </p:sp>
-      <p:sp>
-        <p:nvSpPr>
-          <p:cNvPr id="7" name="TextBox 6"/>
+              <a:t>THE THINKING</a:t>
+            </a:r>
+          </a:p>
+        </p:txBody>
+      </p:sp>
+      <p:sp>
+        <p:nvSpPr>
+          <p:cNvPr id="9" name="TextBox 8"/>
           <p:cNvSpPr txBox="1"/>
           <p:nvPr/>
         </p:nvSpPr>
         <p:spPr>
           <a:xfrm>
-            <a:off x="548640" y="2450592"/>
-            <a:ext cx="4343400" cy="1828800"/>
+            <a:off x="640080" y="4517136"/>
+            <a:ext cx="4892040" cy="1828800"/>
           </a:xfrm>
           <a:prstGeom prst="rect">
             <a:avLst/>
@@ -9197,6 +9666,9 @@
           <a:lstStyle/>
           <a:p>
             <a:pPr algn="l">
+              <a:lnSpc>
+                <a:spcPct val="112000"/>
+              </a:lnSpc>
               <a:spcBef>
                 <a:spcPts val="0"/>
               </a:spcBef>
@@ -9205,91 +9677,7 @@
               </a:spcAft>
             </a:pPr>
             <a:r>
-              <a:rPr sz="1400" b="0">
-                <a:solidFill>
-                  <a:srgbClr val="22313F"/>
-                </a:solidFill>
-                <a:latin typeface="Calibri"/>
-              </a:rPr>
-              <a:t>The big screen shows the room leaning Buy / Hold / Sell in real time. The outcome stays hidden until the host chooses to reveal it.</a:t>
-            </a:r>
-          </a:p>
-        </p:txBody>
-      </p:sp>
-      <p:sp>
-        <p:nvSpPr>
-          <p:cNvPr id="8" name="TextBox 7"/>
-          <p:cNvSpPr txBox="1"/>
-          <p:nvPr/>
-        </p:nvSpPr>
-        <p:spPr>
-          <a:xfrm>
-            <a:off x="548640" y="4160520"/>
-            <a:ext cx="4343400" cy="292608"/>
-          </a:xfrm>
-          <a:prstGeom prst="rect">
-            <a:avLst/>
-          </a:prstGeom>
-          <a:noFill/>
-        </p:spPr>
-        <p:txBody>
-          <a:bodyPr wrap="square" anchor="t">
-            <a:spAutoFit/>
-          </a:bodyPr>
-          <a:lstStyle/>
-          <a:p>
-            <a:pPr algn="l">
-              <a:spcBef>
-                <a:spcPts val="0"/>
-              </a:spcBef>
-              <a:spcAft>
-                <a:spcPts val="400"/>
-              </a:spcAft>
-            </a:pPr>
-            <a:r>
-              <a:rPr sz="1050" b="1" spc="150">
-                <a:solidFill>
-                  <a:srgbClr val="831574"/>
-                </a:solidFill>
-                <a:latin typeface="Calibri"/>
-              </a:rPr>
-              <a:t>THE THINKING</a:t>
-            </a:r>
-          </a:p>
-        </p:txBody>
-      </p:sp>
-      <p:sp>
-        <p:nvSpPr>
-          <p:cNvPr id="9" name="TextBox 8"/>
-          <p:cNvSpPr txBox="1"/>
-          <p:nvPr/>
-        </p:nvSpPr>
-        <p:spPr>
-          <a:xfrm>
-            <a:off x="548640" y="4462272"/>
-            <a:ext cx="4343400" cy="1920240"/>
-          </a:xfrm>
-          <a:prstGeom prst="rect">
-            <a:avLst/>
-          </a:prstGeom>
-          <a:noFill/>
-        </p:spPr>
-        <p:txBody>
-          <a:bodyPr wrap="square" anchor="t">
-            <a:spAutoFit/>
-          </a:bodyPr>
-          <a:lstStyle/>
-          <a:p>
-            <a:pPr algn="l">
-              <a:spcBef>
-                <a:spcPts val="0"/>
-              </a:spcBef>
-              <a:spcAft>
-                <a:spcPts val="400"/>
-              </a:spcAft>
-            </a:pPr>
-            <a:r>
-              <a:rPr sz="1400" b="0">
+              <a:rPr sz="1350" b="0">
                 <a:solidFill>
                   <a:srgbClr val="22313F"/>
                 </a:solidFill>
@@ -9300,9 +9688,55 @@
           </a:p>
         </p:txBody>
       </p:sp>
+      <p:sp>
+        <p:nvSpPr>
+          <p:cNvPr id="10" name="Rounded Rectangle 9"/>
+          <p:cNvSpPr/>
+          <p:nvPr/>
+        </p:nvSpPr>
+        <p:spPr>
+          <a:xfrm>
+            <a:off x="5742432" y="418228"/>
+            <a:ext cx="6208776" cy="5966680"/>
+          </a:xfrm>
+          <a:prstGeom prst="roundRect">
+            <a:avLst>
+              <a:gd name="adj" fmla="val 3500"/>
+            </a:avLst>
+          </a:prstGeom>
+          <a:solidFill>
+            <a:srgbClr val="EEF3F6"/>
+          </a:solidFill>
+          <a:ln>
+            <a:noFill/>
+          </a:ln>
+          <a:effectLst/>
+        </p:spPr>
+        <p:style>
+          <a:lnRef idx="1">
+            <a:schemeClr val="accent1"/>
+          </a:lnRef>
+          <a:fillRef idx="3">
+            <a:schemeClr val="accent1"/>
+          </a:fillRef>
+          <a:effectRef idx="2">
+            <a:schemeClr val="accent1"/>
+          </a:effectRef>
+          <a:fontRef idx="minor">
+            <a:schemeClr val="lt1"/>
+          </a:fontRef>
+        </p:style>
+        <p:txBody>
+          <a:bodyPr rtlCol="0" anchor="ctr"/>
+          <a:lstStyle/>
+          <a:p>
+            <a:pPr algn="ctr"/>
+          </a:p>
+        </p:txBody>
+      </p:sp>
       <p:pic>
         <p:nvPicPr>
-          <p:cNvPr id="10" name="Picture 9" descr="host-voting.png"/>
+          <p:cNvPr id="11" name="Picture 10" descr="host-voting.png"/>
           <p:cNvPicPr>
             <a:picLocks noChangeAspect="1"/>
           </p:cNvPicPr>
@@ -9316,29 +9750,29 @@
         </p:blipFill>
         <p:spPr>
           <a:xfrm>
-            <a:off x="5074920" y="1285875"/>
-            <a:ext cx="6858000" cy="4286250"/>
+            <a:off x="5943600" y="619396"/>
+            <a:ext cx="5806440" cy="5564344"/>
           </a:xfrm>
           <a:prstGeom prst="rect">
             <a:avLst/>
           </a:prstGeom>
           <a:ln w="9525">
             <a:solidFill>
-              <a:srgbClr val="DBE4EA"/>
+              <a:srgbClr val="D5DFE6"/>
             </a:solidFill>
           </a:ln>
         </p:spPr>
       </p:pic>
       <p:sp>
         <p:nvSpPr>
-          <p:cNvPr id="11" name="Rectangle 10"/>
+          <p:cNvPr id="12" name="Rectangle 11"/>
           <p:cNvSpPr/>
           <p:nvPr/>
         </p:nvSpPr>
         <p:spPr>
           <a:xfrm>
-            <a:off x="0" y="6565392"/>
-            <a:ext cx="12191695" cy="292608"/>
+            <a:off x="0" y="6583680"/>
+            <a:ext cx="12191695" cy="274320"/>
           </a:xfrm>
           <a:prstGeom prst="rect">
             <a:avLst/>
@@ -9375,14 +9809,14 @@
       </p:sp>
       <p:sp>
         <p:nvSpPr>
-          <p:cNvPr id="12" name="TextBox 11"/>
+          <p:cNvPr id="13" name="TextBox 12"/>
           <p:cNvSpPr txBox="1"/>
           <p:nvPr/>
         </p:nvSpPr>
         <p:spPr>
           <a:xfrm>
-            <a:off x="0" y="6556248"/>
-            <a:ext cx="12191695" cy="292608"/>
+            <a:off x="0" y="6574536"/>
+            <a:ext cx="12191695" cy="274320"/>
           </a:xfrm>
           <a:prstGeom prst="rect">
             <a:avLst/>
@@ -9404,13 +9838,13 @@
               </a:spcAft>
             </a:pPr>
             <a:r>
-              <a:rPr sz="850" b="1" spc="150">
+              <a:rPr sz="800" b="1" spc="140">
                 <a:solidFill>
                   <a:srgbClr val="BCD0E6"/>
                 </a:solidFill>
                 <a:latin typeface="Calibri"/>
               </a:rPr>
-              <a:t>THE LONG GAME · LIVE ROOM      ·      HOW IT WORKS, AND WHY      ·      FOR INTERNAL USE ONLY</a:t>
+              <a:t>THE LONG GAME · LIVE ROOM      ·      HOW IT WORKS, AND WHY      ·      INTERNAL USE ONLY</a:t>
             </a:r>
           </a:p>
         </p:txBody>
@@ -9485,8 +9919,8 @@
         </p:nvSpPr>
         <p:spPr>
           <a:xfrm>
-            <a:off x="548640" y="457200"/>
-            <a:ext cx="4343400" cy="365760"/>
+            <a:off x="640080" y="566928"/>
+            <a:ext cx="4892040" cy="365760"/>
           </a:xfrm>
           <a:prstGeom prst="rect">
             <a:avLst/>
@@ -9508,7 +9942,7 @@
               </a:spcAft>
             </a:pPr>
             <a:r>
-              <a:rPr sz="1200" b="1" spc="200">
+              <a:rPr sz="1150" b="1" spc="180">
                 <a:solidFill>
                   <a:srgbClr val="008074"/>
                 </a:solidFill>
@@ -9527,8 +9961,97 @@
         </p:nvSpPr>
         <p:spPr>
           <a:xfrm>
-            <a:off x="548640" y="804672"/>
-            <a:ext cx="4343400" cy="1097280"/>
+            <a:off x="640080" y="914400"/>
+            <a:ext cx="4892040" cy="1005840"/>
+          </a:xfrm>
+          <a:prstGeom prst="rect">
+            <a:avLst/>
+          </a:prstGeom>
+          <a:noFill/>
+        </p:spPr>
+        <p:txBody>
+          <a:bodyPr wrap="square" anchor="t">
+            <a:spAutoFit/>
+          </a:bodyPr>
+          <a:lstStyle/>
+          <a:p>
+            <a:pPr algn="l">
+              <a:lnSpc>
+                <a:spcPct val="102000"/>
+              </a:lnSpc>
+              <a:spcBef>
+                <a:spcPts val="0"/>
+              </a:spcBef>
+              <a:spcAft>
+                <a:spcPts val="400"/>
+              </a:spcAft>
+            </a:pPr>
+            <a:r>
+              <a:rPr sz="2600" b="1">
+                <a:solidFill>
+                  <a:srgbClr val="083469"/>
+                </a:solidFill>
+                <a:latin typeface="Calibri"/>
+              </a:rPr>
+              <a:t>What actually happened</a:t>
+            </a:r>
+          </a:p>
+        </p:txBody>
+      </p:sp>
+      <p:sp>
+        <p:nvSpPr>
+          <p:cNvPr id="5" name="Rectangle 4"/>
+          <p:cNvSpPr/>
+          <p:nvPr/>
+        </p:nvSpPr>
+        <p:spPr>
+          <a:xfrm>
+            <a:off x="640080" y="1847088"/>
+            <a:ext cx="731520" cy="50800"/>
+          </a:xfrm>
+          <a:prstGeom prst="rect">
+            <a:avLst/>
+          </a:prstGeom>
+          <a:solidFill>
+            <a:srgbClr val="00D190"/>
+          </a:solidFill>
+          <a:ln>
+            <a:noFill/>
+          </a:ln>
+          <a:effectLst/>
+        </p:spPr>
+        <p:style>
+          <a:lnRef idx="1">
+            <a:schemeClr val="accent1"/>
+          </a:lnRef>
+          <a:fillRef idx="3">
+            <a:schemeClr val="accent1"/>
+          </a:fillRef>
+          <a:effectRef idx="2">
+            <a:schemeClr val="accent1"/>
+          </a:effectRef>
+          <a:fontRef idx="minor">
+            <a:schemeClr val="lt1"/>
+          </a:fontRef>
+        </p:style>
+        <p:txBody>
+          <a:bodyPr rtlCol="0" anchor="ctr"/>
+          <a:lstStyle/>
+          <a:p>
+            <a:pPr algn="ctr"/>
+          </a:p>
+        </p:txBody>
+      </p:sp>
+      <p:sp>
+        <p:nvSpPr>
+          <p:cNvPr id="6" name="TextBox 5"/>
+          <p:cNvSpPr txBox="1"/>
+          <p:nvPr/>
+        </p:nvSpPr>
+        <p:spPr>
+          <a:xfrm>
+            <a:off x="640080" y="2121408"/>
+            <a:ext cx="4892040" cy="274320"/>
           </a:xfrm>
           <a:prstGeom prst="rect">
             <a:avLst/>
@@ -9550,71 +10073,72 @@
               </a:spcAft>
             </a:pPr>
             <a:r>
-              <a:rPr sz="2700" b="1">
-                <a:solidFill>
-                  <a:srgbClr val="083469"/>
+              <a:rPr sz="1000" b="1" spc="140">
+                <a:solidFill>
+                  <a:srgbClr val="008074"/>
                 </a:solidFill>
                 <a:latin typeface="Calibri"/>
               </a:rPr>
-              <a:t>What actually happened</a:t>
-            </a:r>
-          </a:p>
-        </p:txBody>
-      </p:sp>
-      <p:sp>
-        <p:nvSpPr>
-          <p:cNvPr id="5" name="Rectangle 4"/>
-          <p:cNvSpPr/>
-          <p:nvPr/>
-        </p:nvSpPr>
-        <p:spPr>
-          <a:xfrm>
-            <a:off x="548640" y="1874519"/>
-            <a:ext cx="777240" cy="50800"/>
-          </a:xfrm>
-          <a:prstGeom prst="rect">
-            <a:avLst/>
-          </a:prstGeom>
-          <a:solidFill>
-            <a:srgbClr val="00D190"/>
-          </a:solidFill>
-          <a:ln>
-            <a:noFill/>
-          </a:ln>
-          <a:effectLst/>
-        </p:spPr>
-        <p:style>
-          <a:lnRef idx="1">
-            <a:schemeClr val="accent1"/>
-          </a:lnRef>
-          <a:fillRef idx="3">
-            <a:schemeClr val="accent1"/>
-          </a:fillRef>
-          <a:effectRef idx="2">
-            <a:schemeClr val="accent1"/>
-          </a:effectRef>
-          <a:fontRef idx="minor">
-            <a:schemeClr val="lt1"/>
-          </a:fontRef>
-        </p:style>
-        <p:txBody>
-          <a:bodyPr rtlCol="0" anchor="ctr"/>
-          <a:lstStyle/>
-          <a:p>
-            <a:pPr algn="ctr"/>
-          </a:p>
-        </p:txBody>
-      </p:sp>
-      <p:sp>
-        <p:nvSpPr>
-          <p:cNvPr id="6" name="TextBox 5"/>
+              <a:t>WHAT HAPPENS</a:t>
+            </a:r>
+          </a:p>
+        </p:txBody>
+      </p:sp>
+      <p:sp>
+        <p:nvSpPr>
+          <p:cNvPr id="7" name="TextBox 6"/>
           <p:cNvSpPr txBox="1"/>
           <p:nvPr/>
         </p:nvSpPr>
         <p:spPr>
           <a:xfrm>
-            <a:off x="548640" y="2148840"/>
-            <a:ext cx="4343400" cy="292608"/>
+            <a:off x="640080" y="2414016"/>
+            <a:ext cx="4892040" cy="1828800"/>
+          </a:xfrm>
+          <a:prstGeom prst="rect">
+            <a:avLst/>
+          </a:prstGeom>
+          <a:noFill/>
+        </p:spPr>
+        <p:txBody>
+          <a:bodyPr wrap="square" anchor="t">
+            <a:spAutoFit/>
+          </a:bodyPr>
+          <a:lstStyle/>
+          <a:p>
+            <a:pPr algn="l">
+              <a:lnSpc>
+                <a:spcPct val="112000"/>
+              </a:lnSpc>
+              <a:spcBef>
+                <a:spcPts val="0"/>
+              </a:spcBef>
+              <a:spcAft>
+                <a:spcPts val="400"/>
+              </a:spcAft>
+            </a:pPr>
+            <a:r>
+              <a:rPr sz="1350" b="0">
+                <a:solidFill>
+                  <a:srgbClr val="22313F"/>
+                </a:solidFill>
+                <a:latin typeface="Calibri"/>
+              </a:rPr>
+              <a:t>On reveal, the big screen shows one number — the market's real move that month — with a plain-language read of what it meant.</a:t>
+            </a:r>
+          </a:p>
+        </p:txBody>
+      </p:sp>
+      <p:sp>
+        <p:nvSpPr>
+          <p:cNvPr id="8" name="TextBox 7"/>
+          <p:cNvSpPr txBox="1"/>
+          <p:nvPr/>
+        </p:nvSpPr>
+        <p:spPr>
+          <a:xfrm>
+            <a:off x="640080" y="4224528"/>
+            <a:ext cx="4892040" cy="274320"/>
           </a:xfrm>
           <a:prstGeom prst="rect">
             <a:avLst/>
@@ -9636,27 +10160,27 @@
               </a:spcAft>
             </a:pPr>
             <a:r>
-              <a:rPr sz="1050" b="1" spc="150">
-                <a:solidFill>
-                  <a:srgbClr val="008074"/>
+              <a:rPr sz="1000" b="1" spc="140">
+                <a:solidFill>
+                  <a:srgbClr val="831574"/>
                 </a:solidFill>
                 <a:latin typeface="Calibri"/>
               </a:rPr>
-              <a:t>WHAT HAPPENS</a:t>
-            </a:r>
-          </a:p>
-        </p:txBody>
-      </p:sp>
-      <p:sp>
-        <p:nvSpPr>
-          <p:cNvPr id="7" name="TextBox 6"/>
+              <a:t>THE THINKING</a:t>
+            </a:r>
+          </a:p>
+        </p:txBody>
+      </p:sp>
+      <p:sp>
+        <p:nvSpPr>
+          <p:cNvPr id="9" name="TextBox 8"/>
           <p:cNvSpPr txBox="1"/>
           <p:nvPr/>
         </p:nvSpPr>
         <p:spPr>
           <a:xfrm>
-            <a:off x="548640" y="2450592"/>
-            <a:ext cx="4343400" cy="1828800"/>
+            <a:off x="640080" y="4517136"/>
+            <a:ext cx="4892040" cy="1828800"/>
           </a:xfrm>
           <a:prstGeom prst="rect">
             <a:avLst/>
@@ -9670,6 +10194,9 @@
           <a:lstStyle/>
           <a:p>
             <a:pPr algn="l">
+              <a:lnSpc>
+                <a:spcPct val="112000"/>
+              </a:lnSpc>
               <a:spcBef>
                 <a:spcPts val="0"/>
               </a:spcBef>
@@ -9678,91 +10205,7 @@
               </a:spcAft>
             </a:pPr>
             <a:r>
-              <a:rPr sz="1400" b="0">
-                <a:solidFill>
-                  <a:srgbClr val="22313F"/>
-                </a:solidFill>
-                <a:latin typeface="Calibri"/>
-              </a:rPr>
-              <a:t>On reveal, the big screen shows one number — the market's real move that month — with a plain-language read of what it meant.</a:t>
-            </a:r>
-          </a:p>
-        </p:txBody>
-      </p:sp>
-      <p:sp>
-        <p:nvSpPr>
-          <p:cNvPr id="8" name="TextBox 7"/>
-          <p:cNvSpPr txBox="1"/>
-          <p:nvPr/>
-        </p:nvSpPr>
-        <p:spPr>
-          <a:xfrm>
-            <a:off x="548640" y="4160520"/>
-            <a:ext cx="4343400" cy="292608"/>
-          </a:xfrm>
-          <a:prstGeom prst="rect">
-            <a:avLst/>
-          </a:prstGeom>
-          <a:noFill/>
-        </p:spPr>
-        <p:txBody>
-          <a:bodyPr wrap="square" anchor="t">
-            <a:spAutoFit/>
-          </a:bodyPr>
-          <a:lstStyle/>
-          <a:p>
-            <a:pPr algn="l">
-              <a:spcBef>
-                <a:spcPts val="0"/>
-              </a:spcBef>
-              <a:spcAft>
-                <a:spcPts val="400"/>
-              </a:spcAft>
-            </a:pPr>
-            <a:r>
-              <a:rPr sz="1050" b="1" spc="150">
-                <a:solidFill>
-                  <a:srgbClr val="831574"/>
-                </a:solidFill>
-                <a:latin typeface="Calibri"/>
-              </a:rPr>
-              <a:t>THE THINKING</a:t>
-            </a:r>
-          </a:p>
-        </p:txBody>
-      </p:sp>
-      <p:sp>
-        <p:nvSpPr>
-          <p:cNvPr id="9" name="TextBox 8"/>
-          <p:cNvSpPr txBox="1"/>
-          <p:nvPr/>
-        </p:nvSpPr>
-        <p:spPr>
-          <a:xfrm>
-            <a:off x="548640" y="4462272"/>
-            <a:ext cx="4343400" cy="1920240"/>
-          </a:xfrm>
-          <a:prstGeom prst="rect">
-            <a:avLst/>
-          </a:prstGeom>
-          <a:noFill/>
-        </p:spPr>
-        <p:txBody>
-          <a:bodyPr wrap="square" anchor="t">
-            <a:spAutoFit/>
-          </a:bodyPr>
-          <a:lstStyle/>
-          <a:p>
-            <a:pPr algn="l">
-              <a:spcBef>
-                <a:spcPts val="0"/>
-              </a:spcBef>
-              <a:spcAft>
-                <a:spcPts val="400"/>
-              </a:spcAft>
-            </a:pPr>
-            <a:r>
-              <a:rPr sz="1400" b="0">
+              <a:rPr sz="1350" b="0">
                 <a:solidFill>
                   <a:srgbClr val="22313F"/>
                 </a:solidFill>
@@ -9773,9 +10216,55 @@
           </a:p>
         </p:txBody>
       </p:sp>
+      <p:sp>
+        <p:nvSpPr>
+          <p:cNvPr id="10" name="Rounded Rectangle 9"/>
+          <p:cNvSpPr/>
+          <p:nvPr/>
+        </p:nvSpPr>
+        <p:spPr>
+          <a:xfrm>
+            <a:off x="5742432" y="418228"/>
+            <a:ext cx="6208776" cy="5966680"/>
+          </a:xfrm>
+          <a:prstGeom prst="roundRect">
+            <a:avLst>
+              <a:gd name="adj" fmla="val 3500"/>
+            </a:avLst>
+          </a:prstGeom>
+          <a:solidFill>
+            <a:srgbClr val="EEF3F6"/>
+          </a:solidFill>
+          <a:ln>
+            <a:noFill/>
+          </a:ln>
+          <a:effectLst/>
+        </p:spPr>
+        <p:style>
+          <a:lnRef idx="1">
+            <a:schemeClr val="accent1"/>
+          </a:lnRef>
+          <a:fillRef idx="3">
+            <a:schemeClr val="accent1"/>
+          </a:fillRef>
+          <a:effectRef idx="2">
+            <a:schemeClr val="accent1"/>
+          </a:effectRef>
+          <a:fontRef idx="minor">
+            <a:schemeClr val="lt1"/>
+          </a:fontRef>
+        </p:style>
+        <p:txBody>
+          <a:bodyPr rtlCol="0" anchor="ctr"/>
+          <a:lstStyle/>
+          <a:p>
+            <a:pPr algn="ctr"/>
+          </a:p>
+        </p:txBody>
+      </p:sp>
       <p:pic>
         <p:nvPicPr>
-          <p:cNvPr id="10" name="Picture 9" descr="host-reveal.png"/>
+          <p:cNvPr id="11" name="Picture 10" descr="host-reveal.png"/>
           <p:cNvPicPr>
             <a:picLocks noChangeAspect="1"/>
           </p:cNvPicPr>
@@ -9789,29 +10278,29 @@
         </p:blipFill>
         <p:spPr>
           <a:xfrm>
-            <a:off x="5074920" y="1285875"/>
-            <a:ext cx="6858000" cy="4286250"/>
+            <a:off x="5943600" y="619396"/>
+            <a:ext cx="5806440" cy="5564344"/>
           </a:xfrm>
           <a:prstGeom prst="rect">
             <a:avLst/>
           </a:prstGeom>
           <a:ln w="9525">
             <a:solidFill>
-              <a:srgbClr val="DBE4EA"/>
+              <a:srgbClr val="D5DFE6"/>
             </a:solidFill>
           </a:ln>
         </p:spPr>
       </p:pic>
       <p:sp>
         <p:nvSpPr>
-          <p:cNvPr id="11" name="Rectangle 10"/>
+          <p:cNvPr id="12" name="Rectangle 11"/>
           <p:cNvSpPr/>
           <p:nvPr/>
         </p:nvSpPr>
         <p:spPr>
           <a:xfrm>
-            <a:off x="0" y="6565392"/>
-            <a:ext cx="12191695" cy="292608"/>
+            <a:off x="0" y="6583680"/>
+            <a:ext cx="12191695" cy="274320"/>
           </a:xfrm>
           <a:prstGeom prst="rect">
             <a:avLst/>
@@ -9848,14 +10337,14 @@
       </p:sp>
       <p:sp>
         <p:nvSpPr>
-          <p:cNvPr id="12" name="TextBox 11"/>
+          <p:cNvPr id="13" name="TextBox 12"/>
           <p:cNvSpPr txBox="1"/>
           <p:nvPr/>
         </p:nvSpPr>
         <p:spPr>
           <a:xfrm>
-            <a:off x="0" y="6556248"/>
-            <a:ext cx="12191695" cy="292608"/>
+            <a:off x="0" y="6574536"/>
+            <a:ext cx="12191695" cy="274320"/>
           </a:xfrm>
           <a:prstGeom prst="rect">
             <a:avLst/>
@@ -9877,13 +10366,13 @@
               </a:spcAft>
             </a:pPr>
             <a:r>
-              <a:rPr sz="850" b="1" spc="150">
+              <a:rPr sz="800" b="1" spc="140">
                 <a:solidFill>
                   <a:srgbClr val="BCD0E6"/>
                 </a:solidFill>
                 <a:latin typeface="Calibri"/>
               </a:rPr>
-              <a:t>THE LONG GAME · LIVE ROOM      ·      HOW IT WORKS, AND WHY      ·      FOR INTERNAL USE ONLY</a:t>
+              <a:t>THE LONG GAME · LIVE ROOM      ·      HOW IT WORKS, AND WHY      ·      INTERNAL USE ONLY</a:t>
             </a:r>
           </a:p>
         </p:txBody>
@@ -9958,8 +10447,8 @@
         </p:nvSpPr>
         <p:spPr>
           <a:xfrm>
-            <a:off x="548640" y="457200"/>
-            <a:ext cx="4343400" cy="365760"/>
+            <a:off x="640080" y="566928"/>
+            <a:ext cx="4892040" cy="365760"/>
           </a:xfrm>
           <a:prstGeom prst="rect">
             <a:avLst/>
@@ -9981,7 +10470,7 @@
               </a:spcAft>
             </a:pPr>
             <a:r>
-              <a:rPr sz="1200" b="1" spc="200">
+              <a:rPr sz="1150" b="1" spc="180">
                 <a:solidFill>
                   <a:srgbClr val="008074"/>
                 </a:solidFill>
@@ -10000,8 +10489,97 @@
         </p:nvSpPr>
         <p:spPr>
           <a:xfrm>
-            <a:off x="548640" y="804672"/>
-            <a:ext cx="4343400" cy="1097280"/>
+            <a:off x="640080" y="914400"/>
+            <a:ext cx="4892040" cy="1005840"/>
+          </a:xfrm>
+          <a:prstGeom prst="rect">
+            <a:avLst/>
+          </a:prstGeom>
+          <a:noFill/>
+        </p:spPr>
+        <p:txBody>
+          <a:bodyPr wrap="square" anchor="t">
+            <a:spAutoFit/>
+          </a:bodyPr>
+          <a:lstStyle/>
+          <a:p>
+            <a:pPr algn="l">
+              <a:lnSpc>
+                <a:spcPct val="102000"/>
+              </a:lnSpc>
+              <a:spcBef>
+                <a:spcPts val="0"/>
+              </a:spcBef>
+              <a:spcAft>
+                <a:spcPts val="400"/>
+              </a:spcAft>
+            </a:pPr>
+            <a:r>
+              <a:rPr sz="2600" b="1">
+                <a:solidFill>
+                  <a:srgbClr val="083469"/>
+                </a:solidFill>
+                <a:latin typeface="Calibri"/>
+              </a:rPr>
+              <a:t>The cash windfall</a:t>
+            </a:r>
+          </a:p>
+        </p:txBody>
+      </p:sp>
+      <p:sp>
+        <p:nvSpPr>
+          <p:cNvPr id="5" name="Rectangle 4"/>
+          <p:cNvSpPr/>
+          <p:nvPr/>
+        </p:nvSpPr>
+        <p:spPr>
+          <a:xfrm>
+            <a:off x="640080" y="1847088"/>
+            <a:ext cx="731520" cy="50800"/>
+          </a:xfrm>
+          <a:prstGeom prst="rect">
+            <a:avLst/>
+          </a:prstGeom>
+          <a:solidFill>
+            <a:srgbClr val="00D190"/>
+          </a:solidFill>
+          <a:ln>
+            <a:noFill/>
+          </a:ln>
+          <a:effectLst/>
+        </p:spPr>
+        <p:style>
+          <a:lnRef idx="1">
+            <a:schemeClr val="accent1"/>
+          </a:lnRef>
+          <a:fillRef idx="3">
+            <a:schemeClr val="accent1"/>
+          </a:fillRef>
+          <a:effectRef idx="2">
+            <a:schemeClr val="accent1"/>
+          </a:effectRef>
+          <a:fontRef idx="minor">
+            <a:schemeClr val="lt1"/>
+          </a:fontRef>
+        </p:style>
+        <p:txBody>
+          <a:bodyPr rtlCol="0" anchor="ctr"/>
+          <a:lstStyle/>
+          <a:p>
+            <a:pPr algn="ctr"/>
+          </a:p>
+        </p:txBody>
+      </p:sp>
+      <p:sp>
+        <p:nvSpPr>
+          <p:cNvPr id="6" name="TextBox 5"/>
+          <p:cNvSpPr txBox="1"/>
+          <p:nvPr/>
+        </p:nvSpPr>
+        <p:spPr>
+          <a:xfrm>
+            <a:off x="640080" y="2121408"/>
+            <a:ext cx="4892040" cy="274320"/>
           </a:xfrm>
           <a:prstGeom prst="rect">
             <a:avLst/>
@@ -10023,71 +10601,72 @@
               </a:spcAft>
             </a:pPr>
             <a:r>
-              <a:rPr sz="2700" b="1">
-                <a:solidFill>
-                  <a:srgbClr val="083469"/>
+              <a:rPr sz="1000" b="1" spc="140">
+                <a:solidFill>
+                  <a:srgbClr val="008074"/>
                 </a:solidFill>
                 <a:latin typeface="Calibri"/>
               </a:rPr>
-              <a:t>The cash windfall</a:t>
-            </a:r>
-          </a:p>
-        </p:txBody>
-      </p:sp>
-      <p:sp>
-        <p:nvSpPr>
-          <p:cNvPr id="5" name="Rectangle 4"/>
-          <p:cNvSpPr/>
-          <p:nvPr/>
-        </p:nvSpPr>
-        <p:spPr>
-          <a:xfrm>
-            <a:off x="548640" y="1874519"/>
-            <a:ext cx="777240" cy="50800"/>
-          </a:xfrm>
-          <a:prstGeom prst="rect">
-            <a:avLst/>
-          </a:prstGeom>
-          <a:solidFill>
-            <a:srgbClr val="00D190"/>
-          </a:solidFill>
-          <a:ln>
-            <a:noFill/>
-          </a:ln>
-          <a:effectLst/>
-        </p:spPr>
-        <p:style>
-          <a:lnRef idx="1">
-            <a:schemeClr val="accent1"/>
-          </a:lnRef>
-          <a:fillRef idx="3">
-            <a:schemeClr val="accent1"/>
-          </a:fillRef>
-          <a:effectRef idx="2">
-            <a:schemeClr val="accent1"/>
-          </a:effectRef>
-          <a:fontRef idx="minor">
-            <a:schemeClr val="lt1"/>
-          </a:fontRef>
-        </p:style>
-        <p:txBody>
-          <a:bodyPr rtlCol="0" anchor="ctr"/>
-          <a:lstStyle/>
-          <a:p>
-            <a:pPr algn="ctr"/>
-          </a:p>
-        </p:txBody>
-      </p:sp>
-      <p:sp>
-        <p:nvSpPr>
-          <p:cNvPr id="6" name="TextBox 5"/>
+              <a:t>WHAT HAPPENS</a:t>
+            </a:r>
+          </a:p>
+        </p:txBody>
+      </p:sp>
+      <p:sp>
+        <p:nvSpPr>
+          <p:cNvPr id="7" name="TextBox 6"/>
           <p:cNvSpPr txBox="1"/>
           <p:nvPr/>
         </p:nvSpPr>
         <p:spPr>
           <a:xfrm>
-            <a:off x="548640" y="2148840"/>
-            <a:ext cx="4343400" cy="292608"/>
+            <a:off x="640080" y="2414016"/>
+            <a:ext cx="4892040" cy="1828800"/>
+          </a:xfrm>
+          <a:prstGeom prst="rect">
+            <a:avLst/>
+          </a:prstGeom>
+          <a:noFill/>
+        </p:spPr>
+        <p:txBody>
+          <a:bodyPr wrap="square" anchor="t">
+            <a:spAutoFit/>
+          </a:bodyPr>
+          <a:lstStyle/>
+          <a:p>
+            <a:pPr algn="l">
+              <a:lnSpc>
+                <a:spcPct val="112000"/>
+              </a:lnSpc>
+              <a:spcBef>
+                <a:spcPts val="0"/>
+              </a:spcBef>
+              <a:spcAft>
+                <a:spcPts val="400"/>
+              </a:spcAft>
+            </a:pPr>
+            <a:r>
+              <a:rPr sz="1350" b="0">
+                <a:solidFill>
+                  <a:srgbClr val="22313F"/>
+                </a:solidFill>
+                <a:latin typeface="Calibri"/>
+              </a:rPr>
+              <a:t>Partway through, a cash bonus lands in every portfolio — as cash, announced on its own screen before the moment continues.</a:t>
+            </a:r>
+          </a:p>
+        </p:txBody>
+      </p:sp>
+      <p:sp>
+        <p:nvSpPr>
+          <p:cNvPr id="8" name="TextBox 7"/>
+          <p:cNvSpPr txBox="1"/>
+          <p:nvPr/>
+        </p:nvSpPr>
+        <p:spPr>
+          <a:xfrm>
+            <a:off x="640080" y="4224528"/>
+            <a:ext cx="4892040" cy="274320"/>
           </a:xfrm>
           <a:prstGeom prst="rect">
             <a:avLst/>
@@ -10109,27 +10688,27 @@
               </a:spcAft>
             </a:pPr>
             <a:r>
-              <a:rPr sz="1050" b="1" spc="150">
-                <a:solidFill>
-                  <a:srgbClr val="008074"/>
+              <a:rPr sz="1000" b="1" spc="140">
+                <a:solidFill>
+                  <a:srgbClr val="831574"/>
                 </a:solidFill>
                 <a:latin typeface="Calibri"/>
               </a:rPr>
-              <a:t>WHAT HAPPENS</a:t>
-            </a:r>
-          </a:p>
-        </p:txBody>
-      </p:sp>
-      <p:sp>
-        <p:nvSpPr>
-          <p:cNvPr id="7" name="TextBox 6"/>
+              <a:t>THE THINKING</a:t>
+            </a:r>
+          </a:p>
+        </p:txBody>
+      </p:sp>
+      <p:sp>
+        <p:nvSpPr>
+          <p:cNvPr id="9" name="TextBox 8"/>
           <p:cNvSpPr txBox="1"/>
           <p:nvPr/>
         </p:nvSpPr>
         <p:spPr>
           <a:xfrm>
-            <a:off x="548640" y="2450592"/>
-            <a:ext cx="4343400" cy="1828800"/>
+            <a:off x="640080" y="4517136"/>
+            <a:ext cx="4892040" cy="1828800"/>
           </a:xfrm>
           <a:prstGeom prst="rect">
             <a:avLst/>
@@ -10143,6 +10722,9 @@
           <a:lstStyle/>
           <a:p>
             <a:pPr algn="l">
+              <a:lnSpc>
+                <a:spcPct val="112000"/>
+              </a:lnSpc>
               <a:spcBef>
                 <a:spcPts val="0"/>
               </a:spcBef>
@@ -10151,91 +10733,7 @@
               </a:spcAft>
             </a:pPr>
             <a:r>
-              <a:rPr sz="1400" b="0">
-                <a:solidFill>
-                  <a:srgbClr val="22313F"/>
-                </a:solidFill>
-                <a:latin typeface="Calibri"/>
-              </a:rPr>
-              <a:t>Partway through, a cash bonus lands in every portfolio — as cash, announced on its own screen before the moment continues.</a:t>
-            </a:r>
-          </a:p>
-        </p:txBody>
-      </p:sp>
-      <p:sp>
-        <p:nvSpPr>
-          <p:cNvPr id="8" name="TextBox 7"/>
-          <p:cNvSpPr txBox="1"/>
-          <p:nvPr/>
-        </p:nvSpPr>
-        <p:spPr>
-          <a:xfrm>
-            <a:off x="548640" y="4160520"/>
-            <a:ext cx="4343400" cy="292608"/>
-          </a:xfrm>
-          <a:prstGeom prst="rect">
-            <a:avLst/>
-          </a:prstGeom>
-          <a:noFill/>
-        </p:spPr>
-        <p:txBody>
-          <a:bodyPr wrap="square" anchor="t">
-            <a:spAutoFit/>
-          </a:bodyPr>
-          <a:lstStyle/>
-          <a:p>
-            <a:pPr algn="l">
-              <a:spcBef>
-                <a:spcPts val="0"/>
-              </a:spcBef>
-              <a:spcAft>
-                <a:spcPts val="400"/>
-              </a:spcAft>
-            </a:pPr>
-            <a:r>
-              <a:rPr sz="1050" b="1" spc="150">
-                <a:solidFill>
-                  <a:srgbClr val="831574"/>
-                </a:solidFill>
-                <a:latin typeface="Calibri"/>
-              </a:rPr>
-              <a:t>THE THINKING</a:t>
-            </a:r>
-          </a:p>
-        </p:txBody>
-      </p:sp>
-      <p:sp>
-        <p:nvSpPr>
-          <p:cNvPr id="9" name="TextBox 8"/>
-          <p:cNvSpPr txBox="1"/>
-          <p:nvPr/>
-        </p:nvSpPr>
-        <p:spPr>
-          <a:xfrm>
-            <a:off x="548640" y="4462272"/>
-            <a:ext cx="4343400" cy="1920240"/>
-          </a:xfrm>
-          <a:prstGeom prst="rect">
-            <a:avLst/>
-          </a:prstGeom>
-          <a:noFill/>
-        </p:spPr>
-        <p:txBody>
-          <a:bodyPr wrap="square" anchor="t">
-            <a:spAutoFit/>
-          </a:bodyPr>
-          <a:lstStyle/>
-          <a:p>
-            <a:pPr algn="l">
-              <a:spcBef>
-                <a:spcPts val="0"/>
-              </a:spcBef>
-              <a:spcAft>
-                <a:spcPts val="400"/>
-              </a:spcAft>
-            </a:pPr>
-            <a:r>
-              <a:rPr sz="1400" b="0">
+              <a:rPr sz="1350" b="0">
                 <a:solidFill>
                   <a:srgbClr val="22313F"/>
                 </a:solidFill>
@@ -10246,9 +10744,55 @@
           </a:p>
         </p:txBody>
       </p:sp>
+      <p:sp>
+        <p:nvSpPr>
+          <p:cNvPr id="10" name="Rounded Rectangle 9"/>
+          <p:cNvSpPr/>
+          <p:nvPr/>
+        </p:nvSpPr>
+        <p:spPr>
+          <a:xfrm>
+            <a:off x="6330449" y="365760"/>
+            <a:ext cx="5032742" cy="6071616"/>
+          </a:xfrm>
+          <a:prstGeom prst="roundRect">
+            <a:avLst>
+              <a:gd name="adj" fmla="val 3500"/>
+            </a:avLst>
+          </a:prstGeom>
+          <a:solidFill>
+            <a:srgbClr val="EEF3F6"/>
+          </a:solidFill>
+          <a:ln>
+            <a:noFill/>
+          </a:ln>
+          <a:effectLst/>
+        </p:spPr>
+        <p:style>
+          <a:lnRef idx="1">
+            <a:schemeClr val="accent1"/>
+          </a:lnRef>
+          <a:fillRef idx="3">
+            <a:schemeClr val="accent1"/>
+          </a:fillRef>
+          <a:effectRef idx="2">
+            <a:schemeClr val="accent1"/>
+          </a:effectRef>
+          <a:fontRef idx="minor">
+            <a:schemeClr val="lt1"/>
+          </a:fontRef>
+        </p:style>
+        <p:txBody>
+          <a:bodyPr rtlCol="0" anchor="ctr"/>
+          <a:lstStyle/>
+          <a:p>
+            <a:pPr algn="ctr"/>
+          </a:p>
+        </p:txBody>
+      </p:sp>
       <p:pic>
         <p:nvPicPr>
-          <p:cNvPr id="10" name="Picture 9" descr="phone-injection.png"/>
+          <p:cNvPr id="11" name="Picture 10" descr="phone-injection.png"/>
           <p:cNvPicPr>
             <a:picLocks noChangeAspect="1"/>
           </p:cNvPicPr>
@@ -10262,29 +10806,29 @@
         </p:blipFill>
         <p:spPr>
           <a:xfrm>
-            <a:off x="7488936" y="457200"/>
-            <a:ext cx="2852928" cy="5852160"/>
+            <a:off x="6531617" y="566928"/>
+            <a:ext cx="4630406" cy="5669280"/>
           </a:xfrm>
           <a:prstGeom prst="rect">
             <a:avLst/>
           </a:prstGeom>
           <a:ln w="9525">
             <a:solidFill>
-              <a:srgbClr val="DBE4EA"/>
+              <a:srgbClr val="D5DFE6"/>
             </a:solidFill>
           </a:ln>
         </p:spPr>
       </p:pic>
       <p:sp>
         <p:nvSpPr>
-          <p:cNvPr id="11" name="Rectangle 10"/>
+          <p:cNvPr id="12" name="Rectangle 11"/>
           <p:cNvSpPr/>
           <p:nvPr/>
         </p:nvSpPr>
         <p:spPr>
           <a:xfrm>
-            <a:off x="0" y="6565392"/>
-            <a:ext cx="12191695" cy="292608"/>
+            <a:off x="0" y="6583680"/>
+            <a:ext cx="12191695" cy="274320"/>
           </a:xfrm>
           <a:prstGeom prst="rect">
             <a:avLst/>
@@ -10321,14 +10865,14 @@
       </p:sp>
       <p:sp>
         <p:nvSpPr>
-          <p:cNvPr id="12" name="TextBox 11"/>
+          <p:cNvPr id="13" name="TextBox 12"/>
           <p:cNvSpPr txBox="1"/>
           <p:nvPr/>
         </p:nvSpPr>
         <p:spPr>
           <a:xfrm>
-            <a:off x="0" y="6556248"/>
-            <a:ext cx="12191695" cy="292608"/>
+            <a:off x="0" y="6574536"/>
+            <a:ext cx="12191695" cy="274320"/>
           </a:xfrm>
           <a:prstGeom prst="rect">
             <a:avLst/>
@@ -10350,13 +10894,13 @@
               </a:spcAft>
             </a:pPr>
             <a:r>
-              <a:rPr sz="850" b="1" spc="150">
+              <a:rPr sz="800" b="1" spc="140">
                 <a:solidFill>
                   <a:srgbClr val="BCD0E6"/>
                 </a:solidFill>
                 <a:latin typeface="Calibri"/>
               </a:rPr>
-              <a:t>THE LONG GAME · LIVE ROOM      ·      HOW IT WORKS, AND WHY      ·      FOR INTERNAL USE ONLY</a:t>
+              <a:t>THE LONG GAME · LIVE ROOM      ·      HOW IT WORKS, AND WHY      ·      INTERNAL USE ONLY</a:t>
             </a:r>
           </a:p>
         </p:txBody>
@@ -10431,8 +10975,8 @@
         </p:nvSpPr>
         <p:spPr>
           <a:xfrm>
-            <a:off x="548640" y="457200"/>
-            <a:ext cx="4343400" cy="365760"/>
+            <a:off x="640080" y="566928"/>
+            <a:ext cx="4892040" cy="365760"/>
           </a:xfrm>
           <a:prstGeom prst="rect">
             <a:avLst/>
@@ -10454,7 +10998,7 @@
               </a:spcAft>
             </a:pPr>
             <a:r>
-              <a:rPr sz="1200" b="1" spc="200">
+              <a:rPr sz="1150" b="1" spc="180">
                 <a:solidFill>
                   <a:srgbClr val="008074"/>
                 </a:solidFill>
@@ -10473,8 +11017,97 @@
         </p:nvSpPr>
         <p:spPr>
           <a:xfrm>
-            <a:off x="548640" y="804672"/>
-            <a:ext cx="4343400" cy="1097280"/>
+            <a:off x="640080" y="914400"/>
+            <a:ext cx="4892040" cy="1005840"/>
+          </a:xfrm>
+          <a:prstGeom prst="rect">
+            <a:avLst/>
+          </a:prstGeom>
+          <a:noFill/>
+        </p:spPr>
+        <p:txBody>
+          <a:bodyPr wrap="square" anchor="t">
+            <a:spAutoFit/>
+          </a:bodyPr>
+          <a:lstStyle/>
+          <a:p>
+            <a:pPr algn="l">
+              <a:lnSpc>
+                <a:spcPct val="102000"/>
+              </a:lnSpc>
+              <a:spcBef>
+                <a:spcPts val="0"/>
+              </a:spcBef>
+              <a:spcAft>
+                <a:spcPts val="400"/>
+              </a:spcAft>
+            </a:pPr>
+            <a:r>
+              <a:rPr sz="2600" b="1">
+                <a:solidFill>
+                  <a:srgbClr val="083469"/>
+                </a:solidFill>
+                <a:latin typeface="Calibri"/>
+              </a:rPr>
+              <a:t>The performance check</a:t>
+            </a:r>
+          </a:p>
+        </p:txBody>
+      </p:sp>
+      <p:sp>
+        <p:nvSpPr>
+          <p:cNvPr id="5" name="Rectangle 4"/>
+          <p:cNvSpPr/>
+          <p:nvPr/>
+        </p:nvSpPr>
+        <p:spPr>
+          <a:xfrm>
+            <a:off x="640080" y="1847088"/>
+            <a:ext cx="731520" cy="50800"/>
+          </a:xfrm>
+          <a:prstGeom prst="rect">
+            <a:avLst/>
+          </a:prstGeom>
+          <a:solidFill>
+            <a:srgbClr val="00D190"/>
+          </a:solidFill>
+          <a:ln>
+            <a:noFill/>
+          </a:ln>
+          <a:effectLst/>
+        </p:spPr>
+        <p:style>
+          <a:lnRef idx="1">
+            <a:schemeClr val="accent1"/>
+          </a:lnRef>
+          <a:fillRef idx="3">
+            <a:schemeClr val="accent1"/>
+          </a:fillRef>
+          <a:effectRef idx="2">
+            <a:schemeClr val="accent1"/>
+          </a:effectRef>
+          <a:fontRef idx="minor">
+            <a:schemeClr val="lt1"/>
+          </a:fontRef>
+        </p:style>
+        <p:txBody>
+          <a:bodyPr rtlCol="0" anchor="ctr"/>
+          <a:lstStyle/>
+          <a:p>
+            <a:pPr algn="ctr"/>
+          </a:p>
+        </p:txBody>
+      </p:sp>
+      <p:sp>
+        <p:nvSpPr>
+          <p:cNvPr id="6" name="TextBox 5"/>
+          <p:cNvSpPr txBox="1"/>
+          <p:nvPr/>
+        </p:nvSpPr>
+        <p:spPr>
+          <a:xfrm>
+            <a:off x="640080" y="2121408"/>
+            <a:ext cx="4892040" cy="274320"/>
           </a:xfrm>
           <a:prstGeom prst="rect">
             <a:avLst/>
@@ -10496,71 +11129,72 @@
               </a:spcAft>
             </a:pPr>
             <a:r>
-              <a:rPr sz="2700" b="1">
-                <a:solidFill>
-                  <a:srgbClr val="083469"/>
+              <a:rPr sz="1000" b="1" spc="140">
+                <a:solidFill>
+                  <a:srgbClr val="008074"/>
                 </a:solidFill>
                 <a:latin typeface="Calibri"/>
               </a:rPr>
-              <a:t>The performance check</a:t>
-            </a:r>
-          </a:p>
-        </p:txBody>
-      </p:sp>
-      <p:sp>
-        <p:nvSpPr>
-          <p:cNvPr id="5" name="Rectangle 4"/>
-          <p:cNvSpPr/>
-          <p:nvPr/>
-        </p:nvSpPr>
-        <p:spPr>
-          <a:xfrm>
-            <a:off x="548640" y="1874519"/>
-            <a:ext cx="777240" cy="50800"/>
-          </a:xfrm>
-          <a:prstGeom prst="rect">
-            <a:avLst/>
-          </a:prstGeom>
-          <a:solidFill>
-            <a:srgbClr val="00D190"/>
-          </a:solidFill>
-          <a:ln>
-            <a:noFill/>
-          </a:ln>
-          <a:effectLst/>
-        </p:spPr>
-        <p:style>
-          <a:lnRef idx="1">
-            <a:schemeClr val="accent1"/>
-          </a:lnRef>
-          <a:fillRef idx="3">
-            <a:schemeClr val="accent1"/>
-          </a:fillRef>
-          <a:effectRef idx="2">
-            <a:schemeClr val="accent1"/>
-          </a:effectRef>
-          <a:fontRef idx="minor">
-            <a:schemeClr val="lt1"/>
-          </a:fontRef>
-        </p:style>
-        <p:txBody>
-          <a:bodyPr rtlCol="0" anchor="ctr"/>
-          <a:lstStyle/>
-          <a:p>
-            <a:pPr algn="ctr"/>
-          </a:p>
-        </p:txBody>
-      </p:sp>
-      <p:sp>
-        <p:nvSpPr>
-          <p:cNvPr id="6" name="TextBox 5"/>
+              <a:t>WHAT HAPPENS</a:t>
+            </a:r>
+          </a:p>
+        </p:txBody>
+      </p:sp>
+      <p:sp>
+        <p:nvSpPr>
+          <p:cNvPr id="7" name="TextBox 6"/>
           <p:cNvSpPr txBox="1"/>
           <p:nvPr/>
         </p:nvSpPr>
         <p:spPr>
           <a:xfrm>
-            <a:off x="548640" y="2148840"/>
-            <a:ext cx="4343400" cy="292608"/>
+            <a:off x="640080" y="2414016"/>
+            <a:ext cx="4892040" cy="1828800"/>
+          </a:xfrm>
+          <a:prstGeom prst="rect">
+            <a:avLst/>
+          </a:prstGeom>
+          <a:noFill/>
+        </p:spPr>
+        <p:txBody>
+          <a:bodyPr wrap="square" anchor="t">
+            <a:spAutoFit/>
+          </a:bodyPr>
+          <a:lstStyle/>
+          <a:p>
+            <a:pPr algn="l">
+              <a:lnSpc>
+                <a:spcPct val="112000"/>
+              </a:lnSpc>
+              <a:spcBef>
+                <a:spcPts val="0"/>
+              </a:spcBef>
+              <a:spcAft>
+                <a:spcPts val="400"/>
+              </a:spcAft>
+            </a:pPr>
+            <a:r>
+              <a:rPr sz="1350" b="0">
+                <a:solidFill>
+                  <a:srgbClr val="22313F"/>
+                </a:solidFill>
+                <a:latin typeface="Calibri"/>
+              </a:rPr>
+              <a:t>A live leaderboard shows every player against what they put in. At the same time, each phone shows that player their own rank.</a:t>
+            </a:r>
+          </a:p>
+        </p:txBody>
+      </p:sp>
+      <p:sp>
+        <p:nvSpPr>
+          <p:cNvPr id="8" name="TextBox 7"/>
+          <p:cNvSpPr txBox="1"/>
+          <p:nvPr/>
+        </p:nvSpPr>
+        <p:spPr>
+          <a:xfrm>
+            <a:off x="640080" y="4224528"/>
+            <a:ext cx="4892040" cy="274320"/>
           </a:xfrm>
           <a:prstGeom prst="rect">
             <a:avLst/>
@@ -10582,27 +11216,27 @@
               </a:spcAft>
             </a:pPr>
             <a:r>
-              <a:rPr sz="1050" b="1" spc="150">
-                <a:solidFill>
-                  <a:srgbClr val="008074"/>
+              <a:rPr sz="1000" b="1" spc="140">
+                <a:solidFill>
+                  <a:srgbClr val="831574"/>
                 </a:solidFill>
                 <a:latin typeface="Calibri"/>
               </a:rPr>
-              <a:t>WHAT HAPPENS</a:t>
-            </a:r>
-          </a:p>
-        </p:txBody>
-      </p:sp>
-      <p:sp>
-        <p:nvSpPr>
-          <p:cNvPr id="7" name="TextBox 6"/>
+              <a:t>THE THINKING</a:t>
+            </a:r>
+          </a:p>
+        </p:txBody>
+      </p:sp>
+      <p:sp>
+        <p:nvSpPr>
+          <p:cNvPr id="9" name="TextBox 8"/>
           <p:cNvSpPr txBox="1"/>
           <p:nvPr/>
         </p:nvSpPr>
         <p:spPr>
           <a:xfrm>
-            <a:off x="548640" y="2450592"/>
-            <a:ext cx="4343400" cy="1828800"/>
+            <a:off x="640080" y="4517136"/>
+            <a:ext cx="4892040" cy="1828800"/>
           </a:xfrm>
           <a:prstGeom prst="rect">
             <a:avLst/>
@@ -10616,6 +11250,9 @@
           <a:lstStyle/>
           <a:p>
             <a:pPr algn="l">
+              <a:lnSpc>
+                <a:spcPct val="112000"/>
+              </a:lnSpc>
               <a:spcBef>
                 <a:spcPts val="0"/>
               </a:spcBef>
@@ -10624,91 +11261,7 @@
               </a:spcAft>
             </a:pPr>
             <a:r>
-              <a:rPr sz="1400" b="0">
-                <a:solidFill>
-                  <a:srgbClr val="22313F"/>
-                </a:solidFill>
-                <a:latin typeface="Calibri"/>
-              </a:rPr>
-              <a:t>A live leaderboard shows every player against what they put in. At the same time, each phone shows that player their own rank.</a:t>
-            </a:r>
-          </a:p>
-        </p:txBody>
-      </p:sp>
-      <p:sp>
-        <p:nvSpPr>
-          <p:cNvPr id="8" name="TextBox 7"/>
-          <p:cNvSpPr txBox="1"/>
-          <p:nvPr/>
-        </p:nvSpPr>
-        <p:spPr>
-          <a:xfrm>
-            <a:off x="548640" y="4160520"/>
-            <a:ext cx="4343400" cy="292608"/>
-          </a:xfrm>
-          <a:prstGeom prst="rect">
-            <a:avLst/>
-          </a:prstGeom>
-          <a:noFill/>
-        </p:spPr>
-        <p:txBody>
-          <a:bodyPr wrap="square" anchor="t">
-            <a:spAutoFit/>
-          </a:bodyPr>
-          <a:lstStyle/>
-          <a:p>
-            <a:pPr algn="l">
-              <a:spcBef>
-                <a:spcPts val="0"/>
-              </a:spcBef>
-              <a:spcAft>
-                <a:spcPts val="400"/>
-              </a:spcAft>
-            </a:pPr>
-            <a:r>
-              <a:rPr sz="1050" b="1" spc="150">
-                <a:solidFill>
-                  <a:srgbClr val="831574"/>
-                </a:solidFill>
-                <a:latin typeface="Calibri"/>
-              </a:rPr>
-              <a:t>THE THINKING</a:t>
-            </a:r>
-          </a:p>
-        </p:txBody>
-      </p:sp>
-      <p:sp>
-        <p:nvSpPr>
-          <p:cNvPr id="9" name="TextBox 8"/>
-          <p:cNvSpPr txBox="1"/>
-          <p:nvPr/>
-        </p:nvSpPr>
-        <p:spPr>
-          <a:xfrm>
-            <a:off x="548640" y="4462272"/>
-            <a:ext cx="4343400" cy="1920240"/>
-          </a:xfrm>
-          <a:prstGeom prst="rect">
-            <a:avLst/>
-          </a:prstGeom>
-          <a:noFill/>
-        </p:spPr>
-        <p:txBody>
-          <a:bodyPr wrap="square" anchor="t">
-            <a:spAutoFit/>
-          </a:bodyPr>
-          <a:lstStyle/>
-          <a:p>
-            <a:pPr algn="l">
-              <a:spcBef>
-                <a:spcPts val="0"/>
-              </a:spcBef>
-              <a:spcAft>
-                <a:spcPts val="400"/>
-              </a:spcAft>
-            </a:pPr>
-            <a:r>
-              <a:rPr sz="1400" b="0">
+              <a:rPr sz="1350" b="0">
                 <a:solidFill>
                   <a:srgbClr val="22313F"/>
                 </a:solidFill>
@@ -10719,9 +11272,55 @@
           </a:p>
         </p:txBody>
       </p:sp>
+      <p:sp>
+        <p:nvSpPr>
+          <p:cNvPr id="10" name="Rounded Rectangle 9"/>
+          <p:cNvSpPr/>
+          <p:nvPr/>
+        </p:nvSpPr>
+        <p:spPr>
+          <a:xfrm>
+            <a:off x="5742432" y="418228"/>
+            <a:ext cx="6208776" cy="5966680"/>
+          </a:xfrm>
+          <a:prstGeom prst="roundRect">
+            <a:avLst>
+              <a:gd name="adj" fmla="val 3500"/>
+            </a:avLst>
+          </a:prstGeom>
+          <a:solidFill>
+            <a:srgbClr val="EEF3F6"/>
+          </a:solidFill>
+          <a:ln>
+            <a:noFill/>
+          </a:ln>
+          <a:effectLst/>
+        </p:spPr>
+        <p:style>
+          <a:lnRef idx="1">
+            <a:schemeClr val="accent1"/>
+          </a:lnRef>
+          <a:fillRef idx="3">
+            <a:schemeClr val="accent1"/>
+          </a:fillRef>
+          <a:effectRef idx="2">
+            <a:schemeClr val="accent1"/>
+          </a:effectRef>
+          <a:fontRef idx="minor">
+            <a:schemeClr val="lt1"/>
+          </a:fontRef>
+        </p:style>
+        <p:txBody>
+          <a:bodyPr rtlCol="0" anchor="ctr"/>
+          <a:lstStyle/>
+          <a:p>
+            <a:pPr algn="ctr"/>
+          </a:p>
+        </p:txBody>
+      </p:sp>
       <p:pic>
         <p:nvPicPr>
-          <p:cNvPr id="10" name="Picture 9" descr="host-check.png"/>
+          <p:cNvPr id="11" name="Picture 10" descr="host-check.png"/>
           <p:cNvPicPr>
             <a:picLocks noChangeAspect="1"/>
           </p:cNvPicPr>
@@ -10735,29 +11334,29 @@
         </p:blipFill>
         <p:spPr>
           <a:xfrm>
-            <a:off x="5074920" y="1285875"/>
-            <a:ext cx="6858000" cy="4286250"/>
+            <a:off x="5943600" y="619396"/>
+            <a:ext cx="5806440" cy="5564344"/>
           </a:xfrm>
           <a:prstGeom prst="rect">
             <a:avLst/>
           </a:prstGeom>
           <a:ln w="9525">
             <a:solidFill>
-              <a:srgbClr val="DBE4EA"/>
+              <a:srgbClr val="D5DFE6"/>
             </a:solidFill>
           </a:ln>
         </p:spPr>
       </p:pic>
       <p:sp>
         <p:nvSpPr>
-          <p:cNvPr id="11" name="Rectangle 10"/>
+          <p:cNvPr id="12" name="Rectangle 11"/>
           <p:cNvSpPr/>
           <p:nvPr/>
         </p:nvSpPr>
         <p:spPr>
           <a:xfrm>
-            <a:off x="0" y="6565392"/>
-            <a:ext cx="12191695" cy="292608"/>
+            <a:off x="0" y="6583680"/>
+            <a:ext cx="12191695" cy="274320"/>
           </a:xfrm>
           <a:prstGeom prst="rect">
             <a:avLst/>
@@ -10794,14 +11393,14 @@
       </p:sp>
       <p:sp>
         <p:nvSpPr>
-          <p:cNvPr id="12" name="TextBox 11"/>
+          <p:cNvPr id="13" name="TextBox 12"/>
           <p:cNvSpPr txBox="1"/>
           <p:nvPr/>
         </p:nvSpPr>
         <p:spPr>
           <a:xfrm>
-            <a:off x="0" y="6556248"/>
-            <a:ext cx="12191695" cy="292608"/>
+            <a:off x="0" y="6574536"/>
+            <a:ext cx="12191695" cy="274320"/>
           </a:xfrm>
           <a:prstGeom prst="rect">
             <a:avLst/>
@@ -10823,13 +11422,13 @@
               </a:spcAft>
             </a:pPr>
             <a:r>
-              <a:rPr sz="850" b="1" spc="150">
+              <a:rPr sz="800" b="1" spc="140">
                 <a:solidFill>
                   <a:srgbClr val="BCD0E6"/>
                 </a:solidFill>
                 <a:latin typeface="Calibri"/>
               </a:rPr>
-              <a:t>THE LONG GAME · LIVE ROOM      ·      HOW IT WORKS, AND WHY      ·      FOR INTERNAL USE ONLY</a:t>
+              <a:t>THE LONG GAME · LIVE ROOM      ·      HOW IT WORKS, AND WHY      ·      INTERNAL USE ONLY</a:t>
             </a:r>
           </a:p>
         </p:txBody>

--- a/consultant-materials/The-Long-Game-Live-Walkthrough.pptx
+++ b/consultant-materials/The-Long-Game-Live-Walkthrough.pptx
@@ -3226,7 +3226,7 @@
                 </a:solidFill>
                 <a:latin typeface="Calibri"/>
               </a:rPr>
-              <a:t>CAPITAL GROUP   ·   THE LONG GAME</a:t>
+              <a:t>THE LONG GAME</a:t>
             </a:r>
           </a:p>
         </p:txBody>
@@ -3371,7 +3371,7 @@
                 </a:solidFill>
                 <a:latin typeface="Calibri"/>
               </a:rPr>
-              <a:t>Internal use only · Do not disseminate</a:t>
+              <a:t>A personal project · interactive investing game</a:t>
             </a:r>
           </a:p>
         </p:txBody>
@@ -3899,7 +3899,7 @@
                 </a:solidFill>
                 <a:latin typeface="Calibri"/>
               </a:rPr>
-              <a:t>THE LONG GAME · LIVE ROOM      ·      HOW IT WORKS, AND WHY      ·      INTERNAL USE ONLY</a:t>
+              <a:t>THE LONG GAME · LIVE ROOM      ·      HOW IT WORKS, AND WHY</a:t>
             </a:r>
           </a:p>
         </p:txBody>
@@ -4427,7 +4427,7 @@
                 </a:solidFill>
                 <a:latin typeface="Calibri"/>
               </a:rPr>
-              <a:t>THE LONG GAME · LIVE ROOM      ·      HOW IT WORKS, AND WHY      ·      INTERNAL USE ONLY</a:t>
+              <a:t>THE LONG GAME · LIVE ROOM      ·      HOW IT WORKS, AND WHY</a:t>
             </a:r>
           </a:p>
         </p:txBody>
@@ -4955,7 +4955,7 @@
                 </a:solidFill>
                 <a:latin typeface="Calibri"/>
               </a:rPr>
-              <a:t>THE LONG GAME · LIVE ROOM      ·      HOW IT WORKS, AND WHY      ·      INTERNAL USE ONLY</a:t>
+              <a:t>THE LONG GAME · LIVE ROOM      ·      HOW IT WORKS, AND WHY</a:t>
             </a:r>
           </a:p>
         </p:txBody>
@@ -5762,7 +5762,7 @@
                 </a:solidFill>
                 <a:latin typeface="Calibri"/>
               </a:rPr>
-              <a:t>THE LONG GAME · LIVE ROOM      ·      HOW IT WORKS, AND WHY      ·      INTERNAL USE ONLY</a:t>
+              <a:t>THE LONG GAME · LIVE ROOM      ·      HOW IT WORKS, AND WHY</a:t>
             </a:r>
           </a:p>
         </p:txBody>
@@ -6596,7 +6596,7 @@
                 </a:solidFill>
                 <a:latin typeface="Calibri"/>
               </a:rPr>
-              <a:t>THE LONG GAME · LIVE ROOM      ·      HOW IT WORKS, AND WHY      ·      INTERNAL USE ONLY</a:t>
+              <a:t>THE LONG GAME · LIVE ROOM      ·      HOW IT WORKS, AND WHY</a:t>
             </a:r>
           </a:p>
         </p:txBody>
@@ -7732,7 +7732,7 @@
                 </a:solidFill>
                 <a:latin typeface="Calibri"/>
               </a:rPr>
-              <a:t>THE LONG GAME · LIVE ROOM      ·      HOW IT WORKS, AND WHY      ·      INTERNAL USE ONLY</a:t>
+              <a:t>THE LONG GAME · LIVE ROOM      ·      HOW IT WORKS, AND WHY</a:t>
             </a:r>
           </a:p>
         </p:txBody>
@@ -8260,7 +8260,7 @@
                 </a:solidFill>
                 <a:latin typeface="Calibri"/>
               </a:rPr>
-              <a:t>THE LONG GAME · LIVE ROOM      ·      HOW IT WORKS, AND WHY      ·      INTERNAL USE ONLY</a:t>
+              <a:t>THE LONG GAME · LIVE ROOM      ·      HOW IT WORKS, AND WHY</a:t>
             </a:r>
           </a:p>
         </p:txBody>
@@ -8788,7 +8788,7 @@
                 </a:solidFill>
                 <a:latin typeface="Calibri"/>
               </a:rPr>
-              <a:t>THE LONG GAME · LIVE ROOM      ·      HOW IT WORKS, AND WHY      ·      INTERNAL USE ONLY</a:t>
+              <a:t>THE LONG GAME · LIVE ROOM      ·      HOW IT WORKS, AND WHY</a:t>
             </a:r>
           </a:p>
         </p:txBody>
@@ -9316,7 +9316,7 @@
                 </a:solidFill>
                 <a:latin typeface="Calibri"/>
               </a:rPr>
-              <a:t>THE LONG GAME · LIVE ROOM      ·      HOW IT WORKS, AND WHY      ·      INTERNAL USE ONLY</a:t>
+              <a:t>THE LONG GAME · LIVE ROOM      ·      HOW IT WORKS, AND WHY</a:t>
             </a:r>
           </a:p>
         </p:txBody>
@@ -9844,7 +9844,7 @@
                 </a:solidFill>
                 <a:latin typeface="Calibri"/>
               </a:rPr>
-              <a:t>THE LONG GAME · LIVE ROOM      ·      HOW IT WORKS, AND WHY      ·      INTERNAL USE ONLY</a:t>
+              <a:t>THE LONG GAME · LIVE ROOM      ·      HOW IT WORKS, AND WHY</a:t>
             </a:r>
           </a:p>
         </p:txBody>
@@ -10372,7 +10372,7 @@
                 </a:solidFill>
                 <a:latin typeface="Calibri"/>
               </a:rPr>
-              <a:t>THE LONG GAME · LIVE ROOM      ·      HOW IT WORKS, AND WHY      ·      INTERNAL USE ONLY</a:t>
+              <a:t>THE LONG GAME · LIVE ROOM      ·      HOW IT WORKS, AND WHY</a:t>
             </a:r>
           </a:p>
         </p:txBody>
@@ -10900,7 +10900,7 @@
                 </a:solidFill>
                 <a:latin typeface="Calibri"/>
               </a:rPr>
-              <a:t>THE LONG GAME · LIVE ROOM      ·      HOW IT WORKS, AND WHY      ·      INTERNAL USE ONLY</a:t>
+              <a:t>THE LONG GAME · LIVE ROOM      ·      HOW IT WORKS, AND WHY</a:t>
             </a:r>
           </a:p>
         </p:txBody>
@@ -11428,7 +11428,7 @@
                 </a:solidFill>
                 <a:latin typeface="Calibri"/>
               </a:rPr>
-              <a:t>THE LONG GAME · LIVE ROOM      ·      HOW IT WORKS, AND WHY      ·      INTERNAL USE ONLY</a:t>
+              <a:t>THE LONG GAME · LIVE ROOM      ·      HOW IT WORKS, AND WHY</a:t>
             </a:r>
           </a:p>
         </p:txBody>
